--- a/docs/capstone_presentation_v5.pptx
+++ b/docs/capstone_presentation_v5.pptx
@@ -825,13 +825,33 @@
           <a:p/>
           <a:p>
             <a:r>
-              <a:t>Claude call sites: parse free-text input, write personal copy, parse refine intent. All three have deterministic fallbacks (regex classifier, rule-&gt;text dictionary, regex parser) so the demo runs without an API key. Ranking is never an LLM call.</a:t>
+              <a:t>Claude call sites in the runtime: parse free-text input, write personal copy, parse refine intent. All three have deterministic fallbacks so the demo runs without an API key. Ranking is never an LLM call.</a:t>
             </a:r>
           </a:p>
           <a:p/>
           <a:p>
             <a:r>
-              <a:t>Frontend: five scenes implemented in React + Vite. Compare overlay lets the user pick 2-3 finalists; save-for-later persists per session; diff history records every refine turn.</a:t>
+              <a:t>AI tooling across the build (disclosed honestly):</a:t>
+            </a:r>
+          </a:p>
+          <a:p>
+            <a:r>
+              <a:t>- Runtime model:  Claude Opus 4.6 (anthropic SDK).</a:t>
+            </a:r>
+          </a:p>
+          <a:p>
+            <a:r>
+              <a:t>- Pair-programming:  Claude Code agent on Opus 4.6 and 4.7 across the 12-week build.</a:t>
+            </a:r>
+          </a:p>
+          <a:p>
+            <a:r>
+              <a:t>- Independent validation:  Codex GPT-5.5 was run as an independent technical reviewer to flag demo-safety issues.</a:t>
+            </a:r>
+          </a:p>
+          <a:p>
+            <a:r>
+              <a:t>All three are named in the report's AI Contributions section.</a:t>
             </a:r>
           </a:p>
         </p:txBody>
@@ -6288,8 +6308,8 @@
                   <a:srgbClr val="FFFFFF"/>
                 </a:solidFill>
               </a:rPr>
-              <a:t>✓  Same pattern works across
-    all 3 demo categories</a:t>
+              <a:t>✓  Multi-model workflow disclosed:
+    Opus 4.6 + 4.7 build · Codex 5.5 review</a:t>
             </a:r>
           </a:p>
         </p:txBody>
@@ -6769,7 +6789,7 @@
         </p:nvSpPr>
         <p:spPr>
           <a:xfrm>
-            <a:off x="2011680" y="3520440"/>
+            <a:off x="2011680" y="3429000"/>
             <a:ext cx="2011680" cy="548640"/>
           </a:xfrm>
           <a:prstGeom prst="rect">
@@ -6803,7 +6823,7 @@
         </p:nvSpPr>
         <p:spPr>
           <a:xfrm>
-            <a:off x="4206240" y="3520440"/>
+            <a:off x="4206240" y="3429000"/>
             <a:ext cx="7315200" cy="548640"/>
           </a:xfrm>
           <a:prstGeom prst="rect">
@@ -6837,7 +6857,7 @@
         </p:nvSpPr>
         <p:spPr>
           <a:xfrm>
-            <a:off x="2011680" y="4178808"/>
+            <a:off x="2011680" y="3977640"/>
             <a:ext cx="2011680" cy="548640"/>
           </a:xfrm>
           <a:prstGeom prst="rect">
@@ -6871,7 +6891,7 @@
         </p:nvSpPr>
         <p:spPr>
           <a:xfrm>
-            <a:off x="4206240" y="4178808"/>
+            <a:off x="4206240" y="3977640"/>
             <a:ext cx="7315200" cy="548640"/>
           </a:xfrm>
           <a:prstGeom prst="rect">
@@ -6905,7 +6925,7 @@
         </p:nvSpPr>
         <p:spPr>
           <a:xfrm>
-            <a:off x="2011680" y="4837176"/>
+            <a:off x="2011680" y="4526280"/>
             <a:ext cx="2011680" cy="548640"/>
           </a:xfrm>
           <a:prstGeom prst="rect">
@@ -6939,7 +6959,7 @@
         </p:nvSpPr>
         <p:spPr>
           <a:xfrm>
-            <a:off x="4206240" y="4837176"/>
+            <a:off x="4206240" y="4526280"/>
             <a:ext cx="7315200" cy="548640"/>
           </a:xfrm>
           <a:prstGeom prst="rect">
@@ -6973,7 +6993,7 @@
         </p:nvSpPr>
         <p:spPr>
           <a:xfrm>
-            <a:off x="2011680" y="5495544"/>
+            <a:off x="2011680" y="5074920"/>
             <a:ext cx="2011680" cy="548640"/>
           </a:xfrm>
           <a:prstGeom prst="rect">
@@ -6994,7 +7014,7 @@
                   <a:srgbClr val="CADCFC"/>
                 </a:solidFill>
               </a:rPr>
-              <a:t>Stack:</a:t>
+              <a:t>Runtime:</a:t>
             </a:r>
           </a:p>
         </p:txBody>
@@ -7007,7 +7027,7 @@
         </p:nvSpPr>
         <p:spPr>
           <a:xfrm>
-            <a:off x="4206240" y="5495544"/>
+            <a:off x="4206240" y="5074920"/>
             <a:ext cx="7315200" cy="548640"/>
           </a:xfrm>
           <a:prstGeom prst="rect">
@@ -7036,6 +7056,74 @@
       <p:sp>
         <p:nvSpPr>
           <p:cNvPr id="16" name="TextBox 15"/>
+          <p:cNvSpPr txBox="1"/>
+          <p:nvPr/>
+        </p:nvSpPr>
+        <p:spPr>
+          <a:xfrm>
+            <a:off x="2011680" y="5623560"/>
+            <a:ext cx="2011680" cy="548640"/>
+          </a:xfrm>
+          <a:prstGeom prst="rect">
+            <a:avLst/>
+          </a:prstGeom>
+          <a:noFill/>
+        </p:spPr>
+        <p:txBody>
+          <a:bodyPr wrap="square">
+            <a:spAutoFit/>
+          </a:bodyPr>
+          <a:lstStyle/>
+          <a:p>
+            <a:pPr algn="l"/>
+            <a:r>
+              <a:rPr b="1" i="0" sz="1300">
+                <a:solidFill>
+                  <a:srgbClr val="CADCFC"/>
+                </a:solidFill>
+              </a:rPr>
+              <a:t>Built with:</a:t>
+            </a:r>
+          </a:p>
+        </p:txBody>
+      </p:sp>
+      <p:sp>
+        <p:nvSpPr>
+          <p:cNvPr id="17" name="TextBox 16"/>
+          <p:cNvSpPr txBox="1"/>
+          <p:nvPr/>
+        </p:nvSpPr>
+        <p:spPr>
+          <a:xfrm>
+            <a:off x="4206240" y="5623560"/>
+            <a:ext cx="7315200" cy="548640"/>
+          </a:xfrm>
+          <a:prstGeom prst="rect">
+            <a:avLst/>
+          </a:prstGeom>
+          <a:noFill/>
+        </p:spPr>
+        <p:txBody>
+          <a:bodyPr wrap="square">
+            <a:spAutoFit/>
+          </a:bodyPr>
+          <a:lstStyle/>
+          <a:p>
+            <a:pPr algn="l"/>
+            <a:r>
+              <a:rPr b="0" i="0" sz="1300">
+                <a:solidFill>
+                  <a:srgbClr val="FFFFFF"/>
+                </a:solidFill>
+              </a:rPr>
+              <a:t>Claude Code (Opus 4.6 / 4.7)  ·  Codex GPT-5.5  (independent validation)</a:t>
+            </a:r>
+          </a:p>
+        </p:txBody>
+      </p:sp>
+      <p:sp>
+        <p:nvSpPr>
+          <p:cNvPr id="18" name="TextBox 17"/>
           <p:cNvSpPr txBox="1"/>
           <p:nvPr/>
         </p:nvSpPr>
@@ -22599,7 +22687,84 @@
       </p:sp>
       <p:sp>
         <p:nvSpPr>
-          <p:cNvPr id="28" name="TextBox 27"/>
+          <p:cNvPr id="28" name="Rectangle 27"/>
+          <p:cNvSpPr/>
+          <p:nvPr/>
+        </p:nvSpPr>
+        <p:spPr>
+          <a:xfrm>
+            <a:off x="411480" y="6446520"/>
+            <a:ext cx="11338560" cy="329184"/>
+          </a:xfrm>
+          <a:prstGeom prst="rect">
+            <a:avLst/>
+          </a:prstGeom>
+          <a:solidFill>
+            <a:srgbClr val="1E2761"/>
+          </a:solidFill>
+          <a:ln>
+            <a:noFill/>
+          </a:ln>
+        </p:spPr>
+        <p:style>
+          <a:lnRef idx="1">
+            <a:schemeClr val="accent1"/>
+          </a:lnRef>
+          <a:fillRef idx="3">
+            <a:schemeClr val="accent1"/>
+          </a:fillRef>
+          <a:effectRef idx="2">
+            <a:schemeClr val="accent1"/>
+          </a:effectRef>
+          <a:fontRef idx="minor">
+            <a:schemeClr val="lt1"/>
+          </a:fontRef>
+        </p:style>
+        <p:txBody>
+          <a:bodyPr rtlCol="0" anchor="ctr"/>
+          <a:lstStyle/>
+          <a:p>
+            <a:pPr algn="ctr"/>
+          </a:p>
+        </p:txBody>
+      </p:sp>
+      <p:sp>
+        <p:nvSpPr>
+          <p:cNvPr id="29" name="TextBox 28"/>
+          <p:cNvSpPr txBox="1"/>
+          <p:nvPr/>
+        </p:nvSpPr>
+        <p:spPr>
+          <a:xfrm>
+            <a:off x="548640" y="6464808"/>
+            <a:ext cx="11064240" cy="292608"/>
+          </a:xfrm>
+          <a:prstGeom prst="rect">
+            <a:avLst/>
+          </a:prstGeom>
+          <a:noFill/>
+        </p:spPr>
+        <p:txBody>
+          <a:bodyPr wrap="square">
+            <a:spAutoFit/>
+          </a:bodyPr>
+          <a:lstStyle/>
+          <a:p>
+            <a:pPr algn="ctr"/>
+            <a:r>
+              <a:rPr b="1" i="0" sz="1000">
+                <a:solidFill>
+                  <a:srgbClr val="CADCFC"/>
+                </a:solidFill>
+              </a:rPr>
+              <a:t>AI tooling:  Runtime  Claude Opus 4.6   ·   Build  Claude Code (Opus 4.6 / 4.7)   ·   Independent validation  Codex GPT-5.5</a:t>
+            </a:r>
+          </a:p>
+        </p:txBody>
+      </p:sp>
+      <p:sp>
+        <p:nvSpPr>
+          <p:cNvPr id="30" name="TextBox 29"/>
           <p:cNvSpPr txBox="1"/>
           <p:nvPr/>
         </p:nvSpPr>

--- a/docs/capstone_presentation_v5.pptx
+++ b/docs/capstone_presentation_v5.pptx
@@ -618,7 +618,7 @@
           </a:p>
           <a:p>
             <a:r>
-              <a:t>- Claude Opus 4.6 is used at three call sites: parse free-text input, write personal product copy, parse refine intent. Each has a deterministic fallback so the demo runs without an API key — regex classifier for input, rule-&gt;text dictionary for copy, regex parser for refine.</a:t>
+              <a:t>- Claude Opus 4.7 is used at three call sites: parse free-text input, write personal product copy, parse refine intent. Each has a deterministic fallback so the demo runs without an API key — regex classifier for input, rule-&gt;text dictionary for copy, regex parser for refine.</a:t>
             </a:r>
           </a:p>
           <a:p>
@@ -836,7 +836,7 @@
           </a:p>
           <a:p>
             <a:r>
-              <a:t>- Runtime model:  Claude Opus 4.6 (anthropic SDK).</a:t>
+              <a:t>- Runtime model:  Claude Opus 4.7 (anthropic SDK).</a:t>
             </a:r>
           </a:p>
           <a:p>
@@ -7048,7 +7048,7 @@
                   <a:srgbClr val="FFFFFF"/>
                 </a:solidFill>
               </a:rPr>
-              <a:t>React · FastAPI · Claude Opus 4.6 · Python · Playwright (ETL)</a:t>
+              <a:t>React · FastAPI · Claude Opus 4.7 · Python · Playwright (ETL)</a:t>
             </a:r>
           </a:p>
         </p:txBody>
@@ -17745,7 +17745,7 @@
                   <a:srgbClr val="FFFFFF"/>
                 </a:solidFill>
               </a:rPr>
-              <a:t>Claude Opus 4.6  (AI)</a:t>
+              <a:t>Claude Opus 4.7  (AI)</a:t>
             </a:r>
           </a:p>
         </p:txBody>
@@ -22374,7 +22374,7 @@
                   <a:srgbClr val="CADCFC"/>
                 </a:solidFill>
               </a:rPr>
-              <a:t>Claude Opus 4.6  —  3 Call Sites</a:t>
+              <a:t>Claude Opus 4.7  —  3 Call Sites</a:t>
             </a:r>
           </a:p>
         </p:txBody>
@@ -22757,7 +22757,7 @@
                   <a:srgbClr val="CADCFC"/>
                 </a:solidFill>
               </a:rPr>
-              <a:t>AI tooling:  Runtime  Claude Opus 4.6   ·   Build  Claude Code (Opus 4.6 / 4.7)   ·   Independent validation  Codex GPT-5.5</a:t>
+              <a:t>AI tooling:  Runtime  Claude Opus 4.7   ·   Build  Claude Code (Opus 4.6 / 4.7)   ·   Independent validation  Codex GPT-5.5</a:t>
             </a:r>
           </a:p>
         </p:txBody>

--- a/docs/capstone_presentation_v5.pptx
+++ b/docs/capstone_presentation_v5.pptx
@@ -841,7 +841,7 @@
           </a:p>
           <a:p>
             <a:r>
-              <a:t>- Pair-programming:  Claude Code agent on Opus 4.6 and 4.7 across the 12-week build.</a:t>
+              <a:t>- Pair-programming:  Claude Code agent on Opus 4.7 across the build.</a:t>
             </a:r>
           </a:p>
           <a:p>
@@ -6308,8 +6308,8 @@
                   <a:srgbClr val="FFFFFF"/>
                 </a:solidFill>
               </a:rPr>
-              <a:t>✓  Multi-model workflow disclosed:
-    Opus 4.6 + 4.7 build · Codex 5.5 review</a:t>
+              <a:t>✓  AI tools disclosed:
+    Claude Opus 4.7 · Codex 5.5 review</a:t>
             </a:r>
           </a:p>
         </p:txBody>
@@ -7116,7 +7116,7 @@
                   <a:srgbClr val="FFFFFF"/>
                 </a:solidFill>
               </a:rPr>
-              <a:t>Claude Code (Opus 4.6 / 4.7)  ·  Codex GPT-5.5  (independent validation)</a:t>
+              <a:t>Claude Code (Opus 4.7)  ·  Codex GPT-5.5  (independent validation)</a:t>
             </a:r>
           </a:p>
         </p:txBody>
@@ -22757,7 +22757,7 @@
                   <a:srgbClr val="CADCFC"/>
                 </a:solidFill>
               </a:rPr>
-              <a:t>AI tooling:  Runtime  Claude Opus 4.7   ·   Build  Claude Code (Opus 4.6 / 4.7)   ·   Independent validation  Codex GPT-5.5</a:t>
+              <a:t>AI tooling:  Runtime  Claude Opus 4.7   ·   Build  Claude Code (Opus 4.7)   ·   Independent validation  Codex GPT-5.5</a:t>
             </a:r>
           </a:p>
         </p:txBody>

--- a/docs/capstone_presentation_v5.pptx
+++ b/docs/capstone_presentation_v5.pptx
@@ -5471,7 +5471,7 @@
                   <a:srgbClr val="CADCFC"/>
                 </a:solidFill>
               </a:rPr>
-              <a:t>Heuristic self-assessment against the seven capability gaps in our evaluation  ·  formal user study is future work (see Slide 11)</a:t>
+              <a:t>Self-evaluation + small-scale user testing (family · friends · classmates)  ·  formal study is future work (see Slide 11)</a:t>
             </a:r>
           </a:p>
         </p:txBody>
@@ -6063,8 +6063,8 @@
                   <a:srgbClr val="FFFFFF"/>
                 </a:solidFill>
               </a:rPr>
-              <a:t>⚠  No formal user study —
-    heuristic evaluation only</a:t>
+              <a:t>⚠  Small-scale user testing —
+    family, friends, classmates only</a:t>
             </a:r>
           </a:p>
         </p:txBody>

--- a/docs/capstone_presentation_v5.pptx
+++ b/docs/capstone_presentation_v5.pptx
@@ -919,6 +919,17 @@
         <p:txBody>
           <a:bodyPr/>
           <a:lstStyle/>
+          <a:p>
+            <a:r>
+              <a:t>Validation method (multi-agent debate):</a:t>
+            </a:r>
+          </a:p>
+          <a:p>
+            <a:r>
+              <a:t>I ran two AI agents independently against the same codebase and compared their findings. Claude Code (the build pair-programmer) did the implementation and self-review; Codex GPT-5.5 was given the role of independent technical validator and listed every demo-safety risk it could find. Each finding either survived cross-examination (and got fixed in code) or got dismissed with a written reason. Combined with small-scale user testing on family / friends / classmates, this gave three independent evaluation lenses on the project.</a:t>
+            </a:r>
+          </a:p>
+          <a:p/>
           <a:p>
             <a:r>
               <a:t>Live demo script (matches the running app exactly):</a:t>
@@ -4730,7 +4741,7 @@
                   <a:srgbClr val="2ECC71"/>
                 </a:solidFill>
               </a:rPr>
-              <a:t>✓  Capability gaps (self-evaluation)</a:t>
+              <a:t>✓  Validation method  (multi-agent)</a:t>
             </a:r>
           </a:p>
         </p:txBody>
@@ -4764,6 +4775,76 @@
                   <a:srgbClr val="FFFFFF"/>
                 </a:solidFill>
               </a:rPr>
+              <a:t>Claude Code ↔ Codex GPT-5.5 cross-review
+on the same codebase  +  family / friends /
+classmates user testing</a:t>
+            </a:r>
+          </a:p>
+        </p:txBody>
+      </p:sp>
+      <p:sp>
+        <p:nvSpPr>
+          <p:cNvPr id="12" name="TextBox 11"/>
+          <p:cNvSpPr txBox="1"/>
+          <p:nvPr/>
+        </p:nvSpPr>
+        <p:spPr>
+          <a:xfrm>
+            <a:off x="594360" y="3200400"/>
+            <a:ext cx="5394960" cy="347472"/>
+          </a:xfrm>
+          <a:prstGeom prst="rect">
+            <a:avLst/>
+          </a:prstGeom>
+          <a:noFill/>
+        </p:spPr>
+        <p:txBody>
+          <a:bodyPr wrap="square">
+            <a:spAutoFit/>
+          </a:bodyPr>
+          <a:lstStyle/>
+          <a:p>
+            <a:pPr algn="l"/>
+            <a:r>
+              <a:rPr b="1" i="0" sz="1100">
+                <a:solidFill>
+                  <a:srgbClr val="2ECC71"/>
+                </a:solidFill>
+              </a:rPr>
+              <a:t>✓  Capability gaps (self-evaluation)</a:t>
+            </a:r>
+          </a:p>
+        </p:txBody>
+      </p:sp>
+      <p:sp>
+        <p:nvSpPr>
+          <p:cNvPr id="13" name="TextBox 12"/>
+          <p:cNvSpPr txBox="1"/>
+          <p:nvPr/>
+        </p:nvSpPr>
+        <p:spPr>
+          <a:xfrm>
+            <a:off x="594360" y="3529584"/>
+            <a:ext cx="5394960" cy="502920"/>
+          </a:xfrm>
+          <a:prstGeom prst="rect">
+            <a:avLst/>
+          </a:prstGeom>
+          <a:noFill/>
+        </p:spPr>
+        <p:txBody>
+          <a:bodyPr wrap="square">
+            <a:spAutoFit/>
+          </a:bodyPr>
+          <a:lstStyle/>
+          <a:p>
+            <a:pPr algn="l"/>
+            <a:r>
+              <a:rPr b="0" i="0" sz="1000">
+                <a:solidFill>
+                  <a:srgbClr val="FFFFFF"/>
+                </a:solidFill>
+              </a:rPr>
               <a:t>7 of 7 gaps addressed in our walkthroughs;
 no surveyed platform addressed more than 2</a:t>
             </a:r>
@@ -4772,13 +4853,13 @@
       </p:sp>
       <p:sp>
         <p:nvSpPr>
-          <p:cNvPr id="12" name="TextBox 11"/>
-          <p:cNvSpPr txBox="1"/>
-          <p:nvPr/>
-        </p:nvSpPr>
-        <p:spPr>
-          <a:xfrm>
-            <a:off x="594360" y="3200400"/>
+          <p:cNvPr id="14" name="TextBox 13"/>
+          <p:cNvSpPr txBox="1"/>
+          <p:nvPr/>
+        </p:nvSpPr>
+        <p:spPr>
+          <a:xfrm>
+            <a:off x="594360" y="4114800"/>
             <a:ext cx="5394960" cy="347472"/>
           </a:xfrm>
           <a:prstGeom prst="rect">
@@ -4806,13 +4887,13 @@
       </p:sp>
       <p:sp>
         <p:nvSpPr>
-          <p:cNvPr id="13" name="TextBox 12"/>
-          <p:cNvSpPr txBox="1"/>
-          <p:nvPr/>
-        </p:nvSpPr>
-        <p:spPr>
-          <a:xfrm>
-            <a:off x="594360" y="3529584"/>
+          <p:cNvPr id="15" name="TextBox 14"/>
+          <p:cNvSpPr txBox="1"/>
+          <p:nvPr/>
+        </p:nvSpPr>
+        <p:spPr>
+          <a:xfrm>
+            <a:off x="594360" y="4443984"/>
             <a:ext cx="5394960" cy="502920"/>
           </a:xfrm>
           <a:prstGeom prst="rect">
@@ -4835,75 +4916,6 @@
               </a:rPr>
               <a:t>Screen size, ecosystem, camera, capacity,
 material — surfaced on every pick</a:t>
-            </a:r>
-          </a:p>
-        </p:txBody>
-      </p:sp>
-      <p:sp>
-        <p:nvSpPr>
-          <p:cNvPr id="14" name="TextBox 13"/>
-          <p:cNvSpPr txBox="1"/>
-          <p:nvPr/>
-        </p:nvSpPr>
-        <p:spPr>
-          <a:xfrm>
-            <a:off x="594360" y="4114800"/>
-            <a:ext cx="5394960" cy="347472"/>
-          </a:xfrm>
-          <a:prstGeom prst="rect">
-            <a:avLst/>
-          </a:prstGeom>
-          <a:noFill/>
-        </p:spPr>
-        <p:txBody>
-          <a:bodyPr wrap="square">
-            <a:spAutoFit/>
-          </a:bodyPr>
-          <a:lstStyle/>
-          <a:p>
-            <a:pPr algn="l"/>
-            <a:r>
-              <a:rPr b="1" i="0" sz="1100">
-                <a:solidFill>
-                  <a:srgbClr val="2ECC71"/>
-                </a:solidFill>
-              </a:rPr>
-              <a:t>✓  End-to-end in five scenes</a:t>
-            </a:r>
-          </a:p>
-        </p:txBody>
-      </p:sp>
-      <p:sp>
-        <p:nvSpPr>
-          <p:cNvPr id="15" name="TextBox 14"/>
-          <p:cNvSpPr txBox="1"/>
-          <p:nvPr/>
-        </p:nvSpPr>
-        <p:spPr>
-          <a:xfrm>
-            <a:off x="594360" y="4443984"/>
-            <a:ext cx="5394960" cy="502920"/>
-          </a:xfrm>
-          <a:prstGeom prst="rect">
-            <a:avLst/>
-          </a:prstGeom>
-          <a:noFill/>
-        </p:spPr>
-        <p:txBody>
-          <a:bodyPr wrap="square">
-            <a:spAutoFit/>
-          </a:bodyPr>
-          <a:lstStyle/>
-          <a:p>
-            <a:pPr algn="l"/>
-            <a:r>
-              <a:rPr b="0" i="0" sz="1000">
-                <a:solidFill>
-                  <a:srgbClr val="FFFFFF"/>
-                </a:solidFill>
-              </a:rPr>
-              <a:t>Need → clarify → 3 picks → why-this-fits →
-lifecycle. Zero external page navigation.</a:t>
             </a:r>
           </a:p>
         </p:txBody>

--- a/docs/capstone_presentation_v5.pptx
+++ b/docs/capstone_presentation_v5.pptx
@@ -4,21 +4,24 @@
   <p:sldMasterIdLst>
     <p:sldMasterId id="2147483648" r:id="rId1"/>
   </p:sldMasterIdLst>
+  <p:notesMasterIdLst>
+    <p:notesMasterId r:id="rId14"/>
+  </p:notesMasterIdLst>
   <p:sldIdLst>
-    <p:sldId id="256" r:id="rId7"/>
-    <p:sldId id="257" r:id="rId8"/>
-    <p:sldId id="258" r:id="rId9"/>
-    <p:sldId id="259" r:id="rId10"/>
-    <p:sldId id="260" r:id="rId11"/>
-    <p:sldId id="261" r:id="rId13"/>
-    <p:sldId id="262" r:id="rId14"/>
-    <p:sldId id="263" r:id="rId15"/>
-    <p:sldId id="264" r:id="rId16"/>
-    <p:sldId id="265" r:id="rId17"/>
-    <p:sldId id="266" r:id="rId18"/>
-    <p:sldId id="267" r:id="rId19"/>
+    <p:sldId id="256" r:id="rId2"/>
+    <p:sldId id="257" r:id="rId3"/>
+    <p:sldId id="258" r:id="rId4"/>
+    <p:sldId id="259" r:id="rId5"/>
+    <p:sldId id="260" r:id="rId6"/>
+    <p:sldId id="261" r:id="rId7"/>
+    <p:sldId id="262" r:id="rId8"/>
+    <p:sldId id="263" r:id="rId9"/>
+    <p:sldId id="264" r:id="rId10"/>
+    <p:sldId id="265" r:id="rId11"/>
+    <p:sldId id="266" r:id="rId12"/>
+    <p:sldId id="267" r:id="rId13"/>
   </p:sldIdLst>
-  <p:sldSz cx="12188952" cy="6858000" type="screen4x3"/>
+  <p:sldSz cx="12188825" cy="6858000"/>
   <p:notesSz cx="6858000" cy="9144000"/>
   <p:defaultTextStyle>
     <a:defPPr>
@@ -115,11 +118,27 @@
       </a:defRPr>
     </a:lvl9pPr>
   </p:defaultTextStyle>
+  <p:extLst>
+    <p:ext uri="{EFAFB233-063F-42B5-8137-9DF3F51BA10A}">
+      <p15:sldGuideLst xmlns:p15="http://schemas.microsoft.com/office/powerpoint/2012/main">
+        <p15:guide id="1" orient="horz" pos="2160">
+          <p15:clr>
+            <a:srgbClr val="A4A3A4"/>
+          </p15:clr>
+        </p15:guide>
+        <p15:guide id="2" pos="2880">
+          <p15:clr>
+            <a:srgbClr val="A4A3A4"/>
+          </p15:clr>
+        </p15:guide>
+      </p15:sldGuideLst>
+    </p:ext>
+  </p:extLst>
 </p:presentation>
 </file>
 
 <file path=ppt/notesMasters/notesMaster1.xml><?xml version="1.0" encoding="utf-8"?>
-<p:notesMaster xmlns:a="http://schemas.openxmlformats.org/drawingml/2006/main" xmlns:p="http://schemas.openxmlformats.org/presentationml/2006/main" xmlns:r="http://schemas.openxmlformats.org/officeDocument/2006/relationships">
+<p:notesMaster xmlns:a="http://schemas.openxmlformats.org/drawingml/2006/main" xmlns:r="http://schemas.openxmlformats.org/officeDocument/2006/relationships" xmlns:p="http://schemas.openxmlformats.org/presentationml/2006/main">
   <p:cSld>
     <p:bg>
       <p:bgRef idx="1001">
@@ -153,7 +172,7 @@
         <p:spPr>
           <a:xfrm>
             <a:off x="0" y="0"/>
-            <a:ext cx="2971800" cy="457200"/>
+            <a:ext cx="2971800" cy="458788"/>
           </a:xfrm>
           <a:prstGeom prst="rect">
             <a:avLst/>
@@ -184,7 +203,7 @@
         <p:spPr>
           <a:xfrm>
             <a:off x="3884613" y="0"/>
-            <a:ext cx="2971800" cy="457200"/>
+            <a:ext cx="2971800" cy="458788"/>
           </a:xfrm>
           <a:prstGeom prst="rect">
             <a:avLst/>
@@ -198,9 +217,9 @@
             </a:lvl1pPr>
           </a:lstStyle>
           <a:p>
-            <a:fld id="{0F89C1C7-3DCD-1040-A9CF-14679D8B5DDD}" type="datetimeFigureOut">
+            <a:fld id="{0564F60B-AA65-D449-8D41-B4361286FA8D}" type="datetimeFigureOut">
               <a:rPr lang="en-US" smtClean="0"/>
-              <a:t>10/17/16</a:t>
+              <a:t>5/5/26</a:t>
             </a:fld>
             <a:endParaRPr lang="en-US"/>
           </a:p>
@@ -218,8 +237,8 @@
         </p:nvSpPr>
         <p:spPr>
           <a:xfrm>
-            <a:off x="1143000" y="685800"/>
-            <a:ext cx="4572000" cy="3429000"/>
+            <a:off x="685800" y="1143000"/>
+            <a:ext cx="5486400" cy="3086100"/>
           </a:xfrm>
           <a:prstGeom prst="rect">
             <a:avLst/>
@@ -251,8 +270,8 @@
         </p:nvSpPr>
         <p:spPr>
           <a:xfrm>
-            <a:off x="685800" y="4343400"/>
-            <a:ext cx="5486400" cy="4114800"/>
+            <a:off x="685800" y="4400550"/>
+            <a:ext cx="5486400" cy="3600450"/>
           </a:xfrm>
           <a:prstGeom prst="rect">
             <a:avLst/>
@@ -264,38 +283,37 @@
           <a:p>
             <a:pPr lvl="0"/>
             <a:r>
-              <a:rPr lang="en-US" smtClean="0"/>
+              <a:rPr lang="en-US"/>
               <a:t>Click to edit Master text styles</a:t>
             </a:r>
           </a:p>
           <a:p>
             <a:pPr lvl="1"/>
             <a:r>
-              <a:rPr lang="en-US" smtClean="0"/>
+              <a:rPr lang="en-US"/>
               <a:t>Second level</a:t>
             </a:r>
           </a:p>
           <a:p>
             <a:pPr lvl="2"/>
             <a:r>
-              <a:rPr lang="en-US" smtClean="0"/>
+              <a:rPr lang="en-US"/>
               <a:t>Third level</a:t>
             </a:r>
           </a:p>
           <a:p>
             <a:pPr lvl="3"/>
             <a:r>
-              <a:rPr lang="en-US" smtClean="0"/>
+              <a:rPr lang="en-US"/>
               <a:t>Fourth level</a:t>
             </a:r>
           </a:p>
           <a:p>
             <a:pPr lvl="4"/>
             <a:r>
-              <a:rPr lang="en-US" smtClean="0"/>
+              <a:rPr lang="en-US"/>
               <a:t>Fifth level</a:t>
             </a:r>
-            <a:endParaRPr lang="en-US"/>
           </a:p>
         </p:txBody>
       </p:sp>
@@ -312,7 +330,7 @@
         <p:spPr>
           <a:xfrm>
             <a:off x="0" y="8685213"/>
-            <a:ext cx="2971800" cy="457200"/>
+            <a:ext cx="2971800" cy="458787"/>
           </a:xfrm>
           <a:prstGeom prst="rect">
             <a:avLst/>
@@ -343,7 +361,7 @@
         <p:spPr>
           <a:xfrm>
             <a:off x="3884613" y="8685213"/>
-            <a:ext cx="2971800" cy="457200"/>
+            <a:ext cx="2971800" cy="458787"/>
           </a:xfrm>
           <a:prstGeom prst="rect">
             <a:avLst/>
@@ -357,7 +375,7 @@
             </a:lvl1pPr>
           </a:lstStyle>
           <a:p>
-            <a:fld id="{BB5E49A5-4136-284D-997B-48E1D791AD67}" type="slidenum">
+            <a:fld id="{6D2C78E8-E846-484E-A7A6-D508189F4B01}" type="slidenum">
               <a:rPr lang="en-US" smtClean="0"/>
               <a:t>‹#›</a:t>
             </a:fld>
@@ -368,13 +386,13 @@
     </p:spTree>
     <p:extLst>
       <p:ext uri="{BB962C8B-B14F-4D97-AF65-F5344CB8AC3E}">
-        <p14:creationId xmlns:p14="http://schemas.microsoft.com/office/powerpoint/2010/main" val="2623252185"/>
+        <p14:creationId xmlns:p14="http://schemas.microsoft.com/office/powerpoint/2010/main" val="4014620179"/>
       </p:ext>
     </p:extLst>
   </p:cSld>
   <p:clrMap bg1="lt1" tx1="dk1" bg2="lt2" tx2="dk2" accent1="accent1" accent2="accent2" accent3="accent3" accent4="accent4" accent5="accent5" accent6="accent6" hlink="hlink" folHlink="folHlink"/>
   <p:notesStyle>
-    <a:lvl1pPr marL="0" algn="l" defTabSz="457200" rtl="0" eaLnBrk="1" latinLnBrk="0" hangingPunct="1">
+    <a:lvl1pPr marL="0" algn="l" defTabSz="914400" rtl="0" eaLnBrk="1" latinLnBrk="0" hangingPunct="1">
       <a:defRPr sz="1200" kern="1200">
         <a:solidFill>
           <a:schemeClr val="tx1"/>
@@ -384,7 +402,7 @@
         <a:cs typeface="+mn-cs"/>
       </a:defRPr>
     </a:lvl1pPr>
-    <a:lvl2pPr marL="457200" algn="l" defTabSz="457200" rtl="0" eaLnBrk="1" latinLnBrk="0" hangingPunct="1">
+    <a:lvl2pPr marL="457200" algn="l" defTabSz="914400" rtl="0" eaLnBrk="1" latinLnBrk="0" hangingPunct="1">
       <a:defRPr sz="1200" kern="1200">
         <a:solidFill>
           <a:schemeClr val="tx1"/>
@@ -394,7 +412,7 @@
         <a:cs typeface="+mn-cs"/>
       </a:defRPr>
     </a:lvl2pPr>
-    <a:lvl3pPr marL="914400" algn="l" defTabSz="457200" rtl="0" eaLnBrk="1" latinLnBrk="0" hangingPunct="1">
+    <a:lvl3pPr marL="914400" algn="l" defTabSz="914400" rtl="0" eaLnBrk="1" latinLnBrk="0" hangingPunct="1">
       <a:defRPr sz="1200" kern="1200">
         <a:solidFill>
           <a:schemeClr val="tx1"/>
@@ -404,7 +422,7 @@
         <a:cs typeface="+mn-cs"/>
       </a:defRPr>
     </a:lvl3pPr>
-    <a:lvl4pPr marL="1371600" algn="l" defTabSz="457200" rtl="0" eaLnBrk="1" latinLnBrk="0" hangingPunct="1">
+    <a:lvl4pPr marL="1371600" algn="l" defTabSz="914400" rtl="0" eaLnBrk="1" latinLnBrk="0" hangingPunct="1">
       <a:defRPr sz="1200" kern="1200">
         <a:solidFill>
           <a:schemeClr val="tx1"/>
@@ -414,7 +432,7 @@
         <a:cs typeface="+mn-cs"/>
       </a:defRPr>
     </a:lvl4pPr>
-    <a:lvl5pPr marL="1828800" algn="l" defTabSz="457200" rtl="0" eaLnBrk="1" latinLnBrk="0" hangingPunct="1">
+    <a:lvl5pPr marL="1828800" algn="l" defTabSz="914400" rtl="0" eaLnBrk="1" latinLnBrk="0" hangingPunct="1">
       <a:defRPr sz="1200" kern="1200">
         <a:solidFill>
           <a:schemeClr val="tx1"/>
@@ -424,7 +442,7 @@
         <a:cs typeface="+mn-cs"/>
       </a:defRPr>
     </a:lvl5pPr>
-    <a:lvl6pPr marL="2286000" algn="l" defTabSz="457200" rtl="0" eaLnBrk="1" latinLnBrk="0" hangingPunct="1">
+    <a:lvl6pPr marL="2286000" algn="l" defTabSz="914400" rtl="0" eaLnBrk="1" latinLnBrk="0" hangingPunct="1">
       <a:defRPr sz="1200" kern="1200">
         <a:solidFill>
           <a:schemeClr val="tx1"/>
@@ -434,7 +452,7 @@
         <a:cs typeface="+mn-cs"/>
       </a:defRPr>
     </a:lvl6pPr>
-    <a:lvl7pPr marL="2743200" algn="l" defTabSz="457200" rtl="0" eaLnBrk="1" latinLnBrk="0" hangingPunct="1">
+    <a:lvl7pPr marL="2743200" algn="l" defTabSz="914400" rtl="0" eaLnBrk="1" latinLnBrk="0" hangingPunct="1">
       <a:defRPr sz="1200" kern="1200">
         <a:solidFill>
           <a:schemeClr val="tx1"/>
@@ -444,7 +462,7 @@
         <a:cs typeface="+mn-cs"/>
       </a:defRPr>
     </a:lvl7pPr>
-    <a:lvl8pPr marL="3200400" algn="l" defTabSz="457200" rtl="0" eaLnBrk="1" latinLnBrk="0" hangingPunct="1">
+    <a:lvl8pPr marL="3200400" algn="l" defTabSz="914400" rtl="0" eaLnBrk="1" latinLnBrk="0" hangingPunct="1">
       <a:defRPr sz="1200" kern="1200">
         <a:solidFill>
           <a:schemeClr val="tx1"/>
@@ -454,7 +472,7 @@
         <a:cs typeface="+mn-cs"/>
       </a:defRPr>
     </a:lvl8pPr>
-    <a:lvl9pPr marL="3657600" algn="l" defTabSz="457200" rtl="0" eaLnBrk="1" latinLnBrk="0" hangingPunct="1">
+    <a:lvl9pPr marL="3657600" algn="l" defTabSz="914400" rtl="0" eaLnBrk="1" latinLnBrk="0" hangingPunct="1">
       <a:defRPr sz="1200" kern="1200">
         <a:solidFill>
           <a:schemeClr val="tx1"/>
@@ -469,7 +487,7 @@
 </file>
 
 <file path=ppt/notesSlides/notesSlide1.xml><?xml version="1.0" encoding="utf-8"?>
-<p:notes xmlns:a="http://schemas.openxmlformats.org/drawingml/2006/main" xmlns:p="http://schemas.openxmlformats.org/presentationml/2006/main" xmlns:r="http://schemas.openxmlformats.org/officeDocument/2006/relationships">
+<p:notes xmlns:a="http://schemas.openxmlformats.org/drawingml/2006/main" xmlns:r="http://schemas.openxmlformats.org/officeDocument/2006/relationships" xmlns:p="http://schemas.openxmlformats.org/presentationml/2006/main">
   <p:cSld>
     <p:spTree>
       <p:nvGrpSpPr>
@@ -489,7 +507,7 @@
         <p:nvSpPr>
           <p:cNvPr id="2" name="Slide Image Placeholder 1"/>
           <p:cNvSpPr>
-            <a:spLocks noGrp="1"/>
+            <a:spLocks noGrp="1" noRot="1" noChangeAspect="1"/>
           </p:cNvSpPr>
           <p:nvPr>
             <p:ph type="sldImg" idx="2"/>
@@ -504,7 +522,7 @@
             <a:spLocks noGrp="1"/>
           </p:cNvSpPr>
           <p:nvPr>
-            <p:ph type="body" idx="3" sz="quarter"/>
+            <p:ph type="body" sz="quarter" idx="3"/>
           </p:nvPr>
         </p:nvSpPr>
         <p:spPr/>
@@ -513,26 +531,39 @@
           <a:lstStyle/>
           <a:p>
             <a:r>
+              <a:rPr dirty="0"/>
               <a:t>Talking points for this slide:</a:t>
             </a:r>
           </a:p>
           <a:p>
             <a:r>
+              <a:rPr dirty="0"/>
               <a:t>1. UNDERSTAND YOU — the assistant lets the user start from a frustration ('phone screen too small for cooking') instead of a category. Six chip questions per category — voice ecosystem, placement, screen size, privacy, etc. — are decision-relevant, not generic budget/urgency.</a:t>
             </a:r>
           </a:p>
           <a:p>
             <a:r>
-              <a:t>2. REMEMBERS YOU — every refine turn captures a preference diff and renders it as a 'What changed' card. Implicit prefs are inferred from the free-text frustration ('leaks' -&gt; leak-resistant, 'heavy' -&gt; lightweight).</a:t>
-            </a:r>
-          </a:p>
-          <a:p>
-            <a:r>
+              <a:rPr dirty="0"/>
+              <a:t>2. REMEMBERS YOU — every refine turn captures a preference diff and renders it as a 'What changed' card. Implicit </a:t>
+            </a:r>
+            <a:r>
+              <a:rPr dirty="0" err="1"/>
+              <a:t>prefs</a:t>
+            </a:r>
+            <a:r>
+              <a:rPr dirty="0"/>
+              <a:t> are inferred from the free-text frustration ('leaks' -&gt; leak-resistant, 'heavy' -&gt; lightweight).</a:t>
+            </a:r>
+          </a:p>
+          <a:p>
+            <a:r>
+              <a:rPr dirty="0"/>
               <a:t>3. CLEAR DECISIONS — the assistant returns 3 differentiated picks (Best Fit / Budget Pick / Stretch). Each pick carries a ✓/✗/? checklist mapping every chip the user picked to a match status. Compare view lays 2-3 finalists side-by-side with row-winners highlighted.</a:t>
             </a:r>
           </a:p>
           <a:p>
             <a:r>
+              <a:rPr dirty="0"/>
               <a:t>4. LIFECYCLE LAYER — framed as a prototype concept that demonstrates the assistant continuing to add value after purchase (phone reminders, gym-bag checklist, replacement parts). Not a finished post-purchase platform.</a:t>
             </a:r>
           </a:p>
@@ -545,7 +576,7 @@
             <a:spLocks noGrp="1"/>
           </p:cNvSpPr>
           <p:nvPr>
-            <p:ph type="sldNum" idx="5" sz="quarter"/>
+            <p:ph type="sldNum" sz="quarter" idx="5"/>
           </p:nvPr>
         </p:nvSpPr>
         <p:spPr/>
@@ -559,7 +590,7 @@
 </file>
 
 <file path=ppt/notesSlides/notesSlide2.xml><?xml version="1.0" encoding="utf-8"?>
-<p:notes xmlns:a="http://schemas.openxmlformats.org/drawingml/2006/main" xmlns:p="http://schemas.openxmlformats.org/presentationml/2006/main" xmlns:r="http://schemas.openxmlformats.org/officeDocument/2006/relationships">
+<p:notes xmlns:a="http://schemas.openxmlformats.org/drawingml/2006/main" xmlns:r="http://schemas.openxmlformats.org/officeDocument/2006/relationships" xmlns:p="http://schemas.openxmlformats.org/presentationml/2006/main">
   <p:cSld>
     <p:spTree>
       <p:nvGrpSpPr>
@@ -579,7 +610,7 @@
         <p:nvSpPr>
           <p:cNvPr id="2" name="Slide Image Placeholder 1"/>
           <p:cNvSpPr>
-            <a:spLocks noGrp="1"/>
+            <a:spLocks noGrp="1" noRot="1" noChangeAspect="1"/>
           </p:cNvSpPr>
           <p:nvPr>
             <p:ph type="sldImg" idx="2"/>
@@ -594,7 +625,7 @@
             <a:spLocks noGrp="1"/>
           </p:cNvSpPr>
           <p:nvPr>
-            <p:ph type="body" idx="3" sz="quarter"/>
+            <p:ph type="body" sz="quarter" idx="3"/>
           </p:nvPr>
         </p:nvSpPr>
         <p:spPr/>
@@ -640,7 +671,7 @@
             <a:spLocks noGrp="1"/>
           </p:cNvSpPr>
           <p:nvPr>
-            <p:ph type="sldNum" idx="5" sz="quarter"/>
+            <p:ph type="sldNum" sz="quarter" idx="5"/>
           </p:nvPr>
         </p:nvSpPr>
         <p:spPr/>
@@ -654,7 +685,7 @@
 </file>
 
 <file path=ppt/notesSlides/notesSlide3.xml><?xml version="1.0" encoding="utf-8"?>
-<p:notes xmlns:a="http://schemas.openxmlformats.org/drawingml/2006/main" xmlns:p="http://schemas.openxmlformats.org/presentationml/2006/main" xmlns:r="http://schemas.openxmlformats.org/officeDocument/2006/relationships">
+<p:notes xmlns:a="http://schemas.openxmlformats.org/drawingml/2006/main" xmlns:r="http://schemas.openxmlformats.org/officeDocument/2006/relationships" xmlns:p="http://schemas.openxmlformats.org/presentationml/2006/main">
   <p:cSld>
     <p:spTree>
       <p:nvGrpSpPr>
@@ -674,7 +705,7 @@
         <p:nvSpPr>
           <p:cNvPr id="2" name="Slide Image Placeholder 1"/>
           <p:cNvSpPr>
-            <a:spLocks noGrp="1"/>
+            <a:spLocks noGrp="1" noRot="1" noChangeAspect="1"/>
           </p:cNvSpPr>
           <p:nvPr>
             <p:ph type="sldImg" idx="2"/>
@@ -689,7 +720,7 @@
             <a:spLocks noGrp="1"/>
           </p:cNvSpPr>
           <p:nvPr>
-            <p:ph type="body" idx="3" sz="quarter"/>
+            <p:ph type="body" sz="quarter" idx="3"/>
           </p:nvPr>
         </p:nvSpPr>
         <p:spPr/>
@@ -750,7 +781,7 @@
             <a:spLocks noGrp="1"/>
           </p:cNvSpPr>
           <p:nvPr>
-            <p:ph type="sldNum" idx="5" sz="quarter"/>
+            <p:ph type="sldNum" sz="quarter" idx="5"/>
           </p:nvPr>
         </p:nvSpPr>
         <p:spPr/>
@@ -764,7 +795,7 @@
 </file>
 
 <file path=ppt/notesSlides/notesSlide4.xml><?xml version="1.0" encoding="utf-8"?>
-<p:notes xmlns:a="http://schemas.openxmlformats.org/drawingml/2006/main" xmlns:p="http://schemas.openxmlformats.org/presentationml/2006/main" xmlns:r="http://schemas.openxmlformats.org/officeDocument/2006/relationships">
+<p:notes xmlns:a="http://schemas.openxmlformats.org/drawingml/2006/main" xmlns:r="http://schemas.openxmlformats.org/officeDocument/2006/relationships" xmlns:p="http://schemas.openxmlformats.org/presentationml/2006/main">
   <p:cSld>
     <p:spTree>
       <p:nvGrpSpPr>
@@ -784,7 +815,7 @@
         <p:nvSpPr>
           <p:cNvPr id="2" name="Slide Image Placeholder 1"/>
           <p:cNvSpPr>
-            <a:spLocks noGrp="1"/>
+            <a:spLocks noGrp="1" noRot="1" noChangeAspect="1"/>
           </p:cNvSpPr>
           <p:nvPr>
             <p:ph type="sldImg" idx="2"/>
@@ -799,7 +830,7 @@
             <a:spLocks noGrp="1"/>
           </p:cNvSpPr>
           <p:nvPr>
-            <p:ph type="body" idx="3" sz="quarter"/>
+            <p:ph type="body" sz="quarter" idx="3"/>
           </p:nvPr>
         </p:nvSpPr>
         <p:spPr/>
@@ -816,19 +847,25 @@
               <a:t>ETL: scrapes 100 products via Playwright with anti-bot measures, normalises delivery copy ('arrives Mar 14' -&gt; 5 days). 72/100 delivery values were missing post-scrape and are flagged 'estimated'; descriptions for all 100 are flagged 'synthesised from title'. No silent fabrication.</a:t>
             </a:r>
           </a:p>
-          <a:p/>
+          <a:p>
+            <a:endParaRPr/>
+          </a:p>
           <a:p>
             <a:r>
               <a:t>Attribute extraction: regex-based, runs at load time. Echo Show models map to known screen sizes (5 -&gt; 5.5", 8 -&gt; 8", 15 -&gt; 15.6"); ecosystems infer from Echo/Nest/HomePod keywords; bottle capacity from 'oz' patterns.</a:t>
             </a:r>
           </a:p>
-          <a:p/>
+          <a:p>
+            <a:endParaRPr/>
+          </a:p>
           <a:p>
             <a:r>
               <a:t>Claude call sites in the runtime: parse free-text input, write personal copy, parse refine intent. All three have deterministic fallbacks so the demo runs without an API key. Ranking is never an LLM call.</a:t>
             </a:r>
           </a:p>
-          <a:p/>
+          <a:p>
+            <a:endParaRPr/>
+          </a:p>
           <a:p>
             <a:r>
               <a:t>AI tooling across the build (disclosed honestly):</a:t>
@@ -863,7 +900,7 @@
             <a:spLocks noGrp="1"/>
           </p:cNvSpPr>
           <p:nvPr>
-            <p:ph type="sldNum" idx="5" sz="quarter"/>
+            <p:ph type="sldNum" sz="quarter" idx="5"/>
           </p:nvPr>
         </p:nvSpPr>
         <p:spPr/>
@@ -877,7 +914,7 @@
 </file>
 
 <file path=ppt/notesSlides/notesSlide5.xml><?xml version="1.0" encoding="utf-8"?>
-<p:notes xmlns:a="http://schemas.openxmlformats.org/drawingml/2006/main" xmlns:p="http://schemas.openxmlformats.org/presentationml/2006/main" xmlns:r="http://schemas.openxmlformats.org/officeDocument/2006/relationships">
+<p:notes xmlns:a="http://schemas.openxmlformats.org/drawingml/2006/main" xmlns:r="http://schemas.openxmlformats.org/officeDocument/2006/relationships" xmlns:p="http://schemas.openxmlformats.org/presentationml/2006/main">
   <p:cSld>
     <p:spTree>
       <p:nvGrpSpPr>
@@ -897,7 +934,7 @@
         <p:nvSpPr>
           <p:cNvPr id="2" name="Slide Image Placeholder 1"/>
           <p:cNvSpPr>
-            <a:spLocks noGrp="1"/>
+            <a:spLocks noGrp="1" noRot="1" noChangeAspect="1"/>
           </p:cNvSpPr>
           <p:nvPr>
             <p:ph type="sldImg" idx="2"/>
@@ -912,7 +949,7 @@
             <a:spLocks noGrp="1"/>
           </p:cNvSpPr>
           <p:nvPr>
-            <p:ph type="body" idx="3" sz="quarter"/>
+            <p:ph type="body" sz="quarter" idx="3"/>
           </p:nvPr>
         </p:nvSpPr>
         <p:spPr/>
@@ -921,21 +958,12 @@
           <a:lstStyle/>
           <a:p>
             <a:r>
-              <a:t>Validation method (multi-agent debate):</a:t>
-            </a:r>
-          </a:p>
-          <a:p>
-            <a:r>
-              <a:t>I ran two AI agents independently against the same codebase and compared their findings. Claude Code (the build pair-programmer) did the implementation and self-review; Codex GPT-5.5 was given the role of independent technical validator and listed every demo-safety risk it could find. Each finding either survived cross-examination (and got fixed in code) or got dismissed with a written reason. Combined with small-scale user testing on family / friends / classmates, this gave three independent evaluation lenses on the project.</a:t>
-            </a:r>
-          </a:p>
-          <a:p/>
-          <a:p>
-            <a:r>
               <a:t>Live demo script (matches the running app exactly):</a:t>
             </a:r>
           </a:p>
-          <a:p/>
+          <a:p>
+            <a:endParaRPr/>
+          </a:p>
           <a:p>
             <a:r>
               <a:t>1. Type into Scene 1: 'current bottle is heavy and leaks in my gym bag'.</a:t>
@@ -946,13 +974,17 @@
               <a:t>   Observe: category auto-classified as water_bottle. The route also infers leak_proof_preferred=True from the word 'leaks'.</a:t>
             </a:r>
           </a:p>
-          <a:p/>
+          <a:p>
+            <a:endParaRPr/>
+          </a:p>
           <a:p>
             <a:r>
               <a:t>2. Scene 2: pick three chips — Water Bottle / Gym / Large capacity. Skip the others. Hit 'See recommendations'.</a:t>
             </a:r>
           </a:p>
-          <a:p/>
+          <a:p>
+            <a:endParaRPr/>
+          </a:p>
           <a:p>
             <a:r>
               <a:t>3. Scene 3: three differentiated picks render in a row.</a:t>
@@ -973,25 +1005,33 @@
               <a:t>   - LARGE CAPACITY PICK: Owala 32oz FreeSip — labels [Most capacity, Most leakproof].</a:t>
             </a:r>
           </a:p>
-          <a:p/>
+          <a:p>
+            <a:endParaRPr/>
+          </a:p>
           <a:p>
             <a:r>
               <a:t>4. Click 'See why' on Best Fit. Stage 4 quotes the user's frustration, lists the rule-grounded reasons, and shows the ✓/✗/? checklist of every preference.</a:t>
             </a:r>
           </a:p>
-          <a:p/>
+          <a:p>
+            <a:endParaRPr/>
+          </a:p>
           <a:p>
             <a:r>
               <a:t>5. Refine: type 'larger'. The diff card shows size_preference None -&gt; large; Best Fit flips to 32oz. Demonstrates preference continuity.</a:t>
             </a:r>
           </a:p>
-          <a:p/>
+          <a:p>
+            <a:endParaRPr/>
+          </a:p>
           <a:p>
             <a:r>
               <a:t>6. Click compare on 2-3 picks; the side-by-side overlay highlights the row-winner (lowest price, largest capacity, etc.) per attribute.</a:t>
             </a:r>
           </a:p>
-          <a:p/>
+          <a:p>
+            <a:endParaRPr/>
+          </a:p>
           <a:p>
             <a:r>
               <a:t>7. Continue to Lifecycle (prototype). Phone reminders / gym-bag checklist / replacement parts — honest about what the bottle can/cannot do.</a:t>
@@ -1006,7 +1046,7 @@
             <a:spLocks noGrp="1"/>
           </p:cNvSpPr>
           <p:nvPr>
-            <p:ph type="sldNum" idx="5" sz="quarter"/>
+            <p:ph type="sldNum" sz="quarter" idx="5"/>
           </p:nvPr>
         </p:nvSpPr>
         <p:spPr/>
@@ -1057,10 +1097,9 @@
           <a:lstStyle/>
           <a:p>
             <a:r>
-              <a:rPr lang="en-US" smtClean="0"/>
+              <a:rPr lang="en-US"/>
               <a:t>Click to edit Master title style</a:t>
             </a:r>
-            <a:endParaRPr lang="en-US"/>
           </a:p>
         </p:txBody>
       </p:sp>
@@ -1176,10 +1215,9 @@
           </a:lstStyle>
           <a:p>
             <a:r>
-              <a:rPr lang="en-US" smtClean="0"/>
+              <a:rPr lang="en-US"/>
               <a:t>Click to edit Master subtitle style</a:t>
             </a:r>
-            <a:endParaRPr lang="en-US"/>
           </a:p>
         </p:txBody>
       </p:sp>
@@ -1200,7 +1238,7 @@
           <a:p>
             <a:fld id="{5BCAD085-E8A6-8845-BD4E-CB4CCA059FC4}" type="datetimeFigureOut">
               <a:rPr lang="en-US" smtClean="0"/>
-              <a:t>1/27/13</a:t>
+              <a:t>5/5/26</a:t>
             </a:fld>
             <a:endParaRPr lang="en-US"/>
           </a:p>
@@ -1294,10 +1332,9 @@
           <a:lstStyle/>
           <a:p>
             <a:r>
-              <a:rPr lang="en-US" smtClean="0"/>
+              <a:rPr lang="en-US"/>
               <a:t>Click to edit Master title style</a:t>
             </a:r>
-            <a:endParaRPr lang="en-US"/>
           </a:p>
         </p:txBody>
       </p:sp>
@@ -1318,38 +1355,37 @@
           <a:p>
             <a:pPr lvl="0"/>
             <a:r>
-              <a:rPr lang="en-US" smtClean="0"/>
+              <a:rPr lang="en-US"/>
               <a:t>Click to edit Master text styles</a:t>
             </a:r>
           </a:p>
           <a:p>
             <a:pPr lvl="1"/>
             <a:r>
-              <a:rPr lang="en-US" smtClean="0"/>
+              <a:rPr lang="en-US"/>
               <a:t>Second level</a:t>
             </a:r>
           </a:p>
           <a:p>
             <a:pPr lvl="2"/>
             <a:r>
-              <a:rPr lang="en-US" smtClean="0"/>
+              <a:rPr lang="en-US"/>
               <a:t>Third level</a:t>
             </a:r>
           </a:p>
           <a:p>
             <a:pPr lvl="3"/>
             <a:r>
-              <a:rPr lang="en-US" smtClean="0"/>
+              <a:rPr lang="en-US"/>
               <a:t>Fourth level</a:t>
             </a:r>
           </a:p>
           <a:p>
             <a:pPr lvl="4"/>
             <a:r>
-              <a:rPr lang="en-US" smtClean="0"/>
+              <a:rPr lang="en-US"/>
               <a:t>Fifth level</a:t>
             </a:r>
-            <a:endParaRPr lang="en-US"/>
           </a:p>
         </p:txBody>
       </p:sp>
@@ -1370,7 +1406,7 @@
           <a:p>
             <a:fld id="{5BCAD085-E8A6-8845-BD4E-CB4CCA059FC4}" type="datetimeFigureOut">
               <a:rPr lang="en-US" smtClean="0"/>
-              <a:t>1/27/13</a:t>
+              <a:t>5/5/26</a:t>
             </a:fld>
             <a:endParaRPr lang="en-US"/>
           </a:p>
@@ -1469,10 +1505,9 @@
           <a:lstStyle/>
           <a:p>
             <a:r>
-              <a:rPr lang="en-US" smtClean="0"/>
+              <a:rPr lang="en-US"/>
               <a:t>Click to edit Master title style</a:t>
             </a:r>
-            <a:endParaRPr lang="en-US"/>
           </a:p>
         </p:txBody>
       </p:sp>
@@ -1498,38 +1533,37 @@
           <a:p>
             <a:pPr lvl="0"/>
             <a:r>
-              <a:rPr lang="en-US" smtClean="0"/>
+              <a:rPr lang="en-US"/>
               <a:t>Click to edit Master text styles</a:t>
             </a:r>
           </a:p>
           <a:p>
             <a:pPr lvl="1"/>
             <a:r>
-              <a:rPr lang="en-US" smtClean="0"/>
+              <a:rPr lang="en-US"/>
               <a:t>Second level</a:t>
             </a:r>
           </a:p>
           <a:p>
             <a:pPr lvl="2"/>
             <a:r>
-              <a:rPr lang="en-US" smtClean="0"/>
+              <a:rPr lang="en-US"/>
               <a:t>Third level</a:t>
             </a:r>
           </a:p>
           <a:p>
             <a:pPr lvl="3"/>
             <a:r>
-              <a:rPr lang="en-US" smtClean="0"/>
+              <a:rPr lang="en-US"/>
               <a:t>Fourth level</a:t>
             </a:r>
           </a:p>
           <a:p>
             <a:pPr lvl="4"/>
             <a:r>
-              <a:rPr lang="en-US" smtClean="0"/>
+              <a:rPr lang="en-US"/>
               <a:t>Fifth level</a:t>
             </a:r>
-            <a:endParaRPr lang="en-US"/>
           </a:p>
         </p:txBody>
       </p:sp>
@@ -1550,7 +1584,7 @@
           <a:p>
             <a:fld id="{5BCAD085-E8A6-8845-BD4E-CB4CCA059FC4}" type="datetimeFigureOut">
               <a:rPr lang="en-US" smtClean="0"/>
-              <a:t>1/27/13</a:t>
+              <a:t>5/5/26</a:t>
             </a:fld>
             <a:endParaRPr lang="en-US"/>
           </a:p>
@@ -1644,10 +1678,9 @@
           <a:lstStyle/>
           <a:p>
             <a:r>
-              <a:rPr lang="en-US" smtClean="0"/>
+              <a:rPr lang="en-US"/>
               <a:t>Click to edit Master title style</a:t>
             </a:r>
-            <a:endParaRPr lang="en-US"/>
           </a:p>
         </p:txBody>
       </p:sp>
@@ -1668,38 +1701,37 @@
           <a:p>
             <a:pPr lvl="0"/>
             <a:r>
-              <a:rPr lang="en-US" smtClean="0"/>
+              <a:rPr lang="en-US"/>
               <a:t>Click to edit Master text styles</a:t>
             </a:r>
           </a:p>
           <a:p>
             <a:pPr lvl="1"/>
             <a:r>
-              <a:rPr lang="en-US" smtClean="0"/>
+              <a:rPr lang="en-US"/>
               <a:t>Second level</a:t>
             </a:r>
           </a:p>
           <a:p>
             <a:pPr lvl="2"/>
             <a:r>
-              <a:rPr lang="en-US" smtClean="0"/>
+              <a:rPr lang="en-US"/>
               <a:t>Third level</a:t>
             </a:r>
           </a:p>
           <a:p>
             <a:pPr lvl="3"/>
             <a:r>
-              <a:rPr lang="en-US" smtClean="0"/>
+              <a:rPr lang="en-US"/>
               <a:t>Fourth level</a:t>
             </a:r>
           </a:p>
           <a:p>
             <a:pPr lvl="4"/>
             <a:r>
-              <a:rPr lang="en-US" smtClean="0"/>
+              <a:rPr lang="en-US"/>
               <a:t>Fifth level</a:t>
             </a:r>
-            <a:endParaRPr lang="en-US"/>
           </a:p>
         </p:txBody>
       </p:sp>
@@ -1720,7 +1752,7 @@
           <a:p>
             <a:fld id="{5BCAD085-E8A6-8845-BD4E-CB4CCA059FC4}" type="datetimeFigureOut">
               <a:rPr lang="en-US" smtClean="0"/>
-              <a:t>1/27/13</a:t>
+              <a:t>5/5/26</a:t>
             </a:fld>
             <a:endParaRPr lang="en-US"/>
           </a:p>
@@ -1823,10 +1855,9 @@
           </a:lstStyle>
           <a:p>
             <a:r>
-              <a:rPr lang="en-US" smtClean="0"/>
+              <a:rPr lang="en-US"/>
               <a:t>Click to edit Master title style</a:t>
             </a:r>
-            <a:endParaRPr lang="en-US"/>
           </a:p>
         </p:txBody>
       </p:sp>
@@ -1943,7 +1974,7 @@
           <a:p>
             <a:pPr lvl="0"/>
             <a:r>
-              <a:rPr lang="en-US" smtClean="0"/>
+              <a:rPr lang="en-US"/>
               <a:t>Click to edit Master text styles</a:t>
             </a:r>
           </a:p>
@@ -1966,7 +1997,7 @@
           <a:p>
             <a:fld id="{5BCAD085-E8A6-8845-BD4E-CB4CCA059FC4}" type="datetimeFigureOut">
               <a:rPr lang="en-US" smtClean="0"/>
-              <a:t>1/27/13</a:t>
+              <a:t>5/5/26</a:t>
             </a:fld>
             <a:endParaRPr lang="en-US"/>
           </a:p>
@@ -2060,10 +2091,9 @@
           <a:lstStyle/>
           <a:p>
             <a:r>
-              <a:rPr lang="en-US" smtClean="0"/>
+              <a:rPr lang="en-US"/>
               <a:t>Click to edit Master title style</a:t>
             </a:r>
-            <a:endParaRPr lang="en-US"/>
           </a:p>
         </p:txBody>
       </p:sp>
@@ -2117,38 +2147,37 @@
           <a:p>
             <a:pPr lvl="0"/>
             <a:r>
-              <a:rPr lang="en-US" smtClean="0"/>
+              <a:rPr lang="en-US"/>
               <a:t>Click to edit Master text styles</a:t>
             </a:r>
           </a:p>
           <a:p>
             <a:pPr lvl="1"/>
             <a:r>
-              <a:rPr lang="en-US" smtClean="0"/>
+              <a:rPr lang="en-US"/>
               <a:t>Second level</a:t>
             </a:r>
           </a:p>
           <a:p>
             <a:pPr lvl="2"/>
             <a:r>
-              <a:rPr lang="en-US" smtClean="0"/>
+              <a:rPr lang="en-US"/>
               <a:t>Third level</a:t>
             </a:r>
           </a:p>
           <a:p>
             <a:pPr lvl="3"/>
             <a:r>
-              <a:rPr lang="en-US" smtClean="0"/>
+              <a:rPr lang="en-US"/>
               <a:t>Fourth level</a:t>
             </a:r>
           </a:p>
           <a:p>
             <a:pPr lvl="4"/>
             <a:r>
-              <a:rPr lang="en-US" smtClean="0"/>
+              <a:rPr lang="en-US"/>
               <a:t>Fifth level</a:t>
             </a:r>
-            <a:endParaRPr lang="en-US"/>
           </a:p>
         </p:txBody>
       </p:sp>
@@ -2202,38 +2231,37 @@
           <a:p>
             <a:pPr lvl="0"/>
             <a:r>
-              <a:rPr lang="en-US" smtClean="0"/>
+              <a:rPr lang="en-US"/>
               <a:t>Click to edit Master text styles</a:t>
             </a:r>
           </a:p>
           <a:p>
             <a:pPr lvl="1"/>
             <a:r>
-              <a:rPr lang="en-US" smtClean="0"/>
+              <a:rPr lang="en-US"/>
               <a:t>Second level</a:t>
             </a:r>
           </a:p>
           <a:p>
             <a:pPr lvl="2"/>
             <a:r>
-              <a:rPr lang="en-US" smtClean="0"/>
+              <a:rPr lang="en-US"/>
               <a:t>Third level</a:t>
             </a:r>
           </a:p>
           <a:p>
             <a:pPr lvl="3"/>
             <a:r>
-              <a:rPr lang="en-US" smtClean="0"/>
+              <a:rPr lang="en-US"/>
               <a:t>Fourth level</a:t>
             </a:r>
           </a:p>
           <a:p>
             <a:pPr lvl="4"/>
             <a:r>
-              <a:rPr lang="en-US" smtClean="0"/>
+              <a:rPr lang="en-US"/>
               <a:t>Fifth level</a:t>
             </a:r>
-            <a:endParaRPr lang="en-US"/>
           </a:p>
         </p:txBody>
       </p:sp>
@@ -2254,7 +2282,7 @@
           <a:p>
             <a:fld id="{5BCAD085-E8A6-8845-BD4E-CB4CCA059FC4}" type="datetimeFigureOut">
               <a:rPr lang="en-US" smtClean="0"/>
-              <a:t>1/27/13</a:t>
+              <a:t>5/5/26</a:t>
             </a:fld>
             <a:endParaRPr lang="en-US"/>
           </a:p>
@@ -2352,10 +2380,9 @@
           </a:lstStyle>
           <a:p>
             <a:r>
-              <a:rPr lang="en-US" smtClean="0"/>
+              <a:rPr lang="en-US"/>
               <a:t>Click to edit Master title style</a:t>
             </a:r>
-            <a:endParaRPr lang="en-US"/>
           </a:p>
         </p:txBody>
       </p:sp>
@@ -2418,7 +2445,7 @@
           <a:p>
             <a:pPr lvl="0"/>
             <a:r>
-              <a:rPr lang="en-US" smtClean="0"/>
+              <a:rPr lang="en-US"/>
               <a:t>Click to edit Master text styles</a:t>
             </a:r>
           </a:p>
@@ -2474,38 +2501,37 @@
           <a:p>
             <a:pPr lvl="0"/>
             <a:r>
-              <a:rPr lang="en-US" smtClean="0"/>
+              <a:rPr lang="en-US"/>
               <a:t>Click to edit Master text styles</a:t>
             </a:r>
           </a:p>
           <a:p>
             <a:pPr lvl="1"/>
             <a:r>
-              <a:rPr lang="en-US" smtClean="0"/>
+              <a:rPr lang="en-US"/>
               <a:t>Second level</a:t>
             </a:r>
           </a:p>
           <a:p>
             <a:pPr lvl="2"/>
             <a:r>
-              <a:rPr lang="en-US" smtClean="0"/>
+              <a:rPr lang="en-US"/>
               <a:t>Third level</a:t>
             </a:r>
           </a:p>
           <a:p>
             <a:pPr lvl="3"/>
             <a:r>
-              <a:rPr lang="en-US" smtClean="0"/>
+              <a:rPr lang="en-US"/>
               <a:t>Fourth level</a:t>
             </a:r>
           </a:p>
           <a:p>
             <a:pPr lvl="4"/>
             <a:r>
-              <a:rPr lang="en-US" smtClean="0"/>
+              <a:rPr lang="en-US"/>
               <a:t>Fifth level</a:t>
             </a:r>
-            <a:endParaRPr lang="en-US"/>
           </a:p>
         </p:txBody>
       </p:sp>
@@ -2568,7 +2594,7 @@
           <a:p>
             <a:pPr lvl="0"/>
             <a:r>
-              <a:rPr lang="en-US" smtClean="0"/>
+              <a:rPr lang="en-US"/>
               <a:t>Click to edit Master text styles</a:t>
             </a:r>
           </a:p>
@@ -2624,38 +2650,37 @@
           <a:p>
             <a:pPr lvl="0"/>
             <a:r>
-              <a:rPr lang="en-US" smtClean="0"/>
+              <a:rPr lang="en-US"/>
               <a:t>Click to edit Master text styles</a:t>
             </a:r>
           </a:p>
           <a:p>
             <a:pPr lvl="1"/>
             <a:r>
-              <a:rPr lang="en-US" smtClean="0"/>
+              <a:rPr lang="en-US"/>
               <a:t>Second level</a:t>
             </a:r>
           </a:p>
           <a:p>
             <a:pPr lvl="2"/>
             <a:r>
-              <a:rPr lang="en-US" smtClean="0"/>
+              <a:rPr lang="en-US"/>
               <a:t>Third level</a:t>
             </a:r>
           </a:p>
           <a:p>
             <a:pPr lvl="3"/>
             <a:r>
-              <a:rPr lang="en-US" smtClean="0"/>
+              <a:rPr lang="en-US"/>
               <a:t>Fourth level</a:t>
             </a:r>
           </a:p>
           <a:p>
             <a:pPr lvl="4"/>
             <a:r>
-              <a:rPr lang="en-US" smtClean="0"/>
+              <a:rPr lang="en-US"/>
               <a:t>Fifth level</a:t>
             </a:r>
-            <a:endParaRPr lang="en-US"/>
           </a:p>
         </p:txBody>
       </p:sp>
@@ -2676,7 +2701,7 @@
           <a:p>
             <a:fld id="{5BCAD085-E8A6-8845-BD4E-CB4CCA059FC4}" type="datetimeFigureOut">
               <a:rPr lang="en-US" smtClean="0"/>
-              <a:t>1/27/13</a:t>
+              <a:t>5/5/26</a:t>
             </a:fld>
             <a:endParaRPr lang="en-US"/>
           </a:p>
@@ -2770,10 +2795,9 @@
           <a:lstStyle/>
           <a:p>
             <a:r>
-              <a:rPr lang="en-US" smtClean="0"/>
+              <a:rPr lang="en-US"/>
               <a:t>Click to edit Master title style</a:t>
             </a:r>
-            <a:endParaRPr lang="en-US"/>
           </a:p>
         </p:txBody>
       </p:sp>
@@ -2794,7 +2818,7 @@
           <a:p>
             <a:fld id="{5BCAD085-E8A6-8845-BD4E-CB4CCA059FC4}" type="datetimeFigureOut">
               <a:rPr lang="en-US" smtClean="0"/>
-              <a:t>1/27/13</a:t>
+              <a:t>5/5/26</a:t>
             </a:fld>
             <a:endParaRPr lang="en-US"/>
           </a:p>
@@ -2889,7 +2913,7 @@
           <a:p>
             <a:fld id="{5BCAD085-E8A6-8845-BD4E-CB4CCA059FC4}" type="datetimeFigureOut">
               <a:rPr lang="en-US" smtClean="0"/>
-              <a:t>1/27/13</a:t>
+              <a:t>5/5/26</a:t>
             </a:fld>
             <a:endParaRPr lang="en-US"/>
           </a:p>
@@ -2992,10 +3016,9 @@
           </a:lstStyle>
           <a:p>
             <a:r>
-              <a:rPr lang="en-US" smtClean="0"/>
+              <a:rPr lang="en-US"/>
               <a:t>Click to edit Master title style</a:t>
             </a:r>
-            <a:endParaRPr lang="en-US"/>
           </a:p>
         </p:txBody>
       </p:sp>
@@ -3049,38 +3072,37 @@
           <a:p>
             <a:pPr lvl="0"/>
             <a:r>
-              <a:rPr lang="en-US" smtClean="0"/>
+              <a:rPr lang="en-US"/>
               <a:t>Click to edit Master text styles</a:t>
             </a:r>
           </a:p>
           <a:p>
             <a:pPr lvl="1"/>
             <a:r>
-              <a:rPr lang="en-US" smtClean="0"/>
+              <a:rPr lang="en-US"/>
               <a:t>Second level</a:t>
             </a:r>
           </a:p>
           <a:p>
             <a:pPr lvl="2"/>
             <a:r>
-              <a:rPr lang="en-US" smtClean="0"/>
+              <a:rPr lang="en-US"/>
               <a:t>Third level</a:t>
             </a:r>
           </a:p>
           <a:p>
             <a:pPr lvl="3"/>
             <a:r>
-              <a:rPr lang="en-US" smtClean="0"/>
+              <a:rPr lang="en-US"/>
               <a:t>Fourth level</a:t>
             </a:r>
           </a:p>
           <a:p>
             <a:pPr lvl="4"/>
             <a:r>
-              <a:rPr lang="en-US" smtClean="0"/>
+              <a:rPr lang="en-US"/>
               <a:t>Fifth level</a:t>
             </a:r>
-            <a:endParaRPr lang="en-US"/>
           </a:p>
         </p:txBody>
       </p:sp>
@@ -3143,7 +3165,7 @@
           <a:p>
             <a:pPr lvl="0"/>
             <a:r>
-              <a:rPr lang="en-US" smtClean="0"/>
+              <a:rPr lang="en-US"/>
               <a:t>Click to edit Master text styles</a:t>
             </a:r>
           </a:p>
@@ -3166,7 +3188,7 @@
           <a:p>
             <a:fld id="{5BCAD085-E8A6-8845-BD4E-CB4CCA059FC4}" type="datetimeFigureOut">
               <a:rPr lang="en-US" smtClean="0"/>
-              <a:t>1/27/13</a:t>
+              <a:t>5/5/26</a:t>
             </a:fld>
             <a:endParaRPr lang="en-US"/>
           </a:p>
@@ -3269,10 +3291,9 @@
           </a:lstStyle>
           <a:p>
             <a:r>
-              <a:rPr lang="en-US" smtClean="0"/>
+              <a:rPr lang="en-US"/>
               <a:t>Click to edit Master title style</a:t>
             </a:r>
-            <a:endParaRPr lang="en-US"/>
           </a:p>
         </p:txBody>
       </p:sp>
@@ -3396,7 +3417,7 @@
           <a:p>
             <a:pPr lvl="0"/>
             <a:r>
-              <a:rPr lang="en-US" smtClean="0"/>
+              <a:rPr lang="en-US"/>
               <a:t>Click to edit Master text styles</a:t>
             </a:r>
           </a:p>
@@ -3419,7 +3440,7 @@
           <a:p>
             <a:fld id="{5BCAD085-E8A6-8845-BD4E-CB4CCA059FC4}" type="datetimeFigureOut">
               <a:rPr lang="en-US" smtClean="0"/>
-              <a:t>1/27/13</a:t>
+              <a:t>5/5/26</a:t>
             </a:fld>
             <a:endParaRPr lang="en-US"/>
           </a:p>
@@ -3528,10 +3549,9 @@
           <a:lstStyle/>
           <a:p>
             <a:r>
-              <a:rPr lang="en-US" smtClean="0"/>
+              <a:rPr lang="en-US"/>
               <a:t>Click to edit Master title style</a:t>
             </a:r>
-            <a:endParaRPr lang="en-US"/>
           </a:p>
         </p:txBody>
       </p:sp>
@@ -3562,38 +3582,37 @@
           <a:p>
             <a:pPr lvl="0"/>
             <a:r>
-              <a:rPr lang="en-US" smtClean="0"/>
+              <a:rPr lang="en-US"/>
               <a:t>Click to edit Master text styles</a:t>
             </a:r>
           </a:p>
           <a:p>
             <a:pPr lvl="1"/>
             <a:r>
-              <a:rPr lang="en-US" smtClean="0"/>
+              <a:rPr lang="en-US"/>
               <a:t>Second level</a:t>
             </a:r>
           </a:p>
           <a:p>
             <a:pPr lvl="2"/>
             <a:r>
-              <a:rPr lang="en-US" smtClean="0"/>
+              <a:rPr lang="en-US"/>
               <a:t>Third level</a:t>
             </a:r>
           </a:p>
           <a:p>
             <a:pPr lvl="3"/>
             <a:r>
-              <a:rPr lang="en-US" smtClean="0"/>
+              <a:rPr lang="en-US"/>
               <a:t>Fourth level</a:t>
             </a:r>
           </a:p>
           <a:p>
             <a:pPr lvl="4"/>
             <a:r>
-              <a:rPr lang="en-US" smtClean="0"/>
+              <a:rPr lang="en-US"/>
               <a:t>Fifth level</a:t>
             </a:r>
-            <a:endParaRPr lang="en-US"/>
           </a:p>
         </p:txBody>
       </p:sp>
@@ -3632,7 +3651,7 @@
           <a:p>
             <a:fld id="{5BCAD085-E8A6-8845-BD4E-CB4CCA059FC4}" type="datetimeFigureOut">
               <a:rPr lang="en-US" smtClean="0"/>
-              <a:t>1/27/13</a:t>
+              <a:t>5/5/26</a:t>
             </a:fld>
             <a:endParaRPr lang="en-US"/>
           </a:p>
@@ -3991,7 +4010,7 @@
 </file>
 
 <file path=ppt/slides/slide1.xml><?xml version="1.0" encoding="utf-8"?>
-<p:sld xmlns:a="http://schemas.openxmlformats.org/drawingml/2006/main" xmlns:p="http://schemas.openxmlformats.org/presentationml/2006/main" xmlns:r="http://schemas.openxmlformats.org/officeDocument/2006/relationships">
+<p:sld xmlns:a="http://schemas.openxmlformats.org/drawingml/2006/main" xmlns:r="http://schemas.openxmlformats.org/officeDocument/2006/relationships" xmlns:p="http://schemas.openxmlformats.org/presentationml/2006/main">
   <p:cSld>
     <p:spTree>
       <p:nvGrpSpPr>
@@ -3999,7 +4018,14 @@
         <p:cNvGrpSpPr/>
         <p:nvPr/>
       </p:nvGrpSpPr>
-      <p:grpSpPr/>
+      <p:grpSpPr>
+        <a:xfrm>
+          <a:off x="0" y="0"/>
+          <a:ext cx="0" cy="0"/>
+          <a:chOff x="0" y="0"/>
+          <a:chExt cx="0" cy="0"/>
+        </a:xfrm>
+      </p:grpSpPr>
       <p:sp>
         <p:nvSpPr>
           <p:cNvPr id="2" name="Rectangle 1"/>
@@ -4008,7 +4034,7 @@
         </p:nvSpPr>
         <p:spPr>
           <a:xfrm>
-            <a:off x="0" y="0"/>
+            <a:off x="11575" y="0"/>
             <a:ext cx="12188952" cy="6858000"/>
           </a:xfrm>
           <a:prstGeom prst="rect">
@@ -4040,6 +4066,7 @@
           <a:lstStyle/>
           <a:p>
             <a:pPr algn="ctr"/>
+            <a:endParaRPr/>
           </a:p>
         </p:txBody>
       </p:sp>
@@ -4083,6 +4110,7 @@
           <a:lstStyle/>
           <a:p>
             <a:pPr algn="ctr"/>
+            <a:endParaRPr/>
           </a:p>
         </p:txBody>
       </p:sp>
@@ -4126,6 +4154,7 @@
           <a:lstStyle/>
           <a:p>
             <a:pPr algn="ctr"/>
+            <a:endParaRPr/>
           </a:p>
         </p:txBody>
       </p:sp>
@@ -4153,7 +4182,7 @@
           <a:p>
             <a:pPr algn="l"/>
             <a:r>
-              <a:rPr b="1" i="0" sz="900">
+              <a:rPr sz="900" b="1" i="0">
                 <a:solidFill>
                   <a:srgbClr val="CADCFC"/>
                 </a:solidFill>
@@ -4187,7 +4216,7 @@
           <a:p>
             <a:pPr algn="l"/>
             <a:r>
-              <a:rPr b="1" i="0" sz="4400">
+              <a:rPr sz="4400" b="1" i="0">
                 <a:solidFill>
                   <a:srgbClr val="FFFFFF"/>
                 </a:solidFill>
@@ -4222,7 +4251,7 @@
           <a:p>
             <a:pPr algn="l"/>
             <a:r>
-              <a:rPr b="0" i="0" sz="1600">
+              <a:rPr sz="1600" b="0" i="0">
                 <a:solidFill>
                   <a:srgbClr val="CADCFC"/>
                 </a:solidFill>
@@ -4272,6 +4301,7 @@
           <a:lstStyle/>
           <a:p>
             <a:pPr algn="ctr"/>
+            <a:endParaRPr/>
           </a:p>
         </p:txBody>
       </p:sp>
@@ -4299,7 +4329,7 @@
           <a:p>
             <a:pPr algn="l"/>
             <a:r>
-              <a:rPr b="1" i="0" sz="1500">
+              <a:rPr sz="1500" b="1" i="0">
                 <a:solidFill>
                   <a:srgbClr val="FFFFFF"/>
                 </a:solidFill>
@@ -4333,7 +4363,7 @@
           <a:p>
             <a:pPr algn="l"/>
             <a:r>
-              <a:rPr b="0" i="0" sz="1200">
+              <a:rPr sz="1200" b="0" i="0">
                 <a:solidFill>
                   <a:srgbClr val="6B7AB8"/>
                 </a:solidFill>
@@ -4367,7 +4397,7 @@
           <a:p>
             <a:pPr algn="r"/>
             <a:r>
-              <a:rPr b="0" i="0" sz="900">
+              <a:rPr sz="900" b="0" i="0">
                 <a:solidFill>
                   <a:srgbClr val="6B7AB8"/>
                 </a:solidFill>
@@ -4386,7 +4416,7 @@
 </file>
 
 <file path=ppt/slides/slide10.xml><?xml version="1.0" encoding="utf-8"?>
-<p:sld xmlns:a="http://schemas.openxmlformats.org/drawingml/2006/main" xmlns:p="http://schemas.openxmlformats.org/presentationml/2006/main" xmlns:r="http://schemas.openxmlformats.org/officeDocument/2006/relationships">
+<p:sld xmlns:a="http://schemas.openxmlformats.org/drawingml/2006/main" xmlns:r="http://schemas.openxmlformats.org/officeDocument/2006/relationships" xmlns:p="http://schemas.openxmlformats.org/presentationml/2006/main">
   <p:cSld>
     <p:spTree>
       <p:nvGrpSpPr>
@@ -4394,7 +4424,14 @@
         <p:cNvGrpSpPr/>
         <p:nvPr/>
       </p:nvGrpSpPr>
-      <p:grpSpPr/>
+      <p:grpSpPr>
+        <a:xfrm>
+          <a:off x="0" y="0"/>
+          <a:ext cx="0" cy="0"/>
+          <a:chOff x="0" y="0"/>
+          <a:chExt cx="0" cy="0"/>
+        </a:xfrm>
+      </p:grpSpPr>
       <p:sp>
         <p:nvSpPr>
           <p:cNvPr id="2" name="Rectangle 1"/>
@@ -4435,6 +4472,7 @@
           <a:lstStyle/>
           <a:p>
             <a:pPr algn="ctr"/>
+            <a:endParaRPr/>
           </a:p>
         </p:txBody>
       </p:sp>
@@ -4478,6 +4516,7 @@
           <a:lstStyle/>
           <a:p>
             <a:pPr algn="ctr"/>
+            <a:endParaRPr/>
           </a:p>
         </p:txBody>
       </p:sp>
@@ -4521,6 +4560,7 @@
           <a:lstStyle/>
           <a:p>
             <a:pPr algn="ctr"/>
+            <a:endParaRPr/>
           </a:p>
         </p:txBody>
       </p:sp>
@@ -4548,7 +4588,7 @@
           <a:p>
             <a:pPr algn="l"/>
             <a:r>
-              <a:rPr b="1" i="0" sz="900">
+              <a:rPr sz="900" b="1" i="0">
                 <a:solidFill>
                   <a:srgbClr val="CADCFC"/>
                 </a:solidFill>
@@ -4582,7 +4622,7 @@
           <a:p>
             <a:pPr algn="l"/>
             <a:r>
-              <a:rPr b="1" i="0" sz="3400">
+              <a:rPr sz="3400" b="1" i="0">
                 <a:solidFill>
                   <a:srgbClr val="FFFFFF"/>
                 </a:solidFill>
@@ -4632,6 +4672,7 @@
           <a:lstStyle/>
           <a:p>
             <a:pPr algn="ctr"/>
+            <a:endParaRPr/>
           </a:p>
         </p:txBody>
       </p:sp>
@@ -4675,6 +4716,7 @@
           <a:lstStyle/>
           <a:p>
             <a:pPr algn="ctr"/>
+            <a:endParaRPr/>
           </a:p>
         </p:txBody>
       </p:sp>
@@ -4702,7 +4744,7 @@
           <a:p>
             <a:pPr algn="l"/>
             <a:r>
-              <a:rPr b="1" i="0" sz="1300">
+              <a:rPr sz="1300" b="1" i="0">
                 <a:solidFill>
                   <a:srgbClr val="CADCFC"/>
                 </a:solidFill>
@@ -4736,12 +4778,12 @@
           <a:p>
             <a:pPr algn="l"/>
             <a:r>
-              <a:rPr b="1" i="0" sz="1100">
+              <a:rPr sz="1100" b="1" i="0">
                 <a:solidFill>
                   <a:srgbClr val="2ECC71"/>
                 </a:solidFill>
               </a:rPr>
-              <a:t>✓  Validation method  (multi-agent)</a:t>
+              <a:t>✓  Capability gaps (self-evaluation)</a:t>
             </a:r>
           </a:p>
         </p:txBody>
@@ -4770,14 +4812,13 @@
           <a:p>
             <a:pPr algn="l"/>
             <a:r>
-              <a:rPr b="0" i="0" sz="1000">
+              <a:rPr sz="1000" b="0" i="0">
                 <a:solidFill>
                   <a:srgbClr val="FFFFFF"/>
                 </a:solidFill>
               </a:rPr>
-              <a:t>Claude Code ↔ Codex GPT-5.5 cross-review
-on the same codebase  +  family / friends /
-classmates user testing</a:t>
+              <a:t>7 of 7 gaps addressed in our walkthroughs;
+no surveyed platform addressed more than 2</a:t>
             </a:r>
           </a:p>
         </p:txBody>
@@ -4806,12 +4847,12 @@
           <a:p>
             <a:pPr algn="l"/>
             <a:r>
-              <a:rPr b="1" i="0" sz="1100">
+              <a:rPr sz="1100" b="1" i="0">
                 <a:solidFill>
                   <a:srgbClr val="2ECC71"/>
                 </a:solidFill>
               </a:rPr>
-              <a:t>✓  Capability gaps (self-evaluation)</a:t>
+              <a:t>✓  Decision-critical attributes inline</a:t>
             </a:r>
           </a:p>
         </p:txBody>
@@ -4840,13 +4881,13 @@
           <a:p>
             <a:pPr algn="l"/>
             <a:r>
-              <a:rPr b="0" i="0" sz="1000">
+              <a:rPr sz="1000" b="0" i="0">
                 <a:solidFill>
                   <a:srgbClr val="FFFFFF"/>
                 </a:solidFill>
               </a:rPr>
-              <a:t>7 of 7 gaps addressed in our walkthroughs;
-no surveyed platform addressed more than 2</a:t>
+              <a:t>Screen size, ecosystem, camera, capacity,
+material — surfaced on every pick</a:t>
             </a:r>
           </a:p>
         </p:txBody>
@@ -4875,12 +4916,12 @@
           <a:p>
             <a:pPr algn="l"/>
             <a:r>
-              <a:rPr b="1" i="0" sz="1100">
+              <a:rPr sz="1100" b="1" i="0">
                 <a:solidFill>
                   <a:srgbClr val="2ECC71"/>
                 </a:solidFill>
               </a:rPr>
-              <a:t>✓  Decision-critical attributes inline</a:t>
+              <a:t>✓  End-to-end in five scenes</a:t>
             </a:r>
           </a:p>
         </p:txBody>
@@ -4909,13 +4950,13 @@
           <a:p>
             <a:pPr algn="l"/>
             <a:r>
-              <a:rPr b="0" i="0" sz="1000">
+              <a:rPr sz="1000" b="0" i="0">
                 <a:solidFill>
                   <a:srgbClr val="FFFFFF"/>
                 </a:solidFill>
               </a:rPr>
-              <a:t>Screen size, ecosystem, camera, capacity,
-material — surfaced on every pick</a:t>
+              <a:t>Need → clarify → 3 picks → why-this-fits →
+lifecycle. Zero external page navigation.</a:t>
             </a:r>
           </a:p>
         </p:txBody>
@@ -4944,7 +4985,7 @@
           <a:p>
             <a:pPr algn="l"/>
             <a:r>
-              <a:rPr b="1" i="0" sz="1100">
+              <a:rPr sz="1100" b="1" i="0">
                 <a:solidFill>
                   <a:srgbClr val="2ECC71"/>
                 </a:solidFill>
@@ -4978,7 +5019,7 @@
           <a:p>
             <a:pPr algn="l"/>
             <a:r>
-              <a:rPr b="0" i="0" sz="1000">
+              <a:rPr sz="1000" b="0" i="0">
                 <a:solidFill>
                   <a:srgbClr val="FFFFFF"/>
                 </a:solidFill>
@@ -5029,6 +5070,7 @@
           <a:lstStyle/>
           <a:p>
             <a:pPr algn="ctr"/>
+            <a:endParaRPr/>
           </a:p>
         </p:txBody>
       </p:sp>
@@ -5056,7 +5098,7 @@
           <a:p>
             <a:pPr algn="l"/>
             <a:r>
-              <a:rPr b="1" i="0" sz="1200">
+              <a:rPr sz="1200" b="1" i="0">
                 <a:solidFill>
                   <a:srgbClr val="CADCFC"/>
                 </a:solidFill>
@@ -5090,7 +5132,7 @@
           <a:p>
             <a:pPr algn="l"/>
             <a:r>
-              <a:rPr b="1" i="0" sz="1050">
+              <a:rPr sz="1050" b="1" i="0">
                 <a:solidFill>
                   <a:srgbClr val="CADCFC"/>
                 </a:solidFill>
@@ -5124,7 +5166,7 @@
           <a:p>
             <a:pPr algn="l"/>
             <a:r>
-              <a:rPr b="0" i="0" sz="950">
+              <a:rPr sz="950" b="0" i="0">
                 <a:solidFill>
                   <a:srgbClr val="FFFFFF"/>
                 </a:solidFill>
@@ -5159,7 +5201,7 @@
           <a:p>
             <a:pPr algn="l"/>
             <a:r>
-              <a:rPr b="1" i="0" sz="1050">
+              <a:rPr sz="1050" b="1" i="0">
                 <a:solidFill>
                   <a:srgbClr val="CADCFC"/>
                 </a:solidFill>
@@ -5193,7 +5235,7 @@
           <a:p>
             <a:pPr algn="l"/>
             <a:r>
-              <a:rPr b="0" i="0" sz="950">
+              <a:rPr sz="950" b="0" i="0">
                 <a:solidFill>
                   <a:srgbClr val="FFFFFF"/>
                 </a:solidFill>
@@ -5228,7 +5270,7 @@
           <a:p>
             <a:pPr algn="l"/>
             <a:r>
-              <a:rPr b="1" i="0" sz="1050">
+              <a:rPr sz="1050" b="1" i="0">
                 <a:solidFill>
                   <a:srgbClr val="CADCFC"/>
                 </a:solidFill>
@@ -5262,7 +5304,7 @@
           <a:p>
             <a:pPr algn="l"/>
             <a:r>
-              <a:rPr b="0" i="0" sz="950">
+              <a:rPr sz="950" b="0" i="0">
                 <a:solidFill>
                   <a:srgbClr val="FFFFFF"/>
                 </a:solidFill>
@@ -5297,7 +5339,7 @@
           <a:p>
             <a:pPr algn="l"/>
             <a:r>
-              <a:rPr b="1" i="0" sz="1050">
+              <a:rPr sz="1050" b="1" i="0">
                 <a:solidFill>
                   <a:srgbClr val="CADCFC"/>
                 </a:solidFill>
@@ -5331,7 +5373,7 @@
           <a:p>
             <a:pPr algn="l"/>
             <a:r>
-              <a:rPr b="0" i="0" sz="950">
+              <a:rPr sz="950" b="0" i="0">
                 <a:solidFill>
                   <a:srgbClr val="FFFFFF"/>
                 </a:solidFill>
@@ -5366,7 +5408,7 @@
           <a:p>
             <a:pPr algn="l"/>
             <a:r>
-              <a:rPr b="1" i="0" sz="1050">
+              <a:rPr sz="1050" b="1" i="0">
                 <a:solidFill>
                   <a:srgbClr val="CADCFC"/>
                 </a:solidFill>
@@ -5400,7 +5442,7 @@
           <a:p>
             <a:pPr algn="l"/>
             <a:r>
-              <a:rPr b="0" i="0" sz="950">
+              <a:rPr sz="950" b="0" i="0">
                 <a:solidFill>
                   <a:srgbClr val="FFFFFF"/>
                 </a:solidFill>
@@ -5451,6 +5493,7 @@
           <a:lstStyle/>
           <a:p>
             <a:pPr algn="ctr"/>
+            <a:endParaRPr/>
           </a:p>
         </p:txBody>
       </p:sp>
@@ -5478,12 +5521,12 @@
           <a:p>
             <a:pPr algn="ctr"/>
             <a:r>
-              <a:rPr b="0" i="1" sz="1000">
+              <a:rPr sz="1000" b="0" i="1">
                 <a:solidFill>
                   <a:srgbClr val="CADCFC"/>
                 </a:solidFill>
               </a:rPr>
-              <a:t>Self-evaluation + small-scale user testing (family · friends · classmates)  ·  formal study is future work (see Slide 11)</a:t>
+              <a:t>Heuristic self-assessment against the seven capability gaps in our evaluation  ·  formal user study is future work (see Slide 11)</a:t>
             </a:r>
           </a:p>
         </p:txBody>
@@ -5512,7 +5555,7 @@
           <a:p>
             <a:pPr algn="r"/>
             <a:r>
-              <a:rPr b="0" i="0" sz="900">
+              <a:rPr sz="900" b="0" i="0">
                 <a:solidFill>
                   <a:srgbClr val="6B7AB8"/>
                 </a:solidFill>
@@ -5531,7 +5574,7 @@
 </file>
 
 <file path=ppt/slides/slide11.xml><?xml version="1.0" encoding="utf-8"?>
-<p:sld xmlns:a="http://schemas.openxmlformats.org/drawingml/2006/main" xmlns:p="http://schemas.openxmlformats.org/presentationml/2006/main" xmlns:r="http://schemas.openxmlformats.org/officeDocument/2006/relationships">
+<p:sld xmlns:a="http://schemas.openxmlformats.org/drawingml/2006/main" xmlns:r="http://schemas.openxmlformats.org/officeDocument/2006/relationships" xmlns:p="http://schemas.openxmlformats.org/presentationml/2006/main">
   <p:cSld>
     <p:spTree>
       <p:nvGrpSpPr>
@@ -5539,7 +5582,14 @@
         <p:cNvGrpSpPr/>
         <p:nvPr/>
       </p:nvGrpSpPr>
-      <p:grpSpPr/>
+      <p:grpSpPr>
+        <a:xfrm>
+          <a:off x="0" y="0"/>
+          <a:ext cx="0" cy="0"/>
+          <a:chOff x="0" y="0"/>
+          <a:chExt cx="0" cy="0"/>
+        </a:xfrm>
+      </p:grpSpPr>
       <p:sp>
         <p:nvSpPr>
           <p:cNvPr id="2" name="Rectangle 1"/>
@@ -5580,6 +5630,7 @@
           <a:lstStyle/>
           <a:p>
             <a:pPr algn="ctr"/>
+            <a:endParaRPr/>
           </a:p>
         </p:txBody>
       </p:sp>
@@ -5623,6 +5674,7 @@
           <a:lstStyle/>
           <a:p>
             <a:pPr algn="ctr"/>
+            <a:endParaRPr/>
           </a:p>
         </p:txBody>
       </p:sp>
@@ -5666,6 +5718,7 @@
           <a:lstStyle/>
           <a:p>
             <a:pPr algn="ctr"/>
+            <a:endParaRPr/>
           </a:p>
         </p:txBody>
       </p:sp>
@@ -5693,7 +5746,7 @@
           <a:p>
             <a:pPr algn="l"/>
             <a:r>
-              <a:rPr b="1" i="0" sz="900">
+              <a:rPr sz="900" b="1" i="0">
                 <a:solidFill>
                   <a:srgbClr val="1E2761"/>
                 </a:solidFill>
@@ -5727,7 +5780,7 @@
           <a:p>
             <a:pPr algn="l"/>
             <a:r>
-              <a:rPr b="1" i="0" sz="2800">
+              <a:rPr sz="2800" b="1" i="0">
                 <a:solidFill>
                   <a:srgbClr val="1E2761"/>
                 </a:solidFill>
@@ -5777,6 +5830,7 @@
           <a:lstStyle/>
           <a:p>
             <a:pPr algn="ctr"/>
+            <a:endParaRPr/>
           </a:p>
         </p:txBody>
       </p:sp>
@@ -5820,6 +5874,7 @@
           <a:lstStyle/>
           <a:p>
             <a:pPr algn="ctr"/>
+            <a:endParaRPr/>
           </a:p>
         </p:txBody>
       </p:sp>
@@ -5847,7 +5902,7 @@
           <a:p>
             <a:pPr algn="l"/>
             <a:r>
-              <a:rPr b="1" i="0" sz="1200">
+              <a:rPr sz="1200" b="1" i="0">
                 <a:solidFill>
                   <a:srgbClr val="FFFFFF"/>
                 </a:solidFill>
@@ -5897,6 +5952,7 @@
           <a:lstStyle/>
           <a:p>
             <a:pPr algn="ctr"/>
+            <a:endParaRPr/>
           </a:p>
         </p:txBody>
       </p:sp>
@@ -5924,7 +5980,7 @@
           <a:p>
             <a:pPr algn="l"/>
             <a:r>
-              <a:rPr b="1" i="0" sz="1200">
+              <a:rPr sz="1200" b="1" i="0">
                 <a:solidFill>
                   <a:srgbClr val="FFFFFF"/>
                 </a:solidFill>
@@ -5974,6 +6030,7 @@
           <a:lstStyle/>
           <a:p>
             <a:pPr algn="ctr"/>
+            <a:endParaRPr/>
           </a:p>
         </p:txBody>
       </p:sp>
@@ -6001,7 +6058,7 @@
           <a:p>
             <a:pPr algn="l"/>
             <a:r>
-              <a:rPr b="1" i="0" sz="1200">
+              <a:rPr sz="1200" b="1" i="0">
                 <a:solidFill>
                   <a:srgbClr val="FFFFFF"/>
                 </a:solidFill>
@@ -6035,7 +6092,7 @@
           <a:p>
             <a:pPr algn="l"/>
             <a:r>
-              <a:rPr b="0" i="0" sz="1000">
+              <a:rPr sz="1000" b="0" i="0">
                 <a:solidFill>
                   <a:srgbClr val="FFFFFF"/>
                 </a:solidFill>
@@ -6070,13 +6127,13 @@
           <a:p>
             <a:pPr algn="l"/>
             <a:r>
-              <a:rPr b="0" i="0" sz="1000">
+              <a:rPr sz="1000" b="0" i="0">
                 <a:solidFill>
                   <a:srgbClr val="FFFFFF"/>
                 </a:solidFill>
               </a:rPr>
-              <a:t>⚠  Small-scale user testing —
-    family, friends, classmates only</a:t>
+              <a:t>⚠  No formal user study —
+    heuristic evaluation only</a:t>
             </a:r>
           </a:p>
         </p:txBody>
@@ -6105,7 +6162,7 @@
           <a:p>
             <a:pPr algn="l"/>
             <a:r>
-              <a:rPr b="0" i="0" sz="1000">
+              <a:rPr sz="1000" b="0" i="0">
                 <a:solidFill>
                   <a:srgbClr val="FFFFFF"/>
                 </a:solidFill>
@@ -6140,7 +6197,7 @@
           <a:p>
             <a:pPr algn="l"/>
             <a:r>
-              <a:rPr b="0" i="0" sz="1000">
+              <a:rPr sz="1000" b="0" i="0">
                 <a:solidFill>
                   <a:srgbClr val="FFFFFF"/>
                 </a:solidFill>
@@ -6175,7 +6232,7 @@
           <a:p>
             <a:pPr algn="l"/>
             <a:r>
-              <a:rPr b="0" i="0" sz="1000">
+              <a:rPr sz="1000" b="0" i="0">
                 <a:solidFill>
                   <a:srgbClr val="FFFFFF"/>
                 </a:solidFill>
@@ -6210,7 +6267,7 @@
           <a:p>
             <a:pPr algn="l"/>
             <a:r>
-              <a:rPr b="0" i="0" sz="1000">
+              <a:rPr sz="1000" b="0" i="0">
                 <a:solidFill>
                   <a:srgbClr val="FFFFFF"/>
                 </a:solidFill>
@@ -6245,7 +6302,7 @@
           <a:p>
             <a:pPr algn="l"/>
             <a:r>
-              <a:rPr b="0" i="0" sz="1000">
+              <a:rPr sz="1000" b="0" i="0">
                 <a:solidFill>
                   <a:srgbClr val="FFFFFF"/>
                 </a:solidFill>
@@ -6280,7 +6337,7 @@
           <a:p>
             <a:pPr algn="l"/>
             <a:r>
-              <a:rPr b="0" i="0" sz="1000">
+              <a:rPr sz="1000" b="0" i="0">
                 <a:solidFill>
                   <a:srgbClr val="FFFFFF"/>
                 </a:solidFill>
@@ -6315,7 +6372,7 @@
           <a:p>
             <a:pPr algn="l"/>
             <a:r>
-              <a:rPr b="0" i="0" sz="1000">
+              <a:rPr sz="1000" b="0" i="0">
                 <a:solidFill>
                   <a:srgbClr val="FFFFFF"/>
                 </a:solidFill>
@@ -6350,7 +6407,7 @@
           <a:p>
             <a:pPr algn="l"/>
             <a:r>
-              <a:rPr b="0" i="0" sz="1000">
+              <a:rPr sz="1000" b="0" i="0">
                 <a:solidFill>
                   <a:srgbClr val="FFFFFF"/>
                 </a:solidFill>
@@ -6385,7 +6442,7 @@
           <a:p>
             <a:pPr algn="l"/>
             <a:r>
-              <a:rPr b="0" i="0" sz="1000">
+              <a:rPr sz="1000" b="0" i="0">
                 <a:solidFill>
                   <a:srgbClr val="FFFFFF"/>
                 </a:solidFill>
@@ -6420,7 +6477,7 @@
           <a:p>
             <a:pPr algn="l"/>
             <a:r>
-              <a:rPr b="0" i="0" sz="1000">
+              <a:rPr sz="1000" b="0" i="0">
                 <a:solidFill>
                   <a:srgbClr val="FFFFFF"/>
                 </a:solidFill>
@@ -6455,7 +6512,7 @@
           <a:p>
             <a:pPr algn="l"/>
             <a:r>
-              <a:rPr b="0" i="0" sz="1000">
+              <a:rPr sz="1000" b="0" i="0">
                 <a:solidFill>
                   <a:srgbClr val="FFFFFF"/>
                 </a:solidFill>
@@ -6490,7 +6547,7 @@
           <a:p>
             <a:pPr algn="l"/>
             <a:r>
-              <a:rPr b="0" i="0" sz="1000">
+              <a:rPr sz="1000" b="0" i="0">
                 <a:solidFill>
                   <a:srgbClr val="FFFFFF"/>
                 </a:solidFill>
@@ -6525,7 +6582,7 @@
           <a:p>
             <a:pPr algn="r"/>
             <a:r>
-              <a:rPr b="0" i="0" sz="900">
+              <a:rPr sz="900" b="0" i="0">
                 <a:solidFill>
                   <a:srgbClr val="9AA8CC"/>
                 </a:solidFill>
@@ -6544,7 +6601,7 @@
 </file>
 
 <file path=ppt/slides/slide12.xml><?xml version="1.0" encoding="utf-8"?>
-<p:sld xmlns:a="http://schemas.openxmlformats.org/drawingml/2006/main" xmlns:p="http://schemas.openxmlformats.org/presentationml/2006/main" xmlns:r="http://schemas.openxmlformats.org/officeDocument/2006/relationships">
+<p:sld xmlns:a="http://schemas.openxmlformats.org/drawingml/2006/main" xmlns:r="http://schemas.openxmlformats.org/officeDocument/2006/relationships" xmlns:p="http://schemas.openxmlformats.org/presentationml/2006/main">
   <p:cSld>
     <p:spTree>
       <p:nvGrpSpPr>
@@ -6552,7 +6609,14 @@
         <p:cNvGrpSpPr/>
         <p:nvPr/>
       </p:nvGrpSpPr>
-      <p:grpSpPr/>
+      <p:grpSpPr>
+        <a:xfrm>
+          <a:off x="0" y="0"/>
+          <a:ext cx="0" cy="0"/>
+          <a:chOff x="0" y="0"/>
+          <a:chExt cx="0" cy="0"/>
+        </a:xfrm>
+      </p:grpSpPr>
       <p:sp>
         <p:nvSpPr>
           <p:cNvPr id="2" name="Rectangle 1"/>
@@ -6593,6 +6657,7 @@
           <a:lstStyle/>
           <a:p>
             <a:pPr algn="ctr"/>
+            <a:endParaRPr/>
           </a:p>
         </p:txBody>
       </p:sp>
@@ -6636,6 +6701,7 @@
           <a:lstStyle/>
           <a:p>
             <a:pPr algn="ctr"/>
+            <a:endParaRPr/>
           </a:p>
         </p:txBody>
       </p:sp>
@@ -6679,6 +6745,7 @@
           <a:lstStyle/>
           <a:p>
             <a:pPr algn="ctr"/>
+            <a:endParaRPr/>
           </a:p>
         </p:txBody>
       </p:sp>
@@ -6706,7 +6773,7 @@
           <a:p>
             <a:pPr algn="ctr"/>
             <a:r>
-              <a:rPr b="1" i="0" sz="6000">
+              <a:rPr sz="6000" b="1" i="0">
                 <a:solidFill>
                   <a:srgbClr val="FFFFFF"/>
                 </a:solidFill>
@@ -6740,7 +6807,7 @@
           <a:p>
             <a:pPr algn="ctr"/>
             <a:r>
-              <a:rPr b="0" i="0" sz="2200">
+              <a:rPr sz="2200" b="0" i="0">
                 <a:solidFill>
                   <a:srgbClr val="CADCFC"/>
                 </a:solidFill>
@@ -6790,6 +6857,7 @@
           <a:lstStyle/>
           <a:p>
             <a:pPr algn="ctr"/>
+            <a:endParaRPr/>
           </a:p>
         </p:txBody>
       </p:sp>
@@ -6817,7 +6885,7 @@
           <a:p>
             <a:pPr algn="l"/>
             <a:r>
-              <a:rPr b="1" i="0" sz="1300">
+              <a:rPr sz="1300" b="1" i="0">
                 <a:solidFill>
                   <a:srgbClr val="CADCFC"/>
                 </a:solidFill>
@@ -6851,7 +6919,7 @@
           <a:p>
             <a:pPr algn="l"/>
             <a:r>
-              <a:rPr b="0" i="0" sz="1300">
+              <a:rPr sz="1300" b="0" i="0">
                 <a:solidFill>
                   <a:srgbClr val="FFFFFF"/>
                 </a:solidFill>
@@ -6885,7 +6953,7 @@
           <a:p>
             <a:pPr algn="l"/>
             <a:r>
-              <a:rPr b="1" i="0" sz="1300">
+              <a:rPr sz="1300" b="1" i="0">
                 <a:solidFill>
                   <a:srgbClr val="CADCFC"/>
                 </a:solidFill>
@@ -6919,7 +6987,7 @@
           <a:p>
             <a:pPr algn="l"/>
             <a:r>
-              <a:rPr b="0" i="0" sz="1300">
+              <a:rPr sz="1300" b="0" i="0">
                 <a:solidFill>
                   <a:srgbClr val="FFFFFF"/>
                 </a:solidFill>
@@ -6953,7 +7021,7 @@
           <a:p>
             <a:pPr algn="l"/>
             <a:r>
-              <a:rPr b="1" i="0" sz="1300">
+              <a:rPr sz="1300" b="1" i="0">
                 <a:solidFill>
                   <a:srgbClr val="CADCFC"/>
                 </a:solidFill>
@@ -6987,7 +7055,7 @@
           <a:p>
             <a:pPr algn="l"/>
             <a:r>
-              <a:rPr b="0" i="0" sz="1300">
+              <a:rPr sz="1300" b="0" i="0">
                 <a:solidFill>
                   <a:srgbClr val="FFFFFF"/>
                 </a:solidFill>
@@ -7021,7 +7089,7 @@
           <a:p>
             <a:pPr algn="l"/>
             <a:r>
-              <a:rPr b="1" i="0" sz="1300">
+              <a:rPr sz="1300" b="1" i="0">
                 <a:solidFill>
                   <a:srgbClr val="CADCFC"/>
                 </a:solidFill>
@@ -7055,7 +7123,7 @@
           <a:p>
             <a:pPr algn="l"/>
             <a:r>
-              <a:rPr b="0" i="0" sz="1300">
+              <a:rPr sz="1300" b="0" i="0">
                 <a:solidFill>
                   <a:srgbClr val="FFFFFF"/>
                 </a:solidFill>
@@ -7089,7 +7157,7 @@
           <a:p>
             <a:pPr algn="l"/>
             <a:r>
-              <a:rPr b="1" i="0" sz="1300">
+              <a:rPr sz="1300" b="1" i="0">
                 <a:solidFill>
                   <a:srgbClr val="CADCFC"/>
                 </a:solidFill>
@@ -7123,7 +7191,7 @@
           <a:p>
             <a:pPr algn="l"/>
             <a:r>
-              <a:rPr b="0" i="0" sz="1300">
+              <a:rPr sz="1300" b="0" i="0">
                 <a:solidFill>
                   <a:srgbClr val="FFFFFF"/>
                 </a:solidFill>
@@ -7157,7 +7225,7 @@
           <a:p>
             <a:pPr algn="r"/>
             <a:r>
-              <a:rPr b="0" i="0" sz="900">
+              <a:rPr sz="900" b="0" i="0">
                 <a:solidFill>
                   <a:srgbClr val="6B7AB8"/>
                 </a:solidFill>
@@ -7176,7 +7244,7 @@
 </file>
 
 <file path=ppt/slides/slide2.xml><?xml version="1.0" encoding="utf-8"?>
-<p:sld xmlns:a="http://schemas.openxmlformats.org/drawingml/2006/main" xmlns:p="http://schemas.openxmlformats.org/presentationml/2006/main" xmlns:r="http://schemas.openxmlformats.org/officeDocument/2006/relationships">
+<p:sld xmlns:a="http://schemas.openxmlformats.org/drawingml/2006/main" xmlns:r="http://schemas.openxmlformats.org/officeDocument/2006/relationships" xmlns:p="http://schemas.openxmlformats.org/presentationml/2006/main">
   <p:cSld>
     <p:spTree>
       <p:nvGrpSpPr>
@@ -7184,7 +7252,14 @@
         <p:cNvGrpSpPr/>
         <p:nvPr/>
       </p:nvGrpSpPr>
-      <p:grpSpPr/>
+      <p:grpSpPr>
+        <a:xfrm>
+          <a:off x="0" y="0"/>
+          <a:ext cx="0" cy="0"/>
+          <a:chOff x="0" y="0"/>
+          <a:chExt cx="0" cy="0"/>
+        </a:xfrm>
+      </p:grpSpPr>
       <p:sp>
         <p:nvSpPr>
           <p:cNvPr id="2" name="Rectangle 1"/>
@@ -7225,6 +7300,7 @@
           <a:lstStyle/>
           <a:p>
             <a:pPr algn="ctr"/>
+            <a:endParaRPr/>
           </a:p>
         </p:txBody>
       </p:sp>
@@ -7268,6 +7344,7 @@
           <a:lstStyle/>
           <a:p>
             <a:pPr algn="ctr"/>
+            <a:endParaRPr/>
           </a:p>
         </p:txBody>
       </p:sp>
@@ -7311,6 +7388,7 @@
           <a:lstStyle/>
           <a:p>
             <a:pPr algn="ctr"/>
+            <a:endParaRPr/>
           </a:p>
         </p:txBody>
       </p:sp>
@@ -7338,7 +7416,7 @@
           <a:p>
             <a:pPr algn="l"/>
             <a:r>
-              <a:rPr b="1" i="0" sz="900">
+              <a:rPr sz="900" b="1" i="0">
                 <a:solidFill>
                   <a:srgbClr val="1E2761"/>
                 </a:solidFill>
@@ -7372,7 +7450,7 @@
           <a:p>
             <a:pPr algn="l"/>
             <a:r>
-              <a:rPr b="1" i="0" sz="3200">
+              <a:rPr sz="3200" b="1" i="0">
                 <a:solidFill>
                   <a:srgbClr val="1E2761"/>
                 </a:solidFill>
@@ -7422,6 +7500,7 @@
           <a:lstStyle/>
           <a:p>
             <a:pPr algn="ctr"/>
+            <a:endParaRPr/>
           </a:p>
         </p:txBody>
       </p:sp>
@@ -7465,6 +7544,7 @@
           <a:lstStyle/>
           <a:p>
             <a:pPr algn="ctr"/>
+            <a:endParaRPr/>
           </a:p>
         </p:txBody>
       </p:sp>
@@ -7492,7 +7572,7 @@
           <a:p>
             <a:pPr algn="l"/>
             <a:r>
-              <a:rPr b="0" i="0" sz="2000">
+              <a:rPr sz="2000" b="0" i="0">
                 <a:solidFill>
                   <a:srgbClr val="FFFFFF"/>
                 </a:solidFill>
@@ -7526,7 +7606,7 @@
           <a:p>
             <a:pPr algn="l"/>
             <a:r>
-              <a:rPr b="1" i="0" sz="1300">
+              <a:rPr sz="1300" b="1" i="0">
                 <a:solidFill>
                   <a:srgbClr val="CADCFC"/>
                 </a:solidFill>
@@ -7560,7 +7640,7 @@
           <a:p>
             <a:pPr algn="l"/>
             <a:r>
-              <a:rPr b="0" i="0" sz="1100">
+              <a:rPr sz="1100" b="0" i="0">
                 <a:solidFill>
                   <a:srgbClr val="FFFFFF"/>
                 </a:solidFill>
@@ -7610,6 +7690,7 @@
           <a:lstStyle/>
           <a:p>
             <a:pPr algn="ctr"/>
+            <a:endParaRPr/>
           </a:p>
         </p:txBody>
       </p:sp>
@@ -7637,7 +7718,7 @@
           <a:p>
             <a:pPr algn="l"/>
             <a:r>
-              <a:rPr b="0" i="0" sz="2000">
+              <a:rPr sz="2000" b="0" i="0">
                 <a:solidFill>
                   <a:srgbClr val="FFFFFF"/>
                 </a:solidFill>
@@ -7671,7 +7752,7 @@
           <a:p>
             <a:pPr algn="l"/>
             <a:r>
-              <a:rPr b="1" i="0" sz="1300">
+              <a:rPr sz="1300" b="1" i="0">
                 <a:solidFill>
                   <a:srgbClr val="CADCFC"/>
                 </a:solidFill>
@@ -7705,7 +7786,7 @@
           <a:p>
             <a:pPr algn="l"/>
             <a:r>
-              <a:rPr b="0" i="0" sz="1100">
+              <a:rPr sz="1100" b="0" i="0">
                 <a:solidFill>
                   <a:srgbClr val="FFFFFF"/>
                 </a:solidFill>
@@ -7755,6 +7836,7 @@
           <a:lstStyle/>
           <a:p>
             <a:pPr algn="ctr"/>
+            <a:endParaRPr/>
           </a:p>
         </p:txBody>
       </p:sp>
@@ -7782,7 +7864,7 @@
           <a:p>
             <a:pPr algn="l"/>
             <a:r>
-              <a:rPr b="0" i="0" sz="2000">
+              <a:rPr sz="2000" b="0" i="0">
                 <a:solidFill>
                   <a:srgbClr val="FFFFFF"/>
                 </a:solidFill>
@@ -7816,7 +7898,7 @@
           <a:p>
             <a:pPr algn="l"/>
             <a:r>
-              <a:rPr b="1" i="0" sz="1300">
+              <a:rPr sz="1300" b="1" i="0">
                 <a:solidFill>
                   <a:srgbClr val="CADCFC"/>
                 </a:solidFill>
@@ -7850,7 +7932,7 @@
           <a:p>
             <a:pPr algn="l"/>
             <a:r>
-              <a:rPr b="0" i="0" sz="1100">
+              <a:rPr sz="1100" b="0" i="0">
                 <a:solidFill>
                   <a:srgbClr val="FFFFFF"/>
                 </a:solidFill>
@@ -7900,6 +7982,7 @@
           <a:lstStyle/>
           <a:p>
             <a:pPr algn="ctr"/>
+            <a:endParaRPr/>
           </a:p>
         </p:txBody>
       </p:sp>
@@ -7927,7 +8010,7 @@
           <a:p>
             <a:pPr algn="l"/>
             <a:r>
-              <a:rPr b="0" i="0" sz="2000">
+              <a:rPr sz="2000" b="0" i="0">
                 <a:solidFill>
                   <a:srgbClr val="FFFFFF"/>
                 </a:solidFill>
@@ -7961,7 +8044,7 @@
           <a:p>
             <a:pPr algn="l"/>
             <a:r>
-              <a:rPr b="1" i="0" sz="1300">
+              <a:rPr sz="1300" b="1" i="0">
                 <a:solidFill>
                   <a:srgbClr val="CADCFC"/>
                 </a:solidFill>
@@ -7995,7 +8078,7 @@
           <a:p>
             <a:pPr algn="l"/>
             <a:r>
-              <a:rPr b="0" i="0" sz="1100">
+              <a:rPr sz="1100" b="0" i="0">
                 <a:solidFill>
                   <a:srgbClr val="FFFFFF"/>
                 </a:solidFill>
@@ -8045,6 +8128,7 @@
           <a:lstStyle/>
           <a:p>
             <a:pPr algn="ctr"/>
+            <a:endParaRPr/>
           </a:p>
         </p:txBody>
       </p:sp>
@@ -8072,7 +8156,7 @@
           <a:p>
             <a:pPr algn="l"/>
             <a:r>
-              <a:rPr b="1" i="0" sz="1400">
+              <a:rPr sz="1400" b="1" i="0">
                 <a:solidFill>
                   <a:srgbClr val="CADCFC"/>
                 </a:solidFill>
@@ -8106,7 +8190,7 @@
           <a:p>
             <a:pPr algn="l"/>
             <a:r>
-              <a:rPr b="0" i="1" sz="1200">
+              <a:rPr sz="1200" b="0" i="1">
                 <a:solidFill>
                   <a:srgbClr val="FFFFFF"/>
                 </a:solidFill>
@@ -8158,6 +8242,7 @@
           <a:lstStyle/>
           <a:p>
             <a:pPr algn="ctr"/>
+            <a:endParaRPr/>
           </a:p>
         </p:txBody>
       </p:sp>
@@ -8185,7 +8270,7 @@
           <a:p>
             <a:pPr algn="l"/>
             <a:r>
-              <a:rPr b="0" i="0" sz="1100">
+              <a:rPr sz="1100" b="0" i="0">
                 <a:solidFill>
                   <a:srgbClr val="FFFFFF"/>
                 </a:solidFill>
@@ -8219,7 +8304,7 @@
           <a:p>
             <a:pPr algn="l"/>
             <a:r>
-              <a:rPr b="0" i="0" sz="1100">
+              <a:rPr sz="1100" b="0" i="0">
                 <a:solidFill>
                   <a:srgbClr val="FFFFFF"/>
                 </a:solidFill>
@@ -8253,7 +8338,7 @@
           <a:p>
             <a:pPr algn="l"/>
             <a:r>
-              <a:rPr b="0" i="0" sz="1100">
+              <a:rPr sz="1100" b="0" i="0">
                 <a:solidFill>
                   <a:srgbClr val="FFFFFF"/>
                 </a:solidFill>
@@ -8287,7 +8372,7 @@
           <a:p>
             <a:pPr algn="l"/>
             <a:r>
-              <a:rPr b="0" i="0" sz="1100">
+              <a:rPr sz="1100" b="0" i="0">
                 <a:solidFill>
                   <a:srgbClr val="FFFFFF"/>
                 </a:solidFill>
@@ -8337,6 +8422,7 @@
           <a:lstStyle/>
           <a:p>
             <a:pPr algn="ctr"/>
+            <a:endParaRPr/>
           </a:p>
         </p:txBody>
       </p:sp>
@@ -8364,7 +8450,7 @@
           <a:p>
             <a:pPr algn="l"/>
             <a:r>
-              <a:rPr b="1" i="0" sz="1100">
+              <a:rPr sz="1100" b="1" i="0">
                 <a:solidFill>
                   <a:srgbClr val="CADCFC"/>
                 </a:solidFill>
@@ -8398,7 +8484,7 @@
           <a:p>
             <a:pPr algn="r"/>
             <a:r>
-              <a:rPr b="0" i="0" sz="900">
+              <a:rPr sz="900" b="0" i="0">
                 <a:solidFill>
                   <a:srgbClr val="9AA8CC"/>
                 </a:solidFill>
@@ -8417,7 +8503,7 @@
 </file>
 
 <file path=ppt/slides/slide3.xml><?xml version="1.0" encoding="utf-8"?>
-<p:sld xmlns:a="http://schemas.openxmlformats.org/drawingml/2006/main" xmlns:p="http://schemas.openxmlformats.org/presentationml/2006/main" xmlns:r="http://schemas.openxmlformats.org/officeDocument/2006/relationships">
+<p:sld xmlns:a="http://schemas.openxmlformats.org/drawingml/2006/main" xmlns:r="http://schemas.openxmlformats.org/officeDocument/2006/relationships" xmlns:p="http://schemas.openxmlformats.org/presentationml/2006/main">
   <p:cSld>
     <p:spTree>
       <p:nvGrpSpPr>
@@ -8425,7 +8511,14 @@
         <p:cNvGrpSpPr/>
         <p:nvPr/>
       </p:nvGrpSpPr>
-      <p:grpSpPr/>
+      <p:grpSpPr>
+        <a:xfrm>
+          <a:off x="0" y="0"/>
+          <a:ext cx="0" cy="0"/>
+          <a:chOff x="0" y="0"/>
+          <a:chExt cx="0" cy="0"/>
+        </a:xfrm>
+      </p:grpSpPr>
       <p:sp>
         <p:nvSpPr>
           <p:cNvPr id="2" name="Rectangle 1"/>
@@ -8466,6 +8559,7 @@
           <a:lstStyle/>
           <a:p>
             <a:pPr algn="ctr"/>
+            <a:endParaRPr/>
           </a:p>
         </p:txBody>
       </p:sp>
@@ -8509,6 +8603,7 @@
           <a:lstStyle/>
           <a:p>
             <a:pPr algn="ctr"/>
+            <a:endParaRPr/>
           </a:p>
         </p:txBody>
       </p:sp>
@@ -8552,6 +8647,7 @@
           <a:lstStyle/>
           <a:p>
             <a:pPr algn="ctr"/>
+            <a:endParaRPr/>
           </a:p>
         </p:txBody>
       </p:sp>
@@ -8579,7 +8675,7 @@
           <a:p>
             <a:pPr algn="l"/>
             <a:r>
-              <a:rPr b="1" i="0" sz="900">
+              <a:rPr sz="900" b="1" i="0">
                 <a:solidFill>
                   <a:srgbClr val="CADCFC"/>
                 </a:solidFill>
@@ -8613,7 +8709,7 @@
           <a:p>
             <a:pPr algn="l"/>
             <a:r>
-              <a:rPr b="1" i="0" sz="3400">
+              <a:rPr sz="3400" b="1" i="0">
                 <a:solidFill>
                   <a:srgbClr val="FFFFFF"/>
                 </a:solidFill>
@@ -8663,6 +8759,7 @@
           <a:lstStyle/>
           <a:p>
             <a:pPr algn="ctr"/>
+            <a:endParaRPr/>
           </a:p>
         </p:txBody>
       </p:sp>
@@ -8706,6 +8803,7 @@
           <a:lstStyle/>
           <a:p>
             <a:pPr algn="ctr"/>
+            <a:endParaRPr/>
           </a:p>
         </p:txBody>
       </p:sp>
@@ -8733,7 +8831,7 @@
           <a:p>
             <a:pPr algn="ctr"/>
             <a:r>
-              <a:rPr b="1" i="0" sz="1600">
+              <a:rPr sz="1600" b="1" i="0">
                 <a:solidFill>
                   <a:srgbClr val="FFFFFF"/>
                 </a:solidFill>
@@ -8768,7 +8866,7 @@
           <a:p>
             <a:pPr algn="ctr"/>
             <a:r>
-              <a:rPr b="0" i="0" sz="1000">
+              <a:rPr sz="1000" b="0" i="0">
                 <a:solidFill>
                   <a:srgbClr val="CADCFC"/>
                 </a:solidFill>
@@ -8818,6 +8916,7 @@
           <a:lstStyle/>
           <a:p>
             <a:pPr algn="ctr"/>
+            <a:endParaRPr/>
           </a:p>
         </p:txBody>
       </p:sp>
@@ -8845,7 +8944,7 @@
           <a:p>
             <a:pPr algn="ctr"/>
             <a:r>
-              <a:rPr b="1" i="0" sz="1600">
+              <a:rPr sz="1600" b="1" i="0">
                 <a:solidFill>
                   <a:srgbClr val="FFFFFF"/>
                 </a:solidFill>
@@ -8880,7 +8979,7 @@
           <a:p>
             <a:pPr algn="ctr"/>
             <a:r>
-              <a:rPr b="0" i="0" sz="1000">
+              <a:rPr sz="1000" b="0" i="0">
                 <a:solidFill>
                   <a:srgbClr val="CADCFC"/>
                 </a:solidFill>
@@ -8930,6 +9029,7 @@
           <a:lstStyle/>
           <a:p>
             <a:pPr algn="ctr"/>
+            <a:endParaRPr/>
           </a:p>
         </p:txBody>
       </p:sp>
@@ -8957,7 +9057,7 @@
           <a:p>
             <a:pPr algn="ctr"/>
             <a:r>
-              <a:rPr b="1" i="0" sz="1600">
+              <a:rPr sz="1600" b="1" i="0">
                 <a:solidFill>
                   <a:srgbClr val="FFFFFF"/>
                 </a:solidFill>
@@ -8992,7 +9092,7 @@
           <a:p>
             <a:pPr algn="ctr"/>
             <a:r>
-              <a:rPr b="0" i="0" sz="1000">
+              <a:rPr sz="1000" b="0" i="0">
                 <a:solidFill>
                   <a:srgbClr val="CADCFC"/>
                 </a:solidFill>
@@ -9042,6 +9142,7 @@
           <a:lstStyle/>
           <a:p>
             <a:pPr algn="ctr"/>
+            <a:endParaRPr/>
           </a:p>
         </p:txBody>
       </p:sp>
@@ -9069,7 +9170,7 @@
           <a:p>
             <a:pPr algn="ctr"/>
             <a:r>
-              <a:rPr b="1" i="0" sz="1600">
+              <a:rPr sz="1600" b="1" i="0">
                 <a:solidFill>
                   <a:srgbClr val="FFFFFF"/>
                 </a:solidFill>
@@ -9103,7 +9204,7 @@
           <a:p>
             <a:pPr algn="ctr"/>
             <a:r>
-              <a:rPr b="0" i="0" sz="1000">
+              <a:rPr sz="1000" b="0" i="0">
                 <a:solidFill>
                   <a:srgbClr val="CADCFC"/>
                 </a:solidFill>
@@ -9137,7 +9238,7 @@
           <a:p>
             <a:pPr algn="l"/>
             <a:r>
-              <a:rPr b="1" i="0" sz="1000">
+              <a:rPr sz="1000" b="1" i="0">
                 <a:solidFill>
                   <a:srgbClr val="CADCFC"/>
                 </a:solidFill>
@@ -9187,6 +9288,7 @@
           <a:lstStyle/>
           <a:p>
             <a:pPr algn="ctr"/>
+            <a:endParaRPr/>
           </a:p>
         </p:txBody>
       </p:sp>
@@ -9214,7 +9316,7 @@
           <a:p>
             <a:pPr algn="l"/>
             <a:r>
-              <a:rPr b="0" i="0" sz="1100">
+              <a:rPr sz="1100" b="0" i="0">
                 <a:solidFill>
                   <a:srgbClr val="FFFFFF"/>
                 </a:solidFill>
@@ -9264,6 +9366,7 @@
           <a:lstStyle/>
           <a:p>
             <a:pPr algn="ctr"/>
+            <a:endParaRPr/>
           </a:p>
         </p:txBody>
       </p:sp>
@@ -9291,7 +9394,7 @@
           <a:p>
             <a:pPr algn="l"/>
             <a:r>
-              <a:rPr b="0" i="0" sz="1100">
+              <a:rPr sz="1100" b="0" i="0">
                 <a:solidFill>
                   <a:srgbClr val="FFFFFF"/>
                 </a:solidFill>
@@ -9341,6 +9444,7 @@
           <a:lstStyle/>
           <a:p>
             <a:pPr algn="ctr"/>
+            <a:endParaRPr/>
           </a:p>
         </p:txBody>
       </p:sp>
@@ -9368,7 +9472,7 @@
           <a:p>
             <a:pPr algn="l"/>
             <a:r>
-              <a:rPr b="0" i="0" sz="1100">
+              <a:rPr sz="1100" b="0" i="0">
                 <a:solidFill>
                   <a:srgbClr val="FFFFFF"/>
                 </a:solidFill>
@@ -9418,6 +9522,7 @@
           <a:lstStyle/>
           <a:p>
             <a:pPr algn="ctr"/>
+            <a:endParaRPr/>
           </a:p>
         </p:txBody>
       </p:sp>
@@ -9445,7 +9550,7 @@
           <a:p>
             <a:pPr algn="l"/>
             <a:r>
-              <a:rPr b="0" i="0" sz="1100">
+              <a:rPr sz="1100" b="0" i="0">
                 <a:solidFill>
                   <a:srgbClr val="FFFFFF"/>
                 </a:solidFill>
@@ -9495,6 +9600,7 @@
           <a:lstStyle/>
           <a:p>
             <a:pPr algn="ctr"/>
+            <a:endParaRPr/>
           </a:p>
         </p:txBody>
       </p:sp>
@@ -9522,7 +9628,7 @@
           <a:p>
             <a:pPr algn="l"/>
             <a:r>
-              <a:rPr b="0" i="0" sz="1100">
+              <a:rPr sz="1100" b="0" i="0">
                 <a:solidFill>
                   <a:srgbClr val="FFFFFF"/>
                 </a:solidFill>
@@ -9572,6 +9678,7 @@
           <a:lstStyle/>
           <a:p>
             <a:pPr algn="ctr"/>
+            <a:endParaRPr/>
           </a:p>
         </p:txBody>
       </p:sp>
@@ -9599,7 +9706,7 @@
           <a:p>
             <a:pPr algn="l"/>
             <a:r>
-              <a:rPr b="0" i="0" sz="1100">
+              <a:rPr sz="1100" b="0" i="0">
                 <a:solidFill>
                   <a:srgbClr val="FFFFFF"/>
                 </a:solidFill>
@@ -9649,6 +9756,7 @@
           <a:lstStyle/>
           <a:p>
             <a:pPr algn="ctr"/>
+            <a:endParaRPr/>
           </a:p>
         </p:txBody>
       </p:sp>
@@ -9676,7 +9784,7 @@
           <a:p>
             <a:pPr algn="l"/>
             <a:r>
-              <a:rPr b="0" i="0" sz="1100">
+              <a:rPr sz="1100" b="0" i="0">
                 <a:solidFill>
                   <a:srgbClr val="FFFFFF"/>
                 </a:solidFill>
@@ -9726,6 +9834,7 @@
           <a:lstStyle/>
           <a:p>
             <a:pPr algn="ctr"/>
+            <a:endParaRPr/>
           </a:p>
         </p:txBody>
       </p:sp>
@@ -9753,7 +9862,7 @@
           <a:p>
             <a:pPr algn="l"/>
             <a:r>
-              <a:rPr b="0" i="0" sz="1100">
+              <a:rPr sz="1100" b="0" i="0">
                 <a:solidFill>
                   <a:srgbClr val="FFFFFF"/>
                 </a:solidFill>
@@ -9803,6 +9912,7 @@
           <a:lstStyle/>
           <a:p>
             <a:pPr algn="ctr"/>
+            <a:endParaRPr/>
           </a:p>
         </p:txBody>
       </p:sp>
@@ -9830,7 +9940,7 @@
           <a:p>
             <a:pPr algn="l"/>
             <a:r>
-              <a:rPr b="0" i="0" sz="1100">
+              <a:rPr sz="1100" b="0" i="0">
                 <a:solidFill>
                   <a:srgbClr val="FFFFFF"/>
                 </a:solidFill>
@@ -9880,6 +9990,7 @@
           <a:lstStyle/>
           <a:p>
             <a:pPr algn="ctr"/>
+            <a:endParaRPr/>
           </a:p>
         </p:txBody>
       </p:sp>
@@ -9907,7 +10018,7 @@
           <a:p>
             <a:pPr algn="ctr"/>
             <a:r>
-              <a:rPr b="1" i="0" sz="1300">
+              <a:rPr sz="1300" b="1" i="0">
                 <a:solidFill>
                   <a:srgbClr val="CADCFC"/>
                 </a:solidFill>
@@ -9957,6 +10068,7 @@
           <a:lstStyle/>
           <a:p>
             <a:pPr algn="ctr"/>
+            <a:endParaRPr/>
           </a:p>
         </p:txBody>
       </p:sp>
@@ -9984,7 +10096,7 @@
           <a:p>
             <a:pPr algn="l"/>
             <a:r>
-              <a:rPr b="1" i="0" sz="900">
+              <a:rPr sz="900" b="1" i="0">
                 <a:solidFill>
                   <a:srgbClr val="CADCFC"/>
                 </a:solidFill>
@@ -10018,7 +10130,7 @@
           <a:p>
             <a:pPr algn="l"/>
             <a:r>
-              <a:rPr b="0" i="0" sz="900">
+              <a:rPr sz="900" b="0" i="0">
                 <a:solidFill>
                   <a:srgbClr val="FFFFFF"/>
                 </a:solidFill>
@@ -10068,6 +10180,7 @@
           <a:lstStyle/>
           <a:p>
             <a:pPr algn="ctr"/>
+            <a:endParaRPr/>
           </a:p>
         </p:txBody>
       </p:sp>
@@ -10095,7 +10208,7 @@
           <a:p>
             <a:pPr algn="l"/>
             <a:r>
-              <a:rPr b="1" i="0" sz="900">
+              <a:rPr sz="900" b="1" i="0">
                 <a:solidFill>
                   <a:srgbClr val="CADCFC"/>
                 </a:solidFill>
@@ -10129,7 +10242,7 @@
           <a:p>
             <a:pPr algn="l"/>
             <a:r>
-              <a:rPr b="0" i="0" sz="900">
+              <a:rPr sz="900" b="0" i="0">
                 <a:solidFill>
                   <a:srgbClr val="FFFFFF"/>
                 </a:solidFill>
@@ -10179,6 +10292,7 @@
           <a:lstStyle/>
           <a:p>
             <a:pPr algn="ctr"/>
+            <a:endParaRPr/>
           </a:p>
         </p:txBody>
       </p:sp>
@@ -10206,7 +10320,7 @@
           <a:p>
             <a:pPr algn="l"/>
             <a:r>
-              <a:rPr b="1" i="0" sz="900">
+              <a:rPr sz="900" b="1" i="0">
                 <a:solidFill>
                   <a:srgbClr val="CADCFC"/>
                 </a:solidFill>
@@ -10240,7 +10354,7 @@
           <a:p>
             <a:pPr algn="l"/>
             <a:r>
-              <a:rPr b="0" i="0" sz="900">
+              <a:rPr sz="900" b="0" i="0">
                 <a:solidFill>
                   <a:srgbClr val="FFFFFF"/>
                 </a:solidFill>
@@ -10274,7 +10388,7 @@
           <a:p>
             <a:pPr algn="r"/>
             <a:r>
-              <a:rPr b="0" i="0" sz="900">
+              <a:rPr sz="900" b="0" i="0">
                 <a:solidFill>
                   <a:srgbClr val="6B7AB8"/>
                 </a:solidFill>
@@ -10293,7 +10407,7 @@
 </file>
 
 <file path=ppt/slides/slide4.xml><?xml version="1.0" encoding="utf-8"?>
-<p:sld xmlns:a="http://schemas.openxmlformats.org/drawingml/2006/main" xmlns:p="http://schemas.openxmlformats.org/presentationml/2006/main" xmlns:r="http://schemas.openxmlformats.org/officeDocument/2006/relationships">
+<p:sld xmlns:a="http://schemas.openxmlformats.org/drawingml/2006/main" xmlns:r="http://schemas.openxmlformats.org/officeDocument/2006/relationships" xmlns:p="http://schemas.openxmlformats.org/presentationml/2006/main">
   <p:cSld>
     <p:spTree>
       <p:nvGrpSpPr>
@@ -10301,7 +10415,14 @@
         <p:cNvGrpSpPr/>
         <p:nvPr/>
       </p:nvGrpSpPr>
-      <p:grpSpPr/>
+      <p:grpSpPr>
+        <a:xfrm>
+          <a:off x="0" y="0"/>
+          <a:ext cx="0" cy="0"/>
+          <a:chOff x="0" y="0"/>
+          <a:chExt cx="0" cy="0"/>
+        </a:xfrm>
+      </p:grpSpPr>
       <p:sp>
         <p:nvSpPr>
           <p:cNvPr id="2" name="Rectangle 1"/>
@@ -10342,6 +10463,7 @@
           <a:lstStyle/>
           <a:p>
             <a:pPr algn="ctr"/>
+            <a:endParaRPr/>
           </a:p>
         </p:txBody>
       </p:sp>
@@ -10385,6 +10507,7 @@
           <a:lstStyle/>
           <a:p>
             <a:pPr algn="ctr"/>
+            <a:endParaRPr/>
           </a:p>
         </p:txBody>
       </p:sp>
@@ -10428,6 +10551,7 @@
           <a:lstStyle/>
           <a:p>
             <a:pPr algn="ctr"/>
+            <a:endParaRPr/>
           </a:p>
         </p:txBody>
       </p:sp>
@@ -10455,7 +10579,7 @@
           <a:p>
             <a:pPr algn="l"/>
             <a:r>
-              <a:rPr b="1" i="0" sz="900">
+              <a:rPr sz="900" b="1" i="0">
                 <a:solidFill>
                   <a:srgbClr val="1E2761"/>
                 </a:solidFill>
@@ -10489,7 +10613,7 @@
           <a:p>
             <a:pPr algn="l"/>
             <a:r>
-              <a:rPr b="1" i="0" sz="3200">
+              <a:rPr sz="3200" b="1" i="0">
                 <a:solidFill>
                   <a:srgbClr val="1E2761"/>
                 </a:solidFill>
@@ -10539,6 +10663,7 @@
           <a:lstStyle/>
           <a:p>
             <a:pPr algn="ctr"/>
+            <a:endParaRPr/>
           </a:p>
         </p:txBody>
       </p:sp>
@@ -10582,6 +10707,7 @@
           <a:lstStyle/>
           <a:p>
             <a:pPr algn="ctr"/>
+            <a:endParaRPr/>
           </a:p>
         </p:txBody>
       </p:sp>
@@ -10609,7 +10735,7 @@
           <a:p>
             <a:pPr algn="ctr"/>
             <a:r>
-              <a:rPr b="1" i="0" sz="1000">
+              <a:rPr sz="1000" b="1" i="0">
                 <a:solidFill>
                   <a:srgbClr val="FFFFFF"/>
                 </a:solidFill>
@@ -10659,6 +10785,7 @@
           <a:lstStyle/>
           <a:p>
             <a:pPr algn="ctr"/>
+            <a:endParaRPr/>
           </a:p>
         </p:txBody>
       </p:sp>
@@ -10686,7 +10813,7 @@
           <a:p>
             <a:pPr algn="ctr"/>
             <a:r>
-              <a:rPr b="1" i="0" sz="1000">
+              <a:rPr sz="1000" b="1" i="0">
                 <a:solidFill>
                   <a:srgbClr val="CADCFC"/>
                 </a:solidFill>
@@ -10737,6 +10864,7 @@
           <a:lstStyle/>
           <a:p>
             <a:pPr algn="ctr"/>
+            <a:endParaRPr/>
           </a:p>
         </p:txBody>
       </p:sp>
@@ -10764,7 +10892,7 @@
           <a:p>
             <a:pPr algn="ctr"/>
             <a:r>
-              <a:rPr b="1" i="0" sz="1000">
+              <a:rPr sz="1000" b="1" i="0">
                 <a:solidFill>
                   <a:srgbClr val="CADCFC"/>
                 </a:solidFill>
@@ -10815,6 +10943,7 @@
           <a:lstStyle/>
           <a:p>
             <a:pPr algn="ctr"/>
+            <a:endParaRPr/>
           </a:p>
         </p:txBody>
       </p:sp>
@@ -10842,7 +10971,7 @@
           <a:p>
             <a:pPr algn="ctr"/>
             <a:r>
-              <a:rPr b="1" i="0" sz="1000">
+              <a:rPr sz="1000" b="1" i="0">
                 <a:solidFill>
                   <a:srgbClr val="CADCFC"/>
                 </a:solidFill>
@@ -10893,6 +11022,7 @@
           <a:lstStyle/>
           <a:p>
             <a:pPr algn="ctr"/>
+            <a:endParaRPr/>
           </a:p>
         </p:txBody>
       </p:sp>
@@ -10920,7 +11050,7 @@
           <a:p>
             <a:pPr algn="ctr"/>
             <a:r>
-              <a:rPr b="1" i="0" sz="1000">
+              <a:rPr sz="1000" b="1" i="0">
                 <a:solidFill>
                   <a:srgbClr val="CADCFC"/>
                 </a:solidFill>
@@ -10970,6 +11100,7 @@
           <a:lstStyle/>
           <a:p>
             <a:pPr algn="ctr"/>
+            <a:endParaRPr/>
           </a:p>
         </p:txBody>
       </p:sp>
@@ -10997,7 +11128,7 @@
           <a:p>
             <a:pPr algn="ctr"/>
             <a:r>
-              <a:rPr b="1" i="0" sz="1000">
+              <a:rPr sz="1000" b="1" i="0">
                 <a:solidFill>
                   <a:srgbClr val="CADCFC"/>
                 </a:solidFill>
@@ -11048,6 +11179,7 @@
           <a:lstStyle/>
           <a:p>
             <a:pPr algn="ctr"/>
+            <a:endParaRPr/>
           </a:p>
         </p:txBody>
       </p:sp>
@@ -11075,7 +11207,7 @@
           <a:p>
             <a:pPr algn="l"/>
             <a:r>
-              <a:rPr b="0" i="0" sz="1100">
+              <a:rPr sz="1100" b="0" i="0">
                 <a:solidFill>
                   <a:srgbClr val="1A1A2E"/>
                 </a:solidFill>
@@ -11125,6 +11257,7 @@
           <a:lstStyle/>
           <a:p>
             <a:pPr algn="ctr"/>
+            <a:endParaRPr/>
           </a:p>
         </p:txBody>
       </p:sp>
@@ -11152,7 +11285,7 @@
           <a:p>
             <a:pPr algn="ctr"/>
             <a:r>
-              <a:rPr b="1" i="0" sz="1400">
+              <a:rPr sz="1400" b="1" i="0">
                 <a:solidFill>
                   <a:srgbClr val="E74C3C"/>
                 </a:solidFill>
@@ -11202,6 +11335,7 @@
           <a:lstStyle/>
           <a:p>
             <a:pPr algn="ctr"/>
+            <a:endParaRPr/>
           </a:p>
         </p:txBody>
       </p:sp>
@@ -11229,7 +11363,7 @@
           <a:p>
             <a:pPr algn="ctr"/>
             <a:r>
-              <a:rPr b="0" i="0" sz="1400">
+              <a:rPr sz="1400" b="0" i="0">
                 <a:solidFill>
                   <a:srgbClr val="6B7AB8"/>
                 </a:solidFill>
@@ -11279,6 +11413,7 @@
           <a:lstStyle/>
           <a:p>
             <a:pPr algn="ctr"/>
+            <a:endParaRPr/>
           </a:p>
         </p:txBody>
       </p:sp>
@@ -11306,7 +11441,7 @@
           <a:p>
             <a:pPr algn="ctr"/>
             <a:r>
-              <a:rPr b="0" i="0" sz="1400">
+              <a:rPr sz="1400" b="0" i="0">
                 <a:solidFill>
                   <a:srgbClr val="6B7AB8"/>
                 </a:solidFill>
@@ -11356,6 +11491,7 @@
           <a:lstStyle/>
           <a:p>
             <a:pPr algn="ctr"/>
+            <a:endParaRPr/>
           </a:p>
         </p:txBody>
       </p:sp>
@@ -11383,7 +11519,7 @@
           <a:p>
             <a:pPr algn="ctr"/>
             <a:r>
-              <a:rPr b="1" i="0" sz="1400">
+              <a:rPr sz="1400" b="1" i="0">
                 <a:solidFill>
                   <a:srgbClr val="E74C3C"/>
                 </a:solidFill>
@@ -11433,6 +11569,7 @@
           <a:lstStyle/>
           <a:p>
             <a:pPr algn="ctr"/>
+            <a:endParaRPr/>
           </a:p>
         </p:txBody>
       </p:sp>
@@ -11460,7 +11597,7 @@
           <a:p>
             <a:pPr algn="ctr"/>
             <a:r>
-              <a:rPr b="1" i="0" sz="1400">
+              <a:rPr sz="1400" b="1" i="0">
                 <a:solidFill>
                   <a:srgbClr val="2ECC71"/>
                 </a:solidFill>
@@ -11510,6 +11647,7 @@
           <a:lstStyle/>
           <a:p>
             <a:pPr algn="ctr"/>
+            <a:endParaRPr/>
           </a:p>
         </p:txBody>
       </p:sp>
@@ -11537,7 +11675,7 @@
           <a:p>
             <a:pPr algn="l"/>
             <a:r>
-              <a:rPr b="0" i="0" sz="1100">
+              <a:rPr sz="1100" b="0" i="0">
                 <a:solidFill>
                   <a:srgbClr val="1A1A2E"/>
                 </a:solidFill>
@@ -11587,6 +11725,7 @@
           <a:lstStyle/>
           <a:p>
             <a:pPr algn="ctr"/>
+            <a:endParaRPr/>
           </a:p>
         </p:txBody>
       </p:sp>
@@ -11614,7 +11753,7 @@
           <a:p>
             <a:pPr algn="ctr"/>
             <a:r>
-              <a:rPr b="1" i="0" sz="1400">
+              <a:rPr sz="1400" b="1" i="0">
                 <a:solidFill>
                   <a:srgbClr val="E74C3C"/>
                 </a:solidFill>
@@ -11664,6 +11803,7 @@
           <a:lstStyle/>
           <a:p>
             <a:pPr algn="ctr"/>
+            <a:endParaRPr/>
           </a:p>
         </p:txBody>
       </p:sp>
@@ -11691,7 +11831,7 @@
           <a:p>
             <a:pPr algn="ctr"/>
             <a:r>
-              <a:rPr b="1" i="0" sz="1400">
+              <a:rPr sz="1400" b="1" i="0">
                 <a:solidFill>
                   <a:srgbClr val="E74C3C"/>
                 </a:solidFill>
@@ -11741,6 +11881,7 @@
           <a:lstStyle/>
           <a:p>
             <a:pPr algn="ctr"/>
+            <a:endParaRPr/>
           </a:p>
         </p:txBody>
       </p:sp>
@@ -11768,7 +11909,7 @@
           <a:p>
             <a:pPr algn="ctr"/>
             <a:r>
-              <a:rPr b="1" i="0" sz="1400">
+              <a:rPr sz="1400" b="1" i="0">
                 <a:solidFill>
                   <a:srgbClr val="E74C3C"/>
                 </a:solidFill>
@@ -11818,6 +11959,7 @@
           <a:lstStyle/>
           <a:p>
             <a:pPr algn="ctr"/>
+            <a:endParaRPr/>
           </a:p>
         </p:txBody>
       </p:sp>
@@ -11845,7 +11987,7 @@
           <a:p>
             <a:pPr algn="ctr"/>
             <a:r>
-              <a:rPr b="1" i="0" sz="1400">
+              <a:rPr sz="1400" b="1" i="0">
                 <a:solidFill>
                   <a:srgbClr val="E74C3C"/>
                 </a:solidFill>
@@ -11895,6 +12037,7 @@
           <a:lstStyle/>
           <a:p>
             <a:pPr algn="ctr"/>
+            <a:endParaRPr/>
           </a:p>
         </p:txBody>
       </p:sp>
@@ -11922,7 +12065,7 @@
           <a:p>
             <a:pPr algn="ctr"/>
             <a:r>
-              <a:rPr b="1" i="0" sz="1400">
+              <a:rPr sz="1400" b="1" i="0">
                 <a:solidFill>
                   <a:srgbClr val="2ECC71"/>
                 </a:solidFill>
@@ -11972,6 +12115,7 @@
           <a:lstStyle/>
           <a:p>
             <a:pPr algn="ctr"/>
+            <a:endParaRPr/>
           </a:p>
         </p:txBody>
       </p:sp>
@@ -11999,7 +12143,7 @@
           <a:p>
             <a:pPr algn="l"/>
             <a:r>
-              <a:rPr b="0" i="0" sz="1100">
+              <a:rPr sz="1100" b="0" i="0">
                 <a:solidFill>
                   <a:srgbClr val="1A1A2E"/>
                 </a:solidFill>
@@ -12049,6 +12193,7 @@
           <a:lstStyle/>
           <a:p>
             <a:pPr algn="ctr"/>
+            <a:endParaRPr/>
           </a:p>
         </p:txBody>
       </p:sp>
@@ -12076,7 +12221,7 @@
           <a:p>
             <a:pPr algn="ctr"/>
             <a:r>
-              <a:rPr b="1" i="0" sz="1400">
+              <a:rPr sz="1400" b="1" i="0">
                 <a:solidFill>
                   <a:srgbClr val="E74C3C"/>
                 </a:solidFill>
@@ -12126,6 +12271,7 @@
           <a:lstStyle/>
           <a:p>
             <a:pPr algn="ctr"/>
+            <a:endParaRPr/>
           </a:p>
         </p:txBody>
       </p:sp>
@@ -12153,7 +12299,7 @@
           <a:p>
             <a:pPr algn="ctr"/>
             <a:r>
-              <a:rPr b="1" i="0" sz="1400">
+              <a:rPr sz="1400" b="1" i="0">
                 <a:solidFill>
                   <a:srgbClr val="E74C3C"/>
                 </a:solidFill>
@@ -12203,6 +12349,7 @@
           <a:lstStyle/>
           <a:p>
             <a:pPr algn="ctr"/>
+            <a:endParaRPr/>
           </a:p>
         </p:txBody>
       </p:sp>
@@ -12230,7 +12377,7 @@
           <a:p>
             <a:pPr algn="ctr"/>
             <a:r>
-              <a:rPr b="0" i="0" sz="1400">
+              <a:rPr sz="1400" b="0" i="0">
                 <a:solidFill>
                   <a:srgbClr val="6B7AB8"/>
                 </a:solidFill>
@@ -12280,6 +12427,7 @@
           <a:lstStyle/>
           <a:p>
             <a:pPr algn="ctr"/>
+            <a:endParaRPr/>
           </a:p>
         </p:txBody>
       </p:sp>
@@ -12307,7 +12455,7 @@
           <a:p>
             <a:pPr algn="ctr"/>
             <a:r>
-              <a:rPr b="1" i="0" sz="1400">
+              <a:rPr sz="1400" b="1" i="0">
                 <a:solidFill>
                   <a:srgbClr val="2ECC71"/>
                 </a:solidFill>
@@ -12357,6 +12505,7 @@
           <a:lstStyle/>
           <a:p>
             <a:pPr algn="ctr"/>
+            <a:endParaRPr/>
           </a:p>
         </p:txBody>
       </p:sp>
@@ -12384,7 +12533,7 @@
           <a:p>
             <a:pPr algn="ctr"/>
             <a:r>
-              <a:rPr b="1" i="0" sz="1400">
+              <a:rPr sz="1400" b="1" i="0">
                 <a:solidFill>
                   <a:srgbClr val="2ECC71"/>
                 </a:solidFill>
@@ -12434,6 +12583,7 @@
           <a:lstStyle/>
           <a:p>
             <a:pPr algn="ctr"/>
+            <a:endParaRPr/>
           </a:p>
         </p:txBody>
       </p:sp>
@@ -12461,7 +12611,7 @@
           <a:p>
             <a:pPr algn="l"/>
             <a:r>
-              <a:rPr b="0" i="0" sz="1100">
+              <a:rPr sz="1100" b="0" i="0">
                 <a:solidFill>
                   <a:srgbClr val="1A1A2E"/>
                 </a:solidFill>
@@ -12511,6 +12661,7 @@
           <a:lstStyle/>
           <a:p>
             <a:pPr algn="ctr"/>
+            <a:endParaRPr/>
           </a:p>
         </p:txBody>
       </p:sp>
@@ -12538,7 +12689,7 @@
           <a:p>
             <a:pPr algn="ctr"/>
             <a:r>
-              <a:rPr b="0" i="0" sz="1400">
+              <a:rPr sz="1400" b="0" i="0">
                 <a:solidFill>
                   <a:srgbClr val="6B7AB8"/>
                 </a:solidFill>
@@ -12588,6 +12739,7 @@
           <a:lstStyle/>
           <a:p>
             <a:pPr algn="ctr"/>
+            <a:endParaRPr/>
           </a:p>
         </p:txBody>
       </p:sp>
@@ -12615,7 +12767,7 @@
           <a:p>
             <a:pPr algn="ctr"/>
             <a:r>
-              <a:rPr b="1" i="0" sz="1400">
+              <a:rPr sz="1400" b="1" i="0">
                 <a:solidFill>
                   <a:srgbClr val="E74C3C"/>
                 </a:solidFill>
@@ -12665,6 +12817,7 @@
           <a:lstStyle/>
           <a:p>
             <a:pPr algn="ctr"/>
+            <a:endParaRPr/>
           </a:p>
         </p:txBody>
       </p:sp>
@@ -12692,7 +12845,7 @@
           <a:p>
             <a:pPr algn="ctr"/>
             <a:r>
-              <a:rPr b="1" i="0" sz="1400">
+              <a:rPr sz="1400" b="1" i="0">
                 <a:solidFill>
                   <a:srgbClr val="E74C3C"/>
                 </a:solidFill>
@@ -12742,6 +12895,7 @@
           <a:lstStyle/>
           <a:p>
             <a:pPr algn="ctr"/>
+            <a:endParaRPr/>
           </a:p>
         </p:txBody>
       </p:sp>
@@ -12769,7 +12923,7 @@
           <a:p>
             <a:pPr algn="ctr"/>
             <a:r>
-              <a:rPr b="1" i="0" sz="1400">
+              <a:rPr sz="1400" b="1" i="0">
                 <a:solidFill>
                   <a:srgbClr val="E74C3C"/>
                 </a:solidFill>
@@ -12819,6 +12973,7 @@
           <a:lstStyle/>
           <a:p>
             <a:pPr algn="ctr"/>
+            <a:endParaRPr/>
           </a:p>
         </p:txBody>
       </p:sp>
@@ -12846,7 +13001,7 @@
           <a:p>
             <a:pPr algn="ctr"/>
             <a:r>
-              <a:rPr b="1" i="0" sz="1400">
+              <a:rPr sz="1400" b="1" i="0">
                 <a:solidFill>
                   <a:srgbClr val="2ECC71"/>
                 </a:solidFill>
@@ -12896,6 +13051,7 @@
           <a:lstStyle/>
           <a:p>
             <a:pPr algn="ctr"/>
+            <a:endParaRPr/>
           </a:p>
         </p:txBody>
       </p:sp>
@@ -12923,7 +13079,7 @@
           <a:p>
             <a:pPr algn="l"/>
             <a:r>
-              <a:rPr b="0" i="0" sz="1100">
+              <a:rPr sz="1100" b="0" i="0">
                 <a:solidFill>
                   <a:srgbClr val="1A1A2E"/>
                 </a:solidFill>
@@ -12973,6 +13129,7 @@
           <a:lstStyle/>
           <a:p>
             <a:pPr algn="ctr"/>
+            <a:endParaRPr/>
           </a:p>
         </p:txBody>
       </p:sp>
@@ -13000,7 +13157,7 @@
           <a:p>
             <a:pPr algn="ctr"/>
             <a:r>
-              <a:rPr b="1" i="0" sz="1400">
+              <a:rPr sz="1400" b="1" i="0">
                 <a:solidFill>
                   <a:srgbClr val="E74C3C"/>
                 </a:solidFill>
@@ -13050,6 +13207,7 @@
           <a:lstStyle/>
           <a:p>
             <a:pPr algn="ctr"/>
+            <a:endParaRPr/>
           </a:p>
         </p:txBody>
       </p:sp>
@@ -13077,7 +13235,7 @@
           <a:p>
             <a:pPr algn="ctr"/>
             <a:r>
-              <a:rPr b="0" i="0" sz="1400">
+              <a:rPr sz="1400" b="0" i="0">
                 <a:solidFill>
                   <a:srgbClr val="6B7AB8"/>
                 </a:solidFill>
@@ -13127,6 +13285,7 @@
           <a:lstStyle/>
           <a:p>
             <a:pPr algn="ctr"/>
+            <a:endParaRPr/>
           </a:p>
         </p:txBody>
       </p:sp>
@@ -13154,7 +13313,7 @@
           <a:p>
             <a:pPr algn="ctr"/>
             <a:r>
-              <a:rPr b="0" i="0" sz="1400">
+              <a:rPr sz="1400" b="0" i="0">
                 <a:solidFill>
                   <a:srgbClr val="6B7AB8"/>
                 </a:solidFill>
@@ -13204,6 +13363,7 @@
           <a:lstStyle/>
           <a:p>
             <a:pPr algn="ctr"/>
+            <a:endParaRPr/>
           </a:p>
         </p:txBody>
       </p:sp>
@@ -13231,7 +13391,7 @@
           <a:p>
             <a:pPr algn="ctr"/>
             <a:r>
-              <a:rPr b="1" i="0" sz="1400">
+              <a:rPr sz="1400" b="1" i="0">
                 <a:solidFill>
                   <a:srgbClr val="E74C3C"/>
                 </a:solidFill>
@@ -13281,6 +13441,7 @@
           <a:lstStyle/>
           <a:p>
             <a:pPr algn="ctr"/>
+            <a:endParaRPr/>
           </a:p>
         </p:txBody>
       </p:sp>
@@ -13308,7 +13469,7 @@
           <a:p>
             <a:pPr algn="ctr"/>
             <a:r>
-              <a:rPr b="1" i="0" sz="1400">
+              <a:rPr sz="1400" b="1" i="0">
                 <a:solidFill>
                   <a:srgbClr val="2ECC71"/>
                 </a:solidFill>
@@ -13358,6 +13519,7 @@
           <a:lstStyle/>
           <a:p>
             <a:pPr algn="ctr"/>
+            <a:endParaRPr/>
           </a:p>
         </p:txBody>
       </p:sp>
@@ -13385,7 +13547,7 @@
           <a:p>
             <a:pPr algn="l"/>
             <a:r>
-              <a:rPr b="0" i="0" sz="1100">
+              <a:rPr sz="1100" b="0" i="0">
                 <a:solidFill>
                   <a:srgbClr val="1A1A2E"/>
                 </a:solidFill>
@@ -13435,6 +13597,7 @@
           <a:lstStyle/>
           <a:p>
             <a:pPr algn="ctr"/>
+            <a:endParaRPr/>
           </a:p>
         </p:txBody>
       </p:sp>
@@ -13462,7 +13625,7 @@
           <a:p>
             <a:pPr algn="ctr"/>
             <a:r>
-              <a:rPr b="1" i="0" sz="1400">
+              <a:rPr sz="1400" b="1" i="0">
                 <a:solidFill>
                   <a:srgbClr val="E74C3C"/>
                 </a:solidFill>
@@ -13512,6 +13675,7 @@
           <a:lstStyle/>
           <a:p>
             <a:pPr algn="ctr"/>
+            <a:endParaRPr/>
           </a:p>
         </p:txBody>
       </p:sp>
@@ -13539,7 +13703,7 @@
           <a:p>
             <a:pPr algn="ctr"/>
             <a:r>
-              <a:rPr b="1" i="0" sz="1400">
+              <a:rPr sz="1400" b="1" i="0">
                 <a:solidFill>
                   <a:srgbClr val="E74C3C"/>
                 </a:solidFill>
@@ -13589,6 +13753,7 @@
           <a:lstStyle/>
           <a:p>
             <a:pPr algn="ctr"/>
+            <a:endParaRPr/>
           </a:p>
         </p:txBody>
       </p:sp>
@@ -13616,7 +13781,7 @@
           <a:p>
             <a:pPr algn="ctr"/>
             <a:r>
-              <a:rPr b="1" i="0" sz="1400">
+              <a:rPr sz="1400" b="1" i="0">
                 <a:solidFill>
                   <a:srgbClr val="E74C3C"/>
                 </a:solidFill>
@@ -13666,6 +13831,7 @@
           <a:lstStyle/>
           <a:p>
             <a:pPr algn="ctr"/>
+            <a:endParaRPr/>
           </a:p>
         </p:txBody>
       </p:sp>
@@ -13693,7 +13859,7 @@
           <a:p>
             <a:pPr algn="ctr"/>
             <a:r>
-              <a:rPr b="1" i="0" sz="1400">
+              <a:rPr sz="1400" b="1" i="0">
                 <a:solidFill>
                   <a:srgbClr val="E74C3C"/>
                 </a:solidFill>
@@ -13743,6 +13909,7 @@
           <a:lstStyle/>
           <a:p>
             <a:pPr algn="ctr"/>
+            <a:endParaRPr/>
           </a:p>
         </p:txBody>
       </p:sp>
@@ -13770,7 +13937,7 @@
           <a:p>
             <a:pPr algn="ctr"/>
             <a:r>
-              <a:rPr b="1" i="0" sz="1400">
+              <a:rPr sz="1400" b="1" i="0">
                 <a:solidFill>
                   <a:srgbClr val="2ECC71"/>
                 </a:solidFill>
@@ -13820,6 +13987,7 @@
           <a:lstStyle/>
           <a:p>
             <a:pPr algn="ctr"/>
+            <a:endParaRPr/>
           </a:p>
         </p:txBody>
       </p:sp>
@@ -13847,7 +14015,7 @@
           <a:p>
             <a:pPr algn="l"/>
             <a:r>
-              <a:rPr b="0" i="0" sz="1100">
+              <a:rPr sz="1100" b="0" i="0">
                 <a:solidFill>
                   <a:srgbClr val="1A1A2E"/>
                 </a:solidFill>
@@ -13897,6 +14065,7 @@
           <a:lstStyle/>
           <a:p>
             <a:pPr algn="ctr"/>
+            <a:endParaRPr/>
           </a:p>
         </p:txBody>
       </p:sp>
@@ -13924,7 +14093,7 @@
           <a:p>
             <a:pPr algn="ctr"/>
             <a:r>
-              <a:rPr b="1" i="0" sz="1400">
+              <a:rPr sz="1400" b="1" i="0">
                 <a:solidFill>
                   <a:srgbClr val="E74C3C"/>
                 </a:solidFill>
@@ -13974,6 +14143,7 @@
           <a:lstStyle/>
           <a:p>
             <a:pPr algn="ctr"/>
+            <a:endParaRPr/>
           </a:p>
         </p:txBody>
       </p:sp>
@@ -14001,7 +14171,7 @@
           <a:p>
             <a:pPr algn="ctr"/>
             <a:r>
-              <a:rPr b="1" i="0" sz="1400">
+              <a:rPr sz="1400" b="1" i="0">
                 <a:solidFill>
                   <a:srgbClr val="E74C3C"/>
                 </a:solidFill>
@@ -14051,6 +14221,7 @@
           <a:lstStyle/>
           <a:p>
             <a:pPr algn="ctr"/>
+            <a:endParaRPr/>
           </a:p>
         </p:txBody>
       </p:sp>
@@ -14078,7 +14249,7 @@
           <a:p>
             <a:pPr algn="ctr"/>
             <a:r>
-              <a:rPr b="1" i="0" sz="1400">
+              <a:rPr sz="1400" b="1" i="0">
                 <a:solidFill>
                   <a:srgbClr val="E74C3C"/>
                 </a:solidFill>
@@ -14128,6 +14299,7 @@
           <a:lstStyle/>
           <a:p>
             <a:pPr algn="ctr"/>
+            <a:endParaRPr/>
           </a:p>
         </p:txBody>
       </p:sp>
@@ -14155,7 +14327,7 @@
           <a:p>
             <a:pPr algn="ctr"/>
             <a:r>
-              <a:rPr b="1" i="0" sz="1400">
+              <a:rPr sz="1400" b="1" i="0">
                 <a:solidFill>
                   <a:srgbClr val="E74C3C"/>
                 </a:solidFill>
@@ -14205,6 +14377,7 @@
           <a:lstStyle/>
           <a:p>
             <a:pPr algn="ctr"/>
+            <a:endParaRPr/>
           </a:p>
         </p:txBody>
       </p:sp>
@@ -14232,7 +14405,7 @@
           <a:p>
             <a:pPr algn="ctr"/>
             <a:r>
-              <a:rPr b="1" i="0" sz="1400">
+              <a:rPr sz="1400" b="1" i="0">
                 <a:solidFill>
                   <a:srgbClr val="2ECC71"/>
                 </a:solidFill>
@@ -14282,6 +14455,7 @@
           <a:lstStyle/>
           <a:p>
             <a:pPr algn="ctr"/>
+            <a:endParaRPr/>
           </a:p>
         </p:txBody>
       </p:sp>
@@ -14309,7 +14483,7 @@
           <a:p>
             <a:pPr algn="l"/>
             <a:r>
-              <a:rPr b="1" i="0" sz="1200">
+              <a:rPr sz="1200" b="1" i="0">
                 <a:solidFill>
                   <a:srgbClr val="CADCFC"/>
                 </a:solidFill>
@@ -14343,7 +14517,7 @@
           <a:p>
             <a:pPr algn="r"/>
             <a:r>
-              <a:rPr b="0" i="0" sz="900">
+              <a:rPr sz="900" b="0" i="0">
                 <a:solidFill>
                   <a:srgbClr val="9AA8CC"/>
                 </a:solidFill>
@@ -14362,7 +14536,7 @@
 </file>
 
 <file path=ppt/slides/slide5.xml><?xml version="1.0" encoding="utf-8"?>
-<p:sld xmlns:a="http://schemas.openxmlformats.org/drawingml/2006/main" xmlns:p="http://schemas.openxmlformats.org/presentationml/2006/main" xmlns:r="http://schemas.openxmlformats.org/officeDocument/2006/relationships">
+<p:sld xmlns:a="http://schemas.openxmlformats.org/drawingml/2006/main" xmlns:r="http://schemas.openxmlformats.org/officeDocument/2006/relationships" xmlns:p="http://schemas.openxmlformats.org/presentationml/2006/main">
   <p:cSld>
     <p:spTree>
       <p:nvGrpSpPr>
@@ -14370,7 +14544,14 @@
         <p:cNvGrpSpPr/>
         <p:nvPr/>
       </p:nvGrpSpPr>
-      <p:grpSpPr/>
+      <p:grpSpPr>
+        <a:xfrm>
+          <a:off x="0" y="0"/>
+          <a:ext cx="0" cy="0"/>
+          <a:chOff x="0" y="0"/>
+          <a:chExt cx="0" cy="0"/>
+        </a:xfrm>
+      </p:grpSpPr>
       <p:sp>
         <p:nvSpPr>
           <p:cNvPr id="2" name="Rectangle 1"/>
@@ -14379,7 +14560,7 @@
         </p:nvSpPr>
         <p:spPr>
           <a:xfrm>
-            <a:off x="0" y="0"/>
+            <a:off x="11575" y="0"/>
             <a:ext cx="12188952" cy="6858000"/>
           </a:xfrm>
           <a:prstGeom prst="rect">
@@ -14411,6 +14592,7 @@
           <a:lstStyle/>
           <a:p>
             <a:pPr algn="ctr"/>
+            <a:endParaRPr/>
           </a:p>
         </p:txBody>
       </p:sp>
@@ -14454,6 +14636,7 @@
           <a:lstStyle/>
           <a:p>
             <a:pPr algn="ctr"/>
+            <a:endParaRPr/>
           </a:p>
         </p:txBody>
       </p:sp>
@@ -14497,6 +14680,7 @@
           <a:lstStyle/>
           <a:p>
             <a:pPr algn="ctr"/>
+            <a:endParaRPr/>
           </a:p>
         </p:txBody>
       </p:sp>
@@ -14524,7 +14708,7 @@
           <a:p>
             <a:pPr algn="l"/>
             <a:r>
-              <a:rPr b="1" i="0" sz="900">
+              <a:rPr sz="900" b="1" i="0">
                 <a:solidFill>
                   <a:srgbClr val="CADCFC"/>
                 </a:solidFill>
@@ -14558,7 +14742,7 @@
           <a:p>
             <a:pPr algn="l"/>
             <a:r>
-              <a:rPr b="1" i="0" sz="3400">
+              <a:rPr sz="3400" b="1" i="0">
                 <a:solidFill>
                   <a:srgbClr val="FFFFFF"/>
                 </a:solidFill>
@@ -14608,6 +14792,7 @@
           <a:lstStyle/>
           <a:p>
             <a:pPr algn="ctr"/>
+            <a:endParaRPr/>
           </a:p>
         </p:txBody>
       </p:sp>
@@ -14651,6 +14836,7 @@
           <a:lstStyle/>
           <a:p>
             <a:pPr algn="ctr"/>
+            <a:endParaRPr/>
           </a:p>
         </p:txBody>
       </p:sp>
@@ -14694,6 +14880,7 @@
           <a:lstStyle/>
           <a:p>
             <a:pPr algn="ctr"/>
+            <a:endParaRPr/>
           </a:p>
         </p:txBody>
       </p:sp>
@@ -14721,7 +14908,7 @@
           <a:p>
             <a:pPr algn="ctr"/>
             <a:r>
-              <a:rPr b="0" i="0" sz="2400">
+              <a:rPr sz="2400" b="0" i="0">
                 <a:solidFill>
                   <a:srgbClr val="FFFFFF"/>
                 </a:solidFill>
@@ -14755,7 +14942,7 @@
           <a:p>
             <a:pPr algn="ctr"/>
             <a:r>
-              <a:rPr b="1" i="0" sz="1600">
+              <a:rPr sz="1600" b="1" i="0">
                 <a:solidFill>
                   <a:srgbClr val="FFFFFF"/>
                 </a:solidFill>
@@ -14805,6 +14992,7 @@
           <a:lstStyle/>
           <a:p>
             <a:pPr algn="ctr"/>
+            <a:endParaRPr/>
           </a:p>
         </p:txBody>
       </p:sp>
@@ -14832,7 +15020,7 @@
           <a:p>
             <a:pPr algn="ctr"/>
             <a:r>
-              <a:rPr b="1" i="0" sz="1200">
+              <a:rPr sz="1200" b="1" i="0">
                 <a:solidFill>
                   <a:srgbClr val="CADCFC"/>
                 </a:solidFill>
@@ -14882,6 +15070,7 @@
           <a:lstStyle/>
           <a:p>
             <a:pPr algn="ctr"/>
+            <a:endParaRPr/>
           </a:p>
         </p:txBody>
       </p:sp>
@@ -14909,7 +15098,7 @@
           <a:p>
             <a:pPr algn="ctr"/>
             <a:r>
-              <a:rPr b="1" i="0" sz="1200">
+              <a:rPr sz="1200" b="1" i="0">
                 <a:solidFill>
                   <a:srgbClr val="CADCFC"/>
                 </a:solidFill>
@@ -14943,7 +15132,7 @@
           <a:p>
             <a:pPr algn="ctr"/>
             <a:r>
-              <a:rPr b="0" i="1" sz="1000">
+              <a:rPr sz="1000" b="0" i="1">
                 <a:solidFill>
                   <a:srgbClr val="CADCFC"/>
                 </a:solidFill>
@@ -14993,6 +15182,7 @@
           <a:lstStyle/>
           <a:p>
             <a:pPr algn="ctr"/>
+            <a:endParaRPr/>
           </a:p>
         </p:txBody>
       </p:sp>
@@ -15036,6 +15226,7 @@
           <a:lstStyle/>
           <a:p>
             <a:pPr algn="ctr"/>
+            <a:endParaRPr/>
           </a:p>
         </p:txBody>
       </p:sp>
@@ -15063,7 +15254,7 @@
           <a:p>
             <a:pPr algn="ctr"/>
             <a:r>
-              <a:rPr b="0" i="0" sz="2400">
+              <a:rPr sz="2400" b="0" i="0">
                 <a:solidFill>
                   <a:srgbClr val="FFFFFF"/>
                 </a:solidFill>
@@ -15097,7 +15288,7 @@
           <a:p>
             <a:pPr algn="ctr"/>
             <a:r>
-              <a:rPr b="1" i="0" sz="1600">
+              <a:rPr sz="1600" b="1" i="0">
                 <a:solidFill>
                   <a:srgbClr val="FFFFFF"/>
                 </a:solidFill>
@@ -15147,6 +15338,7 @@
           <a:lstStyle/>
           <a:p>
             <a:pPr algn="ctr"/>
+            <a:endParaRPr/>
           </a:p>
         </p:txBody>
       </p:sp>
@@ -15174,7 +15366,7 @@
           <a:p>
             <a:pPr algn="ctr"/>
             <a:r>
-              <a:rPr b="1" i="0" sz="1200">
+              <a:rPr sz="1200" b="1" i="0">
                 <a:solidFill>
                   <a:srgbClr val="CADCFC"/>
                 </a:solidFill>
@@ -15224,6 +15416,7 @@
           <a:lstStyle/>
           <a:p>
             <a:pPr algn="ctr"/>
+            <a:endParaRPr/>
           </a:p>
         </p:txBody>
       </p:sp>
@@ -15251,7 +15444,7 @@
           <a:p>
             <a:pPr algn="ctr"/>
             <a:r>
-              <a:rPr b="1" i="0" sz="1200">
+              <a:rPr sz="1200" b="1" i="0">
                 <a:solidFill>
                   <a:srgbClr val="CADCFC"/>
                 </a:solidFill>
@@ -15285,7 +15478,7 @@
           <a:p>
             <a:pPr algn="ctr"/>
             <a:r>
-              <a:rPr b="0" i="1" sz="1000">
+              <a:rPr sz="1000" b="0" i="1">
                 <a:solidFill>
                   <a:srgbClr val="CADCFC"/>
                 </a:solidFill>
@@ -15335,6 +15528,7 @@
           <a:lstStyle/>
           <a:p>
             <a:pPr algn="ctr"/>
+            <a:endParaRPr/>
           </a:p>
         </p:txBody>
       </p:sp>
@@ -15378,6 +15572,7 @@
           <a:lstStyle/>
           <a:p>
             <a:pPr algn="ctr"/>
+            <a:endParaRPr/>
           </a:p>
         </p:txBody>
       </p:sp>
@@ -15405,7 +15600,7 @@
           <a:p>
             <a:pPr algn="ctr"/>
             <a:r>
-              <a:rPr b="0" i="0" sz="2400">
+              <a:rPr sz="2400" b="0" i="0">
                 <a:solidFill>
                   <a:srgbClr val="FFFFFF"/>
                 </a:solidFill>
@@ -15439,7 +15634,7 @@
           <a:p>
             <a:pPr algn="ctr"/>
             <a:r>
-              <a:rPr b="1" i="0" sz="1600">
+              <a:rPr sz="1600" b="1" i="0">
                 <a:solidFill>
                   <a:srgbClr val="FFFFFF"/>
                 </a:solidFill>
@@ -15489,6 +15684,7 @@
           <a:lstStyle/>
           <a:p>
             <a:pPr algn="ctr"/>
+            <a:endParaRPr/>
           </a:p>
         </p:txBody>
       </p:sp>
@@ -15516,7 +15712,7 @@
           <a:p>
             <a:pPr algn="ctr"/>
             <a:r>
-              <a:rPr b="1" i="0" sz="1200">
+              <a:rPr sz="1200" b="1" i="0">
                 <a:solidFill>
                   <a:srgbClr val="CADCFC"/>
                 </a:solidFill>
@@ -15566,6 +15762,7 @@
           <a:lstStyle/>
           <a:p>
             <a:pPr algn="ctr"/>
+            <a:endParaRPr/>
           </a:p>
         </p:txBody>
       </p:sp>
@@ -15593,7 +15790,7 @@
           <a:p>
             <a:pPr algn="ctr"/>
             <a:r>
-              <a:rPr b="1" i="0" sz="1200">
+              <a:rPr sz="1200" b="1" i="0">
                 <a:solidFill>
                   <a:srgbClr val="CADCFC"/>
                 </a:solidFill>
@@ -15627,7 +15824,7 @@
           <a:p>
             <a:pPr algn="ctr"/>
             <a:r>
-              <a:rPr b="0" i="1" sz="1000">
+              <a:rPr sz="1000" b="0" i="1">
                 <a:solidFill>
                   <a:srgbClr val="CADCFC"/>
                 </a:solidFill>
@@ -15677,6 +15874,7 @@
           <a:lstStyle/>
           <a:p>
             <a:pPr algn="ctr"/>
+            <a:endParaRPr/>
           </a:p>
         </p:txBody>
       </p:sp>
@@ -15704,7 +15902,7 @@
           <a:p>
             <a:pPr algn="ctr"/>
             <a:r>
-              <a:rPr b="1" i="0" sz="1300">
+              <a:rPr sz="1300" b="1" i="0">
                 <a:solidFill>
                   <a:srgbClr val="FFFFFF"/>
                 </a:solidFill>
@@ -15738,7 +15936,7 @@
           <a:p>
             <a:pPr algn="r"/>
             <a:r>
-              <a:rPr b="0" i="0" sz="900">
+              <a:rPr sz="900" b="0" i="0">
                 <a:solidFill>
                   <a:srgbClr val="6B7AB8"/>
                 </a:solidFill>
@@ -15757,7 +15955,7 @@
 </file>
 
 <file path=ppt/slides/slide6.xml><?xml version="1.0" encoding="utf-8"?>
-<p:sld xmlns:a="http://schemas.openxmlformats.org/drawingml/2006/main" xmlns:p="http://schemas.openxmlformats.org/presentationml/2006/main" xmlns:r="http://schemas.openxmlformats.org/officeDocument/2006/relationships">
+<p:sld xmlns:a="http://schemas.openxmlformats.org/drawingml/2006/main" xmlns:r="http://schemas.openxmlformats.org/officeDocument/2006/relationships" xmlns:p="http://schemas.openxmlformats.org/presentationml/2006/main">
   <p:cSld>
     <p:spTree>
       <p:nvGrpSpPr>
@@ -15765,7 +15963,14 @@
         <p:cNvGrpSpPr/>
         <p:nvPr/>
       </p:nvGrpSpPr>
-      <p:grpSpPr/>
+      <p:grpSpPr>
+        <a:xfrm>
+          <a:off x="0" y="0"/>
+          <a:ext cx="0" cy="0"/>
+          <a:chOff x="0" y="0"/>
+          <a:chExt cx="0" cy="0"/>
+        </a:xfrm>
+      </p:grpSpPr>
       <p:sp>
         <p:nvSpPr>
           <p:cNvPr id="2" name="Rectangle 1"/>
@@ -15806,6 +16011,7 @@
           <a:lstStyle/>
           <a:p>
             <a:pPr algn="ctr"/>
+            <a:endParaRPr/>
           </a:p>
         </p:txBody>
       </p:sp>
@@ -15849,6 +16055,7 @@
           <a:lstStyle/>
           <a:p>
             <a:pPr algn="ctr"/>
+            <a:endParaRPr/>
           </a:p>
         </p:txBody>
       </p:sp>
@@ -15892,6 +16099,7 @@
           <a:lstStyle/>
           <a:p>
             <a:pPr algn="ctr"/>
+            <a:endParaRPr/>
           </a:p>
         </p:txBody>
       </p:sp>
@@ -15919,7 +16127,7 @@
           <a:p>
             <a:pPr algn="l"/>
             <a:r>
-              <a:rPr b="1" i="0" sz="900">
+              <a:rPr sz="900" b="1" i="0">
                 <a:solidFill>
                   <a:srgbClr val="1E2761"/>
                 </a:solidFill>
@@ -15953,7 +16161,7 @@
           <a:p>
             <a:pPr algn="l"/>
             <a:r>
-              <a:rPr b="1" i="0" sz="3200">
+              <a:rPr sz="3200" b="1" i="0">
                 <a:solidFill>
                   <a:srgbClr val="1E2761"/>
                 </a:solidFill>
@@ -16003,6 +16211,7 @@
           <a:lstStyle/>
           <a:p>
             <a:pPr algn="ctr"/>
+            <a:endParaRPr/>
           </a:p>
         </p:txBody>
       </p:sp>
@@ -16046,6 +16255,7 @@
           <a:lstStyle/>
           <a:p>
             <a:pPr algn="ctr"/>
+            <a:endParaRPr/>
           </a:p>
         </p:txBody>
       </p:sp>
@@ -16089,6 +16299,7 @@
           <a:lstStyle/>
           <a:p>
             <a:pPr algn="ctr"/>
+            <a:endParaRPr/>
           </a:p>
         </p:txBody>
       </p:sp>
@@ -16116,7 +16327,7 @@
           <a:p>
             <a:pPr algn="ctr"/>
             <a:r>
-              <a:rPr b="1" i="0" sz="1600">
+              <a:rPr sz="1600" b="1" i="0">
                 <a:solidFill>
                   <a:srgbClr val="CADCFC"/>
                 </a:solidFill>
@@ -16150,7 +16361,7 @@
           <a:p>
             <a:pPr algn="ctr"/>
             <a:r>
-              <a:rPr b="1" i="0" sz="1300">
+              <a:rPr sz="1300" b="1" i="0">
                 <a:solidFill>
                   <a:srgbClr val="CADCFC"/>
                 </a:solidFill>
@@ -16185,7 +16396,7 @@
           <a:p>
             <a:pPr algn="l"/>
             <a:r>
-              <a:rPr b="0" i="0" sz="1100">
+              <a:rPr sz="1100" b="0" i="0">
                 <a:solidFill>
                   <a:srgbClr val="1A1A2E"/>
                 </a:solidFill>
@@ -16221,7 +16432,7 @@
           <a:p>
             <a:pPr algn="ctr"/>
             <a:r>
-              <a:rPr b="1" i="0" sz="1800">
+              <a:rPr sz="1800" b="1" i="0">
                 <a:solidFill>
                   <a:srgbClr val="1E2761"/>
                 </a:solidFill>
@@ -16271,6 +16482,7 @@
           <a:lstStyle/>
           <a:p>
             <a:pPr algn="ctr"/>
+            <a:endParaRPr/>
           </a:p>
         </p:txBody>
       </p:sp>
@@ -16314,6 +16526,7 @@
           <a:lstStyle/>
           <a:p>
             <a:pPr algn="ctr"/>
+            <a:endParaRPr/>
           </a:p>
         </p:txBody>
       </p:sp>
@@ -16341,7 +16554,7 @@
           <a:p>
             <a:pPr algn="ctr"/>
             <a:r>
-              <a:rPr b="1" i="0" sz="1600">
+              <a:rPr sz="1600" b="1" i="0">
                 <a:solidFill>
                   <a:srgbClr val="CADCFC"/>
                 </a:solidFill>
@@ -16375,7 +16588,7 @@
           <a:p>
             <a:pPr algn="ctr"/>
             <a:r>
-              <a:rPr b="1" i="0" sz="1300">
+              <a:rPr sz="1300" b="1" i="0">
                 <a:solidFill>
                   <a:srgbClr val="CADCFC"/>
                 </a:solidFill>
@@ -16410,7 +16623,7 @@
           <a:p>
             <a:pPr algn="l"/>
             <a:r>
-              <a:rPr b="0" i="0" sz="1100">
+              <a:rPr sz="1100" b="0" i="0">
                 <a:solidFill>
                   <a:srgbClr val="1A1A2E"/>
                 </a:solidFill>
@@ -16446,7 +16659,7 @@
           <a:p>
             <a:pPr algn="ctr"/>
             <a:r>
-              <a:rPr b="1" i="0" sz="1800">
+              <a:rPr sz="1800" b="1" i="0">
                 <a:solidFill>
                   <a:srgbClr val="1E2761"/>
                 </a:solidFill>
@@ -16496,6 +16709,7 @@
           <a:lstStyle/>
           <a:p>
             <a:pPr algn="ctr"/>
+            <a:endParaRPr/>
           </a:p>
         </p:txBody>
       </p:sp>
@@ -16539,6 +16753,7 @@
           <a:lstStyle/>
           <a:p>
             <a:pPr algn="ctr"/>
+            <a:endParaRPr/>
           </a:p>
         </p:txBody>
       </p:sp>
@@ -16566,7 +16781,7 @@
           <a:p>
             <a:pPr algn="ctr"/>
             <a:r>
-              <a:rPr b="1" i="0" sz="1600">
+              <a:rPr sz="1600" b="1" i="0">
                 <a:solidFill>
                   <a:srgbClr val="CADCFC"/>
                 </a:solidFill>
@@ -16600,7 +16815,7 @@
           <a:p>
             <a:pPr algn="ctr"/>
             <a:r>
-              <a:rPr b="1" i="0" sz="1300">
+              <a:rPr sz="1300" b="1" i="0">
                 <a:solidFill>
                   <a:srgbClr val="CADCFC"/>
                 </a:solidFill>
@@ -16635,7 +16850,7 @@
           <a:p>
             <a:pPr algn="l"/>
             <a:r>
-              <a:rPr b="0" i="0" sz="1100">
+              <a:rPr sz="1100" b="0" i="0">
                 <a:solidFill>
                   <a:srgbClr val="1A1A2E"/>
                 </a:solidFill>
@@ -16671,7 +16886,7 @@
           <a:p>
             <a:pPr algn="ctr"/>
             <a:r>
-              <a:rPr b="1" i="0" sz="1800">
+              <a:rPr sz="1800" b="1" i="0">
                 <a:solidFill>
                   <a:srgbClr val="1E2761"/>
                 </a:solidFill>
@@ -16721,6 +16936,7 @@
           <a:lstStyle/>
           <a:p>
             <a:pPr algn="ctr"/>
+            <a:endParaRPr/>
           </a:p>
         </p:txBody>
       </p:sp>
@@ -16764,6 +16980,7 @@
           <a:lstStyle/>
           <a:p>
             <a:pPr algn="ctr"/>
+            <a:endParaRPr/>
           </a:p>
         </p:txBody>
       </p:sp>
@@ -16791,7 +17008,7 @@
           <a:p>
             <a:pPr algn="ctr"/>
             <a:r>
-              <a:rPr b="1" i="0" sz="1600">
+              <a:rPr sz="1600" b="1" i="0">
                 <a:solidFill>
                   <a:srgbClr val="CADCFC"/>
                 </a:solidFill>
@@ -16825,7 +17042,7 @@
           <a:p>
             <a:pPr algn="ctr"/>
             <a:r>
-              <a:rPr b="1" i="0" sz="1300">
+              <a:rPr sz="1300" b="1" i="0">
                 <a:solidFill>
                   <a:srgbClr val="CADCFC"/>
                 </a:solidFill>
@@ -16860,7 +17077,7 @@
           <a:p>
             <a:pPr algn="l"/>
             <a:r>
-              <a:rPr b="0" i="0" sz="1100">
+              <a:rPr sz="1100" b="0" i="0">
                 <a:solidFill>
                   <a:srgbClr val="1A1A2E"/>
                 </a:solidFill>
@@ -16896,7 +17113,7 @@
           <a:p>
             <a:pPr algn="ctr"/>
             <a:r>
-              <a:rPr b="1" i="0" sz="1800">
+              <a:rPr sz="1800" b="1" i="0">
                 <a:solidFill>
                   <a:srgbClr val="1E2761"/>
                 </a:solidFill>
@@ -16946,6 +17163,7 @@
           <a:lstStyle/>
           <a:p>
             <a:pPr algn="ctr"/>
+            <a:endParaRPr/>
           </a:p>
         </p:txBody>
       </p:sp>
@@ -16989,6 +17207,7 @@
           <a:lstStyle/>
           <a:p>
             <a:pPr algn="ctr"/>
+            <a:endParaRPr/>
           </a:p>
         </p:txBody>
       </p:sp>
@@ -17016,7 +17235,7 @@
           <a:p>
             <a:pPr algn="ctr"/>
             <a:r>
-              <a:rPr b="1" i="0" sz="1600">
+              <a:rPr sz="1600" b="1" i="0">
                 <a:solidFill>
                   <a:srgbClr val="CADCFC"/>
                 </a:solidFill>
@@ -17050,7 +17269,7 @@
           <a:p>
             <a:pPr algn="ctr"/>
             <a:r>
-              <a:rPr b="1" i="0" sz="1300">
+              <a:rPr sz="1300" b="1" i="0">
                 <a:solidFill>
                   <a:srgbClr val="CADCFC"/>
                 </a:solidFill>
@@ -17085,7 +17304,7 @@
           <a:p>
             <a:pPr algn="l"/>
             <a:r>
-              <a:rPr b="0" i="0" sz="1100">
+              <a:rPr sz="1100" b="0" i="0">
                 <a:solidFill>
                   <a:srgbClr val="1A1A2E"/>
                 </a:solidFill>
@@ -17121,7 +17340,7 @@
           <a:p>
             <a:pPr algn="ctr"/>
             <a:r>
-              <a:rPr b="0" i="1" sz="1100">
+              <a:rPr sz="1100" b="0" i="1">
                 <a:solidFill>
                   <a:srgbClr val="6B7AB8"/>
                 </a:solidFill>
@@ -17155,7 +17374,7 @@
           <a:p>
             <a:pPr algn="r"/>
             <a:r>
-              <a:rPr b="0" i="0" sz="900">
+              <a:rPr sz="900" b="0" i="0">
                 <a:solidFill>
                   <a:srgbClr val="9AA8CC"/>
                 </a:solidFill>
@@ -17174,7 +17393,7 @@
 </file>
 
 <file path=ppt/slides/slide7.xml><?xml version="1.0" encoding="utf-8"?>
-<p:sld xmlns:a="http://schemas.openxmlformats.org/drawingml/2006/main" xmlns:p="http://schemas.openxmlformats.org/presentationml/2006/main" xmlns:r="http://schemas.openxmlformats.org/officeDocument/2006/relationships">
+<p:sld xmlns:a="http://schemas.openxmlformats.org/drawingml/2006/main" xmlns:r="http://schemas.openxmlformats.org/officeDocument/2006/relationships" xmlns:p="http://schemas.openxmlformats.org/presentationml/2006/main">
   <p:cSld>
     <p:spTree>
       <p:nvGrpSpPr>
@@ -17182,7 +17401,14 @@
         <p:cNvGrpSpPr/>
         <p:nvPr/>
       </p:nvGrpSpPr>
-      <p:grpSpPr/>
+      <p:grpSpPr>
+        <a:xfrm>
+          <a:off x="0" y="0"/>
+          <a:ext cx="0" cy="0"/>
+          <a:chOff x="0" y="0"/>
+          <a:chExt cx="0" cy="0"/>
+        </a:xfrm>
+      </p:grpSpPr>
       <p:sp>
         <p:nvSpPr>
           <p:cNvPr id="2" name="Rectangle 1"/>
@@ -17223,6 +17449,7 @@
           <a:lstStyle/>
           <a:p>
             <a:pPr algn="ctr"/>
+            <a:endParaRPr/>
           </a:p>
         </p:txBody>
       </p:sp>
@@ -17266,6 +17493,7 @@
           <a:lstStyle/>
           <a:p>
             <a:pPr algn="ctr"/>
+            <a:endParaRPr/>
           </a:p>
         </p:txBody>
       </p:sp>
@@ -17309,6 +17537,7 @@
           <a:lstStyle/>
           <a:p>
             <a:pPr algn="ctr"/>
+            <a:endParaRPr/>
           </a:p>
         </p:txBody>
       </p:sp>
@@ -17336,7 +17565,7 @@
           <a:p>
             <a:pPr algn="l"/>
             <a:r>
-              <a:rPr b="1" i="0" sz="900">
+              <a:rPr sz="900" b="1" i="0">
                 <a:solidFill>
                   <a:srgbClr val="CADCFC"/>
                 </a:solidFill>
@@ -17370,7 +17599,7 @@
           <a:p>
             <a:pPr algn="l"/>
             <a:r>
-              <a:rPr b="1" i="0" sz="3400">
+              <a:rPr sz="3400" b="1" i="0">
                 <a:solidFill>
                   <a:srgbClr val="FFFFFF"/>
                 </a:solidFill>
@@ -17420,6 +17649,7 @@
           <a:lstStyle/>
           <a:p>
             <a:pPr algn="ctr"/>
+            <a:endParaRPr/>
           </a:p>
         </p:txBody>
       </p:sp>
@@ -17463,6 +17693,7 @@
           <a:lstStyle/>
           <a:p>
             <a:pPr algn="ctr"/>
+            <a:endParaRPr/>
           </a:p>
         </p:txBody>
       </p:sp>
@@ -17490,7 +17721,7 @@
           <a:p>
             <a:pPr algn="ctr"/>
             <a:r>
-              <a:rPr b="1" i="0" sz="1200">
+              <a:rPr sz="1200" b="1" i="0">
                 <a:solidFill>
                   <a:srgbClr val="FFFFFF"/>
                 </a:solidFill>
@@ -17524,7 +17755,7 @@
           <a:p>
             <a:pPr algn="l"/>
             <a:r>
-              <a:rPr b="0" i="0" sz="1000">
+              <a:rPr sz="1000" b="0" i="0">
                 <a:solidFill>
                   <a:srgbClr val="FFFFFF"/>
                 </a:solidFill>
@@ -17578,6 +17809,7 @@
           <a:lstStyle/>
           <a:p>
             <a:pPr algn="ctr"/>
+            <a:endParaRPr/>
           </a:p>
         </p:txBody>
       </p:sp>
@@ -17605,7 +17837,7 @@
           <a:p>
             <a:pPr algn="ctr"/>
             <a:r>
-              <a:rPr b="1" i="0" sz="1200">
+              <a:rPr sz="1200" b="1" i="0">
                 <a:solidFill>
                   <a:srgbClr val="FFFFFF"/>
                 </a:solidFill>
@@ -17639,7 +17871,7 @@
           <a:p>
             <a:pPr algn="ctr"/>
             <a:r>
-              <a:rPr b="0" i="0" sz="1100">
+              <a:rPr sz="1100" b="0" i="0">
                 <a:solidFill>
                   <a:srgbClr val="CADCFC"/>
                 </a:solidFill>
@@ -17674,7 +17906,7 @@
           <a:p>
             <a:pPr algn="ctr"/>
             <a:r>
-              <a:rPr b="0" i="0" sz="1000">
+              <a:rPr sz="1000" b="0" i="0">
                 <a:solidFill>
                   <a:srgbClr val="FFFFFF"/>
                 </a:solidFill>
@@ -17725,6 +17957,7 @@
           <a:lstStyle/>
           <a:p>
             <a:pPr algn="ctr"/>
+            <a:endParaRPr/>
           </a:p>
         </p:txBody>
       </p:sp>
@@ -17752,7 +17985,7 @@
           <a:p>
             <a:pPr algn="ctr"/>
             <a:r>
-              <a:rPr b="1" i="0" sz="1200">
+              <a:rPr sz="1200" b="1" i="0">
                 <a:solidFill>
                   <a:srgbClr val="FFFFFF"/>
                 </a:solidFill>
@@ -17786,7 +18019,7 @@
           <a:p>
             <a:pPr algn="l"/>
             <a:r>
-              <a:rPr b="0" i="0" sz="1000">
+              <a:rPr sz="1000" b="0" i="0">
                 <a:solidFill>
                   <a:srgbClr val="FFFFFF"/>
                 </a:solidFill>
@@ -17839,6 +18072,7 @@
           <a:lstStyle/>
           <a:p>
             <a:pPr algn="ctr"/>
+            <a:endParaRPr/>
           </a:p>
         </p:txBody>
       </p:sp>
@@ -17866,7 +18100,7 @@
           <a:p>
             <a:pPr algn="ctr"/>
             <a:r>
-              <a:rPr b="1" i="0" sz="1000">
+              <a:rPr sz="1000" b="1" i="0">
                 <a:solidFill>
                   <a:srgbClr val="FFFFFF"/>
                 </a:solidFill>
@@ -17900,7 +18134,7 @@
           <a:p>
             <a:pPr algn="l"/>
             <a:r>
-              <a:rPr b="0" i="0" sz="950">
+              <a:rPr sz="950" b="0" i="0">
                 <a:solidFill>
                   <a:srgbClr val="FFFFFF"/>
                 </a:solidFill>
@@ -17953,6 +18187,7 @@
           <a:lstStyle/>
           <a:p>
             <a:pPr algn="ctr"/>
+            <a:endParaRPr/>
           </a:p>
         </p:txBody>
       </p:sp>
@@ -17980,7 +18215,7 @@
           <a:p>
             <a:pPr algn="ctr"/>
             <a:r>
-              <a:rPr b="1" i="0" sz="1100">
+              <a:rPr sz="1100" b="1" i="0">
                 <a:solidFill>
                   <a:srgbClr val="FFFFFF"/>
                 </a:solidFill>
@@ -18014,7 +18249,7 @@
           <a:p>
             <a:pPr algn="l"/>
             <a:r>
-              <a:rPr b="0" i="0" sz="950">
+              <a:rPr sz="950" b="0" i="0">
                 <a:solidFill>
                   <a:srgbClr val="FFFFFF"/>
                 </a:solidFill>
@@ -18067,6 +18302,7 @@
           <a:lstStyle/>
           <a:p>
             <a:pPr algn="ctr"/>
+            <a:endParaRPr/>
           </a:p>
         </p:txBody>
       </p:sp>
@@ -18094,7 +18330,7 @@
           <a:p>
             <a:pPr algn="ctr"/>
             <a:r>
-              <a:rPr b="1" i="0" sz="1100">
+              <a:rPr sz="1100" b="1" i="0">
                 <a:solidFill>
                   <a:srgbClr val="CADCFC"/>
                 </a:solidFill>
@@ -18128,7 +18364,7 @@
           <a:p>
             <a:pPr algn="l"/>
             <a:r>
-              <a:rPr b="0" i="0" sz="950">
+              <a:rPr sz="950" b="0" i="0">
                 <a:solidFill>
                   <a:srgbClr val="FFFFFF"/>
                 </a:solidFill>
@@ -18181,6 +18417,7 @@
           <a:lstStyle/>
           <a:p>
             <a:pPr algn="ctr"/>
+            <a:endParaRPr/>
           </a:p>
         </p:txBody>
       </p:sp>
@@ -18208,7 +18445,7 @@
           <a:p>
             <a:pPr algn="l"/>
             <a:r>
-              <a:rPr b="1" i="0" sz="1200">
+              <a:rPr sz="1200" b="1" i="0">
                 <a:solidFill>
                   <a:srgbClr val="CADCFC"/>
                 </a:solidFill>
@@ -18242,7 +18479,7 @@
           <a:p>
             <a:pPr algn="ctr"/>
             <a:r>
-              <a:rPr b="0" i="1" sz="1000">
+              <a:rPr sz="1000" b="0" i="1">
                 <a:solidFill>
                   <a:srgbClr val="6B7AB8"/>
                 </a:solidFill>
@@ -18292,6 +18529,7 @@
           <a:lstStyle/>
           <a:p>
             <a:pPr algn="ctr"/>
+            <a:endParaRPr/>
           </a:p>
         </p:txBody>
       </p:sp>
@@ -18319,7 +18557,7 @@
           <a:p>
             <a:pPr algn="l"/>
             <a:r>
-              <a:rPr b="1" i="0" sz="1200">
+              <a:rPr sz="1200" b="1" i="0">
                 <a:solidFill>
                   <a:srgbClr val="CADCFC"/>
                 </a:solidFill>
@@ -18353,7 +18591,7 @@
           <a:p>
             <a:pPr algn="ctr"/>
             <a:r>
-              <a:rPr b="0" i="1" sz="1000">
+              <a:rPr sz="1000" b="0" i="1">
                 <a:solidFill>
                   <a:srgbClr val="6B7AB8"/>
                 </a:solidFill>
@@ -18403,6 +18641,7 @@
           <a:lstStyle/>
           <a:p>
             <a:pPr algn="ctr"/>
+            <a:endParaRPr/>
           </a:p>
         </p:txBody>
       </p:sp>
@@ -18430,7 +18669,7 @@
           <a:p>
             <a:pPr algn="l"/>
             <a:r>
-              <a:rPr b="1" i="0" sz="1200">
+              <a:rPr sz="1200" b="1" i="0">
                 <a:solidFill>
                   <a:srgbClr val="CADCFC"/>
                 </a:solidFill>
@@ -18464,7 +18703,7 @@
           <a:p>
             <a:pPr algn="ctr"/>
             <a:r>
-              <a:rPr b="0" i="1" sz="1000">
+              <a:rPr sz="1000" b="0" i="1">
                 <a:solidFill>
                   <a:srgbClr val="6B7AB8"/>
                 </a:solidFill>
@@ -18514,6 +18753,7 @@
           <a:lstStyle/>
           <a:p>
             <a:pPr algn="ctr"/>
+            <a:endParaRPr/>
           </a:p>
         </p:txBody>
       </p:sp>
@@ -18541,7 +18781,7 @@
           <a:p>
             <a:pPr algn="l"/>
             <a:r>
-              <a:rPr b="1" i="0" sz="1200">
+              <a:rPr sz="1200" b="1" i="0">
                 <a:solidFill>
                   <a:srgbClr val="CADCFC"/>
                 </a:solidFill>
@@ -18575,7 +18815,7 @@
           <a:p>
             <a:pPr algn="ctr"/>
             <a:r>
-              <a:rPr b="0" i="1" sz="1000">
+              <a:rPr sz="1000" b="0" i="1">
                 <a:solidFill>
                   <a:srgbClr val="6B7AB8"/>
                 </a:solidFill>
@@ -18625,6 +18865,7 @@
           <a:lstStyle/>
           <a:p>
             <a:pPr algn="ctr"/>
+            <a:endParaRPr/>
           </a:p>
         </p:txBody>
       </p:sp>
@@ -18668,6 +18909,7 @@
           <a:lstStyle/>
           <a:p>
             <a:pPr algn="ctr"/>
+            <a:endParaRPr/>
           </a:p>
         </p:txBody>
       </p:sp>
@@ -18711,6 +18953,7 @@
           <a:lstStyle/>
           <a:p>
             <a:pPr algn="ctr"/>
+            <a:endParaRPr/>
           </a:p>
         </p:txBody>
       </p:sp>
@@ -18738,7 +18981,7 @@
           <a:p>
             <a:pPr algn="ctr"/>
             <a:r>
-              <a:rPr b="1" i="0" sz="1100">
+              <a:rPr sz="1100" b="1" i="0">
                 <a:solidFill>
                   <a:srgbClr val="CADCFC"/>
                 </a:solidFill>
@@ -18788,6 +19031,7 @@
           <a:lstStyle/>
           <a:p>
             <a:pPr algn="ctr"/>
+            <a:endParaRPr/>
           </a:p>
         </p:txBody>
       </p:sp>
@@ -18815,7 +19059,7 @@
           <a:p>
             <a:pPr algn="ctr"/>
             <a:r>
-              <a:rPr b="1" i="0" sz="1100">
+              <a:rPr sz="1100" b="1" i="0">
                 <a:solidFill>
                   <a:srgbClr val="CADCFC"/>
                 </a:solidFill>
@@ -18849,7 +19093,7 @@
           <a:p>
             <a:pPr algn="l"/>
             <a:r>
-              <a:rPr b="0" i="1" sz="1000">
+              <a:rPr sz="1000" b="0" i="1">
                 <a:solidFill>
                   <a:srgbClr val="6B7AB8"/>
                 </a:solidFill>
@@ -18883,7 +19127,7 @@
           <a:p>
             <a:pPr algn="l"/>
             <a:r>
-              <a:rPr b="0" i="1" sz="1000">
+              <a:rPr sz="1000" b="0" i="1">
                 <a:solidFill>
                   <a:srgbClr val="6B7AB8"/>
                 </a:solidFill>
@@ -18917,7 +19161,7 @@
           <a:p>
             <a:pPr algn="l"/>
             <a:r>
-              <a:rPr b="0" i="1" sz="1000">
+              <a:rPr sz="1000" b="0" i="1">
                 <a:solidFill>
                   <a:srgbClr val="6B7AB8"/>
                 </a:solidFill>
@@ -18967,6 +19211,7 @@
           <a:lstStyle/>
           <a:p>
             <a:pPr algn="ctr"/>
+            <a:endParaRPr/>
           </a:p>
         </p:txBody>
       </p:sp>
@@ -18994,7 +19239,7 @@
           <a:p>
             <a:pPr algn="l"/>
             <a:r>
-              <a:rPr b="1" i="0" sz="1100">
+              <a:rPr sz="1100" b="1" i="0">
                 <a:solidFill>
                   <a:srgbClr val="CADCFC"/>
                 </a:solidFill>
@@ -19028,7 +19273,7 @@
           <a:p>
             <a:pPr algn="ctr"/>
             <a:r>
-              <a:rPr b="0" i="1" sz="1000">
+              <a:rPr sz="1000" b="0" i="1">
                 <a:solidFill>
                   <a:srgbClr val="6B7AB8"/>
                 </a:solidFill>
@@ -19062,7 +19307,7 @@
           <a:p>
             <a:pPr algn="r"/>
             <a:r>
-              <a:rPr b="0" i="0" sz="900">
+              <a:rPr sz="900" b="0" i="0">
                 <a:solidFill>
                   <a:srgbClr val="6B7AB8"/>
                 </a:solidFill>
@@ -19081,7 +19326,7 @@
 </file>
 
 <file path=ppt/slides/slide8.xml><?xml version="1.0" encoding="utf-8"?>
-<p:sld xmlns:a="http://schemas.openxmlformats.org/drawingml/2006/main" xmlns:p="http://schemas.openxmlformats.org/presentationml/2006/main" xmlns:r="http://schemas.openxmlformats.org/officeDocument/2006/relationships">
+<p:sld xmlns:a="http://schemas.openxmlformats.org/drawingml/2006/main" xmlns:r="http://schemas.openxmlformats.org/officeDocument/2006/relationships" xmlns:p="http://schemas.openxmlformats.org/presentationml/2006/main">
   <p:cSld>
     <p:spTree>
       <p:nvGrpSpPr>
@@ -19089,7 +19334,14 @@
         <p:cNvGrpSpPr/>
         <p:nvPr/>
       </p:nvGrpSpPr>
-      <p:grpSpPr/>
+      <p:grpSpPr>
+        <a:xfrm>
+          <a:off x="0" y="0"/>
+          <a:ext cx="0" cy="0"/>
+          <a:chOff x="0" y="0"/>
+          <a:chExt cx="0" cy="0"/>
+        </a:xfrm>
+      </p:grpSpPr>
       <p:sp>
         <p:nvSpPr>
           <p:cNvPr id="2" name="Rectangle 1"/>
@@ -19130,6 +19382,7 @@
           <a:lstStyle/>
           <a:p>
             <a:pPr algn="ctr"/>
+            <a:endParaRPr/>
           </a:p>
         </p:txBody>
       </p:sp>
@@ -19141,7 +19394,7 @@
         </p:nvSpPr>
         <p:spPr>
           <a:xfrm>
-            <a:off x="0" y="0"/>
+            <a:off x="18661" y="0"/>
             <a:ext cx="12188952" cy="73152"/>
           </a:xfrm>
           <a:prstGeom prst="rect">
@@ -19173,6 +19426,7 @@
           <a:lstStyle/>
           <a:p>
             <a:pPr algn="ctr"/>
+            <a:endParaRPr/>
           </a:p>
         </p:txBody>
       </p:sp>
@@ -19216,6 +19470,7 @@
           <a:lstStyle/>
           <a:p>
             <a:pPr algn="ctr"/>
+            <a:endParaRPr/>
           </a:p>
         </p:txBody>
       </p:sp>
@@ -19243,7 +19498,7 @@
           <a:p>
             <a:pPr algn="l"/>
             <a:r>
-              <a:rPr b="1" i="0" sz="900">
+              <a:rPr sz="900" b="1" i="0">
                 <a:solidFill>
                   <a:srgbClr val="1E2761"/>
                 </a:solidFill>
@@ -19277,7 +19532,7 @@
           <a:p>
             <a:pPr algn="l"/>
             <a:r>
-              <a:rPr b="1" i="0" sz="3000">
+              <a:rPr sz="3000" b="1" i="0">
                 <a:solidFill>
                   <a:srgbClr val="1E2761"/>
                 </a:solidFill>
@@ -19327,6 +19582,7 @@
           <a:lstStyle/>
           <a:p>
             <a:pPr algn="ctr"/>
+            <a:endParaRPr/>
           </a:p>
         </p:txBody>
       </p:sp>
@@ -19370,6 +19626,7 @@
           <a:lstStyle/>
           <a:p>
             <a:pPr algn="ctr"/>
+            <a:endParaRPr/>
           </a:p>
         </p:txBody>
       </p:sp>
@@ -19397,7 +19654,7 @@
           <a:p>
             <a:pPr algn="ctr"/>
             <a:r>
-              <a:rPr b="1" i="0" sz="1100">
+              <a:rPr sz="1100" b="1" i="0">
                 <a:solidFill>
                   <a:srgbClr val="FFFFFF"/>
                 </a:solidFill>
@@ -19447,6 +19704,7 @@
           <a:lstStyle/>
           <a:p>
             <a:pPr algn="ctr"/>
+            <a:endParaRPr/>
           </a:p>
         </p:txBody>
       </p:sp>
@@ -19474,7 +19732,7 @@
           <a:p>
             <a:pPr algn="ctr"/>
             <a:r>
-              <a:rPr b="1" i="0" sz="1100">
+              <a:rPr sz="1100" b="1" i="0">
                 <a:solidFill>
                   <a:srgbClr val="FFFFFF"/>
                 </a:solidFill>
@@ -19524,6 +19782,7 @@
           <a:lstStyle/>
           <a:p>
             <a:pPr algn="ctr"/>
+            <a:endParaRPr/>
           </a:p>
         </p:txBody>
       </p:sp>
@@ -19551,7 +19810,7 @@
           <a:p>
             <a:pPr algn="ctr"/>
             <a:r>
-              <a:rPr b="1" i="0" sz="1100">
+              <a:rPr sz="1100" b="1" i="0">
                 <a:solidFill>
                   <a:srgbClr val="FFFFFF"/>
                 </a:solidFill>
@@ -19601,6 +19860,7 @@
           <a:lstStyle/>
           <a:p>
             <a:pPr algn="ctr"/>
+            <a:endParaRPr/>
           </a:p>
         </p:txBody>
       </p:sp>
@@ -19628,7 +19888,7 @@
           <a:p>
             <a:pPr algn="l"/>
             <a:r>
-              <a:rPr b="1" i="0" sz="1200">
+              <a:rPr sz="1200" b="1" i="0">
                 <a:solidFill>
                   <a:srgbClr val="CADCFC"/>
                 </a:solidFill>
@@ -19662,7 +19922,7 @@
           <a:p>
             <a:pPr algn="l"/>
             <a:r>
-              <a:rPr b="0" i="0" sz="1000">
+              <a:rPr sz="1000" b="0" i="0">
                 <a:solidFill>
                   <a:srgbClr val="CADCFC"/>
                 </a:solidFill>
@@ -19697,7 +19957,7 @@
           <a:p>
             <a:pPr algn="l"/>
             <a:r>
-              <a:rPr b="1" i="0" sz="1300">
+              <a:rPr sz="1300" b="1" i="0">
                 <a:solidFill>
                   <a:srgbClr val="1E2761"/>
                 </a:solidFill>
@@ -19747,6 +20007,7 @@
           <a:lstStyle/>
           <a:p>
             <a:pPr algn="ctr"/>
+            <a:endParaRPr/>
           </a:p>
         </p:txBody>
       </p:sp>
@@ -19774,7 +20035,7 @@
           <a:p>
             <a:pPr algn="l"/>
             <a:r>
-              <a:rPr b="1" i="0" sz="1200">
+              <a:rPr sz="1200" b="1" i="0">
                 <a:solidFill>
                   <a:srgbClr val="FFFFFF"/>
                 </a:solidFill>
@@ -19808,7 +20069,7 @@
           <a:p>
             <a:pPr algn="l"/>
             <a:r>
-              <a:rPr b="0" i="0" sz="1000">
+              <a:rPr sz="1000" b="0" i="0">
                 <a:solidFill>
                   <a:srgbClr val="FFFFFF"/>
                 </a:solidFill>
@@ -19843,7 +20104,7 @@
           <a:p>
             <a:pPr algn="l"/>
             <a:r>
-              <a:rPr b="1" i="0" sz="1300">
+              <a:rPr sz="1300" b="1" i="0">
                 <a:solidFill>
                   <a:srgbClr val="1E2761"/>
                 </a:solidFill>
@@ -19893,6 +20154,7 @@
           <a:lstStyle/>
           <a:p>
             <a:pPr algn="ctr"/>
+            <a:endParaRPr/>
           </a:p>
         </p:txBody>
       </p:sp>
@@ -19920,7 +20182,7 @@
           <a:p>
             <a:pPr algn="l"/>
             <a:r>
-              <a:rPr b="1" i="0" sz="1200">
+              <a:rPr sz="1200" b="1" i="0">
                 <a:solidFill>
                   <a:srgbClr val="FFFFFF"/>
                 </a:solidFill>
@@ -19954,7 +20216,7 @@
           <a:p>
             <a:pPr algn="l"/>
             <a:r>
-              <a:rPr b="0" i="0" sz="1000">
+              <a:rPr sz="1000" b="0" i="0">
                 <a:solidFill>
                   <a:srgbClr val="FFFFFF"/>
                 </a:solidFill>
@@ -19989,7 +20251,7 @@
           <a:p>
             <a:pPr algn="l"/>
             <a:r>
-              <a:rPr b="1" i="0" sz="1300">
+              <a:rPr sz="1300" b="1" i="0">
                 <a:solidFill>
                   <a:srgbClr val="1E2761"/>
                 </a:solidFill>
@@ -20039,6 +20301,7 @@
           <a:lstStyle/>
           <a:p>
             <a:pPr algn="ctr"/>
+            <a:endParaRPr/>
           </a:p>
         </p:txBody>
       </p:sp>
@@ -20066,7 +20329,7 @@
           <a:p>
             <a:pPr algn="l"/>
             <a:r>
-              <a:rPr b="1" i="0" sz="1200">
+              <a:rPr sz="1200" b="1" i="0">
                 <a:solidFill>
                   <a:srgbClr val="FFFFFF"/>
                 </a:solidFill>
@@ -20100,7 +20363,7 @@
           <a:p>
             <a:pPr algn="l"/>
             <a:r>
-              <a:rPr b="0" i="0" sz="1000">
+              <a:rPr sz="1000" b="0" i="0">
                 <a:solidFill>
                   <a:srgbClr val="FFFFFF"/>
                 </a:solidFill>
@@ -20151,6 +20414,7 @@
           <a:lstStyle/>
           <a:p>
             <a:pPr algn="ctr"/>
+            <a:endParaRPr/>
           </a:p>
         </p:txBody>
       </p:sp>
@@ -20178,7 +20442,7 @@
           <a:p>
             <a:pPr algn="l"/>
             <a:r>
-              <a:rPr b="1" i="0" sz="1050">
+              <a:rPr sz="1050" b="1" i="0">
                 <a:solidFill>
                   <a:srgbClr val="FFFFFF"/>
                 </a:solidFill>
@@ -20212,7 +20476,7 @@
           <a:p>
             <a:pPr algn="l"/>
             <a:r>
-              <a:rPr b="1" i="0" sz="900">
+              <a:rPr sz="900" b="1" i="0">
                 <a:solidFill>
                   <a:srgbClr val="1E2761"/>
                 </a:solidFill>
@@ -20262,6 +20526,7 @@
           <a:lstStyle/>
           <a:p>
             <a:pPr algn="ctr"/>
+            <a:endParaRPr/>
           </a:p>
         </p:txBody>
       </p:sp>
@@ -20289,7 +20554,7 @@
           <a:p>
             <a:pPr algn="ctr"/>
             <a:r>
-              <a:rPr b="1" i="0" sz="1000">
+              <a:rPr sz="1000" b="1" i="0">
                 <a:solidFill>
                   <a:srgbClr val="FFFFFF"/>
                 </a:solidFill>
@@ -20339,6 +20604,7 @@
           <a:lstStyle/>
           <a:p>
             <a:pPr algn="ctr"/>
+            <a:endParaRPr/>
           </a:p>
         </p:txBody>
       </p:sp>
@@ -20366,7 +20632,7 @@
           <a:p>
             <a:pPr algn="ctr"/>
             <a:r>
-              <a:rPr b="1" i="0" sz="1000">
+              <a:rPr sz="1000" b="1" i="0">
                 <a:solidFill>
                   <a:srgbClr val="FFFFFF"/>
                 </a:solidFill>
@@ -20416,6 +20682,7 @@
           <a:lstStyle/>
           <a:p>
             <a:pPr algn="ctr"/>
+            <a:endParaRPr/>
           </a:p>
         </p:txBody>
       </p:sp>
@@ -20443,7 +20710,7 @@
           <a:p>
             <a:pPr algn="ctr"/>
             <a:r>
-              <a:rPr b="1" i="0" sz="1000">
+              <a:rPr sz="1000" b="1" i="0">
                 <a:solidFill>
                   <a:srgbClr val="FFFFFF"/>
                 </a:solidFill>
@@ -20477,7 +20744,7 @@
           <a:p>
             <a:pPr algn="l"/>
             <a:r>
-              <a:rPr b="1" i="0" sz="900">
+              <a:rPr sz="900" b="1" i="0">
                 <a:solidFill>
                   <a:srgbClr val="1E2761"/>
                 </a:solidFill>
@@ -20527,6 +20794,7 @@
           <a:lstStyle/>
           <a:p>
             <a:pPr algn="ctr"/>
+            <a:endParaRPr/>
           </a:p>
         </p:txBody>
       </p:sp>
@@ -20554,7 +20822,7 @@
           <a:p>
             <a:pPr algn="ctr"/>
             <a:r>
-              <a:rPr b="1" i="0" sz="950">
+              <a:rPr sz="950" b="1" i="0">
                 <a:solidFill>
                   <a:srgbClr val="CADCFC"/>
                 </a:solidFill>
@@ -20604,6 +20872,7 @@
           <a:lstStyle/>
           <a:p>
             <a:pPr algn="ctr"/>
+            <a:endParaRPr/>
           </a:p>
         </p:txBody>
       </p:sp>
@@ -20631,7 +20900,7 @@
           <a:p>
             <a:pPr algn="ctr"/>
             <a:r>
-              <a:rPr b="1" i="0" sz="950">
+              <a:rPr sz="950" b="1" i="0">
                 <a:solidFill>
                   <a:srgbClr val="CADCFC"/>
                 </a:solidFill>
@@ -20681,6 +20950,7 @@
           <a:lstStyle/>
           <a:p>
             <a:pPr algn="ctr"/>
+            <a:endParaRPr/>
           </a:p>
         </p:txBody>
       </p:sp>
@@ -20708,7 +20978,7 @@
           <a:p>
             <a:pPr algn="ctr"/>
             <a:r>
-              <a:rPr b="1" i="0" sz="950">
+              <a:rPr sz="950" b="1" i="0">
                 <a:solidFill>
                   <a:srgbClr val="CADCFC"/>
                 </a:solidFill>
@@ -20758,6 +21028,7 @@
           <a:lstStyle/>
           <a:p>
             <a:pPr algn="ctr"/>
+            <a:endParaRPr/>
           </a:p>
         </p:txBody>
       </p:sp>
@@ -20785,7 +21056,7 @@
           <a:p>
             <a:pPr algn="ctr"/>
             <a:r>
-              <a:rPr b="1" i="0" sz="950">
+              <a:rPr sz="950" b="1" i="0">
                 <a:solidFill>
                   <a:srgbClr val="CADCFC"/>
                 </a:solidFill>
@@ -20835,6 +21106,7 @@
           <a:lstStyle/>
           <a:p>
             <a:pPr algn="ctr"/>
+            <a:endParaRPr/>
           </a:p>
         </p:txBody>
       </p:sp>
@@ -20878,6 +21150,7 @@
           <a:lstStyle/>
           <a:p>
             <a:pPr algn="ctr"/>
+            <a:endParaRPr/>
           </a:p>
         </p:txBody>
       </p:sp>
@@ -20905,7 +21178,7 @@
           <a:p>
             <a:pPr algn="ctr"/>
             <a:r>
-              <a:rPr b="1" i="0" sz="900">
+              <a:rPr sz="900" b="1" i="0">
                 <a:solidFill>
                   <a:srgbClr val="FFFFFF"/>
                 </a:solidFill>
@@ -20939,7 +21212,7 @@
           <a:p>
             <a:pPr algn="l"/>
             <a:r>
-              <a:rPr b="1" i="0" sz="1050">
+              <a:rPr sz="1050" b="1" i="0">
                 <a:solidFill>
                   <a:srgbClr val="1A1A2E"/>
                 </a:solidFill>
@@ -20973,7 +21246,7 @@
           <a:p>
             <a:pPr algn="l"/>
             <a:r>
-              <a:rPr b="0" i="0" sz="900">
+              <a:rPr sz="900" b="0" i="0">
                 <a:solidFill>
                   <a:srgbClr val="6B7AB8"/>
                 </a:solidFill>
@@ -21007,7 +21280,7 @@
           <a:p>
             <a:pPr algn="r"/>
             <a:r>
-              <a:rPr b="0" i="0" sz="950">
+              <a:rPr sz="950" b="0" i="0">
                 <a:solidFill>
                   <a:srgbClr val="1A1A2E"/>
                 </a:solidFill>
@@ -21041,7 +21314,7 @@
           <a:p>
             <a:pPr algn="r"/>
             <a:r>
-              <a:rPr b="1" i="0" sz="1000">
+              <a:rPr sz="1000" b="1" i="0">
                 <a:solidFill>
                   <a:srgbClr val="1E2761"/>
                 </a:solidFill>
@@ -21091,6 +21364,7 @@
           <a:lstStyle/>
           <a:p>
             <a:pPr algn="ctr"/>
+            <a:endParaRPr/>
           </a:p>
         </p:txBody>
       </p:sp>
@@ -21134,6 +21408,7 @@
           <a:lstStyle/>
           <a:p>
             <a:pPr algn="ctr"/>
+            <a:endParaRPr/>
           </a:p>
         </p:txBody>
       </p:sp>
@@ -21161,7 +21436,7 @@
           <a:p>
             <a:pPr algn="ctr"/>
             <a:r>
-              <a:rPr b="1" i="0" sz="900">
+              <a:rPr sz="900" b="1" i="0">
                 <a:solidFill>
                   <a:srgbClr val="FFFFFF"/>
                 </a:solidFill>
@@ -21195,7 +21470,7 @@
           <a:p>
             <a:pPr algn="l"/>
             <a:r>
-              <a:rPr b="1" i="0" sz="1050">
+              <a:rPr sz="1050" b="1" i="0">
                 <a:solidFill>
                   <a:srgbClr val="1A1A2E"/>
                 </a:solidFill>
@@ -21229,7 +21504,7 @@
           <a:p>
             <a:pPr algn="l"/>
             <a:r>
-              <a:rPr b="0" i="0" sz="900">
+              <a:rPr sz="900" b="0" i="0">
                 <a:solidFill>
                   <a:srgbClr val="6B7AB8"/>
                 </a:solidFill>
@@ -21263,7 +21538,7 @@
           <a:p>
             <a:pPr algn="r"/>
             <a:r>
-              <a:rPr b="0" i="0" sz="950">
+              <a:rPr sz="950" b="0" i="0">
                 <a:solidFill>
                   <a:srgbClr val="1A1A2E"/>
                 </a:solidFill>
@@ -21297,7 +21572,7 @@
           <a:p>
             <a:pPr algn="r"/>
             <a:r>
-              <a:rPr b="1" i="0" sz="1000">
+              <a:rPr sz="1000" b="1" i="0">
                 <a:solidFill>
                   <a:srgbClr val="1E2761"/>
                 </a:solidFill>
@@ -21347,6 +21622,7 @@
           <a:lstStyle/>
           <a:p>
             <a:pPr algn="ctr"/>
+            <a:endParaRPr/>
           </a:p>
         </p:txBody>
       </p:sp>
@@ -21390,6 +21666,7 @@
           <a:lstStyle/>
           <a:p>
             <a:pPr algn="ctr"/>
+            <a:endParaRPr/>
           </a:p>
         </p:txBody>
       </p:sp>
@@ -21417,7 +21694,7 @@
           <a:p>
             <a:pPr algn="ctr"/>
             <a:r>
-              <a:rPr b="1" i="0" sz="900">
+              <a:rPr sz="900" b="1" i="0">
                 <a:solidFill>
                   <a:srgbClr val="FFFFFF"/>
                 </a:solidFill>
@@ -21451,7 +21728,7 @@
           <a:p>
             <a:pPr algn="l"/>
             <a:r>
-              <a:rPr b="1" i="0" sz="1050">
+              <a:rPr sz="1050" b="1" i="0">
                 <a:solidFill>
                   <a:srgbClr val="1A1A2E"/>
                 </a:solidFill>
@@ -21485,7 +21762,7 @@
           <a:p>
             <a:pPr algn="l"/>
             <a:r>
-              <a:rPr b="0" i="0" sz="900">
+              <a:rPr sz="900" b="0" i="0">
                 <a:solidFill>
                   <a:srgbClr val="6B7AB8"/>
                 </a:solidFill>
@@ -21519,7 +21796,7 @@
           <a:p>
             <a:pPr algn="r"/>
             <a:r>
-              <a:rPr b="0" i="0" sz="950">
+              <a:rPr sz="950" b="0" i="0">
                 <a:solidFill>
                   <a:srgbClr val="1A1A2E"/>
                 </a:solidFill>
@@ -21553,7 +21830,7 @@
           <a:p>
             <a:pPr algn="r"/>
             <a:r>
-              <a:rPr b="1" i="0" sz="1000">
+              <a:rPr sz="1000" b="1" i="0">
                 <a:solidFill>
                   <a:srgbClr val="E74C3C"/>
                 </a:solidFill>
@@ -21603,6 +21880,7 @@
           <a:lstStyle/>
           <a:p>
             <a:pPr algn="ctr"/>
+            <a:endParaRPr/>
           </a:p>
         </p:txBody>
       </p:sp>
@@ -21630,7 +21908,7 @@
           <a:p>
             <a:pPr algn="ctr"/>
             <a:r>
-              <a:rPr b="1" i="0" sz="1100">
+              <a:rPr sz="1100" b="1" i="0">
                 <a:solidFill>
                   <a:srgbClr val="CADCFC"/>
                 </a:solidFill>
@@ -21664,7 +21942,7 @@
           <a:p>
             <a:pPr algn="r"/>
             <a:r>
-              <a:rPr b="0" i="0" sz="900">
+              <a:rPr sz="900" b="0" i="0">
                 <a:solidFill>
                   <a:srgbClr val="9AA8CC"/>
                 </a:solidFill>
@@ -21683,7 +21961,7 @@
 </file>
 
 <file path=ppt/slides/slide9.xml><?xml version="1.0" encoding="utf-8"?>
-<p:sld xmlns:a="http://schemas.openxmlformats.org/drawingml/2006/main" xmlns:p="http://schemas.openxmlformats.org/presentationml/2006/main" xmlns:r="http://schemas.openxmlformats.org/officeDocument/2006/relationships">
+<p:sld xmlns:a="http://schemas.openxmlformats.org/drawingml/2006/main" xmlns:r="http://schemas.openxmlformats.org/officeDocument/2006/relationships" xmlns:p="http://schemas.openxmlformats.org/presentationml/2006/main">
   <p:cSld>
     <p:spTree>
       <p:nvGrpSpPr>
@@ -21691,7 +21969,14 @@
         <p:cNvGrpSpPr/>
         <p:nvPr/>
       </p:nvGrpSpPr>
-      <p:grpSpPr/>
+      <p:grpSpPr>
+        <a:xfrm>
+          <a:off x="0" y="0"/>
+          <a:ext cx="0" cy="0"/>
+          <a:chOff x="0" y="0"/>
+          <a:chExt cx="0" cy="0"/>
+        </a:xfrm>
+      </p:grpSpPr>
       <p:sp>
         <p:nvSpPr>
           <p:cNvPr id="2" name="Rectangle 1"/>
@@ -21732,6 +22017,7 @@
           <a:lstStyle/>
           <a:p>
             <a:pPr algn="ctr"/>
+            <a:endParaRPr/>
           </a:p>
         </p:txBody>
       </p:sp>
@@ -21775,6 +22061,7 @@
           <a:lstStyle/>
           <a:p>
             <a:pPr algn="ctr"/>
+            <a:endParaRPr/>
           </a:p>
         </p:txBody>
       </p:sp>
@@ -21818,6 +22105,7 @@
           <a:lstStyle/>
           <a:p>
             <a:pPr algn="ctr"/>
+            <a:endParaRPr/>
           </a:p>
         </p:txBody>
       </p:sp>
@@ -21845,7 +22133,7 @@
           <a:p>
             <a:pPr algn="l"/>
             <a:r>
-              <a:rPr b="1" i="0" sz="900">
+              <a:rPr sz="900" b="1" i="0">
                 <a:solidFill>
                   <a:srgbClr val="1E2761"/>
                 </a:solidFill>
@@ -21879,7 +22167,7 @@
           <a:p>
             <a:pPr algn="l"/>
             <a:r>
-              <a:rPr b="1" i="0" sz="2800">
+              <a:rPr sz="2800" b="1" i="0">
                 <a:solidFill>
                   <a:srgbClr val="1E2761"/>
                 </a:solidFill>
@@ -21929,6 +22217,7 @@
           <a:lstStyle/>
           <a:p>
             <a:pPr algn="ctr"/>
+            <a:endParaRPr/>
           </a:p>
         </p:txBody>
       </p:sp>
@@ -21972,6 +22261,7 @@
           <a:lstStyle/>
           <a:p>
             <a:pPr algn="ctr"/>
+            <a:endParaRPr/>
           </a:p>
         </p:txBody>
       </p:sp>
@@ -21999,7 +22289,7 @@
           <a:p>
             <a:pPr algn="l"/>
             <a:r>
-              <a:rPr b="1" i="0" sz="1300">
+              <a:rPr sz="1300" b="1" i="0">
                 <a:solidFill>
                   <a:srgbClr val="CADCFC"/>
                 </a:solidFill>
@@ -22033,7 +22323,7 @@
           <a:p>
             <a:pPr algn="l"/>
             <a:r>
-              <a:rPr b="0" i="0" sz="1050">
+              <a:rPr sz="1050" b="0" i="0">
                 <a:solidFill>
                   <a:srgbClr val="FFFFFF"/>
                 </a:solidFill>
@@ -22086,6 +22376,7 @@
           <a:lstStyle/>
           <a:p>
             <a:pPr algn="ctr"/>
+            <a:endParaRPr/>
           </a:p>
         </p:txBody>
       </p:sp>
@@ -22113,7 +22404,7 @@
           <a:p>
             <a:pPr algn="l"/>
             <a:r>
-              <a:rPr b="1" i="0" sz="900">
+              <a:rPr sz="900" b="1" i="0">
                 <a:solidFill>
                   <a:srgbClr val="CADCFC"/>
                 </a:solidFill>
@@ -22163,6 +22454,7 @@
           <a:lstStyle/>
           <a:p>
             <a:pPr algn="ctr"/>
+            <a:endParaRPr/>
           </a:p>
         </p:txBody>
       </p:sp>
@@ -22190,7 +22482,7 @@
           <a:p>
             <a:pPr algn="l"/>
             <a:r>
-              <a:rPr b="1" i="0" sz="1300">
+              <a:rPr sz="1300" b="1" i="0">
                 <a:solidFill>
                   <a:srgbClr val="CADCFC"/>
                 </a:solidFill>
@@ -22224,7 +22516,7 @@
           <a:p>
             <a:pPr algn="l"/>
             <a:r>
-              <a:rPr b="0" i="0" sz="1050">
+              <a:rPr sz="1050" b="0" i="0">
                 <a:solidFill>
                   <a:srgbClr val="FFFFFF"/>
                 </a:solidFill>
@@ -22277,6 +22569,7 @@
           <a:lstStyle/>
           <a:p>
             <a:pPr algn="ctr"/>
+            <a:endParaRPr/>
           </a:p>
         </p:txBody>
       </p:sp>
@@ -22304,7 +22597,7 @@
           <a:p>
             <a:pPr algn="l"/>
             <a:r>
-              <a:rPr b="1" i="0" sz="900">
+              <a:rPr sz="900" b="1" i="0">
                 <a:solidFill>
                   <a:srgbClr val="CADCFC"/>
                 </a:solidFill>
@@ -22354,6 +22647,7 @@
           <a:lstStyle/>
           <a:p>
             <a:pPr algn="ctr"/>
+            <a:endParaRPr/>
           </a:p>
         </p:txBody>
       </p:sp>
@@ -22381,7 +22675,7 @@
           <a:p>
             <a:pPr algn="l"/>
             <a:r>
-              <a:rPr b="1" i="0" sz="1300">
+              <a:rPr sz="1300" b="1" i="0">
                 <a:solidFill>
                   <a:srgbClr val="CADCFC"/>
                 </a:solidFill>
@@ -22415,7 +22709,7 @@
           <a:p>
             <a:pPr algn="l"/>
             <a:r>
-              <a:rPr b="0" i="0" sz="1050">
+              <a:rPr sz="1050" b="0" i="0">
                 <a:solidFill>
                   <a:srgbClr val="FFFFFF"/>
                 </a:solidFill>
@@ -22468,6 +22762,7 @@
           <a:lstStyle/>
           <a:p>
             <a:pPr algn="ctr"/>
+            <a:endParaRPr/>
           </a:p>
         </p:txBody>
       </p:sp>
@@ -22495,7 +22790,7 @@
           <a:p>
             <a:pPr algn="l"/>
             <a:r>
-              <a:rPr b="1" i="0" sz="900">
+              <a:rPr sz="900" b="1" i="0">
                 <a:solidFill>
                   <a:srgbClr val="CADCFC"/>
                 </a:solidFill>
@@ -22545,6 +22840,7 @@
           <a:lstStyle/>
           <a:p>
             <a:pPr algn="ctr"/>
+            <a:endParaRPr/>
           </a:p>
         </p:txBody>
       </p:sp>
@@ -22572,7 +22868,7 @@
           <a:p>
             <a:pPr algn="l"/>
             <a:r>
-              <a:rPr b="1" i="0" sz="1300">
+              <a:rPr sz="1300" b="1" i="0">
                 <a:solidFill>
                   <a:srgbClr val="CADCFC"/>
                 </a:solidFill>
@@ -22606,7 +22902,7 @@
           <a:p>
             <a:pPr algn="l"/>
             <a:r>
-              <a:rPr b="0" i="0" sz="1050">
+              <a:rPr sz="1050" b="0" i="0">
                 <a:solidFill>
                   <a:srgbClr val="FFFFFF"/>
                 </a:solidFill>
@@ -22660,6 +22956,7 @@
           <a:lstStyle/>
           <a:p>
             <a:pPr algn="ctr"/>
+            <a:endParaRPr/>
           </a:p>
         </p:txBody>
       </p:sp>
@@ -22687,7 +22984,7 @@
           <a:p>
             <a:pPr algn="l"/>
             <a:r>
-              <a:rPr b="1" i="0" sz="900">
+              <a:rPr sz="900" b="1" i="0">
                 <a:solidFill>
                   <a:srgbClr val="CADCFC"/>
                 </a:solidFill>
@@ -22737,6 +23034,7 @@
           <a:lstStyle/>
           <a:p>
             <a:pPr algn="ctr"/>
+            <a:endParaRPr/>
           </a:p>
         </p:txBody>
       </p:sp>
@@ -22764,7 +23062,7 @@
           <a:p>
             <a:pPr algn="ctr"/>
             <a:r>
-              <a:rPr b="1" i="0" sz="1000">
+              <a:rPr sz="1000" b="1" i="0">
                 <a:solidFill>
                   <a:srgbClr val="CADCFC"/>
                 </a:solidFill>
@@ -22798,7 +23096,7 @@
           <a:p>
             <a:pPr algn="r"/>
             <a:r>
-              <a:rPr b="0" i="0" sz="900">
+              <a:rPr sz="900" b="0" i="0">
                 <a:solidFill>
                   <a:srgbClr val="9AA8CC"/>
                 </a:solidFill>
@@ -23147,44 +23445,44 @@
         <a:sysClr val="window" lastClr="FFFFFF"/>
       </a:lt1>
       <a:dk2>
-        <a:srgbClr val="1F497D"/>
+        <a:srgbClr val="0E2841"/>
       </a:dk2>
       <a:lt2>
-        <a:srgbClr val="EEECE1"/>
+        <a:srgbClr val="E8E8E8"/>
       </a:lt2>
       <a:accent1>
-        <a:srgbClr val="4F81BD"/>
+        <a:srgbClr val="156082"/>
       </a:accent1>
       <a:accent2>
-        <a:srgbClr val="C0504D"/>
+        <a:srgbClr val="E97132"/>
       </a:accent2>
       <a:accent3>
-        <a:srgbClr val="9BBB59"/>
+        <a:srgbClr val="196B24"/>
       </a:accent3>
       <a:accent4>
-        <a:srgbClr val="8064A2"/>
+        <a:srgbClr val="0F9ED5"/>
       </a:accent4>
       <a:accent5>
-        <a:srgbClr val="4BACC6"/>
+        <a:srgbClr val="A02B93"/>
       </a:accent5>
       <a:accent6>
-        <a:srgbClr val="F79646"/>
+        <a:srgbClr val="4EA72E"/>
       </a:accent6>
       <a:hlink>
-        <a:srgbClr val="0000FF"/>
+        <a:srgbClr val="467886"/>
       </a:hlink>
       <a:folHlink>
-        <a:srgbClr val="800080"/>
+        <a:srgbClr val="96607D"/>
       </a:folHlink>
     </a:clrScheme>
     <a:fontScheme name="Office">
       <a:majorFont>
-        <a:latin typeface="Calibri"/>
+        <a:latin typeface="Aptos Display" panose="02110004020202020204"/>
         <a:ea typeface=""/>
         <a:cs typeface=""/>
-        <a:font script="Jpan" typeface="ＭＳ Ｐゴシック"/>
+        <a:font script="Jpan" typeface="游ゴシック Light"/>
         <a:font script="Hang" typeface="맑은 고딕"/>
-        <a:font script="Hans" typeface="宋体"/>
+        <a:font script="Hans" typeface="等线 Light"/>
         <a:font script="Hant" typeface="新細明體"/>
         <a:font script="Arab" typeface="Times New Roman"/>
         <a:font script="Hebr" typeface="Times New Roman"/>
@@ -23212,14 +23510,31 @@
         <a:font script="Viet" typeface="Times New Roman"/>
         <a:font script="Uigh" typeface="Microsoft Uighur"/>
         <a:font script="Geor" typeface="Sylfaen"/>
+        <a:font script="Armn" typeface="Arial"/>
+        <a:font script="Bugi" typeface="Leelawadee UI"/>
+        <a:font script="Bopo" typeface="Microsoft JhengHei"/>
+        <a:font script="Java" typeface="Javanese Text"/>
+        <a:font script="Lisu" typeface="Segoe UI"/>
+        <a:font script="Mymr" typeface="Myanmar Text"/>
+        <a:font script="Nkoo" typeface="Ebrima"/>
+        <a:font script="Olck" typeface="Nirmala UI"/>
+        <a:font script="Osma" typeface="Ebrima"/>
+        <a:font script="Phag" typeface="Phagspa"/>
+        <a:font script="Syrn" typeface="Estrangelo Edessa"/>
+        <a:font script="Syrj" typeface="Estrangelo Edessa"/>
+        <a:font script="Syre" typeface="Estrangelo Edessa"/>
+        <a:font script="Sora" typeface="Nirmala UI"/>
+        <a:font script="Tale" typeface="Microsoft Tai Le"/>
+        <a:font script="Talu" typeface="Microsoft New Tai Lue"/>
+        <a:font script="Tfng" typeface="Ebrima"/>
       </a:majorFont>
       <a:minorFont>
-        <a:latin typeface="Calibri"/>
+        <a:latin typeface="Aptos" panose="02110004020202020204"/>
         <a:ea typeface=""/>
         <a:cs typeface=""/>
-        <a:font script="Jpan" typeface="ＭＳ Ｐゴシック"/>
+        <a:font script="Jpan" typeface="游ゴシック"/>
         <a:font script="Hang" typeface="맑은 고딕"/>
-        <a:font script="Hans" typeface="宋体"/>
+        <a:font script="Hans" typeface="等线"/>
         <a:font script="Hant" typeface="新細明體"/>
         <a:font script="Arab" typeface="Arial"/>
         <a:font script="Hebr" typeface="Arial"/>
@@ -23247,6 +23562,23 @@
         <a:font script="Viet" typeface="Arial"/>
         <a:font script="Uigh" typeface="Microsoft Uighur"/>
         <a:font script="Geor" typeface="Sylfaen"/>
+        <a:font script="Armn" typeface="Arial"/>
+        <a:font script="Bugi" typeface="Leelawadee UI"/>
+        <a:font script="Bopo" typeface="Microsoft JhengHei"/>
+        <a:font script="Java" typeface="Javanese Text"/>
+        <a:font script="Lisu" typeface="Segoe UI"/>
+        <a:font script="Mymr" typeface="Myanmar Text"/>
+        <a:font script="Nkoo" typeface="Ebrima"/>
+        <a:font script="Olck" typeface="Nirmala UI"/>
+        <a:font script="Osma" typeface="Ebrima"/>
+        <a:font script="Phag" typeface="Phagspa"/>
+        <a:font script="Syrn" typeface="Estrangelo Edessa"/>
+        <a:font script="Syrj" typeface="Estrangelo Edessa"/>
+        <a:font script="Syre" typeface="Estrangelo Edessa"/>
+        <a:font script="Sora" typeface="Nirmala UI"/>
+        <a:font script="Tale" typeface="Microsoft Tai Le"/>
+        <a:font script="Talu" typeface="Microsoft New Tai Lue"/>
+        <a:font script="Tfng" typeface="Ebrima"/>
       </a:minorFont>
     </a:fontScheme>
     <a:fmtScheme name="Office">
@@ -23258,180 +23590,136 @@
           <a:gsLst>
             <a:gs pos="0">
               <a:schemeClr val="phClr">
-                <a:tint val="50000"/>
-                <a:satMod val="300000"/>
+                <a:lumMod val="110000"/>
+                <a:satMod val="105000"/>
+                <a:tint val="67000"/>
               </a:schemeClr>
             </a:gs>
-            <a:gs pos="35000">
+            <a:gs pos="50000">
               <a:schemeClr val="phClr">
-                <a:tint val="37000"/>
-                <a:satMod val="300000"/>
+                <a:lumMod val="105000"/>
+                <a:satMod val="103000"/>
+                <a:tint val="73000"/>
               </a:schemeClr>
             </a:gs>
             <a:gs pos="100000">
               <a:schemeClr val="phClr">
-                <a:tint val="15000"/>
-                <a:satMod val="350000"/>
+                <a:lumMod val="105000"/>
+                <a:satMod val="109000"/>
+                <a:tint val="81000"/>
               </a:schemeClr>
             </a:gs>
           </a:gsLst>
-          <a:lin ang="16200000" scaled="1"/>
+          <a:lin ang="5400000" scaled="0"/>
         </a:gradFill>
         <a:gradFill rotWithShape="1">
           <a:gsLst>
             <a:gs pos="0">
               <a:schemeClr val="phClr">
-                <a:tint val="100000"/>
+                <a:satMod val="103000"/>
+                <a:lumMod val="102000"/>
+                <a:tint val="94000"/>
+              </a:schemeClr>
+            </a:gs>
+            <a:gs pos="50000">
+              <a:schemeClr val="phClr">
+                <a:satMod val="110000"/>
+                <a:lumMod val="100000"/>
                 <a:shade val="100000"/>
-                <a:satMod val="130000"/>
               </a:schemeClr>
             </a:gs>
             <a:gs pos="100000">
               <a:schemeClr val="phClr">
-                <a:tint val="50000"/>
-                <a:shade val="100000"/>
-                <a:satMod val="350000"/>
+                <a:lumMod val="99000"/>
+                <a:satMod val="120000"/>
+                <a:shade val="78000"/>
               </a:schemeClr>
             </a:gs>
           </a:gsLst>
-          <a:lin ang="16200000" scaled="0"/>
+          <a:lin ang="5400000" scaled="0"/>
         </a:gradFill>
       </a:fillStyleLst>
       <a:lnStyleLst>
-        <a:ln w="9525" cap="flat" cmpd="sng" algn="ctr">
+        <a:ln w="12700" cap="flat" cmpd="sng" algn="ctr">
           <a:solidFill>
-            <a:schemeClr val="phClr">
-              <a:shade val="95000"/>
-              <a:satMod val="105000"/>
-            </a:schemeClr>
+            <a:schemeClr val="phClr"/>
           </a:solidFill>
           <a:prstDash val="solid"/>
+          <a:miter lim="800000"/>
+        </a:ln>
+        <a:ln w="19050" cap="flat" cmpd="sng" algn="ctr">
+          <a:solidFill>
+            <a:schemeClr val="phClr"/>
+          </a:solidFill>
+          <a:prstDash val="solid"/>
+          <a:miter lim="800000"/>
         </a:ln>
         <a:ln w="25400" cap="flat" cmpd="sng" algn="ctr">
           <a:solidFill>
             <a:schemeClr val="phClr"/>
           </a:solidFill>
           <a:prstDash val="solid"/>
-        </a:ln>
-        <a:ln w="38100" cap="flat" cmpd="sng" algn="ctr">
-          <a:solidFill>
-            <a:schemeClr val="phClr"/>
-          </a:solidFill>
-          <a:prstDash val="solid"/>
+          <a:miter lim="800000"/>
         </a:ln>
       </a:lnStyleLst>
       <a:effectStyleLst>
         <a:effectStyle>
+          <a:effectLst/>
+        </a:effectStyle>
+        <a:effectStyle>
+          <a:effectLst/>
+        </a:effectStyle>
+        <a:effectStyle>
           <a:effectLst>
-            <a:outerShdw blurRad="40000" dist="20000" dir="5400000" rotWithShape="0">
+            <a:outerShdw blurRad="57150" dist="19050" dir="5400000" algn="ctr" rotWithShape="0">
               <a:srgbClr val="000000">
-                <a:alpha val="38000"/>
+                <a:alpha val="63000"/>
               </a:srgbClr>
             </a:outerShdw>
           </a:effectLst>
-        </a:effectStyle>
-        <a:effectStyle>
-          <a:effectLst>
-            <a:outerShdw blurRad="40000" dist="23000" dir="5400000" rotWithShape="0">
-              <a:srgbClr val="000000">
-                <a:alpha val="35000"/>
-              </a:srgbClr>
-            </a:outerShdw>
-          </a:effectLst>
-        </a:effectStyle>
-        <a:effectStyle>
-          <a:effectLst>
-            <a:outerShdw blurRad="40000" dist="23000" dir="5400000" rotWithShape="0">
-              <a:srgbClr val="000000">
-                <a:alpha val="35000"/>
-              </a:srgbClr>
-            </a:outerShdw>
-          </a:effectLst>
-          <a:scene3d>
-            <a:camera prst="orthographicFront">
-              <a:rot lat="0" lon="0" rev="0"/>
-            </a:camera>
-            <a:lightRig rig="threePt" dir="t">
-              <a:rot lat="0" lon="0" rev="1200000"/>
-            </a:lightRig>
-          </a:scene3d>
-          <a:sp3d>
-            <a:bevelT w="63500" h="25400"/>
-          </a:sp3d>
         </a:effectStyle>
       </a:effectStyleLst>
       <a:bgFillStyleLst>
         <a:solidFill>
           <a:schemeClr val="phClr"/>
         </a:solidFill>
+        <a:solidFill>
+          <a:schemeClr val="phClr">
+            <a:tint val="95000"/>
+            <a:satMod val="170000"/>
+          </a:schemeClr>
+        </a:solidFill>
         <a:gradFill rotWithShape="1">
           <a:gsLst>
             <a:gs pos="0">
               <a:schemeClr val="phClr">
-                <a:tint val="40000"/>
-                <a:satMod val="350000"/>
+                <a:tint val="93000"/>
+                <a:satMod val="150000"/>
+                <a:shade val="98000"/>
+                <a:lumMod val="102000"/>
               </a:schemeClr>
             </a:gs>
-            <a:gs pos="40000">
+            <a:gs pos="50000">
               <a:schemeClr val="phClr">
-                <a:tint val="45000"/>
-                <a:shade val="99000"/>
-                <a:satMod val="350000"/>
+                <a:tint val="98000"/>
+                <a:satMod val="130000"/>
+                <a:shade val="90000"/>
+                <a:lumMod val="103000"/>
               </a:schemeClr>
             </a:gs>
             <a:gs pos="100000">
               <a:schemeClr val="phClr">
-                <a:shade val="20000"/>
-                <a:satMod val="255000"/>
+                <a:shade val="63000"/>
+                <a:satMod val="120000"/>
               </a:schemeClr>
             </a:gs>
           </a:gsLst>
-          <a:path path="circle">
-            <a:fillToRect l="50000" t="-80000" r="50000" b="180000"/>
-          </a:path>
-        </a:gradFill>
-        <a:gradFill rotWithShape="1">
-          <a:gsLst>
-            <a:gs pos="0">
-              <a:schemeClr val="phClr">
-                <a:tint val="80000"/>
-                <a:satMod val="300000"/>
-              </a:schemeClr>
-            </a:gs>
-            <a:gs pos="100000">
-              <a:schemeClr val="phClr">
-                <a:shade val="30000"/>
-                <a:satMod val="200000"/>
-              </a:schemeClr>
-            </a:gs>
-          </a:gsLst>
-          <a:path path="circle">
-            <a:fillToRect l="50000" t="50000" r="50000" b="50000"/>
-          </a:path>
+          <a:lin ang="5400000" scaled="0"/>
         </a:gradFill>
       </a:bgFillStyleLst>
     </a:fmtScheme>
   </a:themeElements>
   <a:objectDefaults>
-    <a:spDef>
-      <a:spPr/>
-      <a:bodyPr/>
-      <a:lstStyle/>
-      <a:style>
-        <a:lnRef idx="1">
-          <a:schemeClr val="accent1"/>
-        </a:lnRef>
-        <a:fillRef idx="3">
-          <a:schemeClr val="accent1"/>
-        </a:fillRef>
-        <a:effectRef idx="2">
-          <a:schemeClr val="accent1"/>
-        </a:effectRef>
-        <a:fontRef idx="minor">
-          <a:schemeClr val="lt1"/>
-        </a:fontRef>
-      </a:style>
-    </a:spDef>
     <a:lnDef>
       <a:spPr/>
       <a:bodyPr/>
@@ -23453,5 +23741,10 @@
     </a:lnDef>
   </a:objectDefaults>
   <a:extraClrSchemeLst/>
+  <a:extLst>
+    <a:ext uri="{05A4C25C-085E-4340-85A3-A5531E510DB2}">
+      <thm15:themeFamily xmlns:thm15="http://schemas.microsoft.com/office/thememl/2012/main" name="Office Theme" id="{2E142A2C-CD16-42D6-873A-C26D2A0506FA}" vid="{1BDDFF52-6CD6-40A5-AB3C-68EB2F1E4D0A}"/>
+    </a:ext>
+  </a:extLst>
 </a:theme>
 </file>
--- a/docs/capstone_presentation_v5.pptx
+++ b/docs/capstone_presentation_v5.pptx
@@ -4,24 +4,21 @@
   <p:sldMasterIdLst>
     <p:sldMasterId id="2147483648" r:id="rId1"/>
   </p:sldMasterIdLst>
-  <p:notesMasterIdLst>
-    <p:notesMasterId r:id="rId14"/>
-  </p:notesMasterIdLst>
   <p:sldIdLst>
-    <p:sldId id="256" r:id="rId2"/>
-    <p:sldId id="257" r:id="rId3"/>
-    <p:sldId id="258" r:id="rId4"/>
-    <p:sldId id="259" r:id="rId5"/>
-    <p:sldId id="260" r:id="rId6"/>
-    <p:sldId id="261" r:id="rId7"/>
-    <p:sldId id="262" r:id="rId8"/>
-    <p:sldId id="263" r:id="rId9"/>
-    <p:sldId id="264" r:id="rId10"/>
-    <p:sldId id="265" r:id="rId11"/>
-    <p:sldId id="266" r:id="rId12"/>
-    <p:sldId id="267" r:id="rId13"/>
+    <p:sldId id="256" r:id="rId7"/>
+    <p:sldId id="257" r:id="rId8"/>
+    <p:sldId id="258" r:id="rId9"/>
+    <p:sldId id="259" r:id="rId10"/>
+    <p:sldId id="260" r:id="rId11"/>
+    <p:sldId id="261" r:id="rId13"/>
+    <p:sldId id="262" r:id="rId14"/>
+    <p:sldId id="263" r:id="rId15"/>
+    <p:sldId id="264" r:id="rId16"/>
+    <p:sldId id="265" r:id="rId17"/>
+    <p:sldId id="266" r:id="rId18"/>
+    <p:sldId id="267" r:id="rId19"/>
   </p:sldIdLst>
-  <p:sldSz cx="12188825" cy="6858000"/>
+  <p:sldSz cx="12188952" cy="6858000" type="screen4x3"/>
   <p:notesSz cx="6858000" cy="9144000"/>
   <p:defaultTextStyle>
     <a:defPPr>
@@ -118,27 +115,11 @@
       </a:defRPr>
     </a:lvl9pPr>
   </p:defaultTextStyle>
-  <p:extLst>
-    <p:ext uri="{EFAFB233-063F-42B5-8137-9DF3F51BA10A}">
-      <p15:sldGuideLst xmlns:p15="http://schemas.microsoft.com/office/powerpoint/2012/main">
-        <p15:guide id="1" orient="horz" pos="2160">
-          <p15:clr>
-            <a:srgbClr val="A4A3A4"/>
-          </p15:clr>
-        </p15:guide>
-        <p15:guide id="2" pos="2880">
-          <p15:clr>
-            <a:srgbClr val="A4A3A4"/>
-          </p15:clr>
-        </p15:guide>
-      </p15:sldGuideLst>
-    </p:ext>
-  </p:extLst>
 </p:presentation>
 </file>
 
 <file path=ppt/notesMasters/notesMaster1.xml><?xml version="1.0" encoding="utf-8"?>
-<p:notesMaster xmlns:a="http://schemas.openxmlformats.org/drawingml/2006/main" xmlns:r="http://schemas.openxmlformats.org/officeDocument/2006/relationships" xmlns:p="http://schemas.openxmlformats.org/presentationml/2006/main">
+<p:notesMaster xmlns:a="http://schemas.openxmlformats.org/drawingml/2006/main" xmlns:p="http://schemas.openxmlformats.org/presentationml/2006/main" xmlns:r="http://schemas.openxmlformats.org/officeDocument/2006/relationships">
   <p:cSld>
     <p:bg>
       <p:bgRef idx="1001">
@@ -172,7 +153,7 @@
         <p:spPr>
           <a:xfrm>
             <a:off x="0" y="0"/>
-            <a:ext cx="2971800" cy="458788"/>
+            <a:ext cx="2971800" cy="457200"/>
           </a:xfrm>
           <a:prstGeom prst="rect">
             <a:avLst/>
@@ -203,7 +184,7 @@
         <p:spPr>
           <a:xfrm>
             <a:off x="3884613" y="0"/>
-            <a:ext cx="2971800" cy="458788"/>
+            <a:ext cx="2971800" cy="457200"/>
           </a:xfrm>
           <a:prstGeom prst="rect">
             <a:avLst/>
@@ -217,9 +198,9 @@
             </a:lvl1pPr>
           </a:lstStyle>
           <a:p>
-            <a:fld id="{0564F60B-AA65-D449-8D41-B4361286FA8D}" type="datetimeFigureOut">
+            <a:fld id="{0F89C1C7-3DCD-1040-A9CF-14679D8B5DDD}" type="datetimeFigureOut">
               <a:rPr lang="en-US" smtClean="0"/>
-              <a:t>5/5/26</a:t>
+              <a:t>10/17/16</a:t>
             </a:fld>
             <a:endParaRPr lang="en-US"/>
           </a:p>
@@ -237,8 +218,8 @@
         </p:nvSpPr>
         <p:spPr>
           <a:xfrm>
-            <a:off x="685800" y="1143000"/>
-            <a:ext cx="5486400" cy="3086100"/>
+            <a:off x="1143000" y="685800"/>
+            <a:ext cx="4572000" cy="3429000"/>
           </a:xfrm>
           <a:prstGeom prst="rect">
             <a:avLst/>
@@ -270,8 +251,8 @@
         </p:nvSpPr>
         <p:spPr>
           <a:xfrm>
-            <a:off x="685800" y="4400550"/>
-            <a:ext cx="5486400" cy="3600450"/>
+            <a:off x="685800" y="4343400"/>
+            <a:ext cx="5486400" cy="4114800"/>
           </a:xfrm>
           <a:prstGeom prst="rect">
             <a:avLst/>
@@ -283,37 +264,38 @@
           <a:p>
             <a:pPr lvl="0"/>
             <a:r>
-              <a:rPr lang="en-US"/>
+              <a:rPr lang="en-US" smtClean="0"/>
               <a:t>Click to edit Master text styles</a:t>
             </a:r>
           </a:p>
           <a:p>
             <a:pPr lvl="1"/>
             <a:r>
-              <a:rPr lang="en-US"/>
+              <a:rPr lang="en-US" smtClean="0"/>
               <a:t>Second level</a:t>
             </a:r>
           </a:p>
           <a:p>
             <a:pPr lvl="2"/>
             <a:r>
-              <a:rPr lang="en-US"/>
+              <a:rPr lang="en-US" smtClean="0"/>
               <a:t>Third level</a:t>
             </a:r>
           </a:p>
           <a:p>
             <a:pPr lvl="3"/>
             <a:r>
-              <a:rPr lang="en-US"/>
+              <a:rPr lang="en-US" smtClean="0"/>
               <a:t>Fourth level</a:t>
             </a:r>
           </a:p>
           <a:p>
             <a:pPr lvl="4"/>
             <a:r>
-              <a:rPr lang="en-US"/>
+              <a:rPr lang="en-US" smtClean="0"/>
               <a:t>Fifth level</a:t>
             </a:r>
+            <a:endParaRPr lang="en-US"/>
           </a:p>
         </p:txBody>
       </p:sp>
@@ -330,7 +312,7 @@
         <p:spPr>
           <a:xfrm>
             <a:off x="0" y="8685213"/>
-            <a:ext cx="2971800" cy="458787"/>
+            <a:ext cx="2971800" cy="457200"/>
           </a:xfrm>
           <a:prstGeom prst="rect">
             <a:avLst/>
@@ -361,7 +343,7 @@
         <p:spPr>
           <a:xfrm>
             <a:off x="3884613" y="8685213"/>
-            <a:ext cx="2971800" cy="458787"/>
+            <a:ext cx="2971800" cy="457200"/>
           </a:xfrm>
           <a:prstGeom prst="rect">
             <a:avLst/>
@@ -375,7 +357,7 @@
             </a:lvl1pPr>
           </a:lstStyle>
           <a:p>
-            <a:fld id="{6D2C78E8-E846-484E-A7A6-D508189F4B01}" type="slidenum">
+            <a:fld id="{BB5E49A5-4136-284D-997B-48E1D791AD67}" type="slidenum">
               <a:rPr lang="en-US" smtClean="0"/>
               <a:t>‹#›</a:t>
             </a:fld>
@@ -386,13 +368,13 @@
     </p:spTree>
     <p:extLst>
       <p:ext uri="{BB962C8B-B14F-4D97-AF65-F5344CB8AC3E}">
-        <p14:creationId xmlns:p14="http://schemas.microsoft.com/office/powerpoint/2010/main" val="4014620179"/>
+        <p14:creationId xmlns:p14="http://schemas.microsoft.com/office/powerpoint/2010/main" val="2623252185"/>
       </p:ext>
     </p:extLst>
   </p:cSld>
   <p:clrMap bg1="lt1" tx1="dk1" bg2="lt2" tx2="dk2" accent1="accent1" accent2="accent2" accent3="accent3" accent4="accent4" accent5="accent5" accent6="accent6" hlink="hlink" folHlink="folHlink"/>
   <p:notesStyle>
-    <a:lvl1pPr marL="0" algn="l" defTabSz="914400" rtl="0" eaLnBrk="1" latinLnBrk="0" hangingPunct="1">
+    <a:lvl1pPr marL="0" algn="l" defTabSz="457200" rtl="0" eaLnBrk="1" latinLnBrk="0" hangingPunct="1">
       <a:defRPr sz="1200" kern="1200">
         <a:solidFill>
           <a:schemeClr val="tx1"/>
@@ -402,7 +384,7 @@
         <a:cs typeface="+mn-cs"/>
       </a:defRPr>
     </a:lvl1pPr>
-    <a:lvl2pPr marL="457200" algn="l" defTabSz="914400" rtl="0" eaLnBrk="1" latinLnBrk="0" hangingPunct="1">
+    <a:lvl2pPr marL="457200" algn="l" defTabSz="457200" rtl="0" eaLnBrk="1" latinLnBrk="0" hangingPunct="1">
       <a:defRPr sz="1200" kern="1200">
         <a:solidFill>
           <a:schemeClr val="tx1"/>
@@ -412,7 +394,7 @@
         <a:cs typeface="+mn-cs"/>
       </a:defRPr>
     </a:lvl2pPr>
-    <a:lvl3pPr marL="914400" algn="l" defTabSz="914400" rtl="0" eaLnBrk="1" latinLnBrk="0" hangingPunct="1">
+    <a:lvl3pPr marL="914400" algn="l" defTabSz="457200" rtl="0" eaLnBrk="1" latinLnBrk="0" hangingPunct="1">
       <a:defRPr sz="1200" kern="1200">
         <a:solidFill>
           <a:schemeClr val="tx1"/>
@@ -422,7 +404,7 @@
         <a:cs typeface="+mn-cs"/>
       </a:defRPr>
     </a:lvl3pPr>
-    <a:lvl4pPr marL="1371600" algn="l" defTabSz="914400" rtl="0" eaLnBrk="1" latinLnBrk="0" hangingPunct="1">
+    <a:lvl4pPr marL="1371600" algn="l" defTabSz="457200" rtl="0" eaLnBrk="1" latinLnBrk="0" hangingPunct="1">
       <a:defRPr sz="1200" kern="1200">
         <a:solidFill>
           <a:schemeClr val="tx1"/>
@@ -432,7 +414,7 @@
         <a:cs typeface="+mn-cs"/>
       </a:defRPr>
     </a:lvl4pPr>
-    <a:lvl5pPr marL="1828800" algn="l" defTabSz="914400" rtl="0" eaLnBrk="1" latinLnBrk="0" hangingPunct="1">
+    <a:lvl5pPr marL="1828800" algn="l" defTabSz="457200" rtl="0" eaLnBrk="1" latinLnBrk="0" hangingPunct="1">
       <a:defRPr sz="1200" kern="1200">
         <a:solidFill>
           <a:schemeClr val="tx1"/>
@@ -442,7 +424,7 @@
         <a:cs typeface="+mn-cs"/>
       </a:defRPr>
     </a:lvl5pPr>
-    <a:lvl6pPr marL="2286000" algn="l" defTabSz="914400" rtl="0" eaLnBrk="1" latinLnBrk="0" hangingPunct="1">
+    <a:lvl6pPr marL="2286000" algn="l" defTabSz="457200" rtl="0" eaLnBrk="1" latinLnBrk="0" hangingPunct="1">
       <a:defRPr sz="1200" kern="1200">
         <a:solidFill>
           <a:schemeClr val="tx1"/>
@@ -452,7 +434,7 @@
         <a:cs typeface="+mn-cs"/>
       </a:defRPr>
     </a:lvl6pPr>
-    <a:lvl7pPr marL="2743200" algn="l" defTabSz="914400" rtl="0" eaLnBrk="1" latinLnBrk="0" hangingPunct="1">
+    <a:lvl7pPr marL="2743200" algn="l" defTabSz="457200" rtl="0" eaLnBrk="1" latinLnBrk="0" hangingPunct="1">
       <a:defRPr sz="1200" kern="1200">
         <a:solidFill>
           <a:schemeClr val="tx1"/>
@@ -462,7 +444,7 @@
         <a:cs typeface="+mn-cs"/>
       </a:defRPr>
     </a:lvl7pPr>
-    <a:lvl8pPr marL="3200400" algn="l" defTabSz="914400" rtl="0" eaLnBrk="1" latinLnBrk="0" hangingPunct="1">
+    <a:lvl8pPr marL="3200400" algn="l" defTabSz="457200" rtl="0" eaLnBrk="1" latinLnBrk="0" hangingPunct="1">
       <a:defRPr sz="1200" kern="1200">
         <a:solidFill>
           <a:schemeClr val="tx1"/>
@@ -472,7 +454,7 @@
         <a:cs typeface="+mn-cs"/>
       </a:defRPr>
     </a:lvl8pPr>
-    <a:lvl9pPr marL="3657600" algn="l" defTabSz="914400" rtl="0" eaLnBrk="1" latinLnBrk="0" hangingPunct="1">
+    <a:lvl9pPr marL="3657600" algn="l" defTabSz="457200" rtl="0" eaLnBrk="1" latinLnBrk="0" hangingPunct="1">
       <a:defRPr sz="1200" kern="1200">
         <a:solidFill>
           <a:schemeClr val="tx1"/>
@@ -487,7 +469,7 @@
 </file>
 
 <file path=ppt/notesSlides/notesSlide1.xml><?xml version="1.0" encoding="utf-8"?>
-<p:notes xmlns:a="http://schemas.openxmlformats.org/drawingml/2006/main" xmlns:r="http://schemas.openxmlformats.org/officeDocument/2006/relationships" xmlns:p="http://schemas.openxmlformats.org/presentationml/2006/main">
+<p:notes xmlns:a="http://schemas.openxmlformats.org/drawingml/2006/main" xmlns:p="http://schemas.openxmlformats.org/presentationml/2006/main" xmlns:r="http://schemas.openxmlformats.org/officeDocument/2006/relationships">
   <p:cSld>
     <p:spTree>
       <p:nvGrpSpPr>
@@ -507,7 +489,7 @@
         <p:nvSpPr>
           <p:cNvPr id="2" name="Slide Image Placeholder 1"/>
           <p:cNvSpPr>
-            <a:spLocks noGrp="1" noRot="1" noChangeAspect="1"/>
+            <a:spLocks noGrp="1"/>
           </p:cNvSpPr>
           <p:nvPr>
             <p:ph type="sldImg" idx="2"/>
@@ -522,7 +504,7 @@
             <a:spLocks noGrp="1"/>
           </p:cNvSpPr>
           <p:nvPr>
-            <p:ph type="body" sz="quarter" idx="3"/>
+            <p:ph type="body" idx="3" sz="quarter"/>
           </p:nvPr>
         </p:nvSpPr>
         <p:spPr/>
@@ -531,39 +513,26 @@
           <a:lstStyle/>
           <a:p>
             <a:r>
-              <a:rPr dirty="0"/>
               <a:t>Talking points for this slide:</a:t>
             </a:r>
           </a:p>
           <a:p>
             <a:r>
-              <a:rPr dirty="0"/>
               <a:t>1. UNDERSTAND YOU — the assistant lets the user start from a frustration ('phone screen too small for cooking') instead of a category. Six chip questions per category — voice ecosystem, placement, screen size, privacy, etc. — are decision-relevant, not generic budget/urgency.</a:t>
             </a:r>
           </a:p>
           <a:p>
             <a:r>
-              <a:rPr dirty="0"/>
-              <a:t>2. REMEMBERS YOU — every refine turn captures a preference diff and renders it as a 'What changed' card. Implicit </a:t>
-            </a:r>
-            <a:r>
-              <a:rPr dirty="0" err="1"/>
-              <a:t>prefs</a:t>
-            </a:r>
-            <a:r>
-              <a:rPr dirty="0"/>
-              <a:t> are inferred from the free-text frustration ('leaks' -&gt; leak-resistant, 'heavy' -&gt; lightweight).</a:t>
-            </a:r>
-          </a:p>
-          <a:p>
-            <a:r>
-              <a:rPr dirty="0"/>
+              <a:t>2. REMEMBERS YOU — every refine turn captures a preference diff and renders it as a 'What changed' card. Implicit prefs are inferred from the free-text frustration ('leaks' -&gt; leak-resistant, 'heavy' -&gt; lightweight).</a:t>
+            </a:r>
+          </a:p>
+          <a:p>
+            <a:r>
               <a:t>3. CLEAR DECISIONS — the assistant returns 3 differentiated picks (Best Fit / Budget Pick / Stretch). Each pick carries a ✓/✗/? checklist mapping every chip the user picked to a match status. Compare view lays 2-3 finalists side-by-side with row-winners highlighted.</a:t>
             </a:r>
           </a:p>
           <a:p>
             <a:r>
-              <a:rPr dirty="0"/>
               <a:t>4. LIFECYCLE LAYER — framed as a prototype concept that demonstrates the assistant continuing to add value after purchase (phone reminders, gym-bag checklist, replacement parts). Not a finished post-purchase platform.</a:t>
             </a:r>
           </a:p>
@@ -576,7 +545,7 @@
             <a:spLocks noGrp="1"/>
           </p:cNvSpPr>
           <p:nvPr>
-            <p:ph type="sldNum" sz="quarter" idx="5"/>
+            <p:ph type="sldNum" idx="5" sz="quarter"/>
           </p:nvPr>
         </p:nvSpPr>
         <p:spPr/>
@@ -590,7 +559,7 @@
 </file>
 
 <file path=ppt/notesSlides/notesSlide2.xml><?xml version="1.0" encoding="utf-8"?>
-<p:notes xmlns:a="http://schemas.openxmlformats.org/drawingml/2006/main" xmlns:r="http://schemas.openxmlformats.org/officeDocument/2006/relationships" xmlns:p="http://schemas.openxmlformats.org/presentationml/2006/main">
+<p:notes xmlns:a="http://schemas.openxmlformats.org/drawingml/2006/main" xmlns:p="http://schemas.openxmlformats.org/presentationml/2006/main" xmlns:r="http://schemas.openxmlformats.org/officeDocument/2006/relationships">
   <p:cSld>
     <p:spTree>
       <p:nvGrpSpPr>
@@ -610,7 +579,7 @@
         <p:nvSpPr>
           <p:cNvPr id="2" name="Slide Image Placeholder 1"/>
           <p:cNvSpPr>
-            <a:spLocks noGrp="1" noRot="1" noChangeAspect="1"/>
+            <a:spLocks noGrp="1"/>
           </p:cNvSpPr>
           <p:nvPr>
             <p:ph type="sldImg" idx="2"/>
@@ -625,7 +594,7 @@
             <a:spLocks noGrp="1"/>
           </p:cNvSpPr>
           <p:nvPr>
-            <p:ph type="body" sz="quarter" idx="3"/>
+            <p:ph type="body" idx="3" sz="quarter"/>
           </p:nvPr>
         </p:nvSpPr>
         <p:spPr/>
@@ -671,7 +640,7 @@
             <a:spLocks noGrp="1"/>
           </p:cNvSpPr>
           <p:nvPr>
-            <p:ph type="sldNum" sz="quarter" idx="5"/>
+            <p:ph type="sldNum" idx="5" sz="quarter"/>
           </p:nvPr>
         </p:nvSpPr>
         <p:spPr/>
@@ -685,7 +654,7 @@
 </file>
 
 <file path=ppt/notesSlides/notesSlide3.xml><?xml version="1.0" encoding="utf-8"?>
-<p:notes xmlns:a="http://schemas.openxmlformats.org/drawingml/2006/main" xmlns:r="http://schemas.openxmlformats.org/officeDocument/2006/relationships" xmlns:p="http://schemas.openxmlformats.org/presentationml/2006/main">
+<p:notes xmlns:a="http://schemas.openxmlformats.org/drawingml/2006/main" xmlns:p="http://schemas.openxmlformats.org/presentationml/2006/main" xmlns:r="http://schemas.openxmlformats.org/officeDocument/2006/relationships">
   <p:cSld>
     <p:spTree>
       <p:nvGrpSpPr>
@@ -705,7 +674,7 @@
         <p:nvSpPr>
           <p:cNvPr id="2" name="Slide Image Placeholder 1"/>
           <p:cNvSpPr>
-            <a:spLocks noGrp="1" noRot="1" noChangeAspect="1"/>
+            <a:spLocks noGrp="1"/>
           </p:cNvSpPr>
           <p:nvPr>
             <p:ph type="sldImg" idx="2"/>
@@ -720,7 +689,7 @@
             <a:spLocks noGrp="1"/>
           </p:cNvSpPr>
           <p:nvPr>
-            <p:ph type="body" sz="quarter" idx="3"/>
+            <p:ph type="body" idx="3" sz="quarter"/>
           </p:nvPr>
         </p:nvSpPr>
         <p:spPr/>
@@ -781,7 +750,7 @@
             <a:spLocks noGrp="1"/>
           </p:cNvSpPr>
           <p:nvPr>
-            <p:ph type="sldNum" sz="quarter" idx="5"/>
+            <p:ph type="sldNum" idx="5" sz="quarter"/>
           </p:nvPr>
         </p:nvSpPr>
         <p:spPr/>
@@ -795,7 +764,7 @@
 </file>
 
 <file path=ppt/notesSlides/notesSlide4.xml><?xml version="1.0" encoding="utf-8"?>
-<p:notes xmlns:a="http://schemas.openxmlformats.org/drawingml/2006/main" xmlns:r="http://schemas.openxmlformats.org/officeDocument/2006/relationships" xmlns:p="http://schemas.openxmlformats.org/presentationml/2006/main">
+<p:notes xmlns:a="http://schemas.openxmlformats.org/drawingml/2006/main" xmlns:p="http://schemas.openxmlformats.org/presentationml/2006/main" xmlns:r="http://schemas.openxmlformats.org/officeDocument/2006/relationships">
   <p:cSld>
     <p:spTree>
       <p:nvGrpSpPr>
@@ -815,7 +784,7 @@
         <p:nvSpPr>
           <p:cNvPr id="2" name="Slide Image Placeholder 1"/>
           <p:cNvSpPr>
-            <a:spLocks noGrp="1" noRot="1" noChangeAspect="1"/>
+            <a:spLocks noGrp="1"/>
           </p:cNvSpPr>
           <p:nvPr>
             <p:ph type="sldImg" idx="2"/>
@@ -830,7 +799,7 @@
             <a:spLocks noGrp="1"/>
           </p:cNvSpPr>
           <p:nvPr>
-            <p:ph type="body" sz="quarter" idx="3"/>
+            <p:ph type="body" idx="3" sz="quarter"/>
           </p:nvPr>
         </p:nvSpPr>
         <p:spPr/>
@@ -847,25 +816,19 @@
               <a:t>ETL: scrapes 100 products via Playwright with anti-bot measures, normalises delivery copy ('arrives Mar 14' -&gt; 5 days). 72/100 delivery values were missing post-scrape and are flagged 'estimated'; descriptions for all 100 are flagged 'synthesised from title'. No silent fabrication.</a:t>
             </a:r>
           </a:p>
-          <a:p>
-            <a:endParaRPr/>
-          </a:p>
+          <a:p/>
           <a:p>
             <a:r>
               <a:t>Attribute extraction: regex-based, runs at load time. Echo Show models map to known screen sizes (5 -&gt; 5.5", 8 -&gt; 8", 15 -&gt; 15.6"); ecosystems infer from Echo/Nest/HomePod keywords; bottle capacity from 'oz' patterns.</a:t>
             </a:r>
           </a:p>
-          <a:p>
-            <a:endParaRPr/>
-          </a:p>
+          <a:p/>
           <a:p>
             <a:r>
               <a:t>Claude call sites in the runtime: parse free-text input, write personal copy, parse refine intent. All three have deterministic fallbacks so the demo runs without an API key. Ranking is never an LLM call.</a:t>
             </a:r>
           </a:p>
-          <a:p>
-            <a:endParaRPr/>
-          </a:p>
+          <a:p/>
           <a:p>
             <a:r>
               <a:t>AI tooling across the build (disclosed honestly):</a:t>
@@ -900,7 +863,7 @@
             <a:spLocks noGrp="1"/>
           </p:cNvSpPr>
           <p:nvPr>
-            <p:ph type="sldNum" sz="quarter" idx="5"/>
+            <p:ph type="sldNum" idx="5" sz="quarter"/>
           </p:nvPr>
         </p:nvSpPr>
         <p:spPr/>
@@ -914,7 +877,7 @@
 </file>
 
 <file path=ppt/notesSlides/notesSlide5.xml><?xml version="1.0" encoding="utf-8"?>
-<p:notes xmlns:a="http://schemas.openxmlformats.org/drawingml/2006/main" xmlns:r="http://schemas.openxmlformats.org/officeDocument/2006/relationships" xmlns:p="http://schemas.openxmlformats.org/presentationml/2006/main">
+<p:notes xmlns:a="http://schemas.openxmlformats.org/drawingml/2006/main" xmlns:p="http://schemas.openxmlformats.org/presentationml/2006/main" xmlns:r="http://schemas.openxmlformats.org/officeDocument/2006/relationships">
   <p:cSld>
     <p:spTree>
       <p:nvGrpSpPr>
@@ -934,7 +897,7 @@
         <p:nvSpPr>
           <p:cNvPr id="2" name="Slide Image Placeholder 1"/>
           <p:cNvSpPr>
-            <a:spLocks noGrp="1" noRot="1" noChangeAspect="1"/>
+            <a:spLocks noGrp="1"/>
           </p:cNvSpPr>
           <p:nvPr>
             <p:ph type="sldImg" idx="2"/>
@@ -949,7 +912,7 @@
             <a:spLocks noGrp="1"/>
           </p:cNvSpPr>
           <p:nvPr>
-            <p:ph type="body" sz="quarter" idx="3"/>
+            <p:ph type="body" idx="3" sz="quarter"/>
           </p:nvPr>
         </p:nvSpPr>
         <p:spPr/>
@@ -958,12 +921,34 @@
           <a:lstStyle/>
           <a:p>
             <a:r>
+              <a:t>Validation — three independent lenses:</a:t>
+            </a:r>
+          </a:p>
+          <a:p/>
+          <a:p>
+            <a:r>
+              <a:t>1. Multi-agent debate. Claude Code (Opus 4.7) ran brainstorming, implementation, tests, and iterations across the 12-week build. Codex GPT-5.5 was given the role of independent technical validator and listed every demo-safety risk it could find. Findings either got fixed in code or got dismissed with a written reason.</a:t>
+            </a:r>
+          </a:p>
+          <a:p/>
+          <a:p>
+            <a:r>
+              <a:t>2. Small-scale user testing. Family, friends, and classmates ran the demo end-to-end. Their feedback consistently confirmed that three things made the decision process easier to follow: structured recommendations (3 picks instead of a long grid), visible preference continuity (the diff card on each refine), and the side-by-side comparison view.</a:t>
+            </a:r>
+          </a:p>
+          <a:p/>
+          <a:p>
+            <a:r>
+              <a:t>3. Industry mentor input. A Senior Analytics Manager / Senior Business Intelligence Engineer / Data Scientist / Data Engineer with 13 years at Amazon gave feedback on data discipline (provenance flagging, scraped vs estimated values) and on the decision-support framing (treating shopping as a multi-criteria decision problem).</a:t>
+            </a:r>
+          </a:p>
+          <a:p/>
+          <a:p>
+            <a:r>
               <a:t>Live demo script (matches the running app exactly):</a:t>
             </a:r>
           </a:p>
-          <a:p>
-            <a:endParaRPr/>
-          </a:p>
+          <a:p/>
           <a:p>
             <a:r>
               <a:t>1. Type into Scene 1: 'current bottle is heavy and leaks in my gym bag'.</a:t>
@@ -974,17 +959,13 @@
               <a:t>   Observe: category auto-classified as water_bottle. The route also infers leak_proof_preferred=True from the word 'leaks'.</a:t>
             </a:r>
           </a:p>
-          <a:p>
-            <a:endParaRPr/>
-          </a:p>
+          <a:p/>
           <a:p>
             <a:r>
               <a:t>2. Scene 2: pick three chips — Water Bottle / Gym / Large capacity. Skip the others. Hit 'See recommendations'.</a:t>
             </a:r>
           </a:p>
-          <a:p>
-            <a:endParaRPr/>
-          </a:p>
+          <a:p/>
           <a:p>
             <a:r>
               <a:t>3. Scene 3: three differentiated picks render in a row.</a:t>
@@ -1005,33 +986,25 @@
               <a:t>   - LARGE CAPACITY PICK: Owala 32oz FreeSip — labels [Most capacity, Most leakproof].</a:t>
             </a:r>
           </a:p>
-          <a:p>
-            <a:endParaRPr/>
-          </a:p>
+          <a:p/>
           <a:p>
             <a:r>
               <a:t>4. Click 'See why' on Best Fit. Stage 4 quotes the user's frustration, lists the rule-grounded reasons, and shows the ✓/✗/? checklist of every preference.</a:t>
             </a:r>
           </a:p>
-          <a:p>
-            <a:endParaRPr/>
-          </a:p>
+          <a:p/>
           <a:p>
             <a:r>
               <a:t>5. Refine: type 'larger'. The diff card shows size_preference None -&gt; large; Best Fit flips to 32oz. Demonstrates preference continuity.</a:t>
             </a:r>
           </a:p>
-          <a:p>
-            <a:endParaRPr/>
-          </a:p>
+          <a:p/>
           <a:p>
             <a:r>
               <a:t>6. Click compare on 2-3 picks; the side-by-side overlay highlights the row-winner (lowest price, largest capacity, etc.) per attribute.</a:t>
             </a:r>
           </a:p>
-          <a:p>
-            <a:endParaRPr/>
-          </a:p>
+          <a:p/>
           <a:p>
             <a:r>
               <a:t>7. Continue to Lifecycle (prototype). Phone reminders / gym-bag checklist / replacement parts — honest about what the bottle can/cannot do.</a:t>
@@ -1046,7 +1019,7 @@
             <a:spLocks noGrp="1"/>
           </p:cNvSpPr>
           <p:nvPr>
-            <p:ph type="sldNum" sz="quarter" idx="5"/>
+            <p:ph type="sldNum" idx="5" sz="quarter"/>
           </p:nvPr>
         </p:nvSpPr>
         <p:spPr/>
@@ -1097,9 +1070,10 @@
           <a:lstStyle/>
           <a:p>
             <a:r>
-              <a:rPr lang="en-US"/>
+              <a:rPr lang="en-US" smtClean="0"/>
               <a:t>Click to edit Master title style</a:t>
             </a:r>
+            <a:endParaRPr lang="en-US"/>
           </a:p>
         </p:txBody>
       </p:sp>
@@ -1215,9 +1189,10 @@
           </a:lstStyle>
           <a:p>
             <a:r>
-              <a:rPr lang="en-US"/>
+              <a:rPr lang="en-US" smtClean="0"/>
               <a:t>Click to edit Master subtitle style</a:t>
             </a:r>
+            <a:endParaRPr lang="en-US"/>
           </a:p>
         </p:txBody>
       </p:sp>
@@ -1238,7 +1213,7 @@
           <a:p>
             <a:fld id="{5BCAD085-E8A6-8845-BD4E-CB4CCA059FC4}" type="datetimeFigureOut">
               <a:rPr lang="en-US" smtClean="0"/>
-              <a:t>5/5/26</a:t>
+              <a:t>1/27/13</a:t>
             </a:fld>
             <a:endParaRPr lang="en-US"/>
           </a:p>
@@ -1332,9 +1307,10 @@
           <a:lstStyle/>
           <a:p>
             <a:r>
-              <a:rPr lang="en-US"/>
+              <a:rPr lang="en-US" smtClean="0"/>
               <a:t>Click to edit Master title style</a:t>
             </a:r>
+            <a:endParaRPr lang="en-US"/>
           </a:p>
         </p:txBody>
       </p:sp>
@@ -1355,37 +1331,38 @@
           <a:p>
             <a:pPr lvl="0"/>
             <a:r>
-              <a:rPr lang="en-US"/>
+              <a:rPr lang="en-US" smtClean="0"/>
               <a:t>Click to edit Master text styles</a:t>
             </a:r>
           </a:p>
           <a:p>
             <a:pPr lvl="1"/>
             <a:r>
-              <a:rPr lang="en-US"/>
+              <a:rPr lang="en-US" smtClean="0"/>
               <a:t>Second level</a:t>
             </a:r>
           </a:p>
           <a:p>
             <a:pPr lvl="2"/>
             <a:r>
-              <a:rPr lang="en-US"/>
+              <a:rPr lang="en-US" smtClean="0"/>
               <a:t>Third level</a:t>
             </a:r>
           </a:p>
           <a:p>
             <a:pPr lvl="3"/>
             <a:r>
-              <a:rPr lang="en-US"/>
+              <a:rPr lang="en-US" smtClean="0"/>
               <a:t>Fourth level</a:t>
             </a:r>
           </a:p>
           <a:p>
             <a:pPr lvl="4"/>
             <a:r>
-              <a:rPr lang="en-US"/>
+              <a:rPr lang="en-US" smtClean="0"/>
               <a:t>Fifth level</a:t>
             </a:r>
+            <a:endParaRPr lang="en-US"/>
           </a:p>
         </p:txBody>
       </p:sp>
@@ -1406,7 +1383,7 @@
           <a:p>
             <a:fld id="{5BCAD085-E8A6-8845-BD4E-CB4CCA059FC4}" type="datetimeFigureOut">
               <a:rPr lang="en-US" smtClean="0"/>
-              <a:t>5/5/26</a:t>
+              <a:t>1/27/13</a:t>
             </a:fld>
             <a:endParaRPr lang="en-US"/>
           </a:p>
@@ -1505,9 +1482,10 @@
           <a:lstStyle/>
           <a:p>
             <a:r>
-              <a:rPr lang="en-US"/>
+              <a:rPr lang="en-US" smtClean="0"/>
               <a:t>Click to edit Master title style</a:t>
             </a:r>
+            <a:endParaRPr lang="en-US"/>
           </a:p>
         </p:txBody>
       </p:sp>
@@ -1533,37 +1511,38 @@
           <a:p>
             <a:pPr lvl="0"/>
             <a:r>
-              <a:rPr lang="en-US"/>
+              <a:rPr lang="en-US" smtClean="0"/>
               <a:t>Click to edit Master text styles</a:t>
             </a:r>
           </a:p>
           <a:p>
             <a:pPr lvl="1"/>
             <a:r>
-              <a:rPr lang="en-US"/>
+              <a:rPr lang="en-US" smtClean="0"/>
               <a:t>Second level</a:t>
             </a:r>
           </a:p>
           <a:p>
             <a:pPr lvl="2"/>
             <a:r>
-              <a:rPr lang="en-US"/>
+              <a:rPr lang="en-US" smtClean="0"/>
               <a:t>Third level</a:t>
             </a:r>
           </a:p>
           <a:p>
             <a:pPr lvl="3"/>
             <a:r>
-              <a:rPr lang="en-US"/>
+              <a:rPr lang="en-US" smtClean="0"/>
               <a:t>Fourth level</a:t>
             </a:r>
           </a:p>
           <a:p>
             <a:pPr lvl="4"/>
             <a:r>
-              <a:rPr lang="en-US"/>
+              <a:rPr lang="en-US" smtClean="0"/>
               <a:t>Fifth level</a:t>
             </a:r>
+            <a:endParaRPr lang="en-US"/>
           </a:p>
         </p:txBody>
       </p:sp>
@@ -1584,7 +1563,7 @@
           <a:p>
             <a:fld id="{5BCAD085-E8A6-8845-BD4E-CB4CCA059FC4}" type="datetimeFigureOut">
               <a:rPr lang="en-US" smtClean="0"/>
-              <a:t>5/5/26</a:t>
+              <a:t>1/27/13</a:t>
             </a:fld>
             <a:endParaRPr lang="en-US"/>
           </a:p>
@@ -1678,9 +1657,10 @@
           <a:lstStyle/>
           <a:p>
             <a:r>
-              <a:rPr lang="en-US"/>
+              <a:rPr lang="en-US" smtClean="0"/>
               <a:t>Click to edit Master title style</a:t>
             </a:r>
+            <a:endParaRPr lang="en-US"/>
           </a:p>
         </p:txBody>
       </p:sp>
@@ -1701,37 +1681,38 @@
           <a:p>
             <a:pPr lvl="0"/>
             <a:r>
-              <a:rPr lang="en-US"/>
+              <a:rPr lang="en-US" smtClean="0"/>
               <a:t>Click to edit Master text styles</a:t>
             </a:r>
           </a:p>
           <a:p>
             <a:pPr lvl="1"/>
             <a:r>
-              <a:rPr lang="en-US"/>
+              <a:rPr lang="en-US" smtClean="0"/>
               <a:t>Second level</a:t>
             </a:r>
           </a:p>
           <a:p>
             <a:pPr lvl="2"/>
             <a:r>
-              <a:rPr lang="en-US"/>
+              <a:rPr lang="en-US" smtClean="0"/>
               <a:t>Third level</a:t>
             </a:r>
           </a:p>
           <a:p>
             <a:pPr lvl="3"/>
             <a:r>
-              <a:rPr lang="en-US"/>
+              <a:rPr lang="en-US" smtClean="0"/>
               <a:t>Fourth level</a:t>
             </a:r>
           </a:p>
           <a:p>
             <a:pPr lvl="4"/>
             <a:r>
-              <a:rPr lang="en-US"/>
+              <a:rPr lang="en-US" smtClean="0"/>
               <a:t>Fifth level</a:t>
             </a:r>
+            <a:endParaRPr lang="en-US"/>
           </a:p>
         </p:txBody>
       </p:sp>
@@ -1752,7 +1733,7 @@
           <a:p>
             <a:fld id="{5BCAD085-E8A6-8845-BD4E-CB4CCA059FC4}" type="datetimeFigureOut">
               <a:rPr lang="en-US" smtClean="0"/>
-              <a:t>5/5/26</a:t>
+              <a:t>1/27/13</a:t>
             </a:fld>
             <a:endParaRPr lang="en-US"/>
           </a:p>
@@ -1855,9 +1836,10 @@
           </a:lstStyle>
           <a:p>
             <a:r>
-              <a:rPr lang="en-US"/>
+              <a:rPr lang="en-US" smtClean="0"/>
               <a:t>Click to edit Master title style</a:t>
             </a:r>
+            <a:endParaRPr lang="en-US"/>
           </a:p>
         </p:txBody>
       </p:sp>
@@ -1974,7 +1956,7 @@
           <a:p>
             <a:pPr lvl="0"/>
             <a:r>
-              <a:rPr lang="en-US"/>
+              <a:rPr lang="en-US" smtClean="0"/>
               <a:t>Click to edit Master text styles</a:t>
             </a:r>
           </a:p>
@@ -1997,7 +1979,7 @@
           <a:p>
             <a:fld id="{5BCAD085-E8A6-8845-BD4E-CB4CCA059FC4}" type="datetimeFigureOut">
               <a:rPr lang="en-US" smtClean="0"/>
-              <a:t>5/5/26</a:t>
+              <a:t>1/27/13</a:t>
             </a:fld>
             <a:endParaRPr lang="en-US"/>
           </a:p>
@@ -2091,9 +2073,10 @@
           <a:lstStyle/>
           <a:p>
             <a:r>
-              <a:rPr lang="en-US"/>
+              <a:rPr lang="en-US" smtClean="0"/>
               <a:t>Click to edit Master title style</a:t>
             </a:r>
+            <a:endParaRPr lang="en-US"/>
           </a:p>
         </p:txBody>
       </p:sp>
@@ -2147,37 +2130,38 @@
           <a:p>
             <a:pPr lvl="0"/>
             <a:r>
-              <a:rPr lang="en-US"/>
+              <a:rPr lang="en-US" smtClean="0"/>
               <a:t>Click to edit Master text styles</a:t>
             </a:r>
           </a:p>
           <a:p>
             <a:pPr lvl="1"/>
             <a:r>
-              <a:rPr lang="en-US"/>
+              <a:rPr lang="en-US" smtClean="0"/>
               <a:t>Second level</a:t>
             </a:r>
           </a:p>
           <a:p>
             <a:pPr lvl="2"/>
             <a:r>
-              <a:rPr lang="en-US"/>
+              <a:rPr lang="en-US" smtClean="0"/>
               <a:t>Third level</a:t>
             </a:r>
           </a:p>
           <a:p>
             <a:pPr lvl="3"/>
             <a:r>
-              <a:rPr lang="en-US"/>
+              <a:rPr lang="en-US" smtClean="0"/>
               <a:t>Fourth level</a:t>
             </a:r>
           </a:p>
           <a:p>
             <a:pPr lvl="4"/>
             <a:r>
-              <a:rPr lang="en-US"/>
+              <a:rPr lang="en-US" smtClean="0"/>
               <a:t>Fifth level</a:t>
             </a:r>
+            <a:endParaRPr lang="en-US"/>
           </a:p>
         </p:txBody>
       </p:sp>
@@ -2231,37 +2215,38 @@
           <a:p>
             <a:pPr lvl="0"/>
             <a:r>
-              <a:rPr lang="en-US"/>
+              <a:rPr lang="en-US" smtClean="0"/>
               <a:t>Click to edit Master text styles</a:t>
             </a:r>
           </a:p>
           <a:p>
             <a:pPr lvl="1"/>
             <a:r>
-              <a:rPr lang="en-US"/>
+              <a:rPr lang="en-US" smtClean="0"/>
               <a:t>Second level</a:t>
             </a:r>
           </a:p>
           <a:p>
             <a:pPr lvl="2"/>
             <a:r>
-              <a:rPr lang="en-US"/>
+              <a:rPr lang="en-US" smtClean="0"/>
               <a:t>Third level</a:t>
             </a:r>
           </a:p>
           <a:p>
             <a:pPr lvl="3"/>
             <a:r>
-              <a:rPr lang="en-US"/>
+              <a:rPr lang="en-US" smtClean="0"/>
               <a:t>Fourth level</a:t>
             </a:r>
           </a:p>
           <a:p>
             <a:pPr lvl="4"/>
             <a:r>
-              <a:rPr lang="en-US"/>
+              <a:rPr lang="en-US" smtClean="0"/>
               <a:t>Fifth level</a:t>
             </a:r>
+            <a:endParaRPr lang="en-US"/>
           </a:p>
         </p:txBody>
       </p:sp>
@@ -2282,7 +2267,7 @@
           <a:p>
             <a:fld id="{5BCAD085-E8A6-8845-BD4E-CB4CCA059FC4}" type="datetimeFigureOut">
               <a:rPr lang="en-US" smtClean="0"/>
-              <a:t>5/5/26</a:t>
+              <a:t>1/27/13</a:t>
             </a:fld>
             <a:endParaRPr lang="en-US"/>
           </a:p>
@@ -2380,9 +2365,10 @@
           </a:lstStyle>
           <a:p>
             <a:r>
-              <a:rPr lang="en-US"/>
+              <a:rPr lang="en-US" smtClean="0"/>
               <a:t>Click to edit Master title style</a:t>
             </a:r>
+            <a:endParaRPr lang="en-US"/>
           </a:p>
         </p:txBody>
       </p:sp>
@@ -2445,7 +2431,7 @@
           <a:p>
             <a:pPr lvl="0"/>
             <a:r>
-              <a:rPr lang="en-US"/>
+              <a:rPr lang="en-US" smtClean="0"/>
               <a:t>Click to edit Master text styles</a:t>
             </a:r>
           </a:p>
@@ -2501,37 +2487,38 @@
           <a:p>
             <a:pPr lvl="0"/>
             <a:r>
-              <a:rPr lang="en-US"/>
+              <a:rPr lang="en-US" smtClean="0"/>
               <a:t>Click to edit Master text styles</a:t>
             </a:r>
           </a:p>
           <a:p>
             <a:pPr lvl="1"/>
             <a:r>
-              <a:rPr lang="en-US"/>
+              <a:rPr lang="en-US" smtClean="0"/>
               <a:t>Second level</a:t>
             </a:r>
           </a:p>
           <a:p>
             <a:pPr lvl="2"/>
             <a:r>
-              <a:rPr lang="en-US"/>
+              <a:rPr lang="en-US" smtClean="0"/>
               <a:t>Third level</a:t>
             </a:r>
           </a:p>
           <a:p>
             <a:pPr lvl="3"/>
             <a:r>
-              <a:rPr lang="en-US"/>
+              <a:rPr lang="en-US" smtClean="0"/>
               <a:t>Fourth level</a:t>
             </a:r>
           </a:p>
           <a:p>
             <a:pPr lvl="4"/>
             <a:r>
-              <a:rPr lang="en-US"/>
+              <a:rPr lang="en-US" smtClean="0"/>
               <a:t>Fifth level</a:t>
             </a:r>
+            <a:endParaRPr lang="en-US"/>
           </a:p>
         </p:txBody>
       </p:sp>
@@ -2594,7 +2581,7 @@
           <a:p>
             <a:pPr lvl="0"/>
             <a:r>
-              <a:rPr lang="en-US"/>
+              <a:rPr lang="en-US" smtClean="0"/>
               <a:t>Click to edit Master text styles</a:t>
             </a:r>
           </a:p>
@@ -2650,37 +2637,38 @@
           <a:p>
             <a:pPr lvl="0"/>
             <a:r>
-              <a:rPr lang="en-US"/>
+              <a:rPr lang="en-US" smtClean="0"/>
               <a:t>Click to edit Master text styles</a:t>
             </a:r>
           </a:p>
           <a:p>
             <a:pPr lvl="1"/>
             <a:r>
-              <a:rPr lang="en-US"/>
+              <a:rPr lang="en-US" smtClean="0"/>
               <a:t>Second level</a:t>
             </a:r>
           </a:p>
           <a:p>
             <a:pPr lvl="2"/>
             <a:r>
-              <a:rPr lang="en-US"/>
+              <a:rPr lang="en-US" smtClean="0"/>
               <a:t>Third level</a:t>
             </a:r>
           </a:p>
           <a:p>
             <a:pPr lvl="3"/>
             <a:r>
-              <a:rPr lang="en-US"/>
+              <a:rPr lang="en-US" smtClean="0"/>
               <a:t>Fourth level</a:t>
             </a:r>
           </a:p>
           <a:p>
             <a:pPr lvl="4"/>
             <a:r>
-              <a:rPr lang="en-US"/>
+              <a:rPr lang="en-US" smtClean="0"/>
               <a:t>Fifth level</a:t>
             </a:r>
+            <a:endParaRPr lang="en-US"/>
           </a:p>
         </p:txBody>
       </p:sp>
@@ -2701,7 +2689,7 @@
           <a:p>
             <a:fld id="{5BCAD085-E8A6-8845-BD4E-CB4CCA059FC4}" type="datetimeFigureOut">
               <a:rPr lang="en-US" smtClean="0"/>
-              <a:t>5/5/26</a:t>
+              <a:t>1/27/13</a:t>
             </a:fld>
             <a:endParaRPr lang="en-US"/>
           </a:p>
@@ -2795,9 +2783,10 @@
           <a:lstStyle/>
           <a:p>
             <a:r>
-              <a:rPr lang="en-US"/>
+              <a:rPr lang="en-US" smtClean="0"/>
               <a:t>Click to edit Master title style</a:t>
             </a:r>
+            <a:endParaRPr lang="en-US"/>
           </a:p>
         </p:txBody>
       </p:sp>
@@ -2818,7 +2807,7 @@
           <a:p>
             <a:fld id="{5BCAD085-E8A6-8845-BD4E-CB4CCA059FC4}" type="datetimeFigureOut">
               <a:rPr lang="en-US" smtClean="0"/>
-              <a:t>5/5/26</a:t>
+              <a:t>1/27/13</a:t>
             </a:fld>
             <a:endParaRPr lang="en-US"/>
           </a:p>
@@ -2913,7 +2902,7 @@
           <a:p>
             <a:fld id="{5BCAD085-E8A6-8845-BD4E-CB4CCA059FC4}" type="datetimeFigureOut">
               <a:rPr lang="en-US" smtClean="0"/>
-              <a:t>5/5/26</a:t>
+              <a:t>1/27/13</a:t>
             </a:fld>
             <a:endParaRPr lang="en-US"/>
           </a:p>
@@ -3016,9 +3005,10 @@
           </a:lstStyle>
           <a:p>
             <a:r>
-              <a:rPr lang="en-US"/>
+              <a:rPr lang="en-US" smtClean="0"/>
               <a:t>Click to edit Master title style</a:t>
             </a:r>
+            <a:endParaRPr lang="en-US"/>
           </a:p>
         </p:txBody>
       </p:sp>
@@ -3072,37 +3062,38 @@
           <a:p>
             <a:pPr lvl="0"/>
             <a:r>
-              <a:rPr lang="en-US"/>
+              <a:rPr lang="en-US" smtClean="0"/>
               <a:t>Click to edit Master text styles</a:t>
             </a:r>
           </a:p>
           <a:p>
             <a:pPr lvl="1"/>
             <a:r>
-              <a:rPr lang="en-US"/>
+              <a:rPr lang="en-US" smtClean="0"/>
               <a:t>Second level</a:t>
             </a:r>
           </a:p>
           <a:p>
             <a:pPr lvl="2"/>
             <a:r>
-              <a:rPr lang="en-US"/>
+              <a:rPr lang="en-US" smtClean="0"/>
               <a:t>Third level</a:t>
             </a:r>
           </a:p>
           <a:p>
             <a:pPr lvl="3"/>
             <a:r>
-              <a:rPr lang="en-US"/>
+              <a:rPr lang="en-US" smtClean="0"/>
               <a:t>Fourth level</a:t>
             </a:r>
           </a:p>
           <a:p>
             <a:pPr lvl="4"/>
             <a:r>
-              <a:rPr lang="en-US"/>
+              <a:rPr lang="en-US" smtClean="0"/>
               <a:t>Fifth level</a:t>
             </a:r>
+            <a:endParaRPr lang="en-US"/>
           </a:p>
         </p:txBody>
       </p:sp>
@@ -3165,7 +3156,7 @@
           <a:p>
             <a:pPr lvl="0"/>
             <a:r>
-              <a:rPr lang="en-US"/>
+              <a:rPr lang="en-US" smtClean="0"/>
               <a:t>Click to edit Master text styles</a:t>
             </a:r>
           </a:p>
@@ -3188,7 +3179,7 @@
           <a:p>
             <a:fld id="{5BCAD085-E8A6-8845-BD4E-CB4CCA059FC4}" type="datetimeFigureOut">
               <a:rPr lang="en-US" smtClean="0"/>
-              <a:t>5/5/26</a:t>
+              <a:t>1/27/13</a:t>
             </a:fld>
             <a:endParaRPr lang="en-US"/>
           </a:p>
@@ -3291,9 +3282,10 @@
           </a:lstStyle>
           <a:p>
             <a:r>
-              <a:rPr lang="en-US"/>
+              <a:rPr lang="en-US" smtClean="0"/>
               <a:t>Click to edit Master title style</a:t>
             </a:r>
+            <a:endParaRPr lang="en-US"/>
           </a:p>
         </p:txBody>
       </p:sp>
@@ -3417,7 +3409,7 @@
           <a:p>
             <a:pPr lvl="0"/>
             <a:r>
-              <a:rPr lang="en-US"/>
+              <a:rPr lang="en-US" smtClean="0"/>
               <a:t>Click to edit Master text styles</a:t>
             </a:r>
           </a:p>
@@ -3440,7 +3432,7 @@
           <a:p>
             <a:fld id="{5BCAD085-E8A6-8845-BD4E-CB4CCA059FC4}" type="datetimeFigureOut">
               <a:rPr lang="en-US" smtClean="0"/>
-              <a:t>5/5/26</a:t>
+              <a:t>1/27/13</a:t>
             </a:fld>
             <a:endParaRPr lang="en-US"/>
           </a:p>
@@ -3549,9 +3541,10 @@
           <a:lstStyle/>
           <a:p>
             <a:r>
-              <a:rPr lang="en-US"/>
+              <a:rPr lang="en-US" smtClean="0"/>
               <a:t>Click to edit Master title style</a:t>
             </a:r>
+            <a:endParaRPr lang="en-US"/>
           </a:p>
         </p:txBody>
       </p:sp>
@@ -3582,37 +3575,38 @@
           <a:p>
             <a:pPr lvl="0"/>
             <a:r>
-              <a:rPr lang="en-US"/>
+              <a:rPr lang="en-US" smtClean="0"/>
               <a:t>Click to edit Master text styles</a:t>
             </a:r>
           </a:p>
           <a:p>
             <a:pPr lvl="1"/>
             <a:r>
-              <a:rPr lang="en-US"/>
+              <a:rPr lang="en-US" smtClean="0"/>
               <a:t>Second level</a:t>
             </a:r>
           </a:p>
           <a:p>
             <a:pPr lvl="2"/>
             <a:r>
-              <a:rPr lang="en-US"/>
+              <a:rPr lang="en-US" smtClean="0"/>
               <a:t>Third level</a:t>
             </a:r>
           </a:p>
           <a:p>
             <a:pPr lvl="3"/>
             <a:r>
-              <a:rPr lang="en-US"/>
+              <a:rPr lang="en-US" smtClean="0"/>
               <a:t>Fourth level</a:t>
             </a:r>
           </a:p>
           <a:p>
             <a:pPr lvl="4"/>
             <a:r>
-              <a:rPr lang="en-US"/>
+              <a:rPr lang="en-US" smtClean="0"/>
               <a:t>Fifth level</a:t>
             </a:r>
+            <a:endParaRPr lang="en-US"/>
           </a:p>
         </p:txBody>
       </p:sp>
@@ -3651,7 +3645,7 @@
           <a:p>
             <a:fld id="{5BCAD085-E8A6-8845-BD4E-CB4CCA059FC4}" type="datetimeFigureOut">
               <a:rPr lang="en-US" smtClean="0"/>
-              <a:t>5/5/26</a:t>
+              <a:t>1/27/13</a:t>
             </a:fld>
             <a:endParaRPr lang="en-US"/>
           </a:p>
@@ -4010,7 +4004,7 @@
 </file>
 
 <file path=ppt/slides/slide1.xml><?xml version="1.0" encoding="utf-8"?>
-<p:sld xmlns:a="http://schemas.openxmlformats.org/drawingml/2006/main" xmlns:r="http://schemas.openxmlformats.org/officeDocument/2006/relationships" xmlns:p="http://schemas.openxmlformats.org/presentationml/2006/main">
+<p:sld xmlns:a="http://schemas.openxmlformats.org/drawingml/2006/main" xmlns:p="http://schemas.openxmlformats.org/presentationml/2006/main" xmlns:r="http://schemas.openxmlformats.org/officeDocument/2006/relationships">
   <p:cSld>
     <p:spTree>
       <p:nvGrpSpPr>
@@ -4018,14 +4012,7 @@
         <p:cNvGrpSpPr/>
         <p:nvPr/>
       </p:nvGrpSpPr>
-      <p:grpSpPr>
-        <a:xfrm>
-          <a:off x="0" y="0"/>
-          <a:ext cx="0" cy="0"/>
-          <a:chOff x="0" y="0"/>
-          <a:chExt cx="0" cy="0"/>
-        </a:xfrm>
-      </p:grpSpPr>
+      <p:grpSpPr/>
       <p:sp>
         <p:nvSpPr>
           <p:cNvPr id="2" name="Rectangle 1"/>
@@ -4034,7 +4021,7 @@
         </p:nvSpPr>
         <p:spPr>
           <a:xfrm>
-            <a:off x="11575" y="0"/>
+            <a:off x="0" y="0"/>
             <a:ext cx="12188952" cy="6858000"/>
           </a:xfrm>
           <a:prstGeom prst="rect">
@@ -4066,7 +4053,6 @@
           <a:lstStyle/>
           <a:p>
             <a:pPr algn="ctr"/>
-            <a:endParaRPr/>
           </a:p>
         </p:txBody>
       </p:sp>
@@ -4110,7 +4096,6 @@
           <a:lstStyle/>
           <a:p>
             <a:pPr algn="ctr"/>
-            <a:endParaRPr/>
           </a:p>
         </p:txBody>
       </p:sp>
@@ -4154,7 +4139,6 @@
           <a:lstStyle/>
           <a:p>
             <a:pPr algn="ctr"/>
-            <a:endParaRPr/>
           </a:p>
         </p:txBody>
       </p:sp>
@@ -4182,7 +4166,7 @@
           <a:p>
             <a:pPr algn="l"/>
             <a:r>
-              <a:rPr sz="900" b="1" i="0">
+              <a:rPr b="1" i="0" sz="900">
                 <a:solidFill>
                   <a:srgbClr val="CADCFC"/>
                 </a:solidFill>
@@ -4216,7 +4200,7 @@
           <a:p>
             <a:pPr algn="l"/>
             <a:r>
-              <a:rPr sz="4400" b="1" i="0">
+              <a:rPr b="1" i="0" sz="4400">
                 <a:solidFill>
                   <a:srgbClr val="FFFFFF"/>
                 </a:solidFill>
@@ -4251,7 +4235,7 @@
           <a:p>
             <a:pPr algn="l"/>
             <a:r>
-              <a:rPr sz="1600" b="0" i="0">
+              <a:rPr b="0" i="0" sz="1600">
                 <a:solidFill>
                   <a:srgbClr val="CADCFC"/>
                 </a:solidFill>
@@ -4301,7 +4285,6 @@
           <a:lstStyle/>
           <a:p>
             <a:pPr algn="ctr"/>
-            <a:endParaRPr/>
           </a:p>
         </p:txBody>
       </p:sp>
@@ -4329,7 +4312,7 @@
           <a:p>
             <a:pPr algn="l"/>
             <a:r>
-              <a:rPr sz="1500" b="1" i="0">
+              <a:rPr b="1" i="0" sz="1500">
                 <a:solidFill>
                   <a:srgbClr val="FFFFFF"/>
                 </a:solidFill>
@@ -4363,7 +4346,7 @@
           <a:p>
             <a:pPr algn="l"/>
             <a:r>
-              <a:rPr sz="1200" b="0" i="0">
+              <a:rPr b="0" i="0" sz="1200">
                 <a:solidFill>
                   <a:srgbClr val="6B7AB8"/>
                 </a:solidFill>
@@ -4397,7 +4380,7 @@
           <a:p>
             <a:pPr algn="r"/>
             <a:r>
-              <a:rPr sz="900" b="0" i="0">
+              <a:rPr b="0" i="0" sz="900">
                 <a:solidFill>
                   <a:srgbClr val="6B7AB8"/>
                 </a:solidFill>
@@ -4416,7 +4399,7 @@
 </file>
 
 <file path=ppt/slides/slide10.xml><?xml version="1.0" encoding="utf-8"?>
-<p:sld xmlns:a="http://schemas.openxmlformats.org/drawingml/2006/main" xmlns:r="http://schemas.openxmlformats.org/officeDocument/2006/relationships" xmlns:p="http://schemas.openxmlformats.org/presentationml/2006/main">
+<p:sld xmlns:a="http://schemas.openxmlformats.org/drawingml/2006/main" xmlns:p="http://schemas.openxmlformats.org/presentationml/2006/main" xmlns:r="http://schemas.openxmlformats.org/officeDocument/2006/relationships">
   <p:cSld>
     <p:spTree>
       <p:nvGrpSpPr>
@@ -4424,14 +4407,7 @@
         <p:cNvGrpSpPr/>
         <p:nvPr/>
       </p:nvGrpSpPr>
-      <p:grpSpPr>
-        <a:xfrm>
-          <a:off x="0" y="0"/>
-          <a:ext cx="0" cy="0"/>
-          <a:chOff x="0" y="0"/>
-          <a:chExt cx="0" cy="0"/>
-        </a:xfrm>
-      </p:grpSpPr>
+      <p:grpSpPr/>
       <p:sp>
         <p:nvSpPr>
           <p:cNvPr id="2" name="Rectangle 1"/>
@@ -4472,7 +4448,6 @@
           <a:lstStyle/>
           <a:p>
             <a:pPr algn="ctr"/>
-            <a:endParaRPr/>
           </a:p>
         </p:txBody>
       </p:sp>
@@ -4516,7 +4491,6 @@
           <a:lstStyle/>
           <a:p>
             <a:pPr algn="ctr"/>
-            <a:endParaRPr/>
           </a:p>
         </p:txBody>
       </p:sp>
@@ -4560,7 +4534,6 @@
           <a:lstStyle/>
           <a:p>
             <a:pPr algn="ctr"/>
-            <a:endParaRPr/>
           </a:p>
         </p:txBody>
       </p:sp>
@@ -4588,7 +4561,7 @@
           <a:p>
             <a:pPr algn="l"/>
             <a:r>
-              <a:rPr sz="900" b="1" i="0">
+              <a:rPr b="1" i="0" sz="900">
                 <a:solidFill>
                   <a:srgbClr val="CADCFC"/>
                 </a:solidFill>
@@ -4622,7 +4595,7 @@
           <a:p>
             <a:pPr algn="l"/>
             <a:r>
-              <a:rPr sz="3400" b="1" i="0">
+              <a:rPr b="1" i="0" sz="3400">
                 <a:solidFill>
                   <a:srgbClr val="FFFFFF"/>
                 </a:solidFill>
@@ -4672,7 +4645,6 @@
           <a:lstStyle/>
           <a:p>
             <a:pPr algn="ctr"/>
-            <a:endParaRPr/>
           </a:p>
         </p:txBody>
       </p:sp>
@@ -4716,7 +4688,6 @@
           <a:lstStyle/>
           <a:p>
             <a:pPr algn="ctr"/>
-            <a:endParaRPr/>
           </a:p>
         </p:txBody>
       </p:sp>
@@ -4744,7 +4715,7 @@
           <a:p>
             <a:pPr algn="l"/>
             <a:r>
-              <a:rPr sz="1300" b="1" i="0">
+              <a:rPr b="1" i="0" sz="1300">
                 <a:solidFill>
                   <a:srgbClr val="CADCFC"/>
                 </a:solidFill>
@@ -4762,7 +4733,7 @@
         </p:nvSpPr>
         <p:spPr>
           <a:xfrm>
-            <a:off x="594360" y="2286000"/>
+            <a:off x="594360" y="2148840"/>
             <a:ext cx="5394960" cy="347472"/>
           </a:xfrm>
           <a:prstGeom prst="rect">
@@ -4778,12 +4749,12 @@
           <a:p>
             <a:pPr algn="l"/>
             <a:r>
-              <a:rPr sz="1100" b="1" i="0">
+              <a:rPr b="1" i="0" sz="1100">
                 <a:solidFill>
                   <a:srgbClr val="2ECC71"/>
                 </a:solidFill>
               </a:rPr>
-              <a:t>✓  Capability gaps (self-evaluation)</a:t>
+              <a:t>✓  Multi-agent debate  ·  Claude Code Opus 4.7  ↔  Codex GPT-5.5</a:t>
             </a:r>
           </a:p>
         </p:txBody>
@@ -4796,8 +4767,8 @@
         </p:nvSpPr>
         <p:spPr>
           <a:xfrm>
-            <a:off x="594360" y="2615184"/>
-            <a:ext cx="5394960" cy="502920"/>
+            <a:off x="594360" y="2459736"/>
+            <a:ext cx="5394960" cy="960120"/>
           </a:xfrm>
           <a:prstGeom prst="rect">
             <a:avLst/>
@@ -4812,13 +4783,14 @@
           <a:p>
             <a:pPr algn="l"/>
             <a:r>
-              <a:rPr sz="1000" b="0" i="0">
+              <a:rPr b="0" i="0" sz="1000">
                 <a:solidFill>
                   <a:srgbClr val="FFFFFF"/>
                 </a:solidFill>
               </a:rPr>
-              <a:t>7 of 7 gaps addressed in our walkthroughs;
-no surveyed platform addressed more than 2</a:t>
+              <a:t>Claude Code: brainstorm · implementation · tests · iterations.
+Codex GPT-5.5: independent evaluation + validation review.
+Each finding either got fixed in code or dismissed in writing.</a:t>
             </a:r>
           </a:p>
         </p:txBody>
@@ -4831,7 +4803,7 @@
         </p:nvSpPr>
         <p:spPr>
           <a:xfrm>
-            <a:off x="594360" y="3200400"/>
+            <a:off x="594360" y="3474720"/>
             <a:ext cx="5394960" cy="347472"/>
           </a:xfrm>
           <a:prstGeom prst="rect">
@@ -4847,12 +4819,12 @@
           <a:p>
             <a:pPr algn="l"/>
             <a:r>
-              <a:rPr sz="1100" b="1" i="0">
+              <a:rPr b="1" i="0" sz="1100">
                 <a:solidFill>
                   <a:srgbClr val="2ECC71"/>
                 </a:solidFill>
               </a:rPr>
-              <a:t>✓  Decision-critical attributes inline</a:t>
+              <a:t>✓  Small-scale user testing  ·  family · friends · classmates</a:t>
             </a:r>
           </a:p>
         </p:txBody>
@@ -4865,8 +4837,8 @@
         </p:nvSpPr>
         <p:spPr>
           <a:xfrm>
-            <a:off x="594360" y="3529584"/>
-            <a:ext cx="5394960" cy="502920"/>
+            <a:off x="594360" y="3785616"/>
+            <a:ext cx="5394960" cy="960120"/>
           </a:xfrm>
           <a:prstGeom prst="rect">
             <a:avLst/>
@@ -4881,13 +4853,14 @@
           <a:p>
             <a:pPr algn="l"/>
             <a:r>
-              <a:rPr sz="1000" b="0" i="0">
+              <a:rPr b="0" i="0" sz="1000">
                 <a:solidFill>
                   <a:srgbClr val="FFFFFF"/>
                 </a:solidFill>
               </a:rPr>
-              <a:t>Screen size, ecosystem, camera, capacity,
-material — surfaced on every pick</a:t>
+              <a:t>Confirmed that structured recommendations, preference
+continuity, and side-by-side compare made the decision
+process easier to follow.</a:t>
             </a:r>
           </a:p>
         </p:txBody>
@@ -4900,7 +4873,7 @@
         </p:nvSpPr>
         <p:spPr>
           <a:xfrm>
-            <a:off x="594360" y="4114800"/>
+            <a:off x="594360" y="4800600"/>
             <a:ext cx="5394960" cy="347472"/>
           </a:xfrm>
           <a:prstGeom prst="rect">
@@ -4916,12 +4889,12 @@
           <a:p>
             <a:pPr algn="l"/>
             <a:r>
-              <a:rPr sz="1100" b="1" i="0">
+              <a:rPr b="1" i="0" sz="1100">
                 <a:solidFill>
                   <a:srgbClr val="2ECC71"/>
                 </a:solidFill>
               </a:rPr>
-              <a:t>✓  End-to-end in five scenes</a:t>
+              <a:t>✓  Industry mentor input</a:t>
             </a:r>
           </a:p>
         </p:txBody>
@@ -4934,8 +4907,8 @@
         </p:nvSpPr>
         <p:spPr>
           <a:xfrm>
-            <a:off x="594360" y="4443984"/>
-            <a:ext cx="5394960" cy="502920"/>
+            <a:off x="594360" y="5111496"/>
+            <a:ext cx="5394960" cy="960120"/>
           </a:xfrm>
           <a:prstGeom prst="rect">
             <a:avLst/>
@@ -4950,89 +4923,21 @@
           <a:p>
             <a:pPr algn="l"/>
             <a:r>
-              <a:rPr sz="1000" b="0" i="0">
+              <a:rPr b="0" i="0" sz="1000">
                 <a:solidFill>
                   <a:srgbClr val="FFFFFF"/>
                 </a:solidFill>
               </a:rPr>
-              <a:t>Need → clarify → 3 picks → why-this-fits →
-lifecycle. Zero external page navigation.</a:t>
-            </a:r>
-          </a:p>
-        </p:txBody>
-      </p:sp>
-      <p:sp>
-        <p:nvSpPr>
-          <p:cNvPr id="16" name="TextBox 15"/>
-          <p:cNvSpPr txBox="1"/>
-          <p:nvPr/>
-        </p:nvSpPr>
-        <p:spPr>
-          <a:xfrm>
-            <a:off x="594360" y="5029200"/>
-            <a:ext cx="5394960" cy="347472"/>
-          </a:xfrm>
-          <a:prstGeom prst="rect">
-            <a:avLst/>
-          </a:prstGeom>
-          <a:noFill/>
-        </p:spPr>
-        <p:txBody>
-          <a:bodyPr wrap="square">
-            <a:spAutoFit/>
-          </a:bodyPr>
-          <a:lstStyle/>
-          <a:p>
-            <a:pPr algn="l"/>
-            <a:r>
-              <a:rPr sz="1100" b="1" i="0">
-                <a:solidFill>
-                  <a:srgbClr val="2ECC71"/>
-                </a:solidFill>
-              </a:rPr>
-              <a:t>✓  Trade-offs visible, not hidden</a:t>
-            </a:r>
-          </a:p>
-        </p:txBody>
-      </p:sp>
-      <p:sp>
-        <p:nvSpPr>
-          <p:cNvPr id="17" name="TextBox 16"/>
-          <p:cNvSpPr txBox="1"/>
-          <p:nvPr/>
-        </p:nvSpPr>
-        <p:spPr>
-          <a:xfrm>
-            <a:off x="594360" y="5358384"/>
-            <a:ext cx="5394960" cy="502920"/>
-          </a:xfrm>
-          <a:prstGeom prst="rect">
-            <a:avLst/>
-          </a:prstGeom>
-          <a:noFill/>
-        </p:spPr>
-        <p:txBody>
-          <a:bodyPr wrap="square">
-            <a:spAutoFit/>
-          </a:bodyPr>
-          <a:lstStyle/>
-          <a:p>
-            <a:pPr algn="l"/>
-            <a:r>
-              <a:rPr sz="1000" b="0" i="0">
-                <a:solidFill>
-                  <a:srgbClr val="FFFFFF"/>
-                </a:solidFill>
-              </a:rPr>
-              <a:t>Every pick shows a ✓/✗/? checklist mapping
-your chips to match status — no surprises</a:t>
-            </a:r>
-          </a:p>
-        </p:txBody>
-      </p:sp>
-      <p:sp>
-        <p:nvSpPr>
-          <p:cNvPr id="18" name="Rectangle 17"/>
+              <a:t>Senior Analytics Manager · Sr. BI Engineer · Data Scientist · Data
+Engineer (Amazon, 13 years) — input on data discipline and
+decision-support framing.</a:t>
+            </a:r>
+          </a:p>
+        </p:txBody>
+      </p:sp>
+      <p:sp>
+        <p:nvSpPr>
+          <p:cNvPr id="16" name="Rectangle 15"/>
           <p:cNvSpPr/>
           <p:nvPr/>
         </p:nvSpPr>
@@ -5070,13 +4975,12 @@
           <a:lstStyle/>
           <a:p>
             <a:pPr algn="ctr"/>
-            <a:endParaRPr/>
-          </a:p>
-        </p:txBody>
-      </p:sp>
-      <p:sp>
-        <p:nvSpPr>
-          <p:cNvPr id="19" name="TextBox 18"/>
+          </a:p>
+        </p:txBody>
+      </p:sp>
+      <p:sp>
+        <p:nvSpPr>
+          <p:cNvPr id="17" name="TextBox 16"/>
           <p:cNvSpPr txBox="1"/>
           <p:nvPr/>
         </p:nvSpPr>
@@ -5098,7 +5002,7 @@
           <a:p>
             <a:pPr algn="l"/>
             <a:r>
-              <a:rPr sz="1200" b="1" i="0">
+              <a:rPr b="1" i="0" sz="1200">
                 <a:solidFill>
                   <a:srgbClr val="CADCFC"/>
                 </a:solidFill>
@@ -5110,7 +5014,7 @@
       </p:sp>
       <p:sp>
         <p:nvSpPr>
-          <p:cNvPr id="20" name="TextBox 19"/>
+          <p:cNvPr id="18" name="TextBox 17"/>
           <p:cNvSpPr txBox="1"/>
           <p:nvPr/>
         </p:nvSpPr>
@@ -5132,7 +5036,7 @@
           <a:p>
             <a:pPr algn="l"/>
             <a:r>
-              <a:rPr sz="1050" b="1" i="0">
+              <a:rPr b="1" i="0" sz="1050">
                 <a:solidFill>
                   <a:srgbClr val="CADCFC"/>
                 </a:solidFill>
@@ -5144,7 +5048,7 @@
       </p:sp>
       <p:sp>
         <p:nvSpPr>
-          <p:cNvPr id="21" name="TextBox 20"/>
+          <p:cNvPr id="19" name="TextBox 18"/>
           <p:cNvSpPr txBox="1"/>
           <p:nvPr/>
         </p:nvSpPr>
@@ -5166,7 +5070,7 @@
           <a:p>
             <a:pPr algn="l"/>
             <a:r>
-              <a:rPr sz="950" b="0" i="0">
+              <a:rPr b="0" i="0" sz="950">
                 <a:solidFill>
                   <a:srgbClr val="FFFFFF"/>
                 </a:solidFill>
@@ -5179,7 +5083,7 @@
       </p:sp>
       <p:sp>
         <p:nvSpPr>
-          <p:cNvPr id="22" name="TextBox 21"/>
+          <p:cNvPr id="20" name="TextBox 19"/>
           <p:cNvSpPr txBox="1"/>
           <p:nvPr/>
         </p:nvSpPr>
@@ -5201,7 +5105,7 @@
           <a:p>
             <a:pPr algn="l"/>
             <a:r>
-              <a:rPr sz="1050" b="1" i="0">
+              <a:rPr b="1" i="0" sz="1050">
                 <a:solidFill>
                   <a:srgbClr val="CADCFC"/>
                 </a:solidFill>
@@ -5213,7 +5117,7 @@
       </p:sp>
       <p:sp>
         <p:nvSpPr>
-          <p:cNvPr id="23" name="TextBox 22"/>
+          <p:cNvPr id="21" name="TextBox 20"/>
           <p:cNvSpPr txBox="1"/>
           <p:nvPr/>
         </p:nvSpPr>
@@ -5235,7 +5139,7 @@
           <a:p>
             <a:pPr algn="l"/>
             <a:r>
-              <a:rPr sz="950" b="0" i="0">
+              <a:rPr b="0" i="0" sz="950">
                 <a:solidFill>
                   <a:srgbClr val="FFFFFF"/>
                 </a:solidFill>
@@ -5248,7 +5152,7 @@
       </p:sp>
       <p:sp>
         <p:nvSpPr>
-          <p:cNvPr id="24" name="TextBox 23"/>
+          <p:cNvPr id="22" name="TextBox 21"/>
           <p:cNvSpPr txBox="1"/>
           <p:nvPr/>
         </p:nvSpPr>
@@ -5270,7 +5174,7 @@
           <a:p>
             <a:pPr algn="l"/>
             <a:r>
-              <a:rPr sz="1050" b="1" i="0">
+              <a:rPr b="1" i="0" sz="1050">
                 <a:solidFill>
                   <a:srgbClr val="CADCFC"/>
                 </a:solidFill>
@@ -5282,7 +5186,7 @@
       </p:sp>
       <p:sp>
         <p:nvSpPr>
-          <p:cNvPr id="25" name="TextBox 24"/>
+          <p:cNvPr id="23" name="TextBox 22"/>
           <p:cNvSpPr txBox="1"/>
           <p:nvPr/>
         </p:nvSpPr>
@@ -5304,7 +5208,7 @@
           <a:p>
             <a:pPr algn="l"/>
             <a:r>
-              <a:rPr sz="950" b="0" i="0">
+              <a:rPr b="0" i="0" sz="950">
                 <a:solidFill>
                   <a:srgbClr val="FFFFFF"/>
                 </a:solidFill>
@@ -5317,7 +5221,7 @@
       </p:sp>
       <p:sp>
         <p:nvSpPr>
-          <p:cNvPr id="26" name="TextBox 25"/>
+          <p:cNvPr id="24" name="TextBox 23"/>
           <p:cNvSpPr txBox="1"/>
           <p:nvPr/>
         </p:nvSpPr>
@@ -5339,7 +5243,7 @@
           <a:p>
             <a:pPr algn="l"/>
             <a:r>
-              <a:rPr sz="1050" b="1" i="0">
+              <a:rPr b="1" i="0" sz="1050">
                 <a:solidFill>
                   <a:srgbClr val="CADCFC"/>
                 </a:solidFill>
@@ -5351,7 +5255,7 @@
       </p:sp>
       <p:sp>
         <p:nvSpPr>
-          <p:cNvPr id="27" name="TextBox 26"/>
+          <p:cNvPr id="25" name="TextBox 24"/>
           <p:cNvSpPr txBox="1"/>
           <p:nvPr/>
         </p:nvSpPr>
@@ -5373,7 +5277,7 @@
           <a:p>
             <a:pPr algn="l"/>
             <a:r>
-              <a:rPr sz="950" b="0" i="0">
+              <a:rPr b="0" i="0" sz="950">
                 <a:solidFill>
                   <a:srgbClr val="FFFFFF"/>
                 </a:solidFill>
@@ -5386,7 +5290,7 @@
       </p:sp>
       <p:sp>
         <p:nvSpPr>
-          <p:cNvPr id="28" name="TextBox 27"/>
+          <p:cNvPr id="26" name="TextBox 25"/>
           <p:cNvSpPr txBox="1"/>
           <p:nvPr/>
         </p:nvSpPr>
@@ -5408,7 +5312,7 @@
           <a:p>
             <a:pPr algn="l"/>
             <a:r>
-              <a:rPr sz="1050" b="1" i="0">
+              <a:rPr b="1" i="0" sz="1050">
                 <a:solidFill>
                   <a:srgbClr val="CADCFC"/>
                 </a:solidFill>
@@ -5420,7 +5324,7 @@
       </p:sp>
       <p:sp>
         <p:nvSpPr>
-          <p:cNvPr id="29" name="TextBox 28"/>
+          <p:cNvPr id="27" name="TextBox 26"/>
           <p:cNvSpPr txBox="1"/>
           <p:nvPr/>
         </p:nvSpPr>
@@ -5442,7 +5346,7 @@
           <a:p>
             <a:pPr algn="l"/>
             <a:r>
-              <a:rPr sz="950" b="0" i="0">
+              <a:rPr b="0" i="0" sz="950">
                 <a:solidFill>
                   <a:srgbClr val="FFFFFF"/>
                 </a:solidFill>
@@ -5455,7 +5359,7 @@
       </p:sp>
       <p:sp>
         <p:nvSpPr>
-          <p:cNvPr id="30" name="Rectangle 29"/>
+          <p:cNvPr id="28" name="Rectangle 27"/>
           <p:cNvSpPr/>
           <p:nvPr/>
         </p:nvSpPr>
@@ -5493,13 +5397,12 @@
           <a:lstStyle/>
           <a:p>
             <a:pPr algn="ctr"/>
-            <a:endParaRPr/>
-          </a:p>
-        </p:txBody>
-      </p:sp>
-      <p:sp>
-        <p:nvSpPr>
-          <p:cNvPr id="31" name="TextBox 30"/>
+          </a:p>
+        </p:txBody>
+      </p:sp>
+      <p:sp>
+        <p:nvSpPr>
+          <p:cNvPr id="29" name="TextBox 28"/>
           <p:cNvSpPr txBox="1"/>
           <p:nvPr/>
         </p:nvSpPr>
@@ -5521,19 +5424,19 @@
           <a:p>
             <a:pPr algn="ctr"/>
             <a:r>
-              <a:rPr sz="1000" b="0" i="1">
+              <a:rPr b="0" i="1" sz="1000">
                 <a:solidFill>
                   <a:srgbClr val="CADCFC"/>
                 </a:solidFill>
               </a:rPr>
-              <a:t>Heuristic self-assessment against the seven capability gaps in our evaluation  ·  formal user study is future work (see Slide 11)</a:t>
-            </a:r>
-          </a:p>
-        </p:txBody>
-      </p:sp>
-      <p:sp>
-        <p:nvSpPr>
-          <p:cNvPr id="32" name="TextBox 31"/>
+              <a:t>Self-evaluation + small-scale user testing (family · friends · classmates)  ·  formal study is future work (see Slide 11)</a:t>
+            </a:r>
+          </a:p>
+        </p:txBody>
+      </p:sp>
+      <p:sp>
+        <p:nvSpPr>
+          <p:cNvPr id="30" name="TextBox 29"/>
           <p:cNvSpPr txBox="1"/>
           <p:nvPr/>
         </p:nvSpPr>
@@ -5555,7 +5458,7 @@
           <a:p>
             <a:pPr algn="r"/>
             <a:r>
-              <a:rPr sz="900" b="0" i="0">
+              <a:rPr b="0" i="0" sz="900">
                 <a:solidFill>
                   <a:srgbClr val="6B7AB8"/>
                 </a:solidFill>
@@ -5574,7 +5477,7 @@
 </file>
 
 <file path=ppt/slides/slide11.xml><?xml version="1.0" encoding="utf-8"?>
-<p:sld xmlns:a="http://schemas.openxmlformats.org/drawingml/2006/main" xmlns:r="http://schemas.openxmlformats.org/officeDocument/2006/relationships" xmlns:p="http://schemas.openxmlformats.org/presentationml/2006/main">
+<p:sld xmlns:a="http://schemas.openxmlformats.org/drawingml/2006/main" xmlns:p="http://schemas.openxmlformats.org/presentationml/2006/main" xmlns:r="http://schemas.openxmlformats.org/officeDocument/2006/relationships">
   <p:cSld>
     <p:spTree>
       <p:nvGrpSpPr>
@@ -5582,14 +5485,7 @@
         <p:cNvGrpSpPr/>
         <p:nvPr/>
       </p:nvGrpSpPr>
-      <p:grpSpPr>
-        <a:xfrm>
-          <a:off x="0" y="0"/>
-          <a:ext cx="0" cy="0"/>
-          <a:chOff x="0" y="0"/>
-          <a:chExt cx="0" cy="0"/>
-        </a:xfrm>
-      </p:grpSpPr>
+      <p:grpSpPr/>
       <p:sp>
         <p:nvSpPr>
           <p:cNvPr id="2" name="Rectangle 1"/>
@@ -5630,7 +5526,6 @@
           <a:lstStyle/>
           <a:p>
             <a:pPr algn="ctr"/>
-            <a:endParaRPr/>
           </a:p>
         </p:txBody>
       </p:sp>
@@ -5674,7 +5569,6 @@
           <a:lstStyle/>
           <a:p>
             <a:pPr algn="ctr"/>
-            <a:endParaRPr/>
           </a:p>
         </p:txBody>
       </p:sp>
@@ -5718,7 +5612,6 @@
           <a:lstStyle/>
           <a:p>
             <a:pPr algn="ctr"/>
-            <a:endParaRPr/>
           </a:p>
         </p:txBody>
       </p:sp>
@@ -5746,7 +5639,7 @@
           <a:p>
             <a:pPr algn="l"/>
             <a:r>
-              <a:rPr sz="900" b="1" i="0">
+              <a:rPr b="1" i="0" sz="900">
                 <a:solidFill>
                   <a:srgbClr val="1E2761"/>
                 </a:solidFill>
@@ -5780,7 +5673,7 @@
           <a:p>
             <a:pPr algn="l"/>
             <a:r>
-              <a:rPr sz="2800" b="1" i="0">
+              <a:rPr b="1" i="0" sz="2800">
                 <a:solidFill>
                   <a:srgbClr val="1E2761"/>
                 </a:solidFill>
@@ -5830,7 +5723,6 @@
           <a:lstStyle/>
           <a:p>
             <a:pPr algn="ctr"/>
-            <a:endParaRPr/>
           </a:p>
         </p:txBody>
       </p:sp>
@@ -5874,7 +5766,6 @@
           <a:lstStyle/>
           <a:p>
             <a:pPr algn="ctr"/>
-            <a:endParaRPr/>
           </a:p>
         </p:txBody>
       </p:sp>
@@ -5902,7 +5793,7 @@
           <a:p>
             <a:pPr algn="l"/>
             <a:r>
-              <a:rPr sz="1200" b="1" i="0">
+              <a:rPr b="1" i="0" sz="1200">
                 <a:solidFill>
                   <a:srgbClr val="FFFFFF"/>
                 </a:solidFill>
@@ -5952,7 +5843,6 @@
           <a:lstStyle/>
           <a:p>
             <a:pPr algn="ctr"/>
-            <a:endParaRPr/>
           </a:p>
         </p:txBody>
       </p:sp>
@@ -5980,7 +5870,7 @@
           <a:p>
             <a:pPr algn="l"/>
             <a:r>
-              <a:rPr sz="1200" b="1" i="0">
+              <a:rPr b="1" i="0" sz="1200">
                 <a:solidFill>
                   <a:srgbClr val="FFFFFF"/>
                 </a:solidFill>
@@ -6030,7 +5920,6 @@
           <a:lstStyle/>
           <a:p>
             <a:pPr algn="ctr"/>
-            <a:endParaRPr/>
           </a:p>
         </p:txBody>
       </p:sp>
@@ -6058,7 +5947,7 @@
           <a:p>
             <a:pPr algn="l"/>
             <a:r>
-              <a:rPr sz="1200" b="1" i="0">
+              <a:rPr b="1" i="0" sz="1200">
                 <a:solidFill>
                   <a:srgbClr val="FFFFFF"/>
                 </a:solidFill>
@@ -6092,7 +5981,7 @@
           <a:p>
             <a:pPr algn="l"/>
             <a:r>
-              <a:rPr sz="1000" b="0" i="0">
+              <a:rPr b="0" i="0" sz="1000">
                 <a:solidFill>
                   <a:srgbClr val="FFFFFF"/>
                 </a:solidFill>
@@ -6127,13 +6016,13 @@
           <a:p>
             <a:pPr algn="l"/>
             <a:r>
-              <a:rPr sz="1000" b="0" i="0">
+              <a:rPr b="0" i="0" sz="1000">
                 <a:solidFill>
                   <a:srgbClr val="FFFFFF"/>
                 </a:solidFill>
               </a:rPr>
-              <a:t>⚠  No formal user study —
-    heuristic evaluation only</a:t>
+              <a:t>⚠  Small-scale user testing —
+    family, friends, classmates only</a:t>
             </a:r>
           </a:p>
         </p:txBody>
@@ -6162,7 +6051,7 @@
           <a:p>
             <a:pPr algn="l"/>
             <a:r>
-              <a:rPr sz="1000" b="0" i="0">
+              <a:rPr b="0" i="0" sz="1000">
                 <a:solidFill>
                   <a:srgbClr val="FFFFFF"/>
                 </a:solidFill>
@@ -6197,7 +6086,7 @@
           <a:p>
             <a:pPr algn="l"/>
             <a:r>
-              <a:rPr sz="1000" b="0" i="0">
+              <a:rPr b="0" i="0" sz="1000">
                 <a:solidFill>
                   <a:srgbClr val="FFFFFF"/>
                 </a:solidFill>
@@ -6232,7 +6121,7 @@
           <a:p>
             <a:pPr algn="l"/>
             <a:r>
-              <a:rPr sz="1000" b="0" i="0">
+              <a:rPr b="0" i="0" sz="1000">
                 <a:solidFill>
                   <a:srgbClr val="FFFFFF"/>
                 </a:solidFill>
@@ -6267,7 +6156,7 @@
           <a:p>
             <a:pPr algn="l"/>
             <a:r>
-              <a:rPr sz="1000" b="0" i="0">
+              <a:rPr b="0" i="0" sz="1000">
                 <a:solidFill>
                   <a:srgbClr val="FFFFFF"/>
                 </a:solidFill>
@@ -6302,7 +6191,7 @@
           <a:p>
             <a:pPr algn="l"/>
             <a:r>
-              <a:rPr sz="1000" b="0" i="0">
+              <a:rPr b="0" i="0" sz="1000">
                 <a:solidFill>
                   <a:srgbClr val="FFFFFF"/>
                 </a:solidFill>
@@ -6337,7 +6226,7 @@
           <a:p>
             <a:pPr algn="l"/>
             <a:r>
-              <a:rPr sz="1000" b="0" i="0">
+              <a:rPr b="0" i="0" sz="1000">
                 <a:solidFill>
                   <a:srgbClr val="FFFFFF"/>
                 </a:solidFill>
@@ -6372,7 +6261,7 @@
           <a:p>
             <a:pPr algn="l"/>
             <a:r>
-              <a:rPr sz="1000" b="0" i="0">
+              <a:rPr b="0" i="0" sz="1000">
                 <a:solidFill>
                   <a:srgbClr val="FFFFFF"/>
                 </a:solidFill>
@@ -6407,7 +6296,7 @@
           <a:p>
             <a:pPr algn="l"/>
             <a:r>
-              <a:rPr sz="1000" b="0" i="0">
+              <a:rPr b="0" i="0" sz="1000">
                 <a:solidFill>
                   <a:srgbClr val="FFFFFF"/>
                 </a:solidFill>
@@ -6442,7 +6331,7 @@
           <a:p>
             <a:pPr algn="l"/>
             <a:r>
-              <a:rPr sz="1000" b="0" i="0">
+              <a:rPr b="0" i="0" sz="1000">
                 <a:solidFill>
                   <a:srgbClr val="FFFFFF"/>
                 </a:solidFill>
@@ -6477,7 +6366,7 @@
           <a:p>
             <a:pPr algn="l"/>
             <a:r>
-              <a:rPr sz="1000" b="0" i="0">
+              <a:rPr b="0" i="0" sz="1000">
                 <a:solidFill>
                   <a:srgbClr val="FFFFFF"/>
                 </a:solidFill>
@@ -6512,7 +6401,7 @@
           <a:p>
             <a:pPr algn="l"/>
             <a:r>
-              <a:rPr sz="1000" b="0" i="0">
+              <a:rPr b="0" i="0" sz="1000">
                 <a:solidFill>
                   <a:srgbClr val="FFFFFF"/>
                 </a:solidFill>
@@ -6547,7 +6436,7 @@
           <a:p>
             <a:pPr algn="l"/>
             <a:r>
-              <a:rPr sz="1000" b="0" i="0">
+              <a:rPr b="0" i="0" sz="1000">
                 <a:solidFill>
                   <a:srgbClr val="FFFFFF"/>
                 </a:solidFill>
@@ -6582,7 +6471,7 @@
           <a:p>
             <a:pPr algn="r"/>
             <a:r>
-              <a:rPr sz="900" b="0" i="0">
+              <a:rPr b="0" i="0" sz="900">
                 <a:solidFill>
                   <a:srgbClr val="9AA8CC"/>
                 </a:solidFill>
@@ -6601,7 +6490,7 @@
 </file>
 
 <file path=ppt/slides/slide12.xml><?xml version="1.0" encoding="utf-8"?>
-<p:sld xmlns:a="http://schemas.openxmlformats.org/drawingml/2006/main" xmlns:r="http://schemas.openxmlformats.org/officeDocument/2006/relationships" xmlns:p="http://schemas.openxmlformats.org/presentationml/2006/main">
+<p:sld xmlns:a="http://schemas.openxmlformats.org/drawingml/2006/main" xmlns:p="http://schemas.openxmlformats.org/presentationml/2006/main" xmlns:r="http://schemas.openxmlformats.org/officeDocument/2006/relationships">
   <p:cSld>
     <p:spTree>
       <p:nvGrpSpPr>
@@ -6609,14 +6498,7 @@
         <p:cNvGrpSpPr/>
         <p:nvPr/>
       </p:nvGrpSpPr>
-      <p:grpSpPr>
-        <a:xfrm>
-          <a:off x="0" y="0"/>
-          <a:ext cx="0" cy="0"/>
-          <a:chOff x="0" y="0"/>
-          <a:chExt cx="0" cy="0"/>
-        </a:xfrm>
-      </p:grpSpPr>
+      <p:grpSpPr/>
       <p:sp>
         <p:nvSpPr>
           <p:cNvPr id="2" name="Rectangle 1"/>
@@ -6657,7 +6539,6 @@
           <a:lstStyle/>
           <a:p>
             <a:pPr algn="ctr"/>
-            <a:endParaRPr/>
           </a:p>
         </p:txBody>
       </p:sp>
@@ -6701,7 +6582,6 @@
           <a:lstStyle/>
           <a:p>
             <a:pPr algn="ctr"/>
-            <a:endParaRPr/>
           </a:p>
         </p:txBody>
       </p:sp>
@@ -6745,7 +6625,6 @@
           <a:lstStyle/>
           <a:p>
             <a:pPr algn="ctr"/>
-            <a:endParaRPr/>
           </a:p>
         </p:txBody>
       </p:sp>
@@ -6773,7 +6652,7 @@
           <a:p>
             <a:pPr algn="ctr"/>
             <a:r>
-              <a:rPr sz="6000" b="1" i="0">
+              <a:rPr b="1" i="0" sz="6000">
                 <a:solidFill>
                   <a:srgbClr val="FFFFFF"/>
                 </a:solidFill>
@@ -6807,7 +6686,7 @@
           <a:p>
             <a:pPr algn="ctr"/>
             <a:r>
-              <a:rPr sz="2200" b="0" i="0">
+              <a:rPr b="0" i="0" sz="2200">
                 <a:solidFill>
                   <a:srgbClr val="CADCFC"/>
                 </a:solidFill>
@@ -6857,7 +6736,6 @@
           <a:lstStyle/>
           <a:p>
             <a:pPr algn="ctr"/>
-            <a:endParaRPr/>
           </a:p>
         </p:txBody>
       </p:sp>
@@ -6885,7 +6763,7 @@
           <a:p>
             <a:pPr algn="l"/>
             <a:r>
-              <a:rPr sz="1300" b="1" i="0">
+              <a:rPr b="1" i="0" sz="1300">
                 <a:solidFill>
                   <a:srgbClr val="CADCFC"/>
                 </a:solidFill>
@@ -6919,7 +6797,7 @@
           <a:p>
             <a:pPr algn="l"/>
             <a:r>
-              <a:rPr sz="1300" b="0" i="0">
+              <a:rPr b="0" i="0" sz="1300">
                 <a:solidFill>
                   <a:srgbClr val="FFFFFF"/>
                 </a:solidFill>
@@ -6953,7 +6831,7 @@
           <a:p>
             <a:pPr algn="l"/>
             <a:r>
-              <a:rPr sz="1300" b="1" i="0">
+              <a:rPr b="1" i="0" sz="1300">
                 <a:solidFill>
                   <a:srgbClr val="CADCFC"/>
                 </a:solidFill>
@@ -6987,7 +6865,7 @@
           <a:p>
             <a:pPr algn="l"/>
             <a:r>
-              <a:rPr sz="1300" b="0" i="0">
+              <a:rPr b="0" i="0" sz="1300">
                 <a:solidFill>
                   <a:srgbClr val="FFFFFF"/>
                 </a:solidFill>
@@ -7021,7 +6899,7 @@
           <a:p>
             <a:pPr algn="l"/>
             <a:r>
-              <a:rPr sz="1300" b="1" i="0">
+              <a:rPr b="1" i="0" sz="1300">
                 <a:solidFill>
                   <a:srgbClr val="CADCFC"/>
                 </a:solidFill>
@@ -7055,7 +6933,7 @@
           <a:p>
             <a:pPr algn="l"/>
             <a:r>
-              <a:rPr sz="1300" b="0" i="0">
+              <a:rPr b="0" i="0" sz="1300">
                 <a:solidFill>
                   <a:srgbClr val="FFFFFF"/>
                 </a:solidFill>
@@ -7089,7 +6967,7 @@
           <a:p>
             <a:pPr algn="l"/>
             <a:r>
-              <a:rPr sz="1300" b="1" i="0">
+              <a:rPr b="1" i="0" sz="1300">
                 <a:solidFill>
                   <a:srgbClr val="CADCFC"/>
                 </a:solidFill>
@@ -7123,7 +7001,7 @@
           <a:p>
             <a:pPr algn="l"/>
             <a:r>
-              <a:rPr sz="1300" b="0" i="0">
+              <a:rPr b="0" i="0" sz="1300">
                 <a:solidFill>
                   <a:srgbClr val="FFFFFF"/>
                 </a:solidFill>
@@ -7157,7 +7035,7 @@
           <a:p>
             <a:pPr algn="l"/>
             <a:r>
-              <a:rPr sz="1300" b="1" i="0">
+              <a:rPr b="1" i="0" sz="1300">
                 <a:solidFill>
                   <a:srgbClr val="CADCFC"/>
                 </a:solidFill>
@@ -7191,7 +7069,7 @@
           <a:p>
             <a:pPr algn="l"/>
             <a:r>
-              <a:rPr sz="1300" b="0" i="0">
+              <a:rPr b="0" i="0" sz="1300">
                 <a:solidFill>
                   <a:srgbClr val="FFFFFF"/>
                 </a:solidFill>
@@ -7225,7 +7103,7 @@
           <a:p>
             <a:pPr algn="r"/>
             <a:r>
-              <a:rPr sz="900" b="0" i="0">
+              <a:rPr b="0" i="0" sz="900">
                 <a:solidFill>
                   <a:srgbClr val="6B7AB8"/>
                 </a:solidFill>
@@ -7244,7 +7122,7 @@
 </file>
 
 <file path=ppt/slides/slide2.xml><?xml version="1.0" encoding="utf-8"?>
-<p:sld xmlns:a="http://schemas.openxmlformats.org/drawingml/2006/main" xmlns:r="http://schemas.openxmlformats.org/officeDocument/2006/relationships" xmlns:p="http://schemas.openxmlformats.org/presentationml/2006/main">
+<p:sld xmlns:a="http://schemas.openxmlformats.org/drawingml/2006/main" xmlns:p="http://schemas.openxmlformats.org/presentationml/2006/main" xmlns:r="http://schemas.openxmlformats.org/officeDocument/2006/relationships">
   <p:cSld>
     <p:spTree>
       <p:nvGrpSpPr>
@@ -7252,14 +7130,7 @@
         <p:cNvGrpSpPr/>
         <p:nvPr/>
       </p:nvGrpSpPr>
-      <p:grpSpPr>
-        <a:xfrm>
-          <a:off x="0" y="0"/>
-          <a:ext cx="0" cy="0"/>
-          <a:chOff x="0" y="0"/>
-          <a:chExt cx="0" cy="0"/>
-        </a:xfrm>
-      </p:grpSpPr>
+      <p:grpSpPr/>
       <p:sp>
         <p:nvSpPr>
           <p:cNvPr id="2" name="Rectangle 1"/>
@@ -7300,7 +7171,6 @@
           <a:lstStyle/>
           <a:p>
             <a:pPr algn="ctr"/>
-            <a:endParaRPr/>
           </a:p>
         </p:txBody>
       </p:sp>
@@ -7344,7 +7214,6 @@
           <a:lstStyle/>
           <a:p>
             <a:pPr algn="ctr"/>
-            <a:endParaRPr/>
           </a:p>
         </p:txBody>
       </p:sp>
@@ -7388,7 +7257,6 @@
           <a:lstStyle/>
           <a:p>
             <a:pPr algn="ctr"/>
-            <a:endParaRPr/>
           </a:p>
         </p:txBody>
       </p:sp>
@@ -7416,7 +7284,7 @@
           <a:p>
             <a:pPr algn="l"/>
             <a:r>
-              <a:rPr sz="900" b="1" i="0">
+              <a:rPr b="1" i="0" sz="900">
                 <a:solidFill>
                   <a:srgbClr val="1E2761"/>
                 </a:solidFill>
@@ -7450,7 +7318,7 @@
           <a:p>
             <a:pPr algn="l"/>
             <a:r>
-              <a:rPr sz="3200" b="1" i="0">
+              <a:rPr b="1" i="0" sz="3200">
                 <a:solidFill>
                   <a:srgbClr val="1E2761"/>
                 </a:solidFill>
@@ -7500,7 +7368,6 @@
           <a:lstStyle/>
           <a:p>
             <a:pPr algn="ctr"/>
-            <a:endParaRPr/>
           </a:p>
         </p:txBody>
       </p:sp>
@@ -7544,7 +7411,6 @@
           <a:lstStyle/>
           <a:p>
             <a:pPr algn="ctr"/>
-            <a:endParaRPr/>
           </a:p>
         </p:txBody>
       </p:sp>
@@ -7572,7 +7438,7 @@
           <a:p>
             <a:pPr algn="l"/>
             <a:r>
-              <a:rPr sz="2000" b="0" i="0">
+              <a:rPr b="0" i="0" sz="2000">
                 <a:solidFill>
                   <a:srgbClr val="FFFFFF"/>
                 </a:solidFill>
@@ -7606,7 +7472,7 @@
           <a:p>
             <a:pPr algn="l"/>
             <a:r>
-              <a:rPr sz="1300" b="1" i="0">
+              <a:rPr b="1" i="0" sz="1300">
                 <a:solidFill>
                   <a:srgbClr val="CADCFC"/>
                 </a:solidFill>
@@ -7640,7 +7506,7 @@
           <a:p>
             <a:pPr algn="l"/>
             <a:r>
-              <a:rPr sz="1100" b="0" i="0">
+              <a:rPr b="0" i="0" sz="1100">
                 <a:solidFill>
                   <a:srgbClr val="FFFFFF"/>
                 </a:solidFill>
@@ -7690,7 +7556,6 @@
           <a:lstStyle/>
           <a:p>
             <a:pPr algn="ctr"/>
-            <a:endParaRPr/>
           </a:p>
         </p:txBody>
       </p:sp>
@@ -7718,7 +7583,7 @@
           <a:p>
             <a:pPr algn="l"/>
             <a:r>
-              <a:rPr sz="2000" b="0" i="0">
+              <a:rPr b="0" i="0" sz="2000">
                 <a:solidFill>
                   <a:srgbClr val="FFFFFF"/>
                 </a:solidFill>
@@ -7752,7 +7617,7 @@
           <a:p>
             <a:pPr algn="l"/>
             <a:r>
-              <a:rPr sz="1300" b="1" i="0">
+              <a:rPr b="1" i="0" sz="1300">
                 <a:solidFill>
                   <a:srgbClr val="CADCFC"/>
                 </a:solidFill>
@@ -7786,7 +7651,7 @@
           <a:p>
             <a:pPr algn="l"/>
             <a:r>
-              <a:rPr sz="1100" b="0" i="0">
+              <a:rPr b="0" i="0" sz="1100">
                 <a:solidFill>
                   <a:srgbClr val="FFFFFF"/>
                 </a:solidFill>
@@ -7836,7 +7701,6 @@
           <a:lstStyle/>
           <a:p>
             <a:pPr algn="ctr"/>
-            <a:endParaRPr/>
           </a:p>
         </p:txBody>
       </p:sp>
@@ -7864,7 +7728,7 @@
           <a:p>
             <a:pPr algn="l"/>
             <a:r>
-              <a:rPr sz="2000" b="0" i="0">
+              <a:rPr b="0" i="0" sz="2000">
                 <a:solidFill>
                   <a:srgbClr val="FFFFFF"/>
                 </a:solidFill>
@@ -7898,7 +7762,7 @@
           <a:p>
             <a:pPr algn="l"/>
             <a:r>
-              <a:rPr sz="1300" b="1" i="0">
+              <a:rPr b="1" i="0" sz="1300">
                 <a:solidFill>
                   <a:srgbClr val="CADCFC"/>
                 </a:solidFill>
@@ -7932,7 +7796,7 @@
           <a:p>
             <a:pPr algn="l"/>
             <a:r>
-              <a:rPr sz="1100" b="0" i="0">
+              <a:rPr b="0" i="0" sz="1100">
                 <a:solidFill>
                   <a:srgbClr val="FFFFFF"/>
                 </a:solidFill>
@@ -7982,7 +7846,6 @@
           <a:lstStyle/>
           <a:p>
             <a:pPr algn="ctr"/>
-            <a:endParaRPr/>
           </a:p>
         </p:txBody>
       </p:sp>
@@ -8010,7 +7873,7 @@
           <a:p>
             <a:pPr algn="l"/>
             <a:r>
-              <a:rPr sz="2000" b="0" i="0">
+              <a:rPr b="0" i="0" sz="2000">
                 <a:solidFill>
                   <a:srgbClr val="FFFFFF"/>
                 </a:solidFill>
@@ -8044,7 +7907,7 @@
           <a:p>
             <a:pPr algn="l"/>
             <a:r>
-              <a:rPr sz="1300" b="1" i="0">
+              <a:rPr b="1" i="0" sz="1300">
                 <a:solidFill>
                   <a:srgbClr val="CADCFC"/>
                 </a:solidFill>
@@ -8078,7 +7941,7 @@
           <a:p>
             <a:pPr algn="l"/>
             <a:r>
-              <a:rPr sz="1100" b="0" i="0">
+              <a:rPr b="0" i="0" sz="1100">
                 <a:solidFill>
                   <a:srgbClr val="FFFFFF"/>
                 </a:solidFill>
@@ -8128,7 +7991,6 @@
           <a:lstStyle/>
           <a:p>
             <a:pPr algn="ctr"/>
-            <a:endParaRPr/>
           </a:p>
         </p:txBody>
       </p:sp>
@@ -8156,7 +8018,7 @@
           <a:p>
             <a:pPr algn="l"/>
             <a:r>
-              <a:rPr sz="1400" b="1" i="0">
+              <a:rPr b="1" i="0" sz="1400">
                 <a:solidFill>
                   <a:srgbClr val="CADCFC"/>
                 </a:solidFill>
@@ -8190,7 +8052,7 @@
           <a:p>
             <a:pPr algn="l"/>
             <a:r>
-              <a:rPr sz="1200" b="0" i="1">
+              <a:rPr b="0" i="1" sz="1200">
                 <a:solidFill>
                   <a:srgbClr val="FFFFFF"/>
                 </a:solidFill>
@@ -8242,7 +8104,6 @@
           <a:lstStyle/>
           <a:p>
             <a:pPr algn="ctr"/>
-            <a:endParaRPr/>
           </a:p>
         </p:txBody>
       </p:sp>
@@ -8270,7 +8131,7 @@
           <a:p>
             <a:pPr algn="l"/>
             <a:r>
-              <a:rPr sz="1100" b="0" i="0">
+              <a:rPr b="0" i="0" sz="1100">
                 <a:solidFill>
                   <a:srgbClr val="FFFFFF"/>
                 </a:solidFill>
@@ -8304,7 +8165,7 @@
           <a:p>
             <a:pPr algn="l"/>
             <a:r>
-              <a:rPr sz="1100" b="0" i="0">
+              <a:rPr b="0" i="0" sz="1100">
                 <a:solidFill>
                   <a:srgbClr val="FFFFFF"/>
                 </a:solidFill>
@@ -8338,7 +8199,7 @@
           <a:p>
             <a:pPr algn="l"/>
             <a:r>
-              <a:rPr sz="1100" b="0" i="0">
+              <a:rPr b="0" i="0" sz="1100">
                 <a:solidFill>
                   <a:srgbClr val="FFFFFF"/>
                 </a:solidFill>
@@ -8372,7 +8233,7 @@
           <a:p>
             <a:pPr algn="l"/>
             <a:r>
-              <a:rPr sz="1100" b="0" i="0">
+              <a:rPr b="0" i="0" sz="1100">
                 <a:solidFill>
                   <a:srgbClr val="FFFFFF"/>
                 </a:solidFill>
@@ -8422,7 +8283,6 @@
           <a:lstStyle/>
           <a:p>
             <a:pPr algn="ctr"/>
-            <a:endParaRPr/>
           </a:p>
         </p:txBody>
       </p:sp>
@@ -8450,7 +8310,7 @@
           <a:p>
             <a:pPr algn="l"/>
             <a:r>
-              <a:rPr sz="1100" b="1" i="0">
+              <a:rPr b="1" i="0" sz="1100">
                 <a:solidFill>
                   <a:srgbClr val="CADCFC"/>
                 </a:solidFill>
@@ -8484,7 +8344,7 @@
           <a:p>
             <a:pPr algn="r"/>
             <a:r>
-              <a:rPr sz="900" b="0" i="0">
+              <a:rPr b="0" i="0" sz="900">
                 <a:solidFill>
                   <a:srgbClr val="9AA8CC"/>
                 </a:solidFill>
@@ -8503,7 +8363,7 @@
 </file>
 
 <file path=ppt/slides/slide3.xml><?xml version="1.0" encoding="utf-8"?>
-<p:sld xmlns:a="http://schemas.openxmlformats.org/drawingml/2006/main" xmlns:r="http://schemas.openxmlformats.org/officeDocument/2006/relationships" xmlns:p="http://schemas.openxmlformats.org/presentationml/2006/main">
+<p:sld xmlns:a="http://schemas.openxmlformats.org/drawingml/2006/main" xmlns:p="http://schemas.openxmlformats.org/presentationml/2006/main" xmlns:r="http://schemas.openxmlformats.org/officeDocument/2006/relationships">
   <p:cSld>
     <p:spTree>
       <p:nvGrpSpPr>
@@ -8511,14 +8371,7 @@
         <p:cNvGrpSpPr/>
         <p:nvPr/>
       </p:nvGrpSpPr>
-      <p:grpSpPr>
-        <a:xfrm>
-          <a:off x="0" y="0"/>
-          <a:ext cx="0" cy="0"/>
-          <a:chOff x="0" y="0"/>
-          <a:chExt cx="0" cy="0"/>
-        </a:xfrm>
-      </p:grpSpPr>
+      <p:grpSpPr/>
       <p:sp>
         <p:nvSpPr>
           <p:cNvPr id="2" name="Rectangle 1"/>
@@ -8559,7 +8412,6 @@
           <a:lstStyle/>
           <a:p>
             <a:pPr algn="ctr"/>
-            <a:endParaRPr/>
           </a:p>
         </p:txBody>
       </p:sp>
@@ -8603,7 +8455,6 @@
           <a:lstStyle/>
           <a:p>
             <a:pPr algn="ctr"/>
-            <a:endParaRPr/>
           </a:p>
         </p:txBody>
       </p:sp>
@@ -8647,7 +8498,6 @@
           <a:lstStyle/>
           <a:p>
             <a:pPr algn="ctr"/>
-            <a:endParaRPr/>
           </a:p>
         </p:txBody>
       </p:sp>
@@ -8675,7 +8525,7 @@
           <a:p>
             <a:pPr algn="l"/>
             <a:r>
-              <a:rPr sz="900" b="1" i="0">
+              <a:rPr b="1" i="0" sz="900">
                 <a:solidFill>
                   <a:srgbClr val="CADCFC"/>
                 </a:solidFill>
@@ -8709,7 +8559,7 @@
           <a:p>
             <a:pPr algn="l"/>
             <a:r>
-              <a:rPr sz="3400" b="1" i="0">
+              <a:rPr b="1" i="0" sz="3400">
                 <a:solidFill>
                   <a:srgbClr val="FFFFFF"/>
                 </a:solidFill>
@@ -8759,7 +8609,6 @@
           <a:lstStyle/>
           <a:p>
             <a:pPr algn="ctr"/>
-            <a:endParaRPr/>
           </a:p>
         </p:txBody>
       </p:sp>
@@ -8803,7 +8652,6 @@
           <a:lstStyle/>
           <a:p>
             <a:pPr algn="ctr"/>
-            <a:endParaRPr/>
           </a:p>
         </p:txBody>
       </p:sp>
@@ -8831,7 +8679,7 @@
           <a:p>
             <a:pPr algn="ctr"/>
             <a:r>
-              <a:rPr sz="1600" b="1" i="0">
+              <a:rPr b="1" i="0" sz="1600">
                 <a:solidFill>
                   <a:srgbClr val="FFFFFF"/>
                 </a:solidFill>
@@ -8866,7 +8714,7 @@
           <a:p>
             <a:pPr algn="ctr"/>
             <a:r>
-              <a:rPr sz="1000" b="0" i="0">
+              <a:rPr b="0" i="0" sz="1000">
                 <a:solidFill>
                   <a:srgbClr val="CADCFC"/>
                 </a:solidFill>
@@ -8916,7 +8764,6 @@
           <a:lstStyle/>
           <a:p>
             <a:pPr algn="ctr"/>
-            <a:endParaRPr/>
           </a:p>
         </p:txBody>
       </p:sp>
@@ -8944,7 +8791,7 @@
           <a:p>
             <a:pPr algn="ctr"/>
             <a:r>
-              <a:rPr sz="1600" b="1" i="0">
+              <a:rPr b="1" i="0" sz="1600">
                 <a:solidFill>
                   <a:srgbClr val="FFFFFF"/>
                 </a:solidFill>
@@ -8979,7 +8826,7 @@
           <a:p>
             <a:pPr algn="ctr"/>
             <a:r>
-              <a:rPr sz="1000" b="0" i="0">
+              <a:rPr b="0" i="0" sz="1000">
                 <a:solidFill>
                   <a:srgbClr val="CADCFC"/>
                 </a:solidFill>
@@ -9029,7 +8876,6 @@
           <a:lstStyle/>
           <a:p>
             <a:pPr algn="ctr"/>
-            <a:endParaRPr/>
           </a:p>
         </p:txBody>
       </p:sp>
@@ -9057,7 +8903,7 @@
           <a:p>
             <a:pPr algn="ctr"/>
             <a:r>
-              <a:rPr sz="1600" b="1" i="0">
+              <a:rPr b="1" i="0" sz="1600">
                 <a:solidFill>
                   <a:srgbClr val="FFFFFF"/>
                 </a:solidFill>
@@ -9092,7 +8938,7 @@
           <a:p>
             <a:pPr algn="ctr"/>
             <a:r>
-              <a:rPr sz="1000" b="0" i="0">
+              <a:rPr b="0" i="0" sz="1000">
                 <a:solidFill>
                   <a:srgbClr val="CADCFC"/>
                 </a:solidFill>
@@ -9142,7 +8988,6 @@
           <a:lstStyle/>
           <a:p>
             <a:pPr algn="ctr"/>
-            <a:endParaRPr/>
           </a:p>
         </p:txBody>
       </p:sp>
@@ -9170,7 +9015,7 @@
           <a:p>
             <a:pPr algn="ctr"/>
             <a:r>
-              <a:rPr sz="1600" b="1" i="0">
+              <a:rPr b="1" i="0" sz="1600">
                 <a:solidFill>
                   <a:srgbClr val="FFFFFF"/>
                 </a:solidFill>
@@ -9204,7 +9049,7 @@
           <a:p>
             <a:pPr algn="ctr"/>
             <a:r>
-              <a:rPr sz="1000" b="0" i="0">
+              <a:rPr b="0" i="0" sz="1000">
                 <a:solidFill>
                   <a:srgbClr val="CADCFC"/>
                 </a:solidFill>
@@ -9238,7 +9083,7 @@
           <a:p>
             <a:pPr algn="l"/>
             <a:r>
-              <a:rPr sz="1000" b="1" i="0">
+              <a:rPr b="1" i="0" sz="1000">
                 <a:solidFill>
                   <a:srgbClr val="CADCFC"/>
                 </a:solidFill>
@@ -9288,7 +9133,6 @@
           <a:lstStyle/>
           <a:p>
             <a:pPr algn="ctr"/>
-            <a:endParaRPr/>
           </a:p>
         </p:txBody>
       </p:sp>
@@ -9316,7 +9160,7 @@
           <a:p>
             <a:pPr algn="l"/>
             <a:r>
-              <a:rPr sz="1100" b="0" i="0">
+              <a:rPr b="0" i="0" sz="1100">
                 <a:solidFill>
                   <a:srgbClr val="FFFFFF"/>
                 </a:solidFill>
@@ -9366,7 +9210,6 @@
           <a:lstStyle/>
           <a:p>
             <a:pPr algn="ctr"/>
-            <a:endParaRPr/>
           </a:p>
         </p:txBody>
       </p:sp>
@@ -9394,7 +9237,7 @@
           <a:p>
             <a:pPr algn="l"/>
             <a:r>
-              <a:rPr sz="1100" b="0" i="0">
+              <a:rPr b="0" i="0" sz="1100">
                 <a:solidFill>
                   <a:srgbClr val="FFFFFF"/>
                 </a:solidFill>
@@ -9444,7 +9287,6 @@
           <a:lstStyle/>
           <a:p>
             <a:pPr algn="ctr"/>
-            <a:endParaRPr/>
           </a:p>
         </p:txBody>
       </p:sp>
@@ -9472,7 +9314,7 @@
           <a:p>
             <a:pPr algn="l"/>
             <a:r>
-              <a:rPr sz="1100" b="0" i="0">
+              <a:rPr b="0" i="0" sz="1100">
                 <a:solidFill>
                   <a:srgbClr val="FFFFFF"/>
                 </a:solidFill>
@@ -9522,7 +9364,6 @@
           <a:lstStyle/>
           <a:p>
             <a:pPr algn="ctr"/>
-            <a:endParaRPr/>
           </a:p>
         </p:txBody>
       </p:sp>
@@ -9550,7 +9391,7 @@
           <a:p>
             <a:pPr algn="l"/>
             <a:r>
-              <a:rPr sz="1100" b="0" i="0">
+              <a:rPr b="0" i="0" sz="1100">
                 <a:solidFill>
                   <a:srgbClr val="FFFFFF"/>
                 </a:solidFill>
@@ -9600,7 +9441,6 @@
           <a:lstStyle/>
           <a:p>
             <a:pPr algn="ctr"/>
-            <a:endParaRPr/>
           </a:p>
         </p:txBody>
       </p:sp>
@@ -9628,7 +9468,7 @@
           <a:p>
             <a:pPr algn="l"/>
             <a:r>
-              <a:rPr sz="1100" b="0" i="0">
+              <a:rPr b="0" i="0" sz="1100">
                 <a:solidFill>
                   <a:srgbClr val="FFFFFF"/>
                 </a:solidFill>
@@ -9678,7 +9518,6 @@
           <a:lstStyle/>
           <a:p>
             <a:pPr algn="ctr"/>
-            <a:endParaRPr/>
           </a:p>
         </p:txBody>
       </p:sp>
@@ -9706,7 +9545,7 @@
           <a:p>
             <a:pPr algn="l"/>
             <a:r>
-              <a:rPr sz="1100" b="0" i="0">
+              <a:rPr b="0" i="0" sz="1100">
                 <a:solidFill>
                   <a:srgbClr val="FFFFFF"/>
                 </a:solidFill>
@@ -9756,7 +9595,6 @@
           <a:lstStyle/>
           <a:p>
             <a:pPr algn="ctr"/>
-            <a:endParaRPr/>
           </a:p>
         </p:txBody>
       </p:sp>
@@ -9784,7 +9622,7 @@
           <a:p>
             <a:pPr algn="l"/>
             <a:r>
-              <a:rPr sz="1100" b="0" i="0">
+              <a:rPr b="0" i="0" sz="1100">
                 <a:solidFill>
                   <a:srgbClr val="FFFFFF"/>
                 </a:solidFill>
@@ -9834,7 +9672,6 @@
           <a:lstStyle/>
           <a:p>
             <a:pPr algn="ctr"/>
-            <a:endParaRPr/>
           </a:p>
         </p:txBody>
       </p:sp>
@@ -9862,7 +9699,7 @@
           <a:p>
             <a:pPr algn="l"/>
             <a:r>
-              <a:rPr sz="1100" b="0" i="0">
+              <a:rPr b="0" i="0" sz="1100">
                 <a:solidFill>
                   <a:srgbClr val="FFFFFF"/>
                 </a:solidFill>
@@ -9912,7 +9749,6 @@
           <a:lstStyle/>
           <a:p>
             <a:pPr algn="ctr"/>
-            <a:endParaRPr/>
           </a:p>
         </p:txBody>
       </p:sp>
@@ -9940,7 +9776,7 @@
           <a:p>
             <a:pPr algn="l"/>
             <a:r>
-              <a:rPr sz="1100" b="0" i="0">
+              <a:rPr b="0" i="0" sz="1100">
                 <a:solidFill>
                   <a:srgbClr val="FFFFFF"/>
                 </a:solidFill>
@@ -9990,7 +9826,6 @@
           <a:lstStyle/>
           <a:p>
             <a:pPr algn="ctr"/>
-            <a:endParaRPr/>
           </a:p>
         </p:txBody>
       </p:sp>
@@ -10018,7 +9853,7 @@
           <a:p>
             <a:pPr algn="ctr"/>
             <a:r>
-              <a:rPr sz="1300" b="1" i="0">
+              <a:rPr b="1" i="0" sz="1300">
                 <a:solidFill>
                   <a:srgbClr val="CADCFC"/>
                 </a:solidFill>
@@ -10068,7 +9903,6 @@
           <a:lstStyle/>
           <a:p>
             <a:pPr algn="ctr"/>
-            <a:endParaRPr/>
           </a:p>
         </p:txBody>
       </p:sp>
@@ -10096,7 +9930,7 @@
           <a:p>
             <a:pPr algn="l"/>
             <a:r>
-              <a:rPr sz="900" b="1" i="0">
+              <a:rPr b="1" i="0" sz="900">
                 <a:solidFill>
                   <a:srgbClr val="CADCFC"/>
                 </a:solidFill>
@@ -10130,7 +9964,7 @@
           <a:p>
             <a:pPr algn="l"/>
             <a:r>
-              <a:rPr sz="900" b="0" i="0">
+              <a:rPr b="0" i="0" sz="900">
                 <a:solidFill>
                   <a:srgbClr val="FFFFFF"/>
                 </a:solidFill>
@@ -10180,7 +10014,6 @@
           <a:lstStyle/>
           <a:p>
             <a:pPr algn="ctr"/>
-            <a:endParaRPr/>
           </a:p>
         </p:txBody>
       </p:sp>
@@ -10208,7 +10041,7 @@
           <a:p>
             <a:pPr algn="l"/>
             <a:r>
-              <a:rPr sz="900" b="1" i="0">
+              <a:rPr b="1" i="0" sz="900">
                 <a:solidFill>
                   <a:srgbClr val="CADCFC"/>
                 </a:solidFill>
@@ -10242,7 +10075,7 @@
           <a:p>
             <a:pPr algn="l"/>
             <a:r>
-              <a:rPr sz="900" b="0" i="0">
+              <a:rPr b="0" i="0" sz="900">
                 <a:solidFill>
                   <a:srgbClr val="FFFFFF"/>
                 </a:solidFill>
@@ -10292,7 +10125,6 @@
           <a:lstStyle/>
           <a:p>
             <a:pPr algn="ctr"/>
-            <a:endParaRPr/>
           </a:p>
         </p:txBody>
       </p:sp>
@@ -10320,7 +10152,7 @@
           <a:p>
             <a:pPr algn="l"/>
             <a:r>
-              <a:rPr sz="900" b="1" i="0">
+              <a:rPr b="1" i="0" sz="900">
                 <a:solidFill>
                   <a:srgbClr val="CADCFC"/>
                 </a:solidFill>
@@ -10354,7 +10186,7 @@
           <a:p>
             <a:pPr algn="l"/>
             <a:r>
-              <a:rPr sz="900" b="0" i="0">
+              <a:rPr b="0" i="0" sz="900">
                 <a:solidFill>
                   <a:srgbClr val="FFFFFF"/>
                 </a:solidFill>
@@ -10388,7 +10220,7 @@
           <a:p>
             <a:pPr algn="r"/>
             <a:r>
-              <a:rPr sz="900" b="0" i="0">
+              <a:rPr b="0" i="0" sz="900">
                 <a:solidFill>
                   <a:srgbClr val="6B7AB8"/>
                 </a:solidFill>
@@ -10407,7 +10239,7 @@
 </file>
 
 <file path=ppt/slides/slide4.xml><?xml version="1.0" encoding="utf-8"?>
-<p:sld xmlns:a="http://schemas.openxmlformats.org/drawingml/2006/main" xmlns:r="http://schemas.openxmlformats.org/officeDocument/2006/relationships" xmlns:p="http://schemas.openxmlformats.org/presentationml/2006/main">
+<p:sld xmlns:a="http://schemas.openxmlformats.org/drawingml/2006/main" xmlns:p="http://schemas.openxmlformats.org/presentationml/2006/main" xmlns:r="http://schemas.openxmlformats.org/officeDocument/2006/relationships">
   <p:cSld>
     <p:spTree>
       <p:nvGrpSpPr>
@@ -10415,14 +10247,7 @@
         <p:cNvGrpSpPr/>
         <p:nvPr/>
       </p:nvGrpSpPr>
-      <p:grpSpPr>
-        <a:xfrm>
-          <a:off x="0" y="0"/>
-          <a:ext cx="0" cy="0"/>
-          <a:chOff x="0" y="0"/>
-          <a:chExt cx="0" cy="0"/>
-        </a:xfrm>
-      </p:grpSpPr>
+      <p:grpSpPr/>
       <p:sp>
         <p:nvSpPr>
           <p:cNvPr id="2" name="Rectangle 1"/>
@@ -10463,7 +10288,6 @@
           <a:lstStyle/>
           <a:p>
             <a:pPr algn="ctr"/>
-            <a:endParaRPr/>
           </a:p>
         </p:txBody>
       </p:sp>
@@ -10507,7 +10331,6 @@
           <a:lstStyle/>
           <a:p>
             <a:pPr algn="ctr"/>
-            <a:endParaRPr/>
           </a:p>
         </p:txBody>
       </p:sp>
@@ -10551,7 +10374,6 @@
           <a:lstStyle/>
           <a:p>
             <a:pPr algn="ctr"/>
-            <a:endParaRPr/>
           </a:p>
         </p:txBody>
       </p:sp>
@@ -10579,7 +10401,7 @@
           <a:p>
             <a:pPr algn="l"/>
             <a:r>
-              <a:rPr sz="900" b="1" i="0">
+              <a:rPr b="1" i="0" sz="900">
                 <a:solidFill>
                   <a:srgbClr val="1E2761"/>
                 </a:solidFill>
@@ -10613,7 +10435,7 @@
           <a:p>
             <a:pPr algn="l"/>
             <a:r>
-              <a:rPr sz="3200" b="1" i="0">
+              <a:rPr b="1" i="0" sz="3200">
                 <a:solidFill>
                   <a:srgbClr val="1E2761"/>
                 </a:solidFill>
@@ -10663,7 +10485,6 @@
           <a:lstStyle/>
           <a:p>
             <a:pPr algn="ctr"/>
-            <a:endParaRPr/>
           </a:p>
         </p:txBody>
       </p:sp>
@@ -10707,7 +10528,6 @@
           <a:lstStyle/>
           <a:p>
             <a:pPr algn="ctr"/>
-            <a:endParaRPr/>
           </a:p>
         </p:txBody>
       </p:sp>
@@ -10735,7 +10555,7 @@
           <a:p>
             <a:pPr algn="ctr"/>
             <a:r>
-              <a:rPr sz="1000" b="1" i="0">
+              <a:rPr b="1" i="0" sz="1000">
                 <a:solidFill>
                   <a:srgbClr val="FFFFFF"/>
                 </a:solidFill>
@@ -10785,7 +10605,6 @@
           <a:lstStyle/>
           <a:p>
             <a:pPr algn="ctr"/>
-            <a:endParaRPr/>
           </a:p>
         </p:txBody>
       </p:sp>
@@ -10813,7 +10632,7 @@
           <a:p>
             <a:pPr algn="ctr"/>
             <a:r>
-              <a:rPr sz="1000" b="1" i="0">
+              <a:rPr b="1" i="0" sz="1000">
                 <a:solidFill>
                   <a:srgbClr val="CADCFC"/>
                 </a:solidFill>
@@ -10864,7 +10683,6 @@
           <a:lstStyle/>
           <a:p>
             <a:pPr algn="ctr"/>
-            <a:endParaRPr/>
           </a:p>
         </p:txBody>
       </p:sp>
@@ -10892,7 +10710,7 @@
           <a:p>
             <a:pPr algn="ctr"/>
             <a:r>
-              <a:rPr sz="1000" b="1" i="0">
+              <a:rPr b="1" i="0" sz="1000">
                 <a:solidFill>
                   <a:srgbClr val="CADCFC"/>
                 </a:solidFill>
@@ -10943,7 +10761,6 @@
           <a:lstStyle/>
           <a:p>
             <a:pPr algn="ctr"/>
-            <a:endParaRPr/>
           </a:p>
         </p:txBody>
       </p:sp>
@@ -10971,7 +10788,7 @@
           <a:p>
             <a:pPr algn="ctr"/>
             <a:r>
-              <a:rPr sz="1000" b="1" i="0">
+              <a:rPr b="1" i="0" sz="1000">
                 <a:solidFill>
                   <a:srgbClr val="CADCFC"/>
                 </a:solidFill>
@@ -11022,7 +10839,6 @@
           <a:lstStyle/>
           <a:p>
             <a:pPr algn="ctr"/>
-            <a:endParaRPr/>
           </a:p>
         </p:txBody>
       </p:sp>
@@ -11050,7 +10866,7 @@
           <a:p>
             <a:pPr algn="ctr"/>
             <a:r>
-              <a:rPr sz="1000" b="1" i="0">
+              <a:rPr b="1" i="0" sz="1000">
                 <a:solidFill>
                   <a:srgbClr val="CADCFC"/>
                 </a:solidFill>
@@ -11100,7 +10916,6 @@
           <a:lstStyle/>
           <a:p>
             <a:pPr algn="ctr"/>
-            <a:endParaRPr/>
           </a:p>
         </p:txBody>
       </p:sp>
@@ -11128,7 +10943,7 @@
           <a:p>
             <a:pPr algn="ctr"/>
             <a:r>
-              <a:rPr sz="1000" b="1" i="0">
+              <a:rPr b="1" i="0" sz="1000">
                 <a:solidFill>
                   <a:srgbClr val="CADCFC"/>
                 </a:solidFill>
@@ -11179,7 +10994,6 @@
           <a:lstStyle/>
           <a:p>
             <a:pPr algn="ctr"/>
-            <a:endParaRPr/>
           </a:p>
         </p:txBody>
       </p:sp>
@@ -11207,7 +11021,7 @@
           <a:p>
             <a:pPr algn="l"/>
             <a:r>
-              <a:rPr sz="1100" b="0" i="0">
+              <a:rPr b="0" i="0" sz="1100">
                 <a:solidFill>
                   <a:srgbClr val="1A1A2E"/>
                 </a:solidFill>
@@ -11257,7 +11071,6 @@
           <a:lstStyle/>
           <a:p>
             <a:pPr algn="ctr"/>
-            <a:endParaRPr/>
           </a:p>
         </p:txBody>
       </p:sp>
@@ -11285,7 +11098,7 @@
           <a:p>
             <a:pPr algn="ctr"/>
             <a:r>
-              <a:rPr sz="1400" b="1" i="0">
+              <a:rPr b="1" i="0" sz="1400">
                 <a:solidFill>
                   <a:srgbClr val="E74C3C"/>
                 </a:solidFill>
@@ -11335,7 +11148,6 @@
           <a:lstStyle/>
           <a:p>
             <a:pPr algn="ctr"/>
-            <a:endParaRPr/>
           </a:p>
         </p:txBody>
       </p:sp>
@@ -11363,7 +11175,7 @@
           <a:p>
             <a:pPr algn="ctr"/>
             <a:r>
-              <a:rPr sz="1400" b="0" i="0">
+              <a:rPr b="0" i="0" sz="1400">
                 <a:solidFill>
                   <a:srgbClr val="6B7AB8"/>
                 </a:solidFill>
@@ -11413,7 +11225,6 @@
           <a:lstStyle/>
           <a:p>
             <a:pPr algn="ctr"/>
-            <a:endParaRPr/>
           </a:p>
         </p:txBody>
       </p:sp>
@@ -11441,7 +11252,7 @@
           <a:p>
             <a:pPr algn="ctr"/>
             <a:r>
-              <a:rPr sz="1400" b="0" i="0">
+              <a:rPr b="0" i="0" sz="1400">
                 <a:solidFill>
                   <a:srgbClr val="6B7AB8"/>
                 </a:solidFill>
@@ -11491,7 +11302,6 @@
           <a:lstStyle/>
           <a:p>
             <a:pPr algn="ctr"/>
-            <a:endParaRPr/>
           </a:p>
         </p:txBody>
       </p:sp>
@@ -11519,7 +11329,7 @@
           <a:p>
             <a:pPr algn="ctr"/>
             <a:r>
-              <a:rPr sz="1400" b="1" i="0">
+              <a:rPr b="1" i="0" sz="1400">
                 <a:solidFill>
                   <a:srgbClr val="E74C3C"/>
                 </a:solidFill>
@@ -11569,7 +11379,6 @@
           <a:lstStyle/>
           <a:p>
             <a:pPr algn="ctr"/>
-            <a:endParaRPr/>
           </a:p>
         </p:txBody>
       </p:sp>
@@ -11597,7 +11406,7 @@
           <a:p>
             <a:pPr algn="ctr"/>
             <a:r>
-              <a:rPr sz="1400" b="1" i="0">
+              <a:rPr b="1" i="0" sz="1400">
                 <a:solidFill>
                   <a:srgbClr val="2ECC71"/>
                 </a:solidFill>
@@ -11647,7 +11456,6 @@
           <a:lstStyle/>
           <a:p>
             <a:pPr algn="ctr"/>
-            <a:endParaRPr/>
           </a:p>
         </p:txBody>
       </p:sp>
@@ -11675,7 +11483,7 @@
           <a:p>
             <a:pPr algn="l"/>
             <a:r>
-              <a:rPr sz="1100" b="0" i="0">
+              <a:rPr b="0" i="0" sz="1100">
                 <a:solidFill>
                   <a:srgbClr val="1A1A2E"/>
                 </a:solidFill>
@@ -11725,7 +11533,6 @@
           <a:lstStyle/>
           <a:p>
             <a:pPr algn="ctr"/>
-            <a:endParaRPr/>
           </a:p>
         </p:txBody>
       </p:sp>
@@ -11753,7 +11560,7 @@
           <a:p>
             <a:pPr algn="ctr"/>
             <a:r>
-              <a:rPr sz="1400" b="1" i="0">
+              <a:rPr b="1" i="0" sz="1400">
                 <a:solidFill>
                   <a:srgbClr val="E74C3C"/>
                 </a:solidFill>
@@ -11803,7 +11610,6 @@
           <a:lstStyle/>
           <a:p>
             <a:pPr algn="ctr"/>
-            <a:endParaRPr/>
           </a:p>
         </p:txBody>
       </p:sp>
@@ -11831,7 +11637,7 @@
           <a:p>
             <a:pPr algn="ctr"/>
             <a:r>
-              <a:rPr sz="1400" b="1" i="0">
+              <a:rPr b="1" i="0" sz="1400">
                 <a:solidFill>
                   <a:srgbClr val="E74C3C"/>
                 </a:solidFill>
@@ -11881,7 +11687,6 @@
           <a:lstStyle/>
           <a:p>
             <a:pPr algn="ctr"/>
-            <a:endParaRPr/>
           </a:p>
         </p:txBody>
       </p:sp>
@@ -11909,7 +11714,7 @@
           <a:p>
             <a:pPr algn="ctr"/>
             <a:r>
-              <a:rPr sz="1400" b="1" i="0">
+              <a:rPr b="1" i="0" sz="1400">
                 <a:solidFill>
                   <a:srgbClr val="E74C3C"/>
                 </a:solidFill>
@@ -11959,7 +11764,6 @@
           <a:lstStyle/>
           <a:p>
             <a:pPr algn="ctr"/>
-            <a:endParaRPr/>
           </a:p>
         </p:txBody>
       </p:sp>
@@ -11987,7 +11791,7 @@
           <a:p>
             <a:pPr algn="ctr"/>
             <a:r>
-              <a:rPr sz="1400" b="1" i="0">
+              <a:rPr b="1" i="0" sz="1400">
                 <a:solidFill>
                   <a:srgbClr val="E74C3C"/>
                 </a:solidFill>
@@ -12037,7 +11841,6 @@
           <a:lstStyle/>
           <a:p>
             <a:pPr algn="ctr"/>
-            <a:endParaRPr/>
           </a:p>
         </p:txBody>
       </p:sp>
@@ -12065,7 +11868,7 @@
           <a:p>
             <a:pPr algn="ctr"/>
             <a:r>
-              <a:rPr sz="1400" b="1" i="0">
+              <a:rPr b="1" i="0" sz="1400">
                 <a:solidFill>
                   <a:srgbClr val="2ECC71"/>
                 </a:solidFill>
@@ -12115,7 +11918,6 @@
           <a:lstStyle/>
           <a:p>
             <a:pPr algn="ctr"/>
-            <a:endParaRPr/>
           </a:p>
         </p:txBody>
       </p:sp>
@@ -12143,7 +11945,7 @@
           <a:p>
             <a:pPr algn="l"/>
             <a:r>
-              <a:rPr sz="1100" b="0" i="0">
+              <a:rPr b="0" i="0" sz="1100">
                 <a:solidFill>
                   <a:srgbClr val="1A1A2E"/>
                 </a:solidFill>
@@ -12193,7 +11995,6 @@
           <a:lstStyle/>
           <a:p>
             <a:pPr algn="ctr"/>
-            <a:endParaRPr/>
           </a:p>
         </p:txBody>
       </p:sp>
@@ -12221,7 +12022,7 @@
           <a:p>
             <a:pPr algn="ctr"/>
             <a:r>
-              <a:rPr sz="1400" b="1" i="0">
+              <a:rPr b="1" i="0" sz="1400">
                 <a:solidFill>
                   <a:srgbClr val="E74C3C"/>
                 </a:solidFill>
@@ -12271,7 +12072,6 @@
           <a:lstStyle/>
           <a:p>
             <a:pPr algn="ctr"/>
-            <a:endParaRPr/>
           </a:p>
         </p:txBody>
       </p:sp>
@@ -12299,7 +12099,7 @@
           <a:p>
             <a:pPr algn="ctr"/>
             <a:r>
-              <a:rPr sz="1400" b="1" i="0">
+              <a:rPr b="1" i="0" sz="1400">
                 <a:solidFill>
                   <a:srgbClr val="E74C3C"/>
                 </a:solidFill>
@@ -12349,7 +12149,6 @@
           <a:lstStyle/>
           <a:p>
             <a:pPr algn="ctr"/>
-            <a:endParaRPr/>
           </a:p>
         </p:txBody>
       </p:sp>
@@ -12377,7 +12176,7 @@
           <a:p>
             <a:pPr algn="ctr"/>
             <a:r>
-              <a:rPr sz="1400" b="0" i="0">
+              <a:rPr b="0" i="0" sz="1400">
                 <a:solidFill>
                   <a:srgbClr val="6B7AB8"/>
                 </a:solidFill>
@@ -12427,7 +12226,6 @@
           <a:lstStyle/>
           <a:p>
             <a:pPr algn="ctr"/>
-            <a:endParaRPr/>
           </a:p>
         </p:txBody>
       </p:sp>
@@ -12455,7 +12253,7 @@
           <a:p>
             <a:pPr algn="ctr"/>
             <a:r>
-              <a:rPr sz="1400" b="1" i="0">
+              <a:rPr b="1" i="0" sz="1400">
                 <a:solidFill>
                   <a:srgbClr val="2ECC71"/>
                 </a:solidFill>
@@ -12505,7 +12303,6 @@
           <a:lstStyle/>
           <a:p>
             <a:pPr algn="ctr"/>
-            <a:endParaRPr/>
           </a:p>
         </p:txBody>
       </p:sp>
@@ -12533,7 +12330,7 @@
           <a:p>
             <a:pPr algn="ctr"/>
             <a:r>
-              <a:rPr sz="1400" b="1" i="0">
+              <a:rPr b="1" i="0" sz="1400">
                 <a:solidFill>
                   <a:srgbClr val="2ECC71"/>
                 </a:solidFill>
@@ -12583,7 +12380,6 @@
           <a:lstStyle/>
           <a:p>
             <a:pPr algn="ctr"/>
-            <a:endParaRPr/>
           </a:p>
         </p:txBody>
       </p:sp>
@@ -12611,7 +12407,7 @@
           <a:p>
             <a:pPr algn="l"/>
             <a:r>
-              <a:rPr sz="1100" b="0" i="0">
+              <a:rPr b="0" i="0" sz="1100">
                 <a:solidFill>
                   <a:srgbClr val="1A1A2E"/>
                 </a:solidFill>
@@ -12661,7 +12457,6 @@
           <a:lstStyle/>
           <a:p>
             <a:pPr algn="ctr"/>
-            <a:endParaRPr/>
           </a:p>
         </p:txBody>
       </p:sp>
@@ -12689,7 +12484,7 @@
           <a:p>
             <a:pPr algn="ctr"/>
             <a:r>
-              <a:rPr sz="1400" b="0" i="0">
+              <a:rPr b="0" i="0" sz="1400">
                 <a:solidFill>
                   <a:srgbClr val="6B7AB8"/>
                 </a:solidFill>
@@ -12739,7 +12534,6 @@
           <a:lstStyle/>
           <a:p>
             <a:pPr algn="ctr"/>
-            <a:endParaRPr/>
           </a:p>
         </p:txBody>
       </p:sp>
@@ -12767,7 +12561,7 @@
           <a:p>
             <a:pPr algn="ctr"/>
             <a:r>
-              <a:rPr sz="1400" b="1" i="0">
+              <a:rPr b="1" i="0" sz="1400">
                 <a:solidFill>
                   <a:srgbClr val="E74C3C"/>
                 </a:solidFill>
@@ -12817,7 +12611,6 @@
           <a:lstStyle/>
           <a:p>
             <a:pPr algn="ctr"/>
-            <a:endParaRPr/>
           </a:p>
         </p:txBody>
       </p:sp>
@@ -12845,7 +12638,7 @@
           <a:p>
             <a:pPr algn="ctr"/>
             <a:r>
-              <a:rPr sz="1400" b="1" i="0">
+              <a:rPr b="1" i="0" sz="1400">
                 <a:solidFill>
                   <a:srgbClr val="E74C3C"/>
                 </a:solidFill>
@@ -12895,7 +12688,6 @@
           <a:lstStyle/>
           <a:p>
             <a:pPr algn="ctr"/>
-            <a:endParaRPr/>
           </a:p>
         </p:txBody>
       </p:sp>
@@ -12923,7 +12715,7 @@
           <a:p>
             <a:pPr algn="ctr"/>
             <a:r>
-              <a:rPr sz="1400" b="1" i="0">
+              <a:rPr b="1" i="0" sz="1400">
                 <a:solidFill>
                   <a:srgbClr val="E74C3C"/>
                 </a:solidFill>
@@ -12973,7 +12765,6 @@
           <a:lstStyle/>
           <a:p>
             <a:pPr algn="ctr"/>
-            <a:endParaRPr/>
           </a:p>
         </p:txBody>
       </p:sp>
@@ -13001,7 +12792,7 @@
           <a:p>
             <a:pPr algn="ctr"/>
             <a:r>
-              <a:rPr sz="1400" b="1" i="0">
+              <a:rPr b="1" i="0" sz="1400">
                 <a:solidFill>
                   <a:srgbClr val="2ECC71"/>
                 </a:solidFill>
@@ -13051,7 +12842,6 @@
           <a:lstStyle/>
           <a:p>
             <a:pPr algn="ctr"/>
-            <a:endParaRPr/>
           </a:p>
         </p:txBody>
       </p:sp>
@@ -13079,7 +12869,7 @@
           <a:p>
             <a:pPr algn="l"/>
             <a:r>
-              <a:rPr sz="1100" b="0" i="0">
+              <a:rPr b="0" i="0" sz="1100">
                 <a:solidFill>
                   <a:srgbClr val="1A1A2E"/>
                 </a:solidFill>
@@ -13129,7 +12919,6 @@
           <a:lstStyle/>
           <a:p>
             <a:pPr algn="ctr"/>
-            <a:endParaRPr/>
           </a:p>
         </p:txBody>
       </p:sp>
@@ -13157,7 +12946,7 @@
           <a:p>
             <a:pPr algn="ctr"/>
             <a:r>
-              <a:rPr sz="1400" b="1" i="0">
+              <a:rPr b="1" i="0" sz="1400">
                 <a:solidFill>
                   <a:srgbClr val="E74C3C"/>
                 </a:solidFill>
@@ -13207,7 +12996,6 @@
           <a:lstStyle/>
           <a:p>
             <a:pPr algn="ctr"/>
-            <a:endParaRPr/>
           </a:p>
         </p:txBody>
       </p:sp>
@@ -13235,7 +13023,7 @@
           <a:p>
             <a:pPr algn="ctr"/>
             <a:r>
-              <a:rPr sz="1400" b="0" i="0">
+              <a:rPr b="0" i="0" sz="1400">
                 <a:solidFill>
                   <a:srgbClr val="6B7AB8"/>
                 </a:solidFill>
@@ -13285,7 +13073,6 @@
           <a:lstStyle/>
           <a:p>
             <a:pPr algn="ctr"/>
-            <a:endParaRPr/>
           </a:p>
         </p:txBody>
       </p:sp>
@@ -13313,7 +13100,7 @@
           <a:p>
             <a:pPr algn="ctr"/>
             <a:r>
-              <a:rPr sz="1400" b="0" i="0">
+              <a:rPr b="0" i="0" sz="1400">
                 <a:solidFill>
                   <a:srgbClr val="6B7AB8"/>
                 </a:solidFill>
@@ -13363,7 +13150,6 @@
           <a:lstStyle/>
           <a:p>
             <a:pPr algn="ctr"/>
-            <a:endParaRPr/>
           </a:p>
         </p:txBody>
       </p:sp>
@@ -13391,7 +13177,7 @@
           <a:p>
             <a:pPr algn="ctr"/>
             <a:r>
-              <a:rPr sz="1400" b="1" i="0">
+              <a:rPr b="1" i="0" sz="1400">
                 <a:solidFill>
                   <a:srgbClr val="E74C3C"/>
                 </a:solidFill>
@@ -13441,7 +13227,6 @@
           <a:lstStyle/>
           <a:p>
             <a:pPr algn="ctr"/>
-            <a:endParaRPr/>
           </a:p>
         </p:txBody>
       </p:sp>
@@ -13469,7 +13254,7 @@
           <a:p>
             <a:pPr algn="ctr"/>
             <a:r>
-              <a:rPr sz="1400" b="1" i="0">
+              <a:rPr b="1" i="0" sz="1400">
                 <a:solidFill>
                   <a:srgbClr val="2ECC71"/>
                 </a:solidFill>
@@ -13519,7 +13304,6 @@
           <a:lstStyle/>
           <a:p>
             <a:pPr algn="ctr"/>
-            <a:endParaRPr/>
           </a:p>
         </p:txBody>
       </p:sp>
@@ -13547,7 +13331,7 @@
           <a:p>
             <a:pPr algn="l"/>
             <a:r>
-              <a:rPr sz="1100" b="0" i="0">
+              <a:rPr b="0" i="0" sz="1100">
                 <a:solidFill>
                   <a:srgbClr val="1A1A2E"/>
                 </a:solidFill>
@@ -13597,7 +13381,6 @@
           <a:lstStyle/>
           <a:p>
             <a:pPr algn="ctr"/>
-            <a:endParaRPr/>
           </a:p>
         </p:txBody>
       </p:sp>
@@ -13625,7 +13408,7 @@
           <a:p>
             <a:pPr algn="ctr"/>
             <a:r>
-              <a:rPr sz="1400" b="1" i="0">
+              <a:rPr b="1" i="0" sz="1400">
                 <a:solidFill>
                   <a:srgbClr val="E74C3C"/>
                 </a:solidFill>
@@ -13675,7 +13458,6 @@
           <a:lstStyle/>
           <a:p>
             <a:pPr algn="ctr"/>
-            <a:endParaRPr/>
           </a:p>
         </p:txBody>
       </p:sp>
@@ -13703,7 +13485,7 @@
           <a:p>
             <a:pPr algn="ctr"/>
             <a:r>
-              <a:rPr sz="1400" b="1" i="0">
+              <a:rPr b="1" i="0" sz="1400">
                 <a:solidFill>
                   <a:srgbClr val="E74C3C"/>
                 </a:solidFill>
@@ -13753,7 +13535,6 @@
           <a:lstStyle/>
           <a:p>
             <a:pPr algn="ctr"/>
-            <a:endParaRPr/>
           </a:p>
         </p:txBody>
       </p:sp>
@@ -13781,7 +13562,7 @@
           <a:p>
             <a:pPr algn="ctr"/>
             <a:r>
-              <a:rPr sz="1400" b="1" i="0">
+              <a:rPr b="1" i="0" sz="1400">
                 <a:solidFill>
                   <a:srgbClr val="E74C3C"/>
                 </a:solidFill>
@@ -13831,7 +13612,6 @@
           <a:lstStyle/>
           <a:p>
             <a:pPr algn="ctr"/>
-            <a:endParaRPr/>
           </a:p>
         </p:txBody>
       </p:sp>
@@ -13859,7 +13639,7 @@
           <a:p>
             <a:pPr algn="ctr"/>
             <a:r>
-              <a:rPr sz="1400" b="1" i="0">
+              <a:rPr b="1" i="0" sz="1400">
                 <a:solidFill>
                   <a:srgbClr val="E74C3C"/>
                 </a:solidFill>
@@ -13909,7 +13689,6 @@
           <a:lstStyle/>
           <a:p>
             <a:pPr algn="ctr"/>
-            <a:endParaRPr/>
           </a:p>
         </p:txBody>
       </p:sp>
@@ -13937,7 +13716,7 @@
           <a:p>
             <a:pPr algn="ctr"/>
             <a:r>
-              <a:rPr sz="1400" b="1" i="0">
+              <a:rPr b="1" i="0" sz="1400">
                 <a:solidFill>
                   <a:srgbClr val="2ECC71"/>
                 </a:solidFill>
@@ -13987,7 +13766,6 @@
           <a:lstStyle/>
           <a:p>
             <a:pPr algn="ctr"/>
-            <a:endParaRPr/>
           </a:p>
         </p:txBody>
       </p:sp>
@@ -14015,7 +13793,7 @@
           <a:p>
             <a:pPr algn="l"/>
             <a:r>
-              <a:rPr sz="1100" b="0" i="0">
+              <a:rPr b="0" i="0" sz="1100">
                 <a:solidFill>
                   <a:srgbClr val="1A1A2E"/>
                 </a:solidFill>
@@ -14065,7 +13843,6 @@
           <a:lstStyle/>
           <a:p>
             <a:pPr algn="ctr"/>
-            <a:endParaRPr/>
           </a:p>
         </p:txBody>
       </p:sp>
@@ -14093,7 +13870,7 @@
           <a:p>
             <a:pPr algn="ctr"/>
             <a:r>
-              <a:rPr sz="1400" b="1" i="0">
+              <a:rPr b="1" i="0" sz="1400">
                 <a:solidFill>
                   <a:srgbClr val="E74C3C"/>
                 </a:solidFill>
@@ -14143,7 +13920,6 @@
           <a:lstStyle/>
           <a:p>
             <a:pPr algn="ctr"/>
-            <a:endParaRPr/>
           </a:p>
         </p:txBody>
       </p:sp>
@@ -14171,7 +13947,7 @@
           <a:p>
             <a:pPr algn="ctr"/>
             <a:r>
-              <a:rPr sz="1400" b="1" i="0">
+              <a:rPr b="1" i="0" sz="1400">
                 <a:solidFill>
                   <a:srgbClr val="E74C3C"/>
                 </a:solidFill>
@@ -14221,7 +13997,6 @@
           <a:lstStyle/>
           <a:p>
             <a:pPr algn="ctr"/>
-            <a:endParaRPr/>
           </a:p>
         </p:txBody>
       </p:sp>
@@ -14249,7 +14024,7 @@
           <a:p>
             <a:pPr algn="ctr"/>
             <a:r>
-              <a:rPr sz="1400" b="1" i="0">
+              <a:rPr b="1" i="0" sz="1400">
                 <a:solidFill>
                   <a:srgbClr val="E74C3C"/>
                 </a:solidFill>
@@ -14299,7 +14074,6 @@
           <a:lstStyle/>
           <a:p>
             <a:pPr algn="ctr"/>
-            <a:endParaRPr/>
           </a:p>
         </p:txBody>
       </p:sp>
@@ -14327,7 +14101,7 @@
           <a:p>
             <a:pPr algn="ctr"/>
             <a:r>
-              <a:rPr sz="1400" b="1" i="0">
+              <a:rPr b="1" i="0" sz="1400">
                 <a:solidFill>
                   <a:srgbClr val="E74C3C"/>
                 </a:solidFill>
@@ -14377,7 +14151,6 @@
           <a:lstStyle/>
           <a:p>
             <a:pPr algn="ctr"/>
-            <a:endParaRPr/>
           </a:p>
         </p:txBody>
       </p:sp>
@@ -14405,7 +14178,7 @@
           <a:p>
             <a:pPr algn="ctr"/>
             <a:r>
-              <a:rPr sz="1400" b="1" i="0">
+              <a:rPr b="1" i="0" sz="1400">
                 <a:solidFill>
                   <a:srgbClr val="2ECC71"/>
                 </a:solidFill>
@@ -14455,7 +14228,6 @@
           <a:lstStyle/>
           <a:p>
             <a:pPr algn="ctr"/>
-            <a:endParaRPr/>
           </a:p>
         </p:txBody>
       </p:sp>
@@ -14483,7 +14255,7 @@
           <a:p>
             <a:pPr algn="l"/>
             <a:r>
-              <a:rPr sz="1200" b="1" i="0">
+              <a:rPr b="1" i="0" sz="1200">
                 <a:solidFill>
                   <a:srgbClr val="CADCFC"/>
                 </a:solidFill>
@@ -14517,7 +14289,7 @@
           <a:p>
             <a:pPr algn="r"/>
             <a:r>
-              <a:rPr sz="900" b="0" i="0">
+              <a:rPr b="0" i="0" sz="900">
                 <a:solidFill>
                   <a:srgbClr val="9AA8CC"/>
                 </a:solidFill>
@@ -14536,7 +14308,7 @@
 </file>
 
 <file path=ppt/slides/slide5.xml><?xml version="1.0" encoding="utf-8"?>
-<p:sld xmlns:a="http://schemas.openxmlformats.org/drawingml/2006/main" xmlns:r="http://schemas.openxmlformats.org/officeDocument/2006/relationships" xmlns:p="http://schemas.openxmlformats.org/presentationml/2006/main">
+<p:sld xmlns:a="http://schemas.openxmlformats.org/drawingml/2006/main" xmlns:p="http://schemas.openxmlformats.org/presentationml/2006/main" xmlns:r="http://schemas.openxmlformats.org/officeDocument/2006/relationships">
   <p:cSld>
     <p:spTree>
       <p:nvGrpSpPr>
@@ -14544,14 +14316,7 @@
         <p:cNvGrpSpPr/>
         <p:nvPr/>
       </p:nvGrpSpPr>
-      <p:grpSpPr>
-        <a:xfrm>
-          <a:off x="0" y="0"/>
-          <a:ext cx="0" cy="0"/>
-          <a:chOff x="0" y="0"/>
-          <a:chExt cx="0" cy="0"/>
-        </a:xfrm>
-      </p:grpSpPr>
+      <p:grpSpPr/>
       <p:sp>
         <p:nvSpPr>
           <p:cNvPr id="2" name="Rectangle 1"/>
@@ -14560,7 +14325,7 @@
         </p:nvSpPr>
         <p:spPr>
           <a:xfrm>
-            <a:off x="11575" y="0"/>
+            <a:off x="0" y="0"/>
             <a:ext cx="12188952" cy="6858000"/>
           </a:xfrm>
           <a:prstGeom prst="rect">
@@ -14592,7 +14357,6 @@
           <a:lstStyle/>
           <a:p>
             <a:pPr algn="ctr"/>
-            <a:endParaRPr/>
           </a:p>
         </p:txBody>
       </p:sp>
@@ -14636,7 +14400,6 @@
           <a:lstStyle/>
           <a:p>
             <a:pPr algn="ctr"/>
-            <a:endParaRPr/>
           </a:p>
         </p:txBody>
       </p:sp>
@@ -14680,7 +14443,6 @@
           <a:lstStyle/>
           <a:p>
             <a:pPr algn="ctr"/>
-            <a:endParaRPr/>
           </a:p>
         </p:txBody>
       </p:sp>
@@ -14708,7 +14470,7 @@
           <a:p>
             <a:pPr algn="l"/>
             <a:r>
-              <a:rPr sz="900" b="1" i="0">
+              <a:rPr b="1" i="0" sz="900">
                 <a:solidFill>
                   <a:srgbClr val="CADCFC"/>
                 </a:solidFill>
@@ -14742,7 +14504,7 @@
           <a:p>
             <a:pPr algn="l"/>
             <a:r>
-              <a:rPr sz="3400" b="1" i="0">
+              <a:rPr b="1" i="0" sz="3400">
                 <a:solidFill>
                   <a:srgbClr val="FFFFFF"/>
                 </a:solidFill>
@@ -14792,7 +14554,6 @@
           <a:lstStyle/>
           <a:p>
             <a:pPr algn="ctr"/>
-            <a:endParaRPr/>
           </a:p>
         </p:txBody>
       </p:sp>
@@ -14836,7 +14597,6 @@
           <a:lstStyle/>
           <a:p>
             <a:pPr algn="ctr"/>
-            <a:endParaRPr/>
           </a:p>
         </p:txBody>
       </p:sp>
@@ -14880,7 +14640,6 @@
           <a:lstStyle/>
           <a:p>
             <a:pPr algn="ctr"/>
-            <a:endParaRPr/>
           </a:p>
         </p:txBody>
       </p:sp>
@@ -14908,7 +14667,7 @@
           <a:p>
             <a:pPr algn="ctr"/>
             <a:r>
-              <a:rPr sz="2400" b="0" i="0">
+              <a:rPr b="0" i="0" sz="2400">
                 <a:solidFill>
                   <a:srgbClr val="FFFFFF"/>
                 </a:solidFill>
@@ -14942,7 +14701,7 @@
           <a:p>
             <a:pPr algn="ctr"/>
             <a:r>
-              <a:rPr sz="1600" b="1" i="0">
+              <a:rPr b="1" i="0" sz="1600">
                 <a:solidFill>
                   <a:srgbClr val="FFFFFF"/>
                 </a:solidFill>
@@ -14992,7 +14751,6 @@
           <a:lstStyle/>
           <a:p>
             <a:pPr algn="ctr"/>
-            <a:endParaRPr/>
           </a:p>
         </p:txBody>
       </p:sp>
@@ -15020,7 +14778,7 @@
           <a:p>
             <a:pPr algn="ctr"/>
             <a:r>
-              <a:rPr sz="1200" b="1" i="0">
+              <a:rPr b="1" i="0" sz="1200">
                 <a:solidFill>
                   <a:srgbClr val="CADCFC"/>
                 </a:solidFill>
@@ -15070,7 +14828,6 @@
           <a:lstStyle/>
           <a:p>
             <a:pPr algn="ctr"/>
-            <a:endParaRPr/>
           </a:p>
         </p:txBody>
       </p:sp>
@@ -15098,7 +14855,7 @@
           <a:p>
             <a:pPr algn="ctr"/>
             <a:r>
-              <a:rPr sz="1200" b="1" i="0">
+              <a:rPr b="1" i="0" sz="1200">
                 <a:solidFill>
                   <a:srgbClr val="CADCFC"/>
                 </a:solidFill>
@@ -15132,7 +14889,7 @@
           <a:p>
             <a:pPr algn="ctr"/>
             <a:r>
-              <a:rPr sz="1000" b="0" i="1">
+              <a:rPr b="0" i="1" sz="1000">
                 <a:solidFill>
                   <a:srgbClr val="CADCFC"/>
                 </a:solidFill>
@@ -15182,7 +14939,6 @@
           <a:lstStyle/>
           <a:p>
             <a:pPr algn="ctr"/>
-            <a:endParaRPr/>
           </a:p>
         </p:txBody>
       </p:sp>
@@ -15226,7 +14982,6 @@
           <a:lstStyle/>
           <a:p>
             <a:pPr algn="ctr"/>
-            <a:endParaRPr/>
           </a:p>
         </p:txBody>
       </p:sp>
@@ -15254,7 +15009,7 @@
           <a:p>
             <a:pPr algn="ctr"/>
             <a:r>
-              <a:rPr sz="2400" b="0" i="0">
+              <a:rPr b="0" i="0" sz="2400">
                 <a:solidFill>
                   <a:srgbClr val="FFFFFF"/>
                 </a:solidFill>
@@ -15288,7 +15043,7 @@
           <a:p>
             <a:pPr algn="ctr"/>
             <a:r>
-              <a:rPr sz="1600" b="1" i="0">
+              <a:rPr b="1" i="0" sz="1600">
                 <a:solidFill>
                   <a:srgbClr val="FFFFFF"/>
                 </a:solidFill>
@@ -15338,7 +15093,6 @@
           <a:lstStyle/>
           <a:p>
             <a:pPr algn="ctr"/>
-            <a:endParaRPr/>
           </a:p>
         </p:txBody>
       </p:sp>
@@ -15366,7 +15120,7 @@
           <a:p>
             <a:pPr algn="ctr"/>
             <a:r>
-              <a:rPr sz="1200" b="1" i="0">
+              <a:rPr b="1" i="0" sz="1200">
                 <a:solidFill>
                   <a:srgbClr val="CADCFC"/>
                 </a:solidFill>
@@ -15416,7 +15170,6 @@
           <a:lstStyle/>
           <a:p>
             <a:pPr algn="ctr"/>
-            <a:endParaRPr/>
           </a:p>
         </p:txBody>
       </p:sp>
@@ -15444,7 +15197,7 @@
           <a:p>
             <a:pPr algn="ctr"/>
             <a:r>
-              <a:rPr sz="1200" b="1" i="0">
+              <a:rPr b="1" i="0" sz="1200">
                 <a:solidFill>
                   <a:srgbClr val="CADCFC"/>
                 </a:solidFill>
@@ -15478,7 +15231,7 @@
           <a:p>
             <a:pPr algn="ctr"/>
             <a:r>
-              <a:rPr sz="1000" b="0" i="1">
+              <a:rPr b="0" i="1" sz="1000">
                 <a:solidFill>
                   <a:srgbClr val="CADCFC"/>
                 </a:solidFill>
@@ -15528,7 +15281,6 @@
           <a:lstStyle/>
           <a:p>
             <a:pPr algn="ctr"/>
-            <a:endParaRPr/>
           </a:p>
         </p:txBody>
       </p:sp>
@@ -15572,7 +15324,6 @@
           <a:lstStyle/>
           <a:p>
             <a:pPr algn="ctr"/>
-            <a:endParaRPr/>
           </a:p>
         </p:txBody>
       </p:sp>
@@ -15600,7 +15351,7 @@
           <a:p>
             <a:pPr algn="ctr"/>
             <a:r>
-              <a:rPr sz="2400" b="0" i="0">
+              <a:rPr b="0" i="0" sz="2400">
                 <a:solidFill>
                   <a:srgbClr val="FFFFFF"/>
                 </a:solidFill>
@@ -15634,7 +15385,7 @@
           <a:p>
             <a:pPr algn="ctr"/>
             <a:r>
-              <a:rPr sz="1600" b="1" i="0">
+              <a:rPr b="1" i="0" sz="1600">
                 <a:solidFill>
                   <a:srgbClr val="FFFFFF"/>
                 </a:solidFill>
@@ -15684,7 +15435,6 @@
           <a:lstStyle/>
           <a:p>
             <a:pPr algn="ctr"/>
-            <a:endParaRPr/>
           </a:p>
         </p:txBody>
       </p:sp>
@@ -15712,7 +15462,7 @@
           <a:p>
             <a:pPr algn="ctr"/>
             <a:r>
-              <a:rPr sz="1200" b="1" i="0">
+              <a:rPr b="1" i="0" sz="1200">
                 <a:solidFill>
                   <a:srgbClr val="CADCFC"/>
                 </a:solidFill>
@@ -15762,7 +15512,6 @@
           <a:lstStyle/>
           <a:p>
             <a:pPr algn="ctr"/>
-            <a:endParaRPr/>
           </a:p>
         </p:txBody>
       </p:sp>
@@ -15790,7 +15539,7 @@
           <a:p>
             <a:pPr algn="ctr"/>
             <a:r>
-              <a:rPr sz="1200" b="1" i="0">
+              <a:rPr b="1" i="0" sz="1200">
                 <a:solidFill>
                   <a:srgbClr val="CADCFC"/>
                 </a:solidFill>
@@ -15824,7 +15573,7 @@
           <a:p>
             <a:pPr algn="ctr"/>
             <a:r>
-              <a:rPr sz="1000" b="0" i="1">
+              <a:rPr b="0" i="1" sz="1000">
                 <a:solidFill>
                   <a:srgbClr val="CADCFC"/>
                 </a:solidFill>
@@ -15874,7 +15623,6 @@
           <a:lstStyle/>
           <a:p>
             <a:pPr algn="ctr"/>
-            <a:endParaRPr/>
           </a:p>
         </p:txBody>
       </p:sp>
@@ -15902,7 +15650,7 @@
           <a:p>
             <a:pPr algn="ctr"/>
             <a:r>
-              <a:rPr sz="1300" b="1" i="0">
+              <a:rPr b="1" i="0" sz="1300">
                 <a:solidFill>
                   <a:srgbClr val="FFFFFF"/>
                 </a:solidFill>
@@ -15936,7 +15684,7 @@
           <a:p>
             <a:pPr algn="r"/>
             <a:r>
-              <a:rPr sz="900" b="0" i="0">
+              <a:rPr b="0" i="0" sz="900">
                 <a:solidFill>
                   <a:srgbClr val="6B7AB8"/>
                 </a:solidFill>
@@ -15955,7 +15703,7 @@
 </file>
 
 <file path=ppt/slides/slide6.xml><?xml version="1.0" encoding="utf-8"?>
-<p:sld xmlns:a="http://schemas.openxmlformats.org/drawingml/2006/main" xmlns:r="http://schemas.openxmlformats.org/officeDocument/2006/relationships" xmlns:p="http://schemas.openxmlformats.org/presentationml/2006/main">
+<p:sld xmlns:a="http://schemas.openxmlformats.org/drawingml/2006/main" xmlns:p="http://schemas.openxmlformats.org/presentationml/2006/main" xmlns:r="http://schemas.openxmlformats.org/officeDocument/2006/relationships">
   <p:cSld>
     <p:spTree>
       <p:nvGrpSpPr>
@@ -15963,14 +15711,7 @@
         <p:cNvGrpSpPr/>
         <p:nvPr/>
       </p:nvGrpSpPr>
-      <p:grpSpPr>
-        <a:xfrm>
-          <a:off x="0" y="0"/>
-          <a:ext cx="0" cy="0"/>
-          <a:chOff x="0" y="0"/>
-          <a:chExt cx="0" cy="0"/>
-        </a:xfrm>
-      </p:grpSpPr>
+      <p:grpSpPr/>
       <p:sp>
         <p:nvSpPr>
           <p:cNvPr id="2" name="Rectangle 1"/>
@@ -16011,7 +15752,6 @@
           <a:lstStyle/>
           <a:p>
             <a:pPr algn="ctr"/>
-            <a:endParaRPr/>
           </a:p>
         </p:txBody>
       </p:sp>
@@ -16055,7 +15795,6 @@
           <a:lstStyle/>
           <a:p>
             <a:pPr algn="ctr"/>
-            <a:endParaRPr/>
           </a:p>
         </p:txBody>
       </p:sp>
@@ -16099,7 +15838,6 @@
           <a:lstStyle/>
           <a:p>
             <a:pPr algn="ctr"/>
-            <a:endParaRPr/>
           </a:p>
         </p:txBody>
       </p:sp>
@@ -16127,7 +15865,7 @@
           <a:p>
             <a:pPr algn="l"/>
             <a:r>
-              <a:rPr sz="900" b="1" i="0">
+              <a:rPr b="1" i="0" sz="900">
                 <a:solidFill>
                   <a:srgbClr val="1E2761"/>
                 </a:solidFill>
@@ -16161,7 +15899,7 @@
           <a:p>
             <a:pPr algn="l"/>
             <a:r>
-              <a:rPr sz="3200" b="1" i="0">
+              <a:rPr b="1" i="0" sz="3200">
                 <a:solidFill>
                   <a:srgbClr val="1E2761"/>
                 </a:solidFill>
@@ -16211,7 +15949,6 @@
           <a:lstStyle/>
           <a:p>
             <a:pPr algn="ctr"/>
-            <a:endParaRPr/>
           </a:p>
         </p:txBody>
       </p:sp>
@@ -16255,7 +15992,6 @@
           <a:lstStyle/>
           <a:p>
             <a:pPr algn="ctr"/>
-            <a:endParaRPr/>
           </a:p>
         </p:txBody>
       </p:sp>
@@ -16299,7 +16035,6 @@
           <a:lstStyle/>
           <a:p>
             <a:pPr algn="ctr"/>
-            <a:endParaRPr/>
           </a:p>
         </p:txBody>
       </p:sp>
@@ -16327,7 +16062,7 @@
           <a:p>
             <a:pPr algn="ctr"/>
             <a:r>
-              <a:rPr sz="1600" b="1" i="0">
+              <a:rPr b="1" i="0" sz="1600">
                 <a:solidFill>
                   <a:srgbClr val="CADCFC"/>
                 </a:solidFill>
@@ -16361,7 +16096,7 @@
           <a:p>
             <a:pPr algn="ctr"/>
             <a:r>
-              <a:rPr sz="1300" b="1" i="0">
+              <a:rPr b="1" i="0" sz="1300">
                 <a:solidFill>
                   <a:srgbClr val="CADCFC"/>
                 </a:solidFill>
@@ -16396,7 +16131,7 @@
           <a:p>
             <a:pPr algn="l"/>
             <a:r>
-              <a:rPr sz="1100" b="0" i="0">
+              <a:rPr b="0" i="0" sz="1100">
                 <a:solidFill>
                   <a:srgbClr val="1A1A2E"/>
                 </a:solidFill>
@@ -16432,7 +16167,7 @@
           <a:p>
             <a:pPr algn="ctr"/>
             <a:r>
-              <a:rPr sz="1800" b="1" i="0">
+              <a:rPr b="1" i="0" sz="1800">
                 <a:solidFill>
                   <a:srgbClr val="1E2761"/>
                 </a:solidFill>
@@ -16482,7 +16217,6 @@
           <a:lstStyle/>
           <a:p>
             <a:pPr algn="ctr"/>
-            <a:endParaRPr/>
           </a:p>
         </p:txBody>
       </p:sp>
@@ -16526,7 +16260,6 @@
           <a:lstStyle/>
           <a:p>
             <a:pPr algn="ctr"/>
-            <a:endParaRPr/>
           </a:p>
         </p:txBody>
       </p:sp>
@@ -16554,7 +16287,7 @@
           <a:p>
             <a:pPr algn="ctr"/>
             <a:r>
-              <a:rPr sz="1600" b="1" i="0">
+              <a:rPr b="1" i="0" sz="1600">
                 <a:solidFill>
                   <a:srgbClr val="CADCFC"/>
                 </a:solidFill>
@@ -16588,7 +16321,7 @@
           <a:p>
             <a:pPr algn="ctr"/>
             <a:r>
-              <a:rPr sz="1300" b="1" i="0">
+              <a:rPr b="1" i="0" sz="1300">
                 <a:solidFill>
                   <a:srgbClr val="CADCFC"/>
                 </a:solidFill>
@@ -16623,7 +16356,7 @@
           <a:p>
             <a:pPr algn="l"/>
             <a:r>
-              <a:rPr sz="1100" b="0" i="0">
+              <a:rPr b="0" i="0" sz="1100">
                 <a:solidFill>
                   <a:srgbClr val="1A1A2E"/>
                 </a:solidFill>
@@ -16659,7 +16392,7 @@
           <a:p>
             <a:pPr algn="ctr"/>
             <a:r>
-              <a:rPr sz="1800" b="1" i="0">
+              <a:rPr b="1" i="0" sz="1800">
                 <a:solidFill>
                   <a:srgbClr val="1E2761"/>
                 </a:solidFill>
@@ -16709,7 +16442,6 @@
           <a:lstStyle/>
           <a:p>
             <a:pPr algn="ctr"/>
-            <a:endParaRPr/>
           </a:p>
         </p:txBody>
       </p:sp>
@@ -16753,7 +16485,6 @@
           <a:lstStyle/>
           <a:p>
             <a:pPr algn="ctr"/>
-            <a:endParaRPr/>
           </a:p>
         </p:txBody>
       </p:sp>
@@ -16781,7 +16512,7 @@
           <a:p>
             <a:pPr algn="ctr"/>
             <a:r>
-              <a:rPr sz="1600" b="1" i="0">
+              <a:rPr b="1" i="0" sz="1600">
                 <a:solidFill>
                   <a:srgbClr val="CADCFC"/>
                 </a:solidFill>
@@ -16815,7 +16546,7 @@
           <a:p>
             <a:pPr algn="ctr"/>
             <a:r>
-              <a:rPr sz="1300" b="1" i="0">
+              <a:rPr b="1" i="0" sz="1300">
                 <a:solidFill>
                   <a:srgbClr val="CADCFC"/>
                 </a:solidFill>
@@ -16850,7 +16581,7 @@
           <a:p>
             <a:pPr algn="l"/>
             <a:r>
-              <a:rPr sz="1100" b="0" i="0">
+              <a:rPr b="0" i="0" sz="1100">
                 <a:solidFill>
                   <a:srgbClr val="1A1A2E"/>
                 </a:solidFill>
@@ -16886,7 +16617,7 @@
           <a:p>
             <a:pPr algn="ctr"/>
             <a:r>
-              <a:rPr sz="1800" b="1" i="0">
+              <a:rPr b="1" i="0" sz="1800">
                 <a:solidFill>
                   <a:srgbClr val="1E2761"/>
                 </a:solidFill>
@@ -16936,7 +16667,6 @@
           <a:lstStyle/>
           <a:p>
             <a:pPr algn="ctr"/>
-            <a:endParaRPr/>
           </a:p>
         </p:txBody>
       </p:sp>
@@ -16980,7 +16710,6 @@
           <a:lstStyle/>
           <a:p>
             <a:pPr algn="ctr"/>
-            <a:endParaRPr/>
           </a:p>
         </p:txBody>
       </p:sp>
@@ -17008,7 +16737,7 @@
           <a:p>
             <a:pPr algn="ctr"/>
             <a:r>
-              <a:rPr sz="1600" b="1" i="0">
+              <a:rPr b="1" i="0" sz="1600">
                 <a:solidFill>
                   <a:srgbClr val="CADCFC"/>
                 </a:solidFill>
@@ -17042,7 +16771,7 @@
           <a:p>
             <a:pPr algn="ctr"/>
             <a:r>
-              <a:rPr sz="1300" b="1" i="0">
+              <a:rPr b="1" i="0" sz="1300">
                 <a:solidFill>
                   <a:srgbClr val="CADCFC"/>
                 </a:solidFill>
@@ -17077,7 +16806,7 @@
           <a:p>
             <a:pPr algn="l"/>
             <a:r>
-              <a:rPr sz="1100" b="0" i="0">
+              <a:rPr b="0" i="0" sz="1100">
                 <a:solidFill>
                   <a:srgbClr val="1A1A2E"/>
                 </a:solidFill>
@@ -17113,7 +16842,7 @@
           <a:p>
             <a:pPr algn="ctr"/>
             <a:r>
-              <a:rPr sz="1800" b="1" i="0">
+              <a:rPr b="1" i="0" sz="1800">
                 <a:solidFill>
                   <a:srgbClr val="1E2761"/>
                 </a:solidFill>
@@ -17163,7 +16892,6 @@
           <a:lstStyle/>
           <a:p>
             <a:pPr algn="ctr"/>
-            <a:endParaRPr/>
           </a:p>
         </p:txBody>
       </p:sp>
@@ -17207,7 +16935,6 @@
           <a:lstStyle/>
           <a:p>
             <a:pPr algn="ctr"/>
-            <a:endParaRPr/>
           </a:p>
         </p:txBody>
       </p:sp>
@@ -17235,7 +16962,7 @@
           <a:p>
             <a:pPr algn="ctr"/>
             <a:r>
-              <a:rPr sz="1600" b="1" i="0">
+              <a:rPr b="1" i="0" sz="1600">
                 <a:solidFill>
                   <a:srgbClr val="CADCFC"/>
                 </a:solidFill>
@@ -17269,7 +16996,7 @@
           <a:p>
             <a:pPr algn="ctr"/>
             <a:r>
-              <a:rPr sz="1300" b="1" i="0">
+              <a:rPr b="1" i="0" sz="1300">
                 <a:solidFill>
                   <a:srgbClr val="CADCFC"/>
                 </a:solidFill>
@@ -17304,7 +17031,7 @@
           <a:p>
             <a:pPr algn="l"/>
             <a:r>
-              <a:rPr sz="1100" b="0" i="0">
+              <a:rPr b="0" i="0" sz="1100">
                 <a:solidFill>
                   <a:srgbClr val="1A1A2E"/>
                 </a:solidFill>
@@ -17340,7 +17067,7 @@
           <a:p>
             <a:pPr algn="ctr"/>
             <a:r>
-              <a:rPr sz="1100" b="0" i="1">
+              <a:rPr b="0" i="1" sz="1100">
                 <a:solidFill>
                   <a:srgbClr val="6B7AB8"/>
                 </a:solidFill>
@@ -17374,7 +17101,7 @@
           <a:p>
             <a:pPr algn="r"/>
             <a:r>
-              <a:rPr sz="900" b="0" i="0">
+              <a:rPr b="0" i="0" sz="900">
                 <a:solidFill>
                   <a:srgbClr val="9AA8CC"/>
                 </a:solidFill>
@@ -17393,7 +17120,7 @@
 </file>
 
 <file path=ppt/slides/slide7.xml><?xml version="1.0" encoding="utf-8"?>
-<p:sld xmlns:a="http://schemas.openxmlformats.org/drawingml/2006/main" xmlns:r="http://schemas.openxmlformats.org/officeDocument/2006/relationships" xmlns:p="http://schemas.openxmlformats.org/presentationml/2006/main">
+<p:sld xmlns:a="http://schemas.openxmlformats.org/drawingml/2006/main" xmlns:p="http://schemas.openxmlformats.org/presentationml/2006/main" xmlns:r="http://schemas.openxmlformats.org/officeDocument/2006/relationships">
   <p:cSld>
     <p:spTree>
       <p:nvGrpSpPr>
@@ -17401,14 +17128,7 @@
         <p:cNvGrpSpPr/>
         <p:nvPr/>
       </p:nvGrpSpPr>
-      <p:grpSpPr>
-        <a:xfrm>
-          <a:off x="0" y="0"/>
-          <a:ext cx="0" cy="0"/>
-          <a:chOff x="0" y="0"/>
-          <a:chExt cx="0" cy="0"/>
-        </a:xfrm>
-      </p:grpSpPr>
+      <p:grpSpPr/>
       <p:sp>
         <p:nvSpPr>
           <p:cNvPr id="2" name="Rectangle 1"/>
@@ -17449,7 +17169,6 @@
           <a:lstStyle/>
           <a:p>
             <a:pPr algn="ctr"/>
-            <a:endParaRPr/>
           </a:p>
         </p:txBody>
       </p:sp>
@@ -17493,7 +17212,6 @@
           <a:lstStyle/>
           <a:p>
             <a:pPr algn="ctr"/>
-            <a:endParaRPr/>
           </a:p>
         </p:txBody>
       </p:sp>
@@ -17537,7 +17255,6 @@
           <a:lstStyle/>
           <a:p>
             <a:pPr algn="ctr"/>
-            <a:endParaRPr/>
           </a:p>
         </p:txBody>
       </p:sp>
@@ -17565,7 +17282,7 @@
           <a:p>
             <a:pPr algn="l"/>
             <a:r>
-              <a:rPr sz="900" b="1" i="0">
+              <a:rPr b="1" i="0" sz="900">
                 <a:solidFill>
                   <a:srgbClr val="CADCFC"/>
                 </a:solidFill>
@@ -17599,7 +17316,7 @@
           <a:p>
             <a:pPr algn="l"/>
             <a:r>
-              <a:rPr sz="3400" b="1" i="0">
+              <a:rPr b="1" i="0" sz="3400">
                 <a:solidFill>
                   <a:srgbClr val="FFFFFF"/>
                 </a:solidFill>
@@ -17649,7 +17366,6 @@
           <a:lstStyle/>
           <a:p>
             <a:pPr algn="ctr"/>
-            <a:endParaRPr/>
           </a:p>
         </p:txBody>
       </p:sp>
@@ -17693,7 +17409,6 @@
           <a:lstStyle/>
           <a:p>
             <a:pPr algn="ctr"/>
-            <a:endParaRPr/>
           </a:p>
         </p:txBody>
       </p:sp>
@@ -17721,7 +17436,7 @@
           <a:p>
             <a:pPr algn="ctr"/>
             <a:r>
-              <a:rPr sz="1200" b="1" i="0">
+              <a:rPr b="1" i="0" sz="1200">
                 <a:solidFill>
                   <a:srgbClr val="FFFFFF"/>
                 </a:solidFill>
@@ -17755,7 +17470,7 @@
           <a:p>
             <a:pPr algn="l"/>
             <a:r>
-              <a:rPr sz="1000" b="0" i="0">
+              <a:rPr b="0" i="0" sz="1000">
                 <a:solidFill>
                   <a:srgbClr val="FFFFFF"/>
                 </a:solidFill>
@@ -17809,7 +17524,6 @@
           <a:lstStyle/>
           <a:p>
             <a:pPr algn="ctr"/>
-            <a:endParaRPr/>
           </a:p>
         </p:txBody>
       </p:sp>
@@ -17837,7 +17551,7 @@
           <a:p>
             <a:pPr algn="ctr"/>
             <a:r>
-              <a:rPr sz="1200" b="1" i="0">
+              <a:rPr b="1" i="0" sz="1200">
                 <a:solidFill>
                   <a:srgbClr val="FFFFFF"/>
                 </a:solidFill>
@@ -17871,7 +17585,7 @@
           <a:p>
             <a:pPr algn="ctr"/>
             <a:r>
-              <a:rPr sz="1100" b="0" i="0">
+              <a:rPr b="0" i="0" sz="1100">
                 <a:solidFill>
                   <a:srgbClr val="CADCFC"/>
                 </a:solidFill>
@@ -17906,7 +17620,7 @@
           <a:p>
             <a:pPr algn="ctr"/>
             <a:r>
-              <a:rPr sz="1000" b="0" i="0">
+              <a:rPr b="0" i="0" sz="1000">
                 <a:solidFill>
                   <a:srgbClr val="FFFFFF"/>
                 </a:solidFill>
@@ -17957,7 +17671,6 @@
           <a:lstStyle/>
           <a:p>
             <a:pPr algn="ctr"/>
-            <a:endParaRPr/>
           </a:p>
         </p:txBody>
       </p:sp>
@@ -17985,7 +17698,7 @@
           <a:p>
             <a:pPr algn="ctr"/>
             <a:r>
-              <a:rPr sz="1200" b="1" i="0">
+              <a:rPr b="1" i="0" sz="1200">
                 <a:solidFill>
                   <a:srgbClr val="FFFFFF"/>
                 </a:solidFill>
@@ -18019,7 +17732,7 @@
           <a:p>
             <a:pPr algn="l"/>
             <a:r>
-              <a:rPr sz="1000" b="0" i="0">
+              <a:rPr b="0" i="0" sz="1000">
                 <a:solidFill>
                   <a:srgbClr val="FFFFFF"/>
                 </a:solidFill>
@@ -18072,7 +17785,6 @@
           <a:lstStyle/>
           <a:p>
             <a:pPr algn="ctr"/>
-            <a:endParaRPr/>
           </a:p>
         </p:txBody>
       </p:sp>
@@ -18100,7 +17812,7 @@
           <a:p>
             <a:pPr algn="ctr"/>
             <a:r>
-              <a:rPr sz="1000" b="1" i="0">
+              <a:rPr b="1" i="0" sz="1000">
                 <a:solidFill>
                   <a:srgbClr val="FFFFFF"/>
                 </a:solidFill>
@@ -18134,7 +17846,7 @@
           <a:p>
             <a:pPr algn="l"/>
             <a:r>
-              <a:rPr sz="950" b="0" i="0">
+              <a:rPr b="0" i="0" sz="950">
                 <a:solidFill>
                   <a:srgbClr val="FFFFFF"/>
                 </a:solidFill>
@@ -18187,7 +17899,6 @@
           <a:lstStyle/>
           <a:p>
             <a:pPr algn="ctr"/>
-            <a:endParaRPr/>
           </a:p>
         </p:txBody>
       </p:sp>
@@ -18215,7 +17926,7 @@
           <a:p>
             <a:pPr algn="ctr"/>
             <a:r>
-              <a:rPr sz="1100" b="1" i="0">
+              <a:rPr b="1" i="0" sz="1100">
                 <a:solidFill>
                   <a:srgbClr val="FFFFFF"/>
                 </a:solidFill>
@@ -18249,7 +17960,7 @@
           <a:p>
             <a:pPr algn="l"/>
             <a:r>
-              <a:rPr sz="950" b="0" i="0">
+              <a:rPr b="0" i="0" sz="950">
                 <a:solidFill>
                   <a:srgbClr val="FFFFFF"/>
                 </a:solidFill>
@@ -18302,7 +18013,6 @@
           <a:lstStyle/>
           <a:p>
             <a:pPr algn="ctr"/>
-            <a:endParaRPr/>
           </a:p>
         </p:txBody>
       </p:sp>
@@ -18330,7 +18040,7 @@
           <a:p>
             <a:pPr algn="ctr"/>
             <a:r>
-              <a:rPr sz="1100" b="1" i="0">
+              <a:rPr b="1" i="0" sz="1100">
                 <a:solidFill>
                   <a:srgbClr val="CADCFC"/>
                 </a:solidFill>
@@ -18364,7 +18074,7 @@
           <a:p>
             <a:pPr algn="l"/>
             <a:r>
-              <a:rPr sz="950" b="0" i="0">
+              <a:rPr b="0" i="0" sz="950">
                 <a:solidFill>
                   <a:srgbClr val="FFFFFF"/>
                 </a:solidFill>
@@ -18417,7 +18127,6 @@
           <a:lstStyle/>
           <a:p>
             <a:pPr algn="ctr"/>
-            <a:endParaRPr/>
           </a:p>
         </p:txBody>
       </p:sp>
@@ -18445,7 +18154,7 @@
           <a:p>
             <a:pPr algn="l"/>
             <a:r>
-              <a:rPr sz="1200" b="1" i="0">
+              <a:rPr b="1" i="0" sz="1200">
                 <a:solidFill>
                   <a:srgbClr val="CADCFC"/>
                 </a:solidFill>
@@ -18479,7 +18188,7 @@
           <a:p>
             <a:pPr algn="ctr"/>
             <a:r>
-              <a:rPr sz="1000" b="0" i="1">
+              <a:rPr b="0" i="1" sz="1000">
                 <a:solidFill>
                   <a:srgbClr val="6B7AB8"/>
                 </a:solidFill>
@@ -18529,7 +18238,6 @@
           <a:lstStyle/>
           <a:p>
             <a:pPr algn="ctr"/>
-            <a:endParaRPr/>
           </a:p>
         </p:txBody>
       </p:sp>
@@ -18557,7 +18265,7 @@
           <a:p>
             <a:pPr algn="l"/>
             <a:r>
-              <a:rPr sz="1200" b="1" i="0">
+              <a:rPr b="1" i="0" sz="1200">
                 <a:solidFill>
                   <a:srgbClr val="CADCFC"/>
                 </a:solidFill>
@@ -18591,7 +18299,7 @@
           <a:p>
             <a:pPr algn="ctr"/>
             <a:r>
-              <a:rPr sz="1000" b="0" i="1">
+              <a:rPr b="0" i="1" sz="1000">
                 <a:solidFill>
                   <a:srgbClr val="6B7AB8"/>
                 </a:solidFill>
@@ -18641,7 +18349,6 @@
           <a:lstStyle/>
           <a:p>
             <a:pPr algn="ctr"/>
-            <a:endParaRPr/>
           </a:p>
         </p:txBody>
       </p:sp>
@@ -18669,7 +18376,7 @@
           <a:p>
             <a:pPr algn="l"/>
             <a:r>
-              <a:rPr sz="1200" b="1" i="0">
+              <a:rPr b="1" i="0" sz="1200">
                 <a:solidFill>
                   <a:srgbClr val="CADCFC"/>
                 </a:solidFill>
@@ -18703,7 +18410,7 @@
           <a:p>
             <a:pPr algn="ctr"/>
             <a:r>
-              <a:rPr sz="1000" b="0" i="1">
+              <a:rPr b="0" i="1" sz="1000">
                 <a:solidFill>
                   <a:srgbClr val="6B7AB8"/>
                 </a:solidFill>
@@ -18753,7 +18460,6 @@
           <a:lstStyle/>
           <a:p>
             <a:pPr algn="ctr"/>
-            <a:endParaRPr/>
           </a:p>
         </p:txBody>
       </p:sp>
@@ -18781,7 +18487,7 @@
           <a:p>
             <a:pPr algn="l"/>
             <a:r>
-              <a:rPr sz="1200" b="1" i="0">
+              <a:rPr b="1" i="0" sz="1200">
                 <a:solidFill>
                   <a:srgbClr val="CADCFC"/>
                 </a:solidFill>
@@ -18815,7 +18521,7 @@
           <a:p>
             <a:pPr algn="ctr"/>
             <a:r>
-              <a:rPr sz="1000" b="0" i="1">
+              <a:rPr b="0" i="1" sz="1000">
                 <a:solidFill>
                   <a:srgbClr val="6B7AB8"/>
                 </a:solidFill>
@@ -18865,7 +18571,6 @@
           <a:lstStyle/>
           <a:p>
             <a:pPr algn="ctr"/>
-            <a:endParaRPr/>
           </a:p>
         </p:txBody>
       </p:sp>
@@ -18909,7 +18614,6 @@
           <a:lstStyle/>
           <a:p>
             <a:pPr algn="ctr"/>
-            <a:endParaRPr/>
           </a:p>
         </p:txBody>
       </p:sp>
@@ -18953,7 +18657,6 @@
           <a:lstStyle/>
           <a:p>
             <a:pPr algn="ctr"/>
-            <a:endParaRPr/>
           </a:p>
         </p:txBody>
       </p:sp>
@@ -18981,7 +18684,7 @@
           <a:p>
             <a:pPr algn="ctr"/>
             <a:r>
-              <a:rPr sz="1100" b="1" i="0">
+              <a:rPr b="1" i="0" sz="1100">
                 <a:solidFill>
                   <a:srgbClr val="CADCFC"/>
                 </a:solidFill>
@@ -19031,7 +18734,6 @@
           <a:lstStyle/>
           <a:p>
             <a:pPr algn="ctr"/>
-            <a:endParaRPr/>
           </a:p>
         </p:txBody>
       </p:sp>
@@ -19059,7 +18761,7 @@
           <a:p>
             <a:pPr algn="ctr"/>
             <a:r>
-              <a:rPr sz="1100" b="1" i="0">
+              <a:rPr b="1" i="0" sz="1100">
                 <a:solidFill>
                   <a:srgbClr val="CADCFC"/>
                 </a:solidFill>
@@ -19093,7 +18795,7 @@
           <a:p>
             <a:pPr algn="l"/>
             <a:r>
-              <a:rPr sz="1000" b="0" i="1">
+              <a:rPr b="0" i="1" sz="1000">
                 <a:solidFill>
                   <a:srgbClr val="6B7AB8"/>
                 </a:solidFill>
@@ -19127,7 +18829,7 @@
           <a:p>
             <a:pPr algn="l"/>
             <a:r>
-              <a:rPr sz="1000" b="0" i="1">
+              <a:rPr b="0" i="1" sz="1000">
                 <a:solidFill>
                   <a:srgbClr val="6B7AB8"/>
                 </a:solidFill>
@@ -19161,7 +18863,7 @@
           <a:p>
             <a:pPr algn="l"/>
             <a:r>
-              <a:rPr sz="1000" b="0" i="1">
+              <a:rPr b="0" i="1" sz="1000">
                 <a:solidFill>
                   <a:srgbClr val="6B7AB8"/>
                 </a:solidFill>
@@ -19211,7 +18913,6 @@
           <a:lstStyle/>
           <a:p>
             <a:pPr algn="ctr"/>
-            <a:endParaRPr/>
           </a:p>
         </p:txBody>
       </p:sp>
@@ -19239,7 +18940,7 @@
           <a:p>
             <a:pPr algn="l"/>
             <a:r>
-              <a:rPr sz="1100" b="1" i="0">
+              <a:rPr b="1" i="0" sz="1100">
                 <a:solidFill>
                   <a:srgbClr val="CADCFC"/>
                 </a:solidFill>
@@ -19273,7 +18974,7 @@
           <a:p>
             <a:pPr algn="ctr"/>
             <a:r>
-              <a:rPr sz="1000" b="0" i="1">
+              <a:rPr b="0" i="1" sz="1000">
                 <a:solidFill>
                   <a:srgbClr val="6B7AB8"/>
                 </a:solidFill>
@@ -19307,7 +19008,7 @@
           <a:p>
             <a:pPr algn="r"/>
             <a:r>
-              <a:rPr sz="900" b="0" i="0">
+              <a:rPr b="0" i="0" sz="900">
                 <a:solidFill>
                   <a:srgbClr val="6B7AB8"/>
                 </a:solidFill>
@@ -19326,7 +19027,7 @@
 </file>
 
 <file path=ppt/slides/slide8.xml><?xml version="1.0" encoding="utf-8"?>
-<p:sld xmlns:a="http://schemas.openxmlformats.org/drawingml/2006/main" xmlns:r="http://schemas.openxmlformats.org/officeDocument/2006/relationships" xmlns:p="http://schemas.openxmlformats.org/presentationml/2006/main">
+<p:sld xmlns:a="http://schemas.openxmlformats.org/drawingml/2006/main" xmlns:p="http://schemas.openxmlformats.org/presentationml/2006/main" xmlns:r="http://schemas.openxmlformats.org/officeDocument/2006/relationships">
   <p:cSld>
     <p:spTree>
       <p:nvGrpSpPr>
@@ -19334,14 +19035,7 @@
         <p:cNvGrpSpPr/>
         <p:nvPr/>
       </p:nvGrpSpPr>
-      <p:grpSpPr>
-        <a:xfrm>
-          <a:off x="0" y="0"/>
-          <a:ext cx="0" cy="0"/>
-          <a:chOff x="0" y="0"/>
-          <a:chExt cx="0" cy="0"/>
-        </a:xfrm>
-      </p:grpSpPr>
+      <p:grpSpPr/>
       <p:sp>
         <p:nvSpPr>
           <p:cNvPr id="2" name="Rectangle 1"/>
@@ -19382,7 +19076,6 @@
           <a:lstStyle/>
           <a:p>
             <a:pPr algn="ctr"/>
-            <a:endParaRPr/>
           </a:p>
         </p:txBody>
       </p:sp>
@@ -19394,7 +19087,7 @@
         </p:nvSpPr>
         <p:spPr>
           <a:xfrm>
-            <a:off x="18661" y="0"/>
+            <a:off x="0" y="0"/>
             <a:ext cx="12188952" cy="73152"/>
           </a:xfrm>
           <a:prstGeom prst="rect">
@@ -19426,7 +19119,6 @@
           <a:lstStyle/>
           <a:p>
             <a:pPr algn="ctr"/>
-            <a:endParaRPr/>
           </a:p>
         </p:txBody>
       </p:sp>
@@ -19470,7 +19162,6 @@
           <a:lstStyle/>
           <a:p>
             <a:pPr algn="ctr"/>
-            <a:endParaRPr/>
           </a:p>
         </p:txBody>
       </p:sp>
@@ -19498,7 +19189,7 @@
           <a:p>
             <a:pPr algn="l"/>
             <a:r>
-              <a:rPr sz="900" b="1" i="0">
+              <a:rPr b="1" i="0" sz="900">
                 <a:solidFill>
                   <a:srgbClr val="1E2761"/>
                 </a:solidFill>
@@ -19532,7 +19223,7 @@
           <a:p>
             <a:pPr algn="l"/>
             <a:r>
-              <a:rPr sz="3000" b="1" i="0">
+              <a:rPr b="1" i="0" sz="3000">
                 <a:solidFill>
                   <a:srgbClr val="1E2761"/>
                 </a:solidFill>
@@ -19582,7 +19273,6 @@
           <a:lstStyle/>
           <a:p>
             <a:pPr algn="ctr"/>
-            <a:endParaRPr/>
           </a:p>
         </p:txBody>
       </p:sp>
@@ -19626,7 +19316,6 @@
           <a:lstStyle/>
           <a:p>
             <a:pPr algn="ctr"/>
-            <a:endParaRPr/>
           </a:p>
         </p:txBody>
       </p:sp>
@@ -19654,7 +19343,7 @@
           <a:p>
             <a:pPr algn="ctr"/>
             <a:r>
-              <a:rPr sz="1100" b="1" i="0">
+              <a:rPr b="1" i="0" sz="1100">
                 <a:solidFill>
                   <a:srgbClr val="FFFFFF"/>
                 </a:solidFill>
@@ -19704,7 +19393,6 @@
           <a:lstStyle/>
           <a:p>
             <a:pPr algn="ctr"/>
-            <a:endParaRPr/>
           </a:p>
         </p:txBody>
       </p:sp>
@@ -19732,7 +19420,7 @@
           <a:p>
             <a:pPr algn="ctr"/>
             <a:r>
-              <a:rPr sz="1100" b="1" i="0">
+              <a:rPr b="1" i="0" sz="1100">
                 <a:solidFill>
                   <a:srgbClr val="FFFFFF"/>
                 </a:solidFill>
@@ -19782,7 +19470,6 @@
           <a:lstStyle/>
           <a:p>
             <a:pPr algn="ctr"/>
-            <a:endParaRPr/>
           </a:p>
         </p:txBody>
       </p:sp>
@@ -19810,7 +19497,7 @@
           <a:p>
             <a:pPr algn="ctr"/>
             <a:r>
-              <a:rPr sz="1100" b="1" i="0">
+              <a:rPr b="1" i="0" sz="1100">
                 <a:solidFill>
                   <a:srgbClr val="FFFFFF"/>
                 </a:solidFill>
@@ -19860,7 +19547,6 @@
           <a:lstStyle/>
           <a:p>
             <a:pPr algn="ctr"/>
-            <a:endParaRPr/>
           </a:p>
         </p:txBody>
       </p:sp>
@@ -19888,7 +19574,7 @@
           <a:p>
             <a:pPr algn="l"/>
             <a:r>
-              <a:rPr sz="1200" b="1" i="0">
+              <a:rPr b="1" i="0" sz="1200">
                 <a:solidFill>
                   <a:srgbClr val="CADCFC"/>
                 </a:solidFill>
@@ -19922,7 +19608,7 @@
           <a:p>
             <a:pPr algn="l"/>
             <a:r>
-              <a:rPr sz="1000" b="0" i="0">
+              <a:rPr b="0" i="0" sz="1000">
                 <a:solidFill>
                   <a:srgbClr val="CADCFC"/>
                 </a:solidFill>
@@ -19957,7 +19643,7 @@
           <a:p>
             <a:pPr algn="l"/>
             <a:r>
-              <a:rPr sz="1300" b="1" i="0">
+              <a:rPr b="1" i="0" sz="1300">
                 <a:solidFill>
                   <a:srgbClr val="1E2761"/>
                 </a:solidFill>
@@ -20007,7 +19693,6 @@
           <a:lstStyle/>
           <a:p>
             <a:pPr algn="ctr"/>
-            <a:endParaRPr/>
           </a:p>
         </p:txBody>
       </p:sp>
@@ -20035,7 +19720,7 @@
           <a:p>
             <a:pPr algn="l"/>
             <a:r>
-              <a:rPr sz="1200" b="1" i="0">
+              <a:rPr b="1" i="0" sz="1200">
                 <a:solidFill>
                   <a:srgbClr val="FFFFFF"/>
                 </a:solidFill>
@@ -20069,7 +19754,7 @@
           <a:p>
             <a:pPr algn="l"/>
             <a:r>
-              <a:rPr sz="1000" b="0" i="0">
+              <a:rPr b="0" i="0" sz="1000">
                 <a:solidFill>
                   <a:srgbClr val="FFFFFF"/>
                 </a:solidFill>
@@ -20104,7 +19789,7 @@
           <a:p>
             <a:pPr algn="l"/>
             <a:r>
-              <a:rPr sz="1300" b="1" i="0">
+              <a:rPr b="1" i="0" sz="1300">
                 <a:solidFill>
                   <a:srgbClr val="1E2761"/>
                 </a:solidFill>
@@ -20154,7 +19839,6 @@
           <a:lstStyle/>
           <a:p>
             <a:pPr algn="ctr"/>
-            <a:endParaRPr/>
           </a:p>
         </p:txBody>
       </p:sp>
@@ -20182,7 +19866,7 @@
           <a:p>
             <a:pPr algn="l"/>
             <a:r>
-              <a:rPr sz="1200" b="1" i="0">
+              <a:rPr b="1" i="0" sz="1200">
                 <a:solidFill>
                   <a:srgbClr val="FFFFFF"/>
                 </a:solidFill>
@@ -20216,7 +19900,7 @@
           <a:p>
             <a:pPr algn="l"/>
             <a:r>
-              <a:rPr sz="1000" b="0" i="0">
+              <a:rPr b="0" i="0" sz="1000">
                 <a:solidFill>
                   <a:srgbClr val="FFFFFF"/>
                 </a:solidFill>
@@ -20251,7 +19935,7 @@
           <a:p>
             <a:pPr algn="l"/>
             <a:r>
-              <a:rPr sz="1300" b="1" i="0">
+              <a:rPr b="1" i="0" sz="1300">
                 <a:solidFill>
                   <a:srgbClr val="1E2761"/>
                 </a:solidFill>
@@ -20301,7 +19985,6 @@
           <a:lstStyle/>
           <a:p>
             <a:pPr algn="ctr"/>
-            <a:endParaRPr/>
           </a:p>
         </p:txBody>
       </p:sp>
@@ -20329,7 +20012,7 @@
           <a:p>
             <a:pPr algn="l"/>
             <a:r>
-              <a:rPr sz="1200" b="1" i="0">
+              <a:rPr b="1" i="0" sz="1200">
                 <a:solidFill>
                   <a:srgbClr val="FFFFFF"/>
                 </a:solidFill>
@@ -20363,7 +20046,7 @@
           <a:p>
             <a:pPr algn="l"/>
             <a:r>
-              <a:rPr sz="1000" b="0" i="0">
+              <a:rPr b="0" i="0" sz="1000">
                 <a:solidFill>
                   <a:srgbClr val="FFFFFF"/>
                 </a:solidFill>
@@ -20414,7 +20097,6 @@
           <a:lstStyle/>
           <a:p>
             <a:pPr algn="ctr"/>
-            <a:endParaRPr/>
           </a:p>
         </p:txBody>
       </p:sp>
@@ -20442,7 +20124,7 @@
           <a:p>
             <a:pPr algn="l"/>
             <a:r>
-              <a:rPr sz="1050" b="1" i="0">
+              <a:rPr b="1" i="0" sz="1050">
                 <a:solidFill>
                   <a:srgbClr val="FFFFFF"/>
                 </a:solidFill>
@@ -20476,7 +20158,7 @@
           <a:p>
             <a:pPr algn="l"/>
             <a:r>
-              <a:rPr sz="900" b="1" i="0">
+              <a:rPr b="1" i="0" sz="900">
                 <a:solidFill>
                   <a:srgbClr val="1E2761"/>
                 </a:solidFill>
@@ -20526,7 +20208,6 @@
           <a:lstStyle/>
           <a:p>
             <a:pPr algn="ctr"/>
-            <a:endParaRPr/>
           </a:p>
         </p:txBody>
       </p:sp>
@@ -20554,7 +20235,7 @@
           <a:p>
             <a:pPr algn="ctr"/>
             <a:r>
-              <a:rPr sz="1000" b="1" i="0">
+              <a:rPr b="1" i="0" sz="1000">
                 <a:solidFill>
                   <a:srgbClr val="FFFFFF"/>
                 </a:solidFill>
@@ -20604,7 +20285,6 @@
           <a:lstStyle/>
           <a:p>
             <a:pPr algn="ctr"/>
-            <a:endParaRPr/>
           </a:p>
         </p:txBody>
       </p:sp>
@@ -20632,7 +20312,7 @@
           <a:p>
             <a:pPr algn="ctr"/>
             <a:r>
-              <a:rPr sz="1000" b="1" i="0">
+              <a:rPr b="1" i="0" sz="1000">
                 <a:solidFill>
                   <a:srgbClr val="FFFFFF"/>
                 </a:solidFill>
@@ -20682,7 +20362,6 @@
           <a:lstStyle/>
           <a:p>
             <a:pPr algn="ctr"/>
-            <a:endParaRPr/>
           </a:p>
         </p:txBody>
       </p:sp>
@@ -20710,7 +20389,7 @@
           <a:p>
             <a:pPr algn="ctr"/>
             <a:r>
-              <a:rPr sz="1000" b="1" i="0">
+              <a:rPr b="1" i="0" sz="1000">
                 <a:solidFill>
                   <a:srgbClr val="FFFFFF"/>
                 </a:solidFill>
@@ -20744,7 +20423,7 @@
           <a:p>
             <a:pPr algn="l"/>
             <a:r>
-              <a:rPr sz="900" b="1" i="0">
+              <a:rPr b="1" i="0" sz="900">
                 <a:solidFill>
                   <a:srgbClr val="1E2761"/>
                 </a:solidFill>
@@ -20794,7 +20473,6 @@
           <a:lstStyle/>
           <a:p>
             <a:pPr algn="ctr"/>
-            <a:endParaRPr/>
           </a:p>
         </p:txBody>
       </p:sp>
@@ -20822,7 +20500,7 @@
           <a:p>
             <a:pPr algn="ctr"/>
             <a:r>
-              <a:rPr sz="950" b="1" i="0">
+              <a:rPr b="1" i="0" sz="950">
                 <a:solidFill>
                   <a:srgbClr val="CADCFC"/>
                 </a:solidFill>
@@ -20872,7 +20550,6 @@
           <a:lstStyle/>
           <a:p>
             <a:pPr algn="ctr"/>
-            <a:endParaRPr/>
           </a:p>
         </p:txBody>
       </p:sp>
@@ -20900,7 +20577,7 @@
           <a:p>
             <a:pPr algn="ctr"/>
             <a:r>
-              <a:rPr sz="950" b="1" i="0">
+              <a:rPr b="1" i="0" sz="950">
                 <a:solidFill>
                   <a:srgbClr val="CADCFC"/>
                 </a:solidFill>
@@ -20950,7 +20627,6 @@
           <a:lstStyle/>
           <a:p>
             <a:pPr algn="ctr"/>
-            <a:endParaRPr/>
           </a:p>
         </p:txBody>
       </p:sp>
@@ -20978,7 +20654,7 @@
           <a:p>
             <a:pPr algn="ctr"/>
             <a:r>
-              <a:rPr sz="950" b="1" i="0">
+              <a:rPr b="1" i="0" sz="950">
                 <a:solidFill>
                   <a:srgbClr val="CADCFC"/>
                 </a:solidFill>
@@ -21028,7 +20704,6 @@
           <a:lstStyle/>
           <a:p>
             <a:pPr algn="ctr"/>
-            <a:endParaRPr/>
           </a:p>
         </p:txBody>
       </p:sp>
@@ -21056,7 +20731,7 @@
           <a:p>
             <a:pPr algn="ctr"/>
             <a:r>
-              <a:rPr sz="950" b="1" i="0">
+              <a:rPr b="1" i="0" sz="950">
                 <a:solidFill>
                   <a:srgbClr val="CADCFC"/>
                 </a:solidFill>
@@ -21106,7 +20781,6 @@
           <a:lstStyle/>
           <a:p>
             <a:pPr algn="ctr"/>
-            <a:endParaRPr/>
           </a:p>
         </p:txBody>
       </p:sp>
@@ -21150,7 +20824,6 @@
           <a:lstStyle/>
           <a:p>
             <a:pPr algn="ctr"/>
-            <a:endParaRPr/>
           </a:p>
         </p:txBody>
       </p:sp>
@@ -21178,7 +20851,7 @@
           <a:p>
             <a:pPr algn="ctr"/>
             <a:r>
-              <a:rPr sz="900" b="1" i="0">
+              <a:rPr b="1" i="0" sz="900">
                 <a:solidFill>
                   <a:srgbClr val="FFFFFF"/>
                 </a:solidFill>
@@ -21212,7 +20885,7 @@
           <a:p>
             <a:pPr algn="l"/>
             <a:r>
-              <a:rPr sz="1050" b="1" i="0">
+              <a:rPr b="1" i="0" sz="1050">
                 <a:solidFill>
                   <a:srgbClr val="1A1A2E"/>
                 </a:solidFill>
@@ -21246,7 +20919,7 @@
           <a:p>
             <a:pPr algn="l"/>
             <a:r>
-              <a:rPr sz="900" b="0" i="0">
+              <a:rPr b="0" i="0" sz="900">
                 <a:solidFill>
                   <a:srgbClr val="6B7AB8"/>
                 </a:solidFill>
@@ -21280,7 +20953,7 @@
           <a:p>
             <a:pPr algn="r"/>
             <a:r>
-              <a:rPr sz="950" b="0" i="0">
+              <a:rPr b="0" i="0" sz="950">
                 <a:solidFill>
                   <a:srgbClr val="1A1A2E"/>
                 </a:solidFill>
@@ -21314,7 +20987,7 @@
           <a:p>
             <a:pPr algn="r"/>
             <a:r>
-              <a:rPr sz="1000" b="1" i="0">
+              <a:rPr b="1" i="0" sz="1000">
                 <a:solidFill>
                   <a:srgbClr val="1E2761"/>
                 </a:solidFill>
@@ -21364,7 +21037,6 @@
           <a:lstStyle/>
           <a:p>
             <a:pPr algn="ctr"/>
-            <a:endParaRPr/>
           </a:p>
         </p:txBody>
       </p:sp>
@@ -21408,7 +21080,6 @@
           <a:lstStyle/>
           <a:p>
             <a:pPr algn="ctr"/>
-            <a:endParaRPr/>
           </a:p>
         </p:txBody>
       </p:sp>
@@ -21436,7 +21107,7 @@
           <a:p>
             <a:pPr algn="ctr"/>
             <a:r>
-              <a:rPr sz="900" b="1" i="0">
+              <a:rPr b="1" i="0" sz="900">
                 <a:solidFill>
                   <a:srgbClr val="FFFFFF"/>
                 </a:solidFill>
@@ -21470,7 +21141,7 @@
           <a:p>
             <a:pPr algn="l"/>
             <a:r>
-              <a:rPr sz="1050" b="1" i="0">
+              <a:rPr b="1" i="0" sz="1050">
                 <a:solidFill>
                   <a:srgbClr val="1A1A2E"/>
                 </a:solidFill>
@@ -21504,7 +21175,7 @@
           <a:p>
             <a:pPr algn="l"/>
             <a:r>
-              <a:rPr sz="900" b="0" i="0">
+              <a:rPr b="0" i="0" sz="900">
                 <a:solidFill>
                   <a:srgbClr val="6B7AB8"/>
                 </a:solidFill>
@@ -21538,7 +21209,7 @@
           <a:p>
             <a:pPr algn="r"/>
             <a:r>
-              <a:rPr sz="950" b="0" i="0">
+              <a:rPr b="0" i="0" sz="950">
                 <a:solidFill>
                   <a:srgbClr val="1A1A2E"/>
                 </a:solidFill>
@@ -21572,7 +21243,7 @@
           <a:p>
             <a:pPr algn="r"/>
             <a:r>
-              <a:rPr sz="1000" b="1" i="0">
+              <a:rPr b="1" i="0" sz="1000">
                 <a:solidFill>
                   <a:srgbClr val="1E2761"/>
                 </a:solidFill>
@@ -21622,7 +21293,6 @@
           <a:lstStyle/>
           <a:p>
             <a:pPr algn="ctr"/>
-            <a:endParaRPr/>
           </a:p>
         </p:txBody>
       </p:sp>
@@ -21666,7 +21336,6 @@
           <a:lstStyle/>
           <a:p>
             <a:pPr algn="ctr"/>
-            <a:endParaRPr/>
           </a:p>
         </p:txBody>
       </p:sp>
@@ -21694,7 +21363,7 @@
           <a:p>
             <a:pPr algn="ctr"/>
             <a:r>
-              <a:rPr sz="900" b="1" i="0">
+              <a:rPr b="1" i="0" sz="900">
                 <a:solidFill>
                   <a:srgbClr val="FFFFFF"/>
                 </a:solidFill>
@@ -21728,7 +21397,7 @@
           <a:p>
             <a:pPr algn="l"/>
             <a:r>
-              <a:rPr sz="1050" b="1" i="0">
+              <a:rPr b="1" i="0" sz="1050">
                 <a:solidFill>
                   <a:srgbClr val="1A1A2E"/>
                 </a:solidFill>
@@ -21762,7 +21431,7 @@
           <a:p>
             <a:pPr algn="l"/>
             <a:r>
-              <a:rPr sz="900" b="0" i="0">
+              <a:rPr b="0" i="0" sz="900">
                 <a:solidFill>
                   <a:srgbClr val="6B7AB8"/>
                 </a:solidFill>
@@ -21796,7 +21465,7 @@
           <a:p>
             <a:pPr algn="r"/>
             <a:r>
-              <a:rPr sz="950" b="0" i="0">
+              <a:rPr b="0" i="0" sz="950">
                 <a:solidFill>
                   <a:srgbClr val="1A1A2E"/>
                 </a:solidFill>
@@ -21830,7 +21499,7 @@
           <a:p>
             <a:pPr algn="r"/>
             <a:r>
-              <a:rPr sz="1000" b="1" i="0">
+              <a:rPr b="1" i="0" sz="1000">
                 <a:solidFill>
                   <a:srgbClr val="E74C3C"/>
                 </a:solidFill>
@@ -21880,7 +21549,6 @@
           <a:lstStyle/>
           <a:p>
             <a:pPr algn="ctr"/>
-            <a:endParaRPr/>
           </a:p>
         </p:txBody>
       </p:sp>
@@ -21908,7 +21576,7 @@
           <a:p>
             <a:pPr algn="ctr"/>
             <a:r>
-              <a:rPr sz="1100" b="1" i="0">
+              <a:rPr b="1" i="0" sz="1100">
                 <a:solidFill>
                   <a:srgbClr val="CADCFC"/>
                 </a:solidFill>
@@ -21942,7 +21610,7 @@
           <a:p>
             <a:pPr algn="r"/>
             <a:r>
-              <a:rPr sz="900" b="0" i="0">
+              <a:rPr b="0" i="0" sz="900">
                 <a:solidFill>
                   <a:srgbClr val="9AA8CC"/>
                 </a:solidFill>
@@ -21961,7 +21629,7 @@
 </file>
 
 <file path=ppt/slides/slide9.xml><?xml version="1.0" encoding="utf-8"?>
-<p:sld xmlns:a="http://schemas.openxmlformats.org/drawingml/2006/main" xmlns:r="http://schemas.openxmlformats.org/officeDocument/2006/relationships" xmlns:p="http://schemas.openxmlformats.org/presentationml/2006/main">
+<p:sld xmlns:a="http://schemas.openxmlformats.org/drawingml/2006/main" xmlns:p="http://schemas.openxmlformats.org/presentationml/2006/main" xmlns:r="http://schemas.openxmlformats.org/officeDocument/2006/relationships">
   <p:cSld>
     <p:spTree>
       <p:nvGrpSpPr>
@@ -21969,14 +21637,7 @@
         <p:cNvGrpSpPr/>
         <p:nvPr/>
       </p:nvGrpSpPr>
-      <p:grpSpPr>
-        <a:xfrm>
-          <a:off x="0" y="0"/>
-          <a:ext cx="0" cy="0"/>
-          <a:chOff x="0" y="0"/>
-          <a:chExt cx="0" cy="0"/>
-        </a:xfrm>
-      </p:grpSpPr>
+      <p:grpSpPr/>
       <p:sp>
         <p:nvSpPr>
           <p:cNvPr id="2" name="Rectangle 1"/>
@@ -22017,7 +21678,6 @@
           <a:lstStyle/>
           <a:p>
             <a:pPr algn="ctr"/>
-            <a:endParaRPr/>
           </a:p>
         </p:txBody>
       </p:sp>
@@ -22061,7 +21721,6 @@
           <a:lstStyle/>
           <a:p>
             <a:pPr algn="ctr"/>
-            <a:endParaRPr/>
           </a:p>
         </p:txBody>
       </p:sp>
@@ -22105,7 +21764,6 @@
           <a:lstStyle/>
           <a:p>
             <a:pPr algn="ctr"/>
-            <a:endParaRPr/>
           </a:p>
         </p:txBody>
       </p:sp>
@@ -22133,7 +21791,7 @@
           <a:p>
             <a:pPr algn="l"/>
             <a:r>
-              <a:rPr sz="900" b="1" i="0">
+              <a:rPr b="1" i="0" sz="900">
                 <a:solidFill>
                   <a:srgbClr val="1E2761"/>
                 </a:solidFill>
@@ -22167,7 +21825,7 @@
           <a:p>
             <a:pPr algn="l"/>
             <a:r>
-              <a:rPr sz="2800" b="1" i="0">
+              <a:rPr b="1" i="0" sz="2800">
                 <a:solidFill>
                   <a:srgbClr val="1E2761"/>
                 </a:solidFill>
@@ -22217,7 +21875,6 @@
           <a:lstStyle/>
           <a:p>
             <a:pPr algn="ctr"/>
-            <a:endParaRPr/>
           </a:p>
         </p:txBody>
       </p:sp>
@@ -22261,7 +21918,6 @@
           <a:lstStyle/>
           <a:p>
             <a:pPr algn="ctr"/>
-            <a:endParaRPr/>
           </a:p>
         </p:txBody>
       </p:sp>
@@ -22289,7 +21945,7 @@
           <a:p>
             <a:pPr algn="l"/>
             <a:r>
-              <a:rPr sz="1300" b="1" i="0">
+              <a:rPr b="1" i="0" sz="1300">
                 <a:solidFill>
                   <a:srgbClr val="CADCFC"/>
                 </a:solidFill>
@@ -22323,7 +21979,7 @@
           <a:p>
             <a:pPr algn="l"/>
             <a:r>
-              <a:rPr sz="1050" b="0" i="0">
+              <a:rPr b="0" i="0" sz="1050">
                 <a:solidFill>
                   <a:srgbClr val="FFFFFF"/>
                 </a:solidFill>
@@ -22376,7 +22032,6 @@
           <a:lstStyle/>
           <a:p>
             <a:pPr algn="ctr"/>
-            <a:endParaRPr/>
           </a:p>
         </p:txBody>
       </p:sp>
@@ -22404,7 +22059,7 @@
           <a:p>
             <a:pPr algn="l"/>
             <a:r>
-              <a:rPr sz="900" b="1" i="0">
+              <a:rPr b="1" i="0" sz="900">
                 <a:solidFill>
                   <a:srgbClr val="CADCFC"/>
                 </a:solidFill>
@@ -22454,7 +22109,6 @@
           <a:lstStyle/>
           <a:p>
             <a:pPr algn="ctr"/>
-            <a:endParaRPr/>
           </a:p>
         </p:txBody>
       </p:sp>
@@ -22482,7 +22136,7 @@
           <a:p>
             <a:pPr algn="l"/>
             <a:r>
-              <a:rPr sz="1300" b="1" i="0">
+              <a:rPr b="1" i="0" sz="1300">
                 <a:solidFill>
                   <a:srgbClr val="CADCFC"/>
                 </a:solidFill>
@@ -22516,7 +22170,7 @@
           <a:p>
             <a:pPr algn="l"/>
             <a:r>
-              <a:rPr sz="1050" b="0" i="0">
+              <a:rPr b="0" i="0" sz="1050">
                 <a:solidFill>
                   <a:srgbClr val="FFFFFF"/>
                 </a:solidFill>
@@ -22569,7 +22223,6 @@
           <a:lstStyle/>
           <a:p>
             <a:pPr algn="ctr"/>
-            <a:endParaRPr/>
           </a:p>
         </p:txBody>
       </p:sp>
@@ -22597,7 +22250,7 @@
           <a:p>
             <a:pPr algn="l"/>
             <a:r>
-              <a:rPr sz="900" b="1" i="0">
+              <a:rPr b="1" i="0" sz="900">
                 <a:solidFill>
                   <a:srgbClr val="CADCFC"/>
                 </a:solidFill>
@@ -22647,7 +22300,6 @@
           <a:lstStyle/>
           <a:p>
             <a:pPr algn="ctr"/>
-            <a:endParaRPr/>
           </a:p>
         </p:txBody>
       </p:sp>
@@ -22675,7 +22327,7 @@
           <a:p>
             <a:pPr algn="l"/>
             <a:r>
-              <a:rPr sz="1300" b="1" i="0">
+              <a:rPr b="1" i="0" sz="1300">
                 <a:solidFill>
                   <a:srgbClr val="CADCFC"/>
                 </a:solidFill>
@@ -22709,7 +22361,7 @@
           <a:p>
             <a:pPr algn="l"/>
             <a:r>
-              <a:rPr sz="1050" b="0" i="0">
+              <a:rPr b="0" i="0" sz="1050">
                 <a:solidFill>
                   <a:srgbClr val="FFFFFF"/>
                 </a:solidFill>
@@ -22762,7 +22414,6 @@
           <a:lstStyle/>
           <a:p>
             <a:pPr algn="ctr"/>
-            <a:endParaRPr/>
           </a:p>
         </p:txBody>
       </p:sp>
@@ -22790,7 +22441,7 @@
           <a:p>
             <a:pPr algn="l"/>
             <a:r>
-              <a:rPr sz="900" b="1" i="0">
+              <a:rPr b="1" i="0" sz="900">
                 <a:solidFill>
                   <a:srgbClr val="CADCFC"/>
                 </a:solidFill>
@@ -22840,7 +22491,6 @@
           <a:lstStyle/>
           <a:p>
             <a:pPr algn="ctr"/>
-            <a:endParaRPr/>
           </a:p>
         </p:txBody>
       </p:sp>
@@ -22868,7 +22518,7 @@
           <a:p>
             <a:pPr algn="l"/>
             <a:r>
-              <a:rPr sz="1300" b="1" i="0">
+              <a:rPr b="1" i="0" sz="1300">
                 <a:solidFill>
                   <a:srgbClr val="CADCFC"/>
                 </a:solidFill>
@@ -22902,7 +22552,7 @@
           <a:p>
             <a:pPr algn="l"/>
             <a:r>
-              <a:rPr sz="1050" b="0" i="0">
+              <a:rPr b="0" i="0" sz="1050">
                 <a:solidFill>
                   <a:srgbClr val="FFFFFF"/>
                 </a:solidFill>
@@ -22956,7 +22606,6 @@
           <a:lstStyle/>
           <a:p>
             <a:pPr algn="ctr"/>
-            <a:endParaRPr/>
           </a:p>
         </p:txBody>
       </p:sp>
@@ -22984,7 +22633,7 @@
           <a:p>
             <a:pPr algn="l"/>
             <a:r>
-              <a:rPr sz="900" b="1" i="0">
+              <a:rPr b="1" i="0" sz="900">
                 <a:solidFill>
                   <a:srgbClr val="CADCFC"/>
                 </a:solidFill>
@@ -23034,7 +22683,6 @@
           <a:lstStyle/>
           <a:p>
             <a:pPr algn="ctr"/>
-            <a:endParaRPr/>
           </a:p>
         </p:txBody>
       </p:sp>
@@ -23062,7 +22710,7 @@
           <a:p>
             <a:pPr algn="ctr"/>
             <a:r>
-              <a:rPr sz="1000" b="1" i="0">
+              <a:rPr b="1" i="0" sz="1000">
                 <a:solidFill>
                   <a:srgbClr val="CADCFC"/>
                 </a:solidFill>
@@ -23096,7 +22744,7 @@
           <a:p>
             <a:pPr algn="r"/>
             <a:r>
-              <a:rPr sz="900" b="0" i="0">
+              <a:rPr b="0" i="0" sz="900">
                 <a:solidFill>
                   <a:srgbClr val="9AA8CC"/>
                 </a:solidFill>
@@ -23445,44 +23093,44 @@
         <a:sysClr val="window" lastClr="FFFFFF"/>
       </a:lt1>
       <a:dk2>
-        <a:srgbClr val="0E2841"/>
+        <a:srgbClr val="1F497D"/>
       </a:dk2>
       <a:lt2>
-        <a:srgbClr val="E8E8E8"/>
+        <a:srgbClr val="EEECE1"/>
       </a:lt2>
       <a:accent1>
-        <a:srgbClr val="156082"/>
+        <a:srgbClr val="4F81BD"/>
       </a:accent1>
       <a:accent2>
-        <a:srgbClr val="E97132"/>
+        <a:srgbClr val="C0504D"/>
       </a:accent2>
       <a:accent3>
-        <a:srgbClr val="196B24"/>
+        <a:srgbClr val="9BBB59"/>
       </a:accent3>
       <a:accent4>
-        <a:srgbClr val="0F9ED5"/>
+        <a:srgbClr val="8064A2"/>
       </a:accent4>
       <a:accent5>
-        <a:srgbClr val="A02B93"/>
+        <a:srgbClr val="4BACC6"/>
       </a:accent5>
       <a:accent6>
-        <a:srgbClr val="4EA72E"/>
+        <a:srgbClr val="F79646"/>
       </a:accent6>
       <a:hlink>
-        <a:srgbClr val="467886"/>
+        <a:srgbClr val="0000FF"/>
       </a:hlink>
       <a:folHlink>
-        <a:srgbClr val="96607D"/>
+        <a:srgbClr val="800080"/>
       </a:folHlink>
     </a:clrScheme>
     <a:fontScheme name="Office">
       <a:majorFont>
-        <a:latin typeface="Aptos Display" panose="02110004020202020204"/>
+        <a:latin typeface="Calibri"/>
         <a:ea typeface=""/>
         <a:cs typeface=""/>
-        <a:font script="Jpan" typeface="游ゴシック Light"/>
+        <a:font script="Jpan" typeface="ＭＳ Ｐゴシック"/>
         <a:font script="Hang" typeface="맑은 고딕"/>
-        <a:font script="Hans" typeface="等线 Light"/>
+        <a:font script="Hans" typeface="宋体"/>
         <a:font script="Hant" typeface="新細明體"/>
         <a:font script="Arab" typeface="Times New Roman"/>
         <a:font script="Hebr" typeface="Times New Roman"/>
@@ -23510,31 +23158,14 @@
         <a:font script="Viet" typeface="Times New Roman"/>
         <a:font script="Uigh" typeface="Microsoft Uighur"/>
         <a:font script="Geor" typeface="Sylfaen"/>
-        <a:font script="Armn" typeface="Arial"/>
-        <a:font script="Bugi" typeface="Leelawadee UI"/>
-        <a:font script="Bopo" typeface="Microsoft JhengHei"/>
-        <a:font script="Java" typeface="Javanese Text"/>
-        <a:font script="Lisu" typeface="Segoe UI"/>
-        <a:font script="Mymr" typeface="Myanmar Text"/>
-        <a:font script="Nkoo" typeface="Ebrima"/>
-        <a:font script="Olck" typeface="Nirmala UI"/>
-        <a:font script="Osma" typeface="Ebrima"/>
-        <a:font script="Phag" typeface="Phagspa"/>
-        <a:font script="Syrn" typeface="Estrangelo Edessa"/>
-        <a:font script="Syrj" typeface="Estrangelo Edessa"/>
-        <a:font script="Syre" typeface="Estrangelo Edessa"/>
-        <a:font script="Sora" typeface="Nirmala UI"/>
-        <a:font script="Tale" typeface="Microsoft Tai Le"/>
-        <a:font script="Talu" typeface="Microsoft New Tai Lue"/>
-        <a:font script="Tfng" typeface="Ebrima"/>
       </a:majorFont>
       <a:minorFont>
-        <a:latin typeface="Aptos" panose="02110004020202020204"/>
+        <a:latin typeface="Calibri"/>
         <a:ea typeface=""/>
         <a:cs typeface=""/>
-        <a:font script="Jpan" typeface="游ゴシック"/>
+        <a:font script="Jpan" typeface="ＭＳ Ｐゴシック"/>
         <a:font script="Hang" typeface="맑은 고딕"/>
-        <a:font script="Hans" typeface="等线"/>
+        <a:font script="Hans" typeface="宋体"/>
         <a:font script="Hant" typeface="新細明體"/>
         <a:font script="Arab" typeface="Arial"/>
         <a:font script="Hebr" typeface="Arial"/>
@@ -23562,23 +23193,6 @@
         <a:font script="Viet" typeface="Arial"/>
         <a:font script="Uigh" typeface="Microsoft Uighur"/>
         <a:font script="Geor" typeface="Sylfaen"/>
-        <a:font script="Armn" typeface="Arial"/>
-        <a:font script="Bugi" typeface="Leelawadee UI"/>
-        <a:font script="Bopo" typeface="Microsoft JhengHei"/>
-        <a:font script="Java" typeface="Javanese Text"/>
-        <a:font script="Lisu" typeface="Segoe UI"/>
-        <a:font script="Mymr" typeface="Myanmar Text"/>
-        <a:font script="Nkoo" typeface="Ebrima"/>
-        <a:font script="Olck" typeface="Nirmala UI"/>
-        <a:font script="Osma" typeface="Ebrima"/>
-        <a:font script="Phag" typeface="Phagspa"/>
-        <a:font script="Syrn" typeface="Estrangelo Edessa"/>
-        <a:font script="Syrj" typeface="Estrangelo Edessa"/>
-        <a:font script="Syre" typeface="Estrangelo Edessa"/>
-        <a:font script="Sora" typeface="Nirmala UI"/>
-        <a:font script="Tale" typeface="Microsoft Tai Le"/>
-        <a:font script="Talu" typeface="Microsoft New Tai Lue"/>
-        <a:font script="Tfng" typeface="Ebrima"/>
       </a:minorFont>
     </a:fontScheme>
     <a:fmtScheme name="Office">
@@ -23590,136 +23204,180 @@
           <a:gsLst>
             <a:gs pos="0">
               <a:schemeClr val="phClr">
-                <a:lumMod val="110000"/>
-                <a:satMod val="105000"/>
-                <a:tint val="67000"/>
+                <a:tint val="50000"/>
+                <a:satMod val="300000"/>
               </a:schemeClr>
             </a:gs>
-            <a:gs pos="50000">
+            <a:gs pos="35000">
               <a:schemeClr val="phClr">
-                <a:lumMod val="105000"/>
-                <a:satMod val="103000"/>
-                <a:tint val="73000"/>
+                <a:tint val="37000"/>
+                <a:satMod val="300000"/>
               </a:schemeClr>
             </a:gs>
             <a:gs pos="100000">
               <a:schemeClr val="phClr">
-                <a:lumMod val="105000"/>
-                <a:satMod val="109000"/>
-                <a:tint val="81000"/>
+                <a:tint val="15000"/>
+                <a:satMod val="350000"/>
               </a:schemeClr>
             </a:gs>
           </a:gsLst>
-          <a:lin ang="5400000" scaled="0"/>
+          <a:lin ang="16200000" scaled="1"/>
         </a:gradFill>
         <a:gradFill rotWithShape="1">
           <a:gsLst>
             <a:gs pos="0">
               <a:schemeClr val="phClr">
-                <a:satMod val="103000"/>
-                <a:lumMod val="102000"/>
-                <a:tint val="94000"/>
-              </a:schemeClr>
-            </a:gs>
-            <a:gs pos="50000">
-              <a:schemeClr val="phClr">
-                <a:satMod val="110000"/>
-                <a:lumMod val="100000"/>
+                <a:tint val="100000"/>
                 <a:shade val="100000"/>
+                <a:satMod val="130000"/>
               </a:schemeClr>
             </a:gs>
             <a:gs pos="100000">
               <a:schemeClr val="phClr">
-                <a:lumMod val="99000"/>
-                <a:satMod val="120000"/>
-                <a:shade val="78000"/>
+                <a:tint val="50000"/>
+                <a:shade val="100000"/>
+                <a:satMod val="350000"/>
               </a:schemeClr>
             </a:gs>
           </a:gsLst>
-          <a:lin ang="5400000" scaled="0"/>
+          <a:lin ang="16200000" scaled="0"/>
         </a:gradFill>
       </a:fillStyleLst>
       <a:lnStyleLst>
-        <a:ln w="12700" cap="flat" cmpd="sng" algn="ctr">
+        <a:ln w="9525" cap="flat" cmpd="sng" algn="ctr">
           <a:solidFill>
-            <a:schemeClr val="phClr"/>
+            <a:schemeClr val="phClr">
+              <a:shade val="95000"/>
+              <a:satMod val="105000"/>
+            </a:schemeClr>
           </a:solidFill>
           <a:prstDash val="solid"/>
-          <a:miter lim="800000"/>
-        </a:ln>
-        <a:ln w="19050" cap="flat" cmpd="sng" algn="ctr">
-          <a:solidFill>
-            <a:schemeClr val="phClr"/>
-          </a:solidFill>
-          <a:prstDash val="solid"/>
-          <a:miter lim="800000"/>
         </a:ln>
         <a:ln w="25400" cap="flat" cmpd="sng" algn="ctr">
           <a:solidFill>
             <a:schemeClr val="phClr"/>
           </a:solidFill>
           <a:prstDash val="solid"/>
-          <a:miter lim="800000"/>
+        </a:ln>
+        <a:ln w="38100" cap="flat" cmpd="sng" algn="ctr">
+          <a:solidFill>
+            <a:schemeClr val="phClr"/>
+          </a:solidFill>
+          <a:prstDash val="solid"/>
         </a:ln>
       </a:lnStyleLst>
       <a:effectStyleLst>
         <a:effectStyle>
-          <a:effectLst/>
-        </a:effectStyle>
-        <a:effectStyle>
-          <a:effectLst/>
+          <a:effectLst>
+            <a:outerShdw blurRad="40000" dist="20000" dir="5400000" rotWithShape="0">
+              <a:srgbClr val="000000">
+                <a:alpha val="38000"/>
+              </a:srgbClr>
+            </a:outerShdw>
+          </a:effectLst>
         </a:effectStyle>
         <a:effectStyle>
           <a:effectLst>
-            <a:outerShdw blurRad="57150" dist="19050" dir="5400000" algn="ctr" rotWithShape="0">
+            <a:outerShdw blurRad="40000" dist="23000" dir="5400000" rotWithShape="0">
               <a:srgbClr val="000000">
-                <a:alpha val="63000"/>
+                <a:alpha val="35000"/>
               </a:srgbClr>
             </a:outerShdw>
           </a:effectLst>
+        </a:effectStyle>
+        <a:effectStyle>
+          <a:effectLst>
+            <a:outerShdw blurRad="40000" dist="23000" dir="5400000" rotWithShape="0">
+              <a:srgbClr val="000000">
+                <a:alpha val="35000"/>
+              </a:srgbClr>
+            </a:outerShdw>
+          </a:effectLst>
+          <a:scene3d>
+            <a:camera prst="orthographicFront">
+              <a:rot lat="0" lon="0" rev="0"/>
+            </a:camera>
+            <a:lightRig rig="threePt" dir="t">
+              <a:rot lat="0" lon="0" rev="1200000"/>
+            </a:lightRig>
+          </a:scene3d>
+          <a:sp3d>
+            <a:bevelT w="63500" h="25400"/>
+          </a:sp3d>
         </a:effectStyle>
       </a:effectStyleLst>
       <a:bgFillStyleLst>
         <a:solidFill>
           <a:schemeClr val="phClr"/>
         </a:solidFill>
-        <a:solidFill>
-          <a:schemeClr val="phClr">
-            <a:tint val="95000"/>
-            <a:satMod val="170000"/>
-          </a:schemeClr>
-        </a:solidFill>
         <a:gradFill rotWithShape="1">
           <a:gsLst>
             <a:gs pos="0">
               <a:schemeClr val="phClr">
-                <a:tint val="93000"/>
-                <a:satMod val="150000"/>
-                <a:shade val="98000"/>
-                <a:lumMod val="102000"/>
+                <a:tint val="40000"/>
+                <a:satMod val="350000"/>
               </a:schemeClr>
             </a:gs>
-            <a:gs pos="50000">
+            <a:gs pos="40000">
               <a:schemeClr val="phClr">
-                <a:tint val="98000"/>
-                <a:satMod val="130000"/>
-                <a:shade val="90000"/>
-                <a:lumMod val="103000"/>
+                <a:tint val="45000"/>
+                <a:shade val="99000"/>
+                <a:satMod val="350000"/>
               </a:schemeClr>
             </a:gs>
             <a:gs pos="100000">
               <a:schemeClr val="phClr">
-                <a:shade val="63000"/>
-                <a:satMod val="120000"/>
+                <a:shade val="20000"/>
+                <a:satMod val="255000"/>
               </a:schemeClr>
             </a:gs>
           </a:gsLst>
-          <a:lin ang="5400000" scaled="0"/>
+          <a:path path="circle">
+            <a:fillToRect l="50000" t="-80000" r="50000" b="180000"/>
+          </a:path>
+        </a:gradFill>
+        <a:gradFill rotWithShape="1">
+          <a:gsLst>
+            <a:gs pos="0">
+              <a:schemeClr val="phClr">
+                <a:tint val="80000"/>
+                <a:satMod val="300000"/>
+              </a:schemeClr>
+            </a:gs>
+            <a:gs pos="100000">
+              <a:schemeClr val="phClr">
+                <a:shade val="30000"/>
+                <a:satMod val="200000"/>
+              </a:schemeClr>
+            </a:gs>
+          </a:gsLst>
+          <a:path path="circle">
+            <a:fillToRect l="50000" t="50000" r="50000" b="50000"/>
+          </a:path>
         </a:gradFill>
       </a:bgFillStyleLst>
     </a:fmtScheme>
   </a:themeElements>
   <a:objectDefaults>
+    <a:spDef>
+      <a:spPr/>
+      <a:bodyPr/>
+      <a:lstStyle/>
+      <a:style>
+        <a:lnRef idx="1">
+          <a:schemeClr val="accent1"/>
+        </a:lnRef>
+        <a:fillRef idx="3">
+          <a:schemeClr val="accent1"/>
+        </a:fillRef>
+        <a:effectRef idx="2">
+          <a:schemeClr val="accent1"/>
+        </a:effectRef>
+        <a:fontRef idx="minor">
+          <a:schemeClr val="lt1"/>
+        </a:fontRef>
+      </a:style>
+    </a:spDef>
     <a:lnDef>
       <a:spPr/>
       <a:bodyPr/>
@@ -23741,10 +23399,5 @@
     </a:lnDef>
   </a:objectDefaults>
   <a:extraClrSchemeLst/>
-  <a:extLst>
-    <a:ext uri="{05A4C25C-085E-4340-85A3-A5531E510DB2}">
-      <thm15:themeFamily xmlns:thm15="http://schemas.microsoft.com/office/thememl/2012/main" name="Office Theme" id="{2E142A2C-CD16-42D6-873A-C26D2A0506FA}" vid="{1BDDFF52-6CD6-40A5-AB3C-68EB2F1E4D0A}"/>
-    </a:ext>
-  </a:extLst>
 </a:theme>
 </file>
--- a/docs/capstone_presentation_v5.pptx
+++ b/docs/capstone_presentation_v5.pptx
@@ -921,93 +921,62 @@
           <a:lstStyle/>
           <a:p>
             <a:r>
-              <a:t>Validation — three independent lenses:</a:t>
+              <a:t>Capability Validation — talking points (45–60 sec):</a:t>
             </a:r>
           </a:p>
           <a:p/>
           <a:p>
             <a:r>
-              <a:t>1. Multi-agent debate. Claude Code (Opus 4.7) ran brainstorming, implementation, tests, and iterations across the 12-week build. Codex GPT-5.5 was given the role of independent technical validator and listed every demo-safety risk it could find. Findings either got fixed in code or got dismissed with a written reason.</a:t>
+              <a:t>DECISION TRANSPARENCY (left card, the headline finding):</a:t>
+            </a:r>
+          </a:p>
+          <a:p>
+            <a:r>
+              <a:t>Every recommendation surfaces three things the user can audit — a Match / Miss / ? checklist mapping their chips to match status, an explicit trade-off card naming what the pick gives up, and reasons that map directly to rules the deterministic ranker fired.</a:t>
             </a:r>
           </a:p>
           <a:p/>
           <a:p>
             <a:r>
-              <a:t>2. Small-scale user testing. Family, friends, and classmates ran the demo end-to-end. Their feedback consistently confirmed that three things made the decision process easier to follow: structured recommendations (3 picks instead of a long grid), visible preference continuity (the diff card on each refine), and the side-by-side comparison view.</a:t>
+              <a:t>CAPABILITY CHECK (right top): the structural gaps from the competitive comparison on slide 4 are addressed in code — main gaps closed, preference continuity (diff per refine), explicit decision modeling (multi-criteria scoring), comparison view, and lifecycle layer.</a:t>
             </a:r>
           </a:p>
           <a:p/>
           <a:p>
             <a:r>
-              <a:t>3. Industry mentor input. A Senior Analytics Manager / Senior Business Intelligence Engineer / Data Scientist / Data Engineer with 13 years at Amazon gave feedback on data discipline (provenance flagging, scraped vs estimated values) and on the decision-support framing (treating shopping as a multi-criteria decision problem).</a:t>
+              <a:t>FEEDBACK &amp; REVIEW (right bottom): four sources fed back into the build —</a:t>
+            </a:r>
+          </a:p>
+          <a:p>
+            <a:r>
+              <a:t> 1. Small-scale user feedback from family, friends, and classmates (structured picks + preference continuity + side-by-side compare made the decision easier to follow).</a:t>
+            </a:r>
+          </a:p>
+          <a:p>
+            <a:r>
+              <a:t> 2. Professor feedback during the capstone.</a:t>
+            </a:r>
+          </a:p>
+          <a:p>
+            <a:r>
+              <a:t> 3. Industry mentor — Senior Analytics Manager / Senior BI Engineer / Data Scientist / Data Engineer (Amazon, 13 years) — input on data discipline and decision-support framing.</a:t>
+            </a:r>
+          </a:p>
+          <a:p>
+            <a:r>
+              <a:t> 4. Implementation review — Claude Code (Opus 4.7) build pair-programmer + Codex GPT-5.5 independent validator cross-reviewed the same codebase; each finding got fixed or dismissed in writing.</a:t>
             </a:r>
           </a:p>
           <a:p/>
           <a:p>
             <a:r>
-              <a:t>Live demo script (matches the running app exactly):</a:t>
+              <a:t>RESULT BAR: the system turns vague needs into structured preferences and then into explainable recommendations — that transformation is the deliverable.</a:t>
             </a:r>
           </a:p>
           <a:p/>
           <a:p>
             <a:r>
-              <a:t>1. Type into Scene 1: 'current bottle is heavy and leaks in my gym bag'.</a:t>
-            </a:r>
-          </a:p>
-          <a:p>
-            <a:r>
-              <a:t>   Observe: category auto-classified as water_bottle. The route also infers leak_proof_preferred=True from the word 'leaks'.</a:t>
-            </a:r>
-          </a:p>
-          <a:p/>
-          <a:p>
-            <a:r>
-              <a:t>2. Scene 2: pick three chips — Water Bottle / Gym / Large capacity. Skip the others. Hit 'See recommendations'.</a:t>
-            </a:r>
-          </a:p>
-          <a:p/>
-          <a:p>
-            <a:r>
-              <a:t>3. Scene 3: three differentiated picks render in a row.</a:t>
-            </a:r>
-          </a:p>
-          <a:p>
-            <a:r>
-              <a:t>   - BEST FIT: Owala 24oz FreeSip — rules [gym_suitable, large_capacity_pref, leak_proof_match]. The Large-capacity preference is honoured (≥24oz) and leak-resistance is matched.</a:t>
-            </a:r>
-          </a:p>
-          <a:p>
-            <a:r>
-              <a:t>   - BUDGET PICK: Zak Designs 19oz — labels [Cheapest, Most portable]. Honestly shows ✗ Large capacity (19oz) in its checklist.</a:t>
-            </a:r>
-          </a:p>
-          <a:p>
-            <a:r>
-              <a:t>   - LARGE CAPACITY PICK: Owala 32oz FreeSip — labels [Most capacity, Most leakproof].</a:t>
-            </a:r>
-          </a:p>
-          <a:p/>
-          <a:p>
-            <a:r>
-              <a:t>4. Click 'See why' on Best Fit. Stage 4 quotes the user's frustration, lists the rule-grounded reasons, and shows the ✓/✗/? checklist of every preference.</a:t>
-            </a:r>
-          </a:p>
-          <a:p/>
-          <a:p>
-            <a:r>
-              <a:t>5. Refine: type 'larger'. The diff card shows size_preference None -&gt; large; Best Fit flips to 32oz. Demonstrates preference continuity.</a:t>
-            </a:r>
-          </a:p>
-          <a:p/>
-          <a:p>
-            <a:r>
-              <a:t>6. Click compare on 2-3 picks; the side-by-side overlay highlights the row-winner (lowest price, largest capacity, etc.) per attribute.</a:t>
-            </a:r>
-          </a:p>
-          <a:p/>
-          <a:p>
-            <a:r>
-              <a:t>7. Continue to Lifecycle (prototype). Phone reminders / gym-bag checklist / replacement parts — honest about what the bottle can/cannot do.</a:t>
+              <a:t>Live demo runs immediately after this slide.</a:t>
             </a:r>
           </a:p>
         </p:txBody>
@@ -4566,7 +4535,7 @@
                   <a:srgbClr val="CADCFC"/>
                 </a:solidFill>
               </a:rPr>
-              <a:t>08  ·  RESULTS &amp; DEMO</a:t>
+              <a:t>08  ·  CAPABILITY VALIDATION</a:t>
             </a:r>
           </a:p>
         </p:txBody>
@@ -4600,7 +4569,7 @@
                   <a:srgbClr val="FFFFFF"/>
                 </a:solidFill>
               </a:rPr>
-              <a:t>Capability Validation &amp; Scenario Walkthrough</a:t>
+              <a:t>Capability Validation — What I Checked</a:t>
             </a:r>
           </a:p>
         </p:txBody>
@@ -4656,8 +4625,8 @@
         </p:nvSpPr>
         <p:spPr>
           <a:xfrm>
-            <a:off x="457200" y="1664208"/>
-            <a:ext cx="5669280" cy="4389120"/>
+            <a:off x="457200" y="1691640"/>
+            <a:ext cx="5486400" cy="4206240"/>
           </a:xfrm>
           <a:prstGeom prst="rect">
             <a:avLst/>
@@ -4699,8 +4668,8 @@
         </p:nvSpPr>
         <p:spPr>
           <a:xfrm>
-            <a:off x="594360" y="1783080"/>
-            <a:ext cx="5394960" cy="384048"/>
+            <a:off x="731520" y="1920240"/>
+            <a:ext cx="5120640" cy="502920"/>
           </a:xfrm>
           <a:prstGeom prst="rect">
             <a:avLst/>
@@ -4715,26 +4684,137 @@
           <a:p>
             <a:pPr algn="l"/>
             <a:r>
-              <a:rPr b="1" i="0" sz="1300">
+              <a:rPr b="1" i="0" sz="2200">
+                <a:solidFill>
+                  <a:srgbClr val="FFFFFF"/>
+                </a:solidFill>
+              </a:rPr>
+              <a:t>Decision Transparency</a:t>
+            </a:r>
+          </a:p>
+        </p:txBody>
+      </p:sp>
+      <p:sp>
+        <p:nvSpPr>
+          <p:cNvPr id="10" name="TextBox 9"/>
+          <p:cNvSpPr txBox="1"/>
+          <p:nvPr/>
+        </p:nvSpPr>
+        <p:spPr>
+          <a:xfrm>
+            <a:off x="731520" y="2468880"/>
+            <a:ext cx="5120640" cy="365760"/>
+          </a:xfrm>
+          <a:prstGeom prst="rect">
+            <a:avLst/>
+          </a:prstGeom>
+          <a:noFill/>
+        </p:spPr>
+        <p:txBody>
+          <a:bodyPr wrap="square">
+            <a:spAutoFit/>
+          </a:bodyPr>
+          <a:lstStyle/>
+          <a:p>
+            <a:pPr algn="l"/>
+            <a:r>
+              <a:rPr b="0" i="1" sz="1200">
                 <a:solidFill>
                   <a:srgbClr val="CADCFC"/>
                 </a:solidFill>
               </a:rPr>
-              <a:t>Capability Validation</a:t>
-            </a:r>
-          </a:p>
-        </p:txBody>
-      </p:sp>
-      <p:sp>
-        <p:nvSpPr>
-          <p:cNvPr id="10" name="TextBox 9"/>
-          <p:cNvSpPr txBox="1"/>
-          <p:nvPr/>
-        </p:nvSpPr>
-        <p:spPr>
-          <a:xfrm>
-            <a:off x="594360" y="2148840"/>
-            <a:ext cx="5394960" cy="347472"/>
+              <a:t>How users can see and audit every recommendation</a:t>
+            </a:r>
+          </a:p>
+        </p:txBody>
+      </p:sp>
+      <p:sp>
+        <p:nvSpPr>
+          <p:cNvPr id="11" name="Rectangle 10"/>
+          <p:cNvSpPr/>
+          <p:nvPr/>
+        </p:nvSpPr>
+        <p:spPr>
+          <a:xfrm>
+            <a:off x="731520" y="3154680"/>
+            <a:ext cx="411480" cy="411480"/>
+          </a:xfrm>
+          <a:prstGeom prst="rect">
+            <a:avLst/>
+          </a:prstGeom>
+          <a:solidFill>
+            <a:srgbClr val="1E2761"/>
+          </a:solidFill>
+          <a:ln>
+            <a:noFill/>
+          </a:ln>
+        </p:spPr>
+        <p:style>
+          <a:lnRef idx="1">
+            <a:schemeClr val="accent1"/>
+          </a:lnRef>
+          <a:fillRef idx="3">
+            <a:schemeClr val="accent1"/>
+          </a:fillRef>
+          <a:effectRef idx="2">
+            <a:schemeClr val="accent1"/>
+          </a:effectRef>
+          <a:fontRef idx="minor">
+            <a:schemeClr val="lt1"/>
+          </a:fontRef>
+        </p:style>
+        <p:txBody>
+          <a:bodyPr rtlCol="0" anchor="ctr"/>
+          <a:lstStyle/>
+          <a:p>
+            <a:pPr algn="ctr"/>
+          </a:p>
+        </p:txBody>
+      </p:sp>
+      <p:sp>
+        <p:nvSpPr>
+          <p:cNvPr id="12" name="TextBox 11"/>
+          <p:cNvSpPr txBox="1"/>
+          <p:nvPr/>
+        </p:nvSpPr>
+        <p:spPr>
+          <a:xfrm>
+            <a:off x="731520" y="3154680"/>
+            <a:ext cx="411480" cy="411480"/>
+          </a:xfrm>
+          <a:prstGeom prst="rect">
+            <a:avLst/>
+          </a:prstGeom>
+          <a:noFill/>
+        </p:spPr>
+        <p:txBody>
+          <a:bodyPr wrap="square">
+            <a:spAutoFit/>
+          </a:bodyPr>
+          <a:lstStyle/>
+          <a:p>
+            <a:pPr algn="ctr"/>
+            <a:r>
+              <a:rPr b="1" i="0" sz="1400">
+                <a:solidFill>
+                  <a:srgbClr val="2ECC71"/>
+                </a:solidFill>
+              </a:rPr>
+              <a:t>✓</a:t>
+            </a:r>
+          </a:p>
+        </p:txBody>
+      </p:sp>
+      <p:sp>
+        <p:nvSpPr>
+          <p:cNvPr id="13" name="TextBox 12"/>
+          <p:cNvSpPr txBox="1"/>
+          <p:nvPr/>
+        </p:nvSpPr>
+        <p:spPr>
+          <a:xfrm>
+            <a:off x="1280160" y="3108960"/>
+            <a:ext cx="4480560" cy="329184"/>
           </a:xfrm>
           <a:prstGeom prst="rect">
             <a:avLst/>
@@ -4749,26 +4829,137 @@
           <a:p>
             <a:pPr algn="l"/>
             <a:r>
-              <a:rPr b="1" i="0" sz="1100">
+              <a:rPr b="1" i="0" sz="1500">
+                <a:solidFill>
+                  <a:srgbClr val="FFFFFF"/>
+                </a:solidFill>
+              </a:rPr>
+              <a:t>Match / Miss / ? checklist</a:t>
+            </a:r>
+          </a:p>
+        </p:txBody>
+      </p:sp>
+      <p:sp>
+        <p:nvSpPr>
+          <p:cNvPr id="14" name="TextBox 13"/>
+          <p:cNvSpPr txBox="1"/>
+          <p:nvPr/>
+        </p:nvSpPr>
+        <p:spPr>
+          <a:xfrm>
+            <a:off x="1280160" y="3438144"/>
+            <a:ext cx="4480560" cy="457200"/>
+          </a:xfrm>
+          <a:prstGeom prst="rect">
+            <a:avLst/>
+          </a:prstGeom>
+          <a:noFill/>
+        </p:spPr>
+        <p:txBody>
+          <a:bodyPr wrap="square">
+            <a:spAutoFit/>
+          </a:bodyPr>
+          <a:lstStyle/>
+          <a:p>
+            <a:pPr algn="l"/>
+            <a:r>
+              <a:rPr b="0" i="0" sz="1100">
+                <a:solidFill>
+                  <a:srgbClr val="CADCFC"/>
+                </a:solidFill>
+              </a:rPr>
+              <a:t>Every chip the user picked is shown as ✓ match · ✗ miss · ? unknown.</a:t>
+            </a:r>
+          </a:p>
+        </p:txBody>
+      </p:sp>
+      <p:sp>
+        <p:nvSpPr>
+          <p:cNvPr id="15" name="Rectangle 14"/>
+          <p:cNvSpPr/>
+          <p:nvPr/>
+        </p:nvSpPr>
+        <p:spPr>
+          <a:xfrm>
+            <a:off x="731520" y="4023360"/>
+            <a:ext cx="411480" cy="411480"/>
+          </a:xfrm>
+          <a:prstGeom prst="rect">
+            <a:avLst/>
+          </a:prstGeom>
+          <a:solidFill>
+            <a:srgbClr val="1E2761"/>
+          </a:solidFill>
+          <a:ln>
+            <a:noFill/>
+          </a:ln>
+        </p:spPr>
+        <p:style>
+          <a:lnRef idx="1">
+            <a:schemeClr val="accent1"/>
+          </a:lnRef>
+          <a:fillRef idx="3">
+            <a:schemeClr val="accent1"/>
+          </a:fillRef>
+          <a:effectRef idx="2">
+            <a:schemeClr val="accent1"/>
+          </a:effectRef>
+          <a:fontRef idx="minor">
+            <a:schemeClr val="lt1"/>
+          </a:fontRef>
+        </p:style>
+        <p:txBody>
+          <a:bodyPr rtlCol="0" anchor="ctr"/>
+          <a:lstStyle/>
+          <a:p>
+            <a:pPr algn="ctr"/>
+          </a:p>
+        </p:txBody>
+      </p:sp>
+      <p:sp>
+        <p:nvSpPr>
+          <p:cNvPr id="16" name="TextBox 15"/>
+          <p:cNvSpPr txBox="1"/>
+          <p:nvPr/>
+        </p:nvSpPr>
+        <p:spPr>
+          <a:xfrm>
+            <a:off x="731520" y="4023360"/>
+            <a:ext cx="411480" cy="411480"/>
+          </a:xfrm>
+          <a:prstGeom prst="rect">
+            <a:avLst/>
+          </a:prstGeom>
+          <a:noFill/>
+        </p:spPr>
+        <p:txBody>
+          <a:bodyPr wrap="square">
+            <a:spAutoFit/>
+          </a:bodyPr>
+          <a:lstStyle/>
+          <a:p>
+            <a:pPr algn="ctr"/>
+            <a:r>
+              <a:rPr b="1" i="0" sz="1400">
                 <a:solidFill>
                   <a:srgbClr val="2ECC71"/>
                 </a:solidFill>
               </a:rPr>
-              <a:t>✓  Multi-agent debate  ·  Claude Code Opus 4.7  ↔  Codex GPT-5.5</a:t>
-            </a:r>
-          </a:p>
-        </p:txBody>
-      </p:sp>
-      <p:sp>
-        <p:nvSpPr>
-          <p:cNvPr id="11" name="TextBox 10"/>
-          <p:cNvSpPr txBox="1"/>
-          <p:nvPr/>
-        </p:nvSpPr>
-        <p:spPr>
-          <a:xfrm>
-            <a:off x="594360" y="2459736"/>
-            <a:ext cx="5394960" cy="960120"/>
+              <a:t>✓</a:t>
+            </a:r>
+          </a:p>
+        </p:txBody>
+      </p:sp>
+      <p:sp>
+        <p:nvSpPr>
+          <p:cNvPr id="17" name="TextBox 16"/>
+          <p:cNvSpPr txBox="1"/>
+          <p:nvPr/>
+        </p:nvSpPr>
+        <p:spPr>
+          <a:xfrm>
+            <a:off x="1280160" y="3977640"/>
+            <a:ext cx="4480560" cy="329184"/>
           </a:xfrm>
           <a:prstGeom prst="rect">
             <a:avLst/>
@@ -4783,28 +4974,26 @@
           <a:p>
             <a:pPr algn="l"/>
             <a:r>
-              <a:rPr b="0" i="0" sz="1000">
+              <a:rPr b="1" i="0" sz="1500">
                 <a:solidFill>
                   <a:srgbClr val="FFFFFF"/>
                 </a:solidFill>
               </a:rPr>
-              <a:t>Claude Code: brainstorm · implementation · tests · iterations.
-Codex GPT-5.5: independent evaluation + validation review.
-Each finding either got fixed in code or dismissed in writing.</a:t>
-            </a:r>
-          </a:p>
-        </p:txBody>
-      </p:sp>
-      <p:sp>
-        <p:nvSpPr>
-          <p:cNvPr id="12" name="TextBox 11"/>
-          <p:cNvSpPr txBox="1"/>
-          <p:nvPr/>
-        </p:nvSpPr>
-        <p:spPr>
-          <a:xfrm>
-            <a:off x="594360" y="3474720"/>
-            <a:ext cx="5394960" cy="347472"/>
+              <a:t>Trade-offs visible</a:t>
+            </a:r>
+          </a:p>
+        </p:txBody>
+      </p:sp>
+      <p:sp>
+        <p:nvSpPr>
+          <p:cNvPr id="18" name="TextBox 17"/>
+          <p:cNvSpPr txBox="1"/>
+          <p:nvPr/>
+        </p:nvSpPr>
+        <p:spPr>
+          <a:xfrm>
+            <a:off x="1280160" y="4306824"/>
+            <a:ext cx="4480560" cy="457200"/>
           </a:xfrm>
           <a:prstGeom prst="rect">
             <a:avLst/>
@@ -4819,26 +5008,103 @@
           <a:p>
             <a:pPr algn="l"/>
             <a:r>
-              <a:rPr b="1" i="0" sz="1100">
+              <a:rPr b="0" i="0" sz="1100">
+                <a:solidFill>
+                  <a:srgbClr val="CADCFC"/>
+                </a:solidFill>
+              </a:rPr>
+              <a:t>Yellow trade-off card on each pick names the cost, not just the win.</a:t>
+            </a:r>
+          </a:p>
+        </p:txBody>
+      </p:sp>
+      <p:sp>
+        <p:nvSpPr>
+          <p:cNvPr id="19" name="Rectangle 18"/>
+          <p:cNvSpPr/>
+          <p:nvPr/>
+        </p:nvSpPr>
+        <p:spPr>
+          <a:xfrm>
+            <a:off x="731520" y="4892040"/>
+            <a:ext cx="411480" cy="411480"/>
+          </a:xfrm>
+          <a:prstGeom prst="rect">
+            <a:avLst/>
+          </a:prstGeom>
+          <a:solidFill>
+            <a:srgbClr val="1E2761"/>
+          </a:solidFill>
+          <a:ln>
+            <a:noFill/>
+          </a:ln>
+        </p:spPr>
+        <p:style>
+          <a:lnRef idx="1">
+            <a:schemeClr val="accent1"/>
+          </a:lnRef>
+          <a:fillRef idx="3">
+            <a:schemeClr val="accent1"/>
+          </a:fillRef>
+          <a:effectRef idx="2">
+            <a:schemeClr val="accent1"/>
+          </a:effectRef>
+          <a:fontRef idx="minor">
+            <a:schemeClr val="lt1"/>
+          </a:fontRef>
+        </p:style>
+        <p:txBody>
+          <a:bodyPr rtlCol="0" anchor="ctr"/>
+          <a:lstStyle/>
+          <a:p>
+            <a:pPr algn="ctr"/>
+          </a:p>
+        </p:txBody>
+      </p:sp>
+      <p:sp>
+        <p:nvSpPr>
+          <p:cNvPr id="20" name="TextBox 19"/>
+          <p:cNvSpPr txBox="1"/>
+          <p:nvPr/>
+        </p:nvSpPr>
+        <p:spPr>
+          <a:xfrm>
+            <a:off x="731520" y="4892040"/>
+            <a:ext cx="411480" cy="411480"/>
+          </a:xfrm>
+          <a:prstGeom prst="rect">
+            <a:avLst/>
+          </a:prstGeom>
+          <a:noFill/>
+        </p:spPr>
+        <p:txBody>
+          <a:bodyPr wrap="square">
+            <a:spAutoFit/>
+          </a:bodyPr>
+          <a:lstStyle/>
+          <a:p>
+            <a:pPr algn="ctr"/>
+            <a:r>
+              <a:rPr b="1" i="0" sz="1400">
                 <a:solidFill>
                   <a:srgbClr val="2ECC71"/>
                 </a:solidFill>
               </a:rPr>
-              <a:t>✓  Small-scale user testing  ·  family · friends · classmates</a:t>
-            </a:r>
-          </a:p>
-        </p:txBody>
-      </p:sp>
-      <p:sp>
-        <p:nvSpPr>
-          <p:cNvPr id="13" name="TextBox 12"/>
-          <p:cNvSpPr txBox="1"/>
-          <p:nvPr/>
-        </p:nvSpPr>
-        <p:spPr>
-          <a:xfrm>
-            <a:off x="594360" y="3785616"/>
-            <a:ext cx="5394960" cy="960120"/>
+              <a:t>✓</a:t>
+            </a:r>
+          </a:p>
+        </p:txBody>
+      </p:sp>
+      <p:sp>
+        <p:nvSpPr>
+          <p:cNvPr id="21" name="TextBox 20"/>
+          <p:cNvSpPr txBox="1"/>
+          <p:nvPr/>
+        </p:nvSpPr>
+        <p:spPr>
+          <a:xfrm>
+            <a:off x="1280160" y="4846320"/>
+            <a:ext cx="4480560" cy="329184"/>
           </a:xfrm>
           <a:prstGeom prst="rect">
             <a:avLst/>
@@ -4853,28 +5119,26 @@
           <a:p>
             <a:pPr algn="l"/>
             <a:r>
-              <a:rPr b="0" i="0" sz="1000">
+              <a:rPr b="1" i="0" sz="1500">
                 <a:solidFill>
                   <a:srgbClr val="FFFFFF"/>
                 </a:solidFill>
               </a:rPr>
-              <a:t>Confirmed that structured recommendations, preference
-continuity, and side-by-side compare made the decision
-process easier to follow.</a:t>
-            </a:r>
-          </a:p>
-        </p:txBody>
-      </p:sp>
-      <p:sp>
-        <p:nvSpPr>
-          <p:cNvPr id="14" name="TextBox 13"/>
-          <p:cNvSpPr txBox="1"/>
-          <p:nvPr/>
-        </p:nvSpPr>
-        <p:spPr>
-          <a:xfrm>
-            <a:off x="594360" y="4800600"/>
-            <a:ext cx="5394960" cy="347472"/>
+              <a:t>Reasoning inspectable</a:t>
+            </a:r>
+          </a:p>
+        </p:txBody>
+      </p:sp>
+      <p:sp>
+        <p:nvSpPr>
+          <p:cNvPr id="22" name="TextBox 21"/>
+          <p:cNvSpPr txBox="1"/>
+          <p:nvPr/>
+        </p:nvSpPr>
+        <p:spPr>
+          <a:xfrm>
+            <a:off x="1280160" y="5175504"/>
+            <a:ext cx="4480560" cy="457200"/>
           </a:xfrm>
           <a:prstGeom prst="rect">
             <a:avLst/>
@@ -4889,62 +5153,26 @@
           <a:p>
             <a:pPr algn="l"/>
             <a:r>
-              <a:rPr b="1" i="0" sz="1100">
-                <a:solidFill>
-                  <a:srgbClr val="2ECC71"/>
-                </a:solidFill>
-              </a:rPr>
-              <a:t>✓  Industry mentor input</a:t>
-            </a:r>
-          </a:p>
-        </p:txBody>
-      </p:sp>
-      <p:sp>
-        <p:nvSpPr>
-          <p:cNvPr id="15" name="TextBox 14"/>
-          <p:cNvSpPr txBox="1"/>
-          <p:nvPr/>
-        </p:nvSpPr>
-        <p:spPr>
-          <a:xfrm>
-            <a:off x="594360" y="5111496"/>
-            <a:ext cx="5394960" cy="960120"/>
-          </a:xfrm>
-          <a:prstGeom prst="rect">
-            <a:avLst/>
-          </a:prstGeom>
-          <a:noFill/>
-        </p:spPr>
-        <p:txBody>
-          <a:bodyPr wrap="square">
-            <a:spAutoFit/>
-          </a:bodyPr>
-          <a:lstStyle/>
-          <a:p>
-            <a:pPr algn="l"/>
-            <a:r>
-              <a:rPr b="0" i="0" sz="1000">
-                <a:solidFill>
-                  <a:srgbClr val="FFFFFF"/>
-                </a:solidFill>
-              </a:rPr>
-              <a:t>Senior Analytics Manager · Sr. BI Engineer · Data Scientist · Data
-Engineer (Amazon, 13 years) — input on data discipline and
-decision-support framing.</a:t>
-            </a:r>
-          </a:p>
-        </p:txBody>
-      </p:sp>
-      <p:sp>
-        <p:nvSpPr>
-          <p:cNvPr id="16" name="Rectangle 15"/>
+              <a:rPr b="0" i="0" sz="1100">
+                <a:solidFill>
+                  <a:srgbClr val="CADCFC"/>
+                </a:solidFill>
+              </a:rPr>
+              <a:t>Each reason maps to a rule the deterministic ranker actually fired.</a:t>
+            </a:r>
+          </a:p>
+        </p:txBody>
+      </p:sp>
+      <p:sp>
+        <p:nvSpPr>
+          <p:cNvPr id="23" name="Rectangle 22"/>
           <p:cNvSpPr/>
           <p:nvPr/>
         </p:nvSpPr>
         <p:spPr>
           <a:xfrm>
-            <a:off x="6355080" y="1664208"/>
-            <a:ext cx="5394960" cy="4389120"/>
+            <a:off x="6263640" y="1691640"/>
+            <a:ext cx="5486400" cy="2011680"/>
           </a:xfrm>
           <a:prstGeom prst="rect">
             <a:avLst/>
@@ -4980,13 +5208,13 @@
       </p:sp>
       <p:sp>
         <p:nvSpPr>
-          <p:cNvPr id="17" name="TextBox 16"/>
-          <p:cNvSpPr txBox="1"/>
-          <p:nvPr/>
-        </p:nvSpPr>
-        <p:spPr>
-          <a:xfrm>
-            <a:off x="6492240" y="1783080"/>
+          <p:cNvPr id="24" name="TextBox 23"/>
+          <p:cNvSpPr txBox="1"/>
+          <p:nvPr/>
+        </p:nvSpPr>
+        <p:spPr>
+          <a:xfrm>
+            <a:off x="6492240" y="1856232"/>
             <a:ext cx="5120640" cy="384048"/>
           </a:xfrm>
           <a:prstGeom prst="rect">
@@ -5002,26 +5230,60 @@
           <a:p>
             <a:pPr algn="l"/>
             <a:r>
-              <a:rPr b="1" i="0" sz="1200">
+              <a:rPr b="1" i="0" sz="1600">
+                <a:solidFill>
+                  <a:srgbClr val="FFFFFF"/>
+                </a:solidFill>
+              </a:rPr>
+              <a:t>Capability Check</a:t>
+            </a:r>
+          </a:p>
+        </p:txBody>
+      </p:sp>
+      <p:sp>
+        <p:nvSpPr>
+          <p:cNvPr id="25" name="TextBox 24"/>
+          <p:cNvSpPr txBox="1"/>
+          <p:nvPr/>
+        </p:nvSpPr>
+        <p:spPr>
+          <a:xfrm>
+            <a:off x="6537960" y="2377440"/>
+            <a:ext cx="182880" cy="274320"/>
+          </a:xfrm>
+          <a:prstGeom prst="rect">
+            <a:avLst/>
+          </a:prstGeom>
+          <a:noFill/>
+        </p:spPr>
+        <p:txBody>
+          <a:bodyPr wrap="square">
+            <a:spAutoFit/>
+          </a:bodyPr>
+          <a:lstStyle/>
+          <a:p>
+            <a:pPr algn="l"/>
+            <a:r>
+              <a:rPr b="1" i="0" sz="1400">
                 <a:solidFill>
                   <a:srgbClr val="CADCFC"/>
                 </a:solidFill>
               </a:rPr>
-              <a:t>Demo — Water-Bottle Scenario</a:t>
-            </a:r>
-          </a:p>
-        </p:txBody>
-      </p:sp>
-      <p:sp>
-        <p:nvSpPr>
-          <p:cNvPr id="18" name="TextBox 17"/>
-          <p:cNvSpPr txBox="1"/>
-          <p:nvPr/>
-        </p:nvSpPr>
-        <p:spPr>
-          <a:xfrm>
-            <a:off x="6492240" y="2240280"/>
-            <a:ext cx="5120640" cy="292608"/>
+              <a:t>•</a:t>
+            </a:r>
+          </a:p>
+        </p:txBody>
+      </p:sp>
+      <p:sp>
+        <p:nvSpPr>
+          <p:cNvPr id="26" name="TextBox 25"/>
+          <p:cNvSpPr txBox="1"/>
+          <p:nvPr/>
+        </p:nvSpPr>
+        <p:spPr>
+          <a:xfrm>
+            <a:off x="6766560" y="2377440"/>
+            <a:ext cx="4846320" cy="292608"/>
           </a:xfrm>
           <a:prstGeom prst="rect">
             <a:avLst/>
@@ -5036,26 +5298,60 @@
           <a:p>
             <a:pPr algn="l"/>
             <a:r>
-              <a:rPr b="1" i="0" sz="1050">
+              <a:rPr b="0" i="0" sz="1300">
+                <a:solidFill>
+                  <a:srgbClr val="FFFFFF"/>
+                </a:solidFill>
+              </a:rPr>
+              <a:t>Main gaps addressed</a:t>
+            </a:r>
+          </a:p>
+        </p:txBody>
+      </p:sp>
+      <p:sp>
+        <p:nvSpPr>
+          <p:cNvPr id="27" name="TextBox 26"/>
+          <p:cNvSpPr txBox="1"/>
+          <p:nvPr/>
+        </p:nvSpPr>
+        <p:spPr>
+          <a:xfrm>
+            <a:off x="6537960" y="2688336"/>
+            <a:ext cx="182880" cy="274320"/>
+          </a:xfrm>
+          <a:prstGeom prst="rect">
+            <a:avLst/>
+          </a:prstGeom>
+          <a:noFill/>
+        </p:spPr>
+        <p:txBody>
+          <a:bodyPr wrap="square">
+            <a:spAutoFit/>
+          </a:bodyPr>
+          <a:lstStyle/>
+          <a:p>
+            <a:pPr algn="l"/>
+            <a:r>
+              <a:rPr b="1" i="0" sz="1400">
                 <a:solidFill>
                   <a:srgbClr val="CADCFC"/>
                 </a:solidFill>
               </a:rPr>
-              <a:t>①  Need Discovery</a:t>
-            </a:r>
-          </a:p>
-        </p:txBody>
-      </p:sp>
-      <p:sp>
-        <p:nvSpPr>
-          <p:cNvPr id="19" name="TextBox 18"/>
-          <p:cNvSpPr txBox="1"/>
-          <p:nvPr/>
-        </p:nvSpPr>
-        <p:spPr>
-          <a:xfrm>
-            <a:off x="6492240" y="2514600"/>
-            <a:ext cx="5120640" cy="502920"/>
+              <a:t>•</a:t>
+            </a:r>
+          </a:p>
+        </p:txBody>
+      </p:sp>
+      <p:sp>
+        <p:nvSpPr>
+          <p:cNvPr id="28" name="TextBox 27"/>
+          <p:cNvSpPr txBox="1"/>
+          <p:nvPr/>
+        </p:nvSpPr>
+        <p:spPr>
+          <a:xfrm>
+            <a:off x="6766560" y="2688336"/>
+            <a:ext cx="4846320" cy="292608"/>
           </a:xfrm>
           <a:prstGeom prst="rect">
             <a:avLst/>
@@ -5070,27 +5366,26 @@
           <a:p>
             <a:pPr algn="l"/>
             <a:r>
-              <a:rPr b="0" i="0" sz="950">
+              <a:rPr b="0" i="0" sz="1300">
                 <a:solidFill>
                   <a:srgbClr val="FFFFFF"/>
                 </a:solidFill>
               </a:rPr>
-              <a:t>“Current bottle is heavy and leaks
-in my gym bag.”  → water_bottle</a:t>
-            </a:r>
-          </a:p>
-        </p:txBody>
-      </p:sp>
-      <p:sp>
-        <p:nvSpPr>
-          <p:cNvPr id="20" name="TextBox 19"/>
-          <p:cNvSpPr txBox="1"/>
-          <p:nvPr/>
-        </p:nvSpPr>
-        <p:spPr>
-          <a:xfrm>
-            <a:off x="6492240" y="3017520"/>
-            <a:ext cx="5120640" cy="292608"/>
+              <a:t>Preference continuity</a:t>
+            </a:r>
+          </a:p>
+        </p:txBody>
+      </p:sp>
+      <p:sp>
+        <p:nvSpPr>
+          <p:cNvPr id="29" name="TextBox 28"/>
+          <p:cNvSpPr txBox="1"/>
+          <p:nvPr/>
+        </p:nvSpPr>
+        <p:spPr>
+          <a:xfrm>
+            <a:off x="6537960" y="2999232"/>
+            <a:ext cx="182880" cy="274320"/>
           </a:xfrm>
           <a:prstGeom prst="rect">
             <a:avLst/>
@@ -5105,26 +5400,26 @@
           <a:p>
             <a:pPr algn="l"/>
             <a:r>
-              <a:rPr b="1" i="0" sz="1050">
+              <a:rPr b="1" i="0" sz="1400">
                 <a:solidFill>
                   <a:srgbClr val="CADCFC"/>
                 </a:solidFill>
               </a:rPr>
-              <a:t>②  Clarification (3 chips)</a:t>
-            </a:r>
-          </a:p>
-        </p:txBody>
-      </p:sp>
-      <p:sp>
-        <p:nvSpPr>
-          <p:cNvPr id="21" name="TextBox 20"/>
-          <p:cNvSpPr txBox="1"/>
-          <p:nvPr/>
-        </p:nvSpPr>
-        <p:spPr>
-          <a:xfrm>
-            <a:off x="6492240" y="3291840"/>
-            <a:ext cx="5120640" cy="502920"/>
+              <a:t>•</a:t>
+            </a:r>
+          </a:p>
+        </p:txBody>
+      </p:sp>
+      <p:sp>
+        <p:nvSpPr>
+          <p:cNvPr id="30" name="TextBox 29"/>
+          <p:cNvSpPr txBox="1"/>
+          <p:nvPr/>
+        </p:nvSpPr>
+        <p:spPr>
+          <a:xfrm>
+            <a:off x="6766560" y="2999232"/>
+            <a:ext cx="4846320" cy="292608"/>
           </a:xfrm>
           <a:prstGeom prst="rect">
             <a:avLst/>
@@ -5139,27 +5434,26 @@
           <a:p>
             <a:pPr algn="l"/>
             <a:r>
-              <a:rPr b="0" i="0" sz="950">
+              <a:rPr b="0" i="0" sz="1300">
                 <a:solidFill>
                   <a:srgbClr val="FFFFFF"/>
                 </a:solidFill>
               </a:rPr>
-              <a:t>Gym · Large capacity · (leak inferred
-from 'leaks' in the input)</a:t>
-            </a:r>
-          </a:p>
-        </p:txBody>
-      </p:sp>
-      <p:sp>
-        <p:nvSpPr>
-          <p:cNvPr id="22" name="TextBox 21"/>
-          <p:cNvSpPr txBox="1"/>
-          <p:nvPr/>
-        </p:nvSpPr>
-        <p:spPr>
-          <a:xfrm>
-            <a:off x="6492240" y="3794760"/>
-            <a:ext cx="5120640" cy="292608"/>
+              <a:t>Decision modeling</a:t>
+            </a:r>
+          </a:p>
+        </p:txBody>
+      </p:sp>
+      <p:sp>
+        <p:nvSpPr>
+          <p:cNvPr id="31" name="TextBox 30"/>
+          <p:cNvSpPr txBox="1"/>
+          <p:nvPr/>
+        </p:nvSpPr>
+        <p:spPr>
+          <a:xfrm>
+            <a:off x="6537960" y="3310128"/>
+            <a:ext cx="182880" cy="274320"/>
           </a:xfrm>
           <a:prstGeom prst="rect">
             <a:avLst/>
@@ -5174,26 +5468,26 @@
           <a:p>
             <a:pPr algn="l"/>
             <a:r>
-              <a:rPr b="1" i="0" sz="1050">
+              <a:rPr b="1" i="0" sz="1400">
                 <a:solidFill>
                   <a:srgbClr val="CADCFC"/>
                 </a:solidFill>
               </a:rPr>
-              <a:t>③  3 Curated Picks</a:t>
-            </a:r>
-          </a:p>
-        </p:txBody>
-      </p:sp>
-      <p:sp>
-        <p:nvSpPr>
-          <p:cNvPr id="23" name="TextBox 22"/>
-          <p:cNvSpPr txBox="1"/>
-          <p:nvPr/>
-        </p:nvSpPr>
-        <p:spPr>
-          <a:xfrm>
-            <a:off x="6492240" y="4069080"/>
-            <a:ext cx="5120640" cy="502920"/>
+              <a:t>•</a:t>
+            </a:r>
+          </a:p>
+        </p:txBody>
+      </p:sp>
+      <p:sp>
+        <p:nvSpPr>
+          <p:cNvPr id="32" name="TextBox 31"/>
+          <p:cNvSpPr txBox="1"/>
+          <p:nvPr/>
+        </p:nvSpPr>
+        <p:spPr>
+          <a:xfrm>
+            <a:off x="6766560" y="3310128"/>
+            <a:ext cx="4846320" cy="292608"/>
           </a:xfrm>
           <a:prstGeom prst="rect">
             <a:avLst/>
@@ -5208,165 +5502,26 @@
           <a:p>
             <a:pPr algn="l"/>
             <a:r>
-              <a:rPr b="0" i="0" sz="950">
+              <a:rPr b="0" i="0" sz="1300">
                 <a:solidFill>
                   <a:srgbClr val="FFFFFF"/>
                 </a:solidFill>
               </a:rPr>
-              <a:t>Best Fit  Owala 24oz FreeSip
-rules: gym_suitable · large_capacity_pref · leak_proof_match</a:t>
-            </a:r>
-          </a:p>
-        </p:txBody>
-      </p:sp>
-      <p:sp>
-        <p:nvSpPr>
-          <p:cNvPr id="24" name="TextBox 23"/>
-          <p:cNvSpPr txBox="1"/>
-          <p:nvPr/>
-        </p:nvSpPr>
-        <p:spPr>
-          <a:xfrm>
-            <a:off x="6492240" y="4572000"/>
-            <a:ext cx="5120640" cy="292608"/>
-          </a:xfrm>
-          <a:prstGeom prst="rect">
-            <a:avLst/>
-          </a:prstGeom>
-          <a:noFill/>
-        </p:spPr>
-        <p:txBody>
-          <a:bodyPr wrap="square">
-            <a:spAutoFit/>
-          </a:bodyPr>
-          <a:lstStyle/>
-          <a:p>
-            <a:pPr algn="l"/>
-            <a:r>
-              <a:rPr b="1" i="0" sz="1050">
-                <a:solidFill>
-                  <a:srgbClr val="CADCFC"/>
-                </a:solidFill>
-              </a:rPr>
-              <a:t>④  Picks — labels + checklist</a:t>
-            </a:r>
-          </a:p>
-        </p:txBody>
-      </p:sp>
-      <p:sp>
-        <p:nvSpPr>
-          <p:cNvPr id="25" name="TextBox 24"/>
-          <p:cNvSpPr txBox="1"/>
-          <p:nvPr/>
-        </p:nvSpPr>
-        <p:spPr>
-          <a:xfrm>
-            <a:off x="6492240" y="4846320"/>
-            <a:ext cx="5120640" cy="502920"/>
-          </a:xfrm>
-          <a:prstGeom prst="rect">
-            <a:avLst/>
-          </a:prstGeom>
-          <a:noFill/>
-        </p:spPr>
-        <p:txBody>
-          <a:bodyPr wrap="square">
-            <a:spAutoFit/>
-          </a:bodyPr>
-          <a:lstStyle/>
-          <a:p>
-            <a:pPr algn="l"/>
-            <a:r>
-              <a:rPr b="0" i="0" sz="950">
-                <a:solidFill>
-                  <a:srgbClr val="FFFFFF"/>
-                </a:solidFill>
-              </a:rPr>
-              <a:t>Budget Pick: Zak 19oz [Cheapest · Most portable]
-Stretch: Owala 32oz [Most capacity · Most leakproof]</a:t>
-            </a:r>
-          </a:p>
-        </p:txBody>
-      </p:sp>
-      <p:sp>
-        <p:nvSpPr>
-          <p:cNvPr id="26" name="TextBox 25"/>
-          <p:cNvSpPr txBox="1"/>
-          <p:nvPr/>
-        </p:nvSpPr>
-        <p:spPr>
-          <a:xfrm>
-            <a:off x="6492240" y="5349240"/>
-            <a:ext cx="5120640" cy="292608"/>
-          </a:xfrm>
-          <a:prstGeom prst="rect">
-            <a:avLst/>
-          </a:prstGeom>
-          <a:noFill/>
-        </p:spPr>
-        <p:txBody>
-          <a:bodyPr wrap="square">
-            <a:spAutoFit/>
-          </a:bodyPr>
-          <a:lstStyle/>
-          <a:p>
-            <a:pPr algn="l"/>
-            <a:r>
-              <a:rPr b="1" i="0" sz="1050">
-                <a:solidFill>
-                  <a:srgbClr val="CADCFC"/>
-                </a:solidFill>
-              </a:rPr>
-              <a:t>⑤  Refine + Compare</a:t>
-            </a:r>
-          </a:p>
-        </p:txBody>
-      </p:sp>
-      <p:sp>
-        <p:nvSpPr>
-          <p:cNvPr id="27" name="TextBox 26"/>
-          <p:cNvSpPr txBox="1"/>
-          <p:nvPr/>
-        </p:nvSpPr>
-        <p:spPr>
-          <a:xfrm>
-            <a:off x="6492240" y="5623560"/>
-            <a:ext cx="5120640" cy="502920"/>
-          </a:xfrm>
-          <a:prstGeom prst="rect">
-            <a:avLst/>
-          </a:prstGeom>
-          <a:noFill/>
-        </p:spPr>
-        <p:txBody>
-          <a:bodyPr wrap="square">
-            <a:spAutoFit/>
-          </a:bodyPr>
-          <a:lstStyle/>
-          <a:p>
-            <a:pPr algn="l"/>
-            <a:r>
-              <a:rPr b="0" i="0" sz="950">
-                <a:solidFill>
-                  <a:srgbClr val="FFFFFF"/>
-                </a:solidFill>
-              </a:rPr>
-              <a:t>‘larger’ → flips Best Fit to 32oz · diff card shown
-Select 3, compare side-by-side with row-winners</a:t>
-            </a:r>
-          </a:p>
-        </p:txBody>
-      </p:sp>
-      <p:sp>
-        <p:nvSpPr>
-          <p:cNvPr id="28" name="Rectangle 27"/>
+              <a:t>Comparison + lifecycle</a:t>
+            </a:r>
+          </a:p>
+        </p:txBody>
+      </p:sp>
+      <p:sp>
+        <p:nvSpPr>
+          <p:cNvPr id="33" name="Rectangle 32"/>
           <p:cNvSpPr/>
           <p:nvPr/>
         </p:nvSpPr>
         <p:spPr>
           <a:xfrm>
-            <a:off x="457200" y="6199632"/>
-            <a:ext cx="10469880" cy="384048"/>
+            <a:off x="6263640" y="3886200"/>
+            <a:ext cx="5486400" cy="2011680"/>
           </a:xfrm>
           <a:prstGeom prst="rect">
             <a:avLst/>
@@ -5402,41 +5557,390 @@
       </p:sp>
       <p:sp>
         <p:nvSpPr>
-          <p:cNvPr id="29" name="TextBox 28"/>
-          <p:cNvSpPr txBox="1"/>
-          <p:nvPr/>
-        </p:nvSpPr>
-        <p:spPr>
-          <a:xfrm>
-            <a:off x="457200" y="6236208"/>
-            <a:ext cx="10469880" cy="329184"/>
-          </a:xfrm>
-          <a:prstGeom prst="rect">
-            <a:avLst/>
-          </a:prstGeom>
-          <a:noFill/>
-        </p:spPr>
-        <p:txBody>
-          <a:bodyPr wrap="square">
-            <a:spAutoFit/>
-          </a:bodyPr>
-          <a:lstStyle/>
-          <a:p>
-            <a:pPr algn="ctr"/>
-            <a:r>
-              <a:rPr b="0" i="1" sz="1000">
+          <p:cNvPr id="34" name="TextBox 33"/>
+          <p:cNvSpPr txBox="1"/>
+          <p:nvPr/>
+        </p:nvSpPr>
+        <p:spPr>
+          <a:xfrm>
+            <a:off x="6492240" y="4050792"/>
+            <a:ext cx="5120640" cy="384048"/>
+          </a:xfrm>
+          <a:prstGeom prst="rect">
+            <a:avLst/>
+          </a:prstGeom>
+          <a:noFill/>
+        </p:spPr>
+        <p:txBody>
+          <a:bodyPr wrap="square">
+            <a:spAutoFit/>
+          </a:bodyPr>
+          <a:lstStyle/>
+          <a:p>
+            <a:pPr algn="l"/>
+            <a:r>
+              <a:rPr b="1" i="0" sz="1600">
+                <a:solidFill>
+                  <a:srgbClr val="FFFFFF"/>
+                </a:solidFill>
+              </a:rPr>
+              <a:t>Feedback &amp; Review</a:t>
+            </a:r>
+          </a:p>
+        </p:txBody>
+      </p:sp>
+      <p:sp>
+        <p:nvSpPr>
+          <p:cNvPr id="35" name="TextBox 34"/>
+          <p:cNvSpPr txBox="1"/>
+          <p:nvPr/>
+        </p:nvSpPr>
+        <p:spPr>
+          <a:xfrm>
+            <a:off x="6537960" y="4572000"/>
+            <a:ext cx="182880" cy="274320"/>
+          </a:xfrm>
+          <a:prstGeom prst="rect">
+            <a:avLst/>
+          </a:prstGeom>
+          <a:noFill/>
+        </p:spPr>
+        <p:txBody>
+          <a:bodyPr wrap="square">
+            <a:spAutoFit/>
+          </a:bodyPr>
+          <a:lstStyle/>
+          <a:p>
+            <a:pPr algn="l"/>
+            <a:r>
+              <a:rPr b="1" i="0" sz="1400">
                 <a:solidFill>
                   <a:srgbClr val="CADCFC"/>
                 </a:solidFill>
               </a:rPr>
-              <a:t>Self-evaluation + small-scale user testing (family · friends · classmates)  ·  formal study is future work (see Slide 11)</a:t>
-            </a:r>
-          </a:p>
-        </p:txBody>
-      </p:sp>
-      <p:sp>
-        <p:nvSpPr>
-          <p:cNvPr id="30" name="TextBox 29"/>
+              <a:t>•</a:t>
+            </a:r>
+          </a:p>
+        </p:txBody>
+      </p:sp>
+      <p:sp>
+        <p:nvSpPr>
+          <p:cNvPr id="36" name="TextBox 35"/>
+          <p:cNvSpPr txBox="1"/>
+          <p:nvPr/>
+        </p:nvSpPr>
+        <p:spPr>
+          <a:xfrm>
+            <a:off x="6766560" y="4572000"/>
+            <a:ext cx="4846320" cy="292608"/>
+          </a:xfrm>
+          <a:prstGeom prst="rect">
+            <a:avLst/>
+          </a:prstGeom>
+          <a:noFill/>
+        </p:spPr>
+        <p:txBody>
+          <a:bodyPr wrap="square">
+            <a:spAutoFit/>
+          </a:bodyPr>
+          <a:lstStyle/>
+          <a:p>
+            <a:pPr algn="l"/>
+            <a:r>
+              <a:rPr b="0" i="0" sz="1300">
+                <a:solidFill>
+                  <a:srgbClr val="FFFFFF"/>
+                </a:solidFill>
+              </a:rPr>
+              <a:t>Small-scale user feedback</a:t>
+            </a:r>
+          </a:p>
+        </p:txBody>
+      </p:sp>
+      <p:sp>
+        <p:nvSpPr>
+          <p:cNvPr id="37" name="TextBox 36"/>
+          <p:cNvSpPr txBox="1"/>
+          <p:nvPr/>
+        </p:nvSpPr>
+        <p:spPr>
+          <a:xfrm>
+            <a:off x="6537960" y="4882896"/>
+            <a:ext cx="182880" cy="274320"/>
+          </a:xfrm>
+          <a:prstGeom prst="rect">
+            <a:avLst/>
+          </a:prstGeom>
+          <a:noFill/>
+        </p:spPr>
+        <p:txBody>
+          <a:bodyPr wrap="square">
+            <a:spAutoFit/>
+          </a:bodyPr>
+          <a:lstStyle/>
+          <a:p>
+            <a:pPr algn="l"/>
+            <a:r>
+              <a:rPr b="1" i="0" sz="1400">
+                <a:solidFill>
+                  <a:srgbClr val="CADCFC"/>
+                </a:solidFill>
+              </a:rPr>
+              <a:t>•</a:t>
+            </a:r>
+          </a:p>
+        </p:txBody>
+      </p:sp>
+      <p:sp>
+        <p:nvSpPr>
+          <p:cNvPr id="38" name="TextBox 37"/>
+          <p:cNvSpPr txBox="1"/>
+          <p:nvPr/>
+        </p:nvSpPr>
+        <p:spPr>
+          <a:xfrm>
+            <a:off x="6766560" y="4882896"/>
+            <a:ext cx="4846320" cy="292608"/>
+          </a:xfrm>
+          <a:prstGeom prst="rect">
+            <a:avLst/>
+          </a:prstGeom>
+          <a:noFill/>
+        </p:spPr>
+        <p:txBody>
+          <a:bodyPr wrap="square">
+            <a:spAutoFit/>
+          </a:bodyPr>
+          <a:lstStyle/>
+          <a:p>
+            <a:pPr algn="l"/>
+            <a:r>
+              <a:rPr b="0" i="0" sz="1300">
+                <a:solidFill>
+                  <a:srgbClr val="FFFFFF"/>
+                </a:solidFill>
+              </a:rPr>
+              <a:t>Professor feedback</a:t>
+            </a:r>
+          </a:p>
+        </p:txBody>
+      </p:sp>
+      <p:sp>
+        <p:nvSpPr>
+          <p:cNvPr id="39" name="TextBox 38"/>
+          <p:cNvSpPr txBox="1"/>
+          <p:nvPr/>
+        </p:nvSpPr>
+        <p:spPr>
+          <a:xfrm>
+            <a:off x="6537960" y="5193792"/>
+            <a:ext cx="182880" cy="274320"/>
+          </a:xfrm>
+          <a:prstGeom prst="rect">
+            <a:avLst/>
+          </a:prstGeom>
+          <a:noFill/>
+        </p:spPr>
+        <p:txBody>
+          <a:bodyPr wrap="square">
+            <a:spAutoFit/>
+          </a:bodyPr>
+          <a:lstStyle/>
+          <a:p>
+            <a:pPr algn="l"/>
+            <a:r>
+              <a:rPr b="1" i="0" sz="1400">
+                <a:solidFill>
+                  <a:srgbClr val="CADCFC"/>
+                </a:solidFill>
+              </a:rPr>
+              <a:t>•</a:t>
+            </a:r>
+          </a:p>
+        </p:txBody>
+      </p:sp>
+      <p:sp>
+        <p:nvSpPr>
+          <p:cNvPr id="40" name="TextBox 39"/>
+          <p:cNvSpPr txBox="1"/>
+          <p:nvPr/>
+        </p:nvSpPr>
+        <p:spPr>
+          <a:xfrm>
+            <a:off x="6766560" y="5193792"/>
+            <a:ext cx="4846320" cy="292608"/>
+          </a:xfrm>
+          <a:prstGeom prst="rect">
+            <a:avLst/>
+          </a:prstGeom>
+          <a:noFill/>
+        </p:spPr>
+        <p:txBody>
+          <a:bodyPr wrap="square">
+            <a:spAutoFit/>
+          </a:bodyPr>
+          <a:lstStyle/>
+          <a:p>
+            <a:pPr algn="l"/>
+            <a:r>
+              <a:rPr b="0" i="0" sz="1300">
+                <a:solidFill>
+                  <a:srgbClr val="FFFFFF"/>
+                </a:solidFill>
+              </a:rPr>
+              <a:t>Industry mentor input</a:t>
+            </a:r>
+          </a:p>
+        </p:txBody>
+      </p:sp>
+      <p:sp>
+        <p:nvSpPr>
+          <p:cNvPr id="41" name="TextBox 40"/>
+          <p:cNvSpPr txBox="1"/>
+          <p:nvPr/>
+        </p:nvSpPr>
+        <p:spPr>
+          <a:xfrm>
+            <a:off x="6537960" y="5504688"/>
+            <a:ext cx="182880" cy="274320"/>
+          </a:xfrm>
+          <a:prstGeom prst="rect">
+            <a:avLst/>
+          </a:prstGeom>
+          <a:noFill/>
+        </p:spPr>
+        <p:txBody>
+          <a:bodyPr wrap="square">
+            <a:spAutoFit/>
+          </a:bodyPr>
+          <a:lstStyle/>
+          <a:p>
+            <a:pPr algn="l"/>
+            <a:r>
+              <a:rPr b="1" i="0" sz="1400">
+                <a:solidFill>
+                  <a:srgbClr val="CADCFC"/>
+                </a:solidFill>
+              </a:rPr>
+              <a:t>•</a:t>
+            </a:r>
+          </a:p>
+        </p:txBody>
+      </p:sp>
+      <p:sp>
+        <p:nvSpPr>
+          <p:cNvPr id="42" name="TextBox 41"/>
+          <p:cNvSpPr txBox="1"/>
+          <p:nvPr/>
+        </p:nvSpPr>
+        <p:spPr>
+          <a:xfrm>
+            <a:off x="6766560" y="5504688"/>
+            <a:ext cx="4846320" cy="292608"/>
+          </a:xfrm>
+          <a:prstGeom prst="rect">
+            <a:avLst/>
+          </a:prstGeom>
+          <a:noFill/>
+        </p:spPr>
+        <p:txBody>
+          <a:bodyPr wrap="square">
+            <a:spAutoFit/>
+          </a:bodyPr>
+          <a:lstStyle/>
+          <a:p>
+            <a:pPr algn="l"/>
+            <a:r>
+              <a:rPr b="0" i="0" sz="1300">
+                <a:solidFill>
+                  <a:srgbClr val="FFFFFF"/>
+                </a:solidFill>
+              </a:rPr>
+              <a:t>Implementation review</a:t>
+            </a:r>
+          </a:p>
+        </p:txBody>
+      </p:sp>
+      <p:sp>
+        <p:nvSpPr>
+          <p:cNvPr id="43" name="Rectangle 42"/>
+          <p:cNvSpPr/>
+          <p:nvPr/>
+        </p:nvSpPr>
+        <p:spPr>
+          <a:xfrm>
+            <a:off x="457200" y="6080760"/>
+            <a:ext cx="11292840" cy="502920"/>
+          </a:xfrm>
+          <a:prstGeom prst="rect">
+            <a:avLst/>
+          </a:prstGeom>
+          <a:solidFill>
+            <a:srgbClr val="C05A10"/>
+          </a:solidFill>
+          <a:ln>
+            <a:noFill/>
+          </a:ln>
+        </p:spPr>
+        <p:style>
+          <a:lnRef idx="1">
+            <a:schemeClr val="accent1"/>
+          </a:lnRef>
+          <a:fillRef idx="3">
+            <a:schemeClr val="accent1"/>
+          </a:fillRef>
+          <a:effectRef idx="2">
+            <a:schemeClr val="accent1"/>
+          </a:effectRef>
+          <a:fontRef idx="minor">
+            <a:schemeClr val="lt1"/>
+          </a:fontRef>
+        </p:style>
+        <p:txBody>
+          <a:bodyPr rtlCol="0" anchor="ctr"/>
+          <a:lstStyle/>
+          <a:p>
+            <a:pPr algn="ctr"/>
+          </a:p>
+        </p:txBody>
+      </p:sp>
+      <p:sp>
+        <p:nvSpPr>
+          <p:cNvPr id="44" name="TextBox 43"/>
+          <p:cNvSpPr txBox="1"/>
+          <p:nvPr/>
+        </p:nvSpPr>
+        <p:spPr>
+          <a:xfrm>
+            <a:off x="457200" y="6153912"/>
+            <a:ext cx="11292840" cy="356616"/>
+          </a:xfrm>
+          <a:prstGeom prst="rect">
+            <a:avLst/>
+          </a:prstGeom>
+          <a:noFill/>
+        </p:spPr>
+        <p:txBody>
+          <a:bodyPr wrap="square">
+            <a:spAutoFit/>
+          </a:bodyPr>
+          <a:lstStyle/>
+          <a:p>
+            <a:pPr algn="ctr"/>
+            <a:r>
+              <a:rPr b="1" i="0" sz="1400">
+                <a:solidFill>
+                  <a:srgbClr val="FFFFFF"/>
+                </a:solidFill>
+              </a:rPr>
+              <a:t>Result:  vague needs  →  structured preferences  →  explainable recommendations</a:t>
+            </a:r>
+          </a:p>
+        </p:txBody>
+      </p:sp>
+      <p:sp>
+        <p:nvSpPr>
+          <p:cNvPr id="45" name="TextBox 44"/>
           <p:cNvSpPr txBox="1"/>
           <p:nvPr/>
         </p:nvSpPr>

--- a/docs/capstone_presentation_v5.pptx
+++ b/docs/capstone_presentation_v5.pptx
@@ -4,20 +4,23 @@
   <p:sldMasterIdLst>
     <p:sldMasterId id="2147483648" r:id="rId1"/>
   </p:sldMasterIdLst>
+  <p:notesMasterIdLst>
+    <p:notesMasterId r:id="rId13"/>
+  </p:notesMasterIdLst>
   <p:sldIdLst>
-    <p:sldId id="256" r:id="rId7"/>
-    <p:sldId id="257" r:id="rId8"/>
-    <p:sldId id="258" r:id="rId9"/>
-    <p:sldId id="259" r:id="rId10"/>
-    <p:sldId id="260" r:id="rId12"/>
-    <p:sldId id="261" r:id="rId13"/>
-    <p:sldId id="262" r:id="rId14"/>
-    <p:sldId id="263" r:id="rId15"/>
-    <p:sldId id="264" r:id="rId16"/>
-    <p:sldId id="265" r:id="rId17"/>
-    <p:sldId id="266" r:id="rId18"/>
+    <p:sldId id="256" r:id="rId2"/>
+    <p:sldId id="257" r:id="rId3"/>
+    <p:sldId id="258" r:id="rId4"/>
+    <p:sldId id="260" r:id="rId5"/>
+    <p:sldId id="261" r:id="rId6"/>
+    <p:sldId id="262" r:id="rId7"/>
+    <p:sldId id="263" r:id="rId8"/>
+    <p:sldId id="264" r:id="rId9"/>
+    <p:sldId id="265" r:id="rId10"/>
+    <p:sldId id="266" r:id="rId11"/>
+    <p:sldId id="267" r:id="rId12"/>
   </p:sldIdLst>
-  <p:sldSz cx="12188952" cy="6858000" type="screen4x3"/>
+  <p:sldSz cx="12188825" cy="6858000"/>
   <p:notesSz cx="6858000" cy="9144000"/>
   <p:defaultTextStyle>
     <a:defPPr>
@@ -114,11 +117,27 @@
       </a:defRPr>
     </a:lvl9pPr>
   </p:defaultTextStyle>
+  <p:extLst>
+    <p:ext uri="{EFAFB233-063F-42B5-8137-9DF3F51BA10A}">
+      <p15:sldGuideLst xmlns:p15="http://schemas.microsoft.com/office/powerpoint/2012/main">
+        <p15:guide id="1" orient="horz" pos="2160">
+          <p15:clr>
+            <a:srgbClr val="A4A3A4"/>
+          </p15:clr>
+        </p15:guide>
+        <p15:guide id="2" pos="2880">
+          <p15:clr>
+            <a:srgbClr val="A4A3A4"/>
+          </p15:clr>
+        </p15:guide>
+      </p15:sldGuideLst>
+    </p:ext>
+  </p:extLst>
 </p:presentation>
 </file>
 
 <file path=ppt/notesMasters/notesMaster1.xml><?xml version="1.0" encoding="utf-8"?>
-<p:notesMaster xmlns:a="http://schemas.openxmlformats.org/drawingml/2006/main" xmlns:p="http://schemas.openxmlformats.org/presentationml/2006/main" xmlns:r="http://schemas.openxmlformats.org/officeDocument/2006/relationships">
+<p:notesMaster xmlns:a="http://schemas.openxmlformats.org/drawingml/2006/main" xmlns:r="http://schemas.openxmlformats.org/officeDocument/2006/relationships" xmlns:p="http://schemas.openxmlformats.org/presentationml/2006/main">
   <p:cSld>
     <p:bg>
       <p:bgRef idx="1001">
@@ -152,7 +171,7 @@
         <p:spPr>
           <a:xfrm>
             <a:off x="0" y="0"/>
-            <a:ext cx="2971800" cy="457200"/>
+            <a:ext cx="2971800" cy="458788"/>
           </a:xfrm>
           <a:prstGeom prst="rect">
             <a:avLst/>
@@ -183,7 +202,7 @@
         <p:spPr>
           <a:xfrm>
             <a:off x="3884613" y="0"/>
-            <a:ext cx="2971800" cy="457200"/>
+            <a:ext cx="2971800" cy="458788"/>
           </a:xfrm>
           <a:prstGeom prst="rect">
             <a:avLst/>
@@ -197,9 +216,9 @@
             </a:lvl1pPr>
           </a:lstStyle>
           <a:p>
-            <a:fld id="{0F89C1C7-3DCD-1040-A9CF-14679D8B5DDD}" type="datetimeFigureOut">
+            <a:fld id="{5C0DFECA-0844-F643-BF91-8AD3B86C8F47}" type="datetimeFigureOut">
               <a:rPr lang="en-US" smtClean="0"/>
-              <a:t>10/17/16</a:t>
+              <a:t>5/6/26</a:t>
             </a:fld>
             <a:endParaRPr lang="en-US"/>
           </a:p>
@@ -217,8 +236,8 @@
         </p:nvSpPr>
         <p:spPr>
           <a:xfrm>
-            <a:off x="1143000" y="685800"/>
-            <a:ext cx="4572000" cy="3429000"/>
+            <a:off x="685800" y="1143000"/>
+            <a:ext cx="5486400" cy="3086100"/>
           </a:xfrm>
           <a:prstGeom prst="rect">
             <a:avLst/>
@@ -250,8 +269,8 @@
         </p:nvSpPr>
         <p:spPr>
           <a:xfrm>
-            <a:off x="685800" y="4343400"/>
-            <a:ext cx="5486400" cy="4114800"/>
+            <a:off x="685800" y="4400550"/>
+            <a:ext cx="5486400" cy="3600450"/>
           </a:xfrm>
           <a:prstGeom prst="rect">
             <a:avLst/>
@@ -263,38 +282,37 @@
           <a:p>
             <a:pPr lvl="0"/>
             <a:r>
-              <a:rPr lang="en-US" smtClean="0"/>
+              <a:rPr lang="en-US"/>
               <a:t>Click to edit Master text styles</a:t>
             </a:r>
           </a:p>
           <a:p>
             <a:pPr lvl="1"/>
             <a:r>
-              <a:rPr lang="en-US" smtClean="0"/>
+              <a:rPr lang="en-US"/>
               <a:t>Second level</a:t>
             </a:r>
           </a:p>
           <a:p>
             <a:pPr lvl="2"/>
             <a:r>
-              <a:rPr lang="en-US" smtClean="0"/>
+              <a:rPr lang="en-US"/>
               <a:t>Third level</a:t>
             </a:r>
           </a:p>
           <a:p>
             <a:pPr lvl="3"/>
             <a:r>
-              <a:rPr lang="en-US" smtClean="0"/>
+              <a:rPr lang="en-US"/>
               <a:t>Fourth level</a:t>
             </a:r>
           </a:p>
           <a:p>
             <a:pPr lvl="4"/>
             <a:r>
-              <a:rPr lang="en-US" smtClean="0"/>
+              <a:rPr lang="en-US"/>
               <a:t>Fifth level</a:t>
             </a:r>
-            <a:endParaRPr lang="en-US"/>
           </a:p>
         </p:txBody>
       </p:sp>
@@ -311,7 +329,7 @@
         <p:spPr>
           <a:xfrm>
             <a:off x="0" y="8685213"/>
-            <a:ext cx="2971800" cy="457200"/>
+            <a:ext cx="2971800" cy="458787"/>
           </a:xfrm>
           <a:prstGeom prst="rect">
             <a:avLst/>
@@ -342,7 +360,7 @@
         <p:spPr>
           <a:xfrm>
             <a:off x="3884613" y="8685213"/>
-            <a:ext cx="2971800" cy="457200"/>
+            <a:ext cx="2971800" cy="458787"/>
           </a:xfrm>
           <a:prstGeom prst="rect">
             <a:avLst/>
@@ -356,7 +374,7 @@
             </a:lvl1pPr>
           </a:lstStyle>
           <a:p>
-            <a:fld id="{BB5E49A5-4136-284D-997B-48E1D791AD67}" type="slidenum">
+            <a:fld id="{892D296C-45C8-8B44-A5A8-6EEF398ADF68}" type="slidenum">
               <a:rPr lang="en-US" smtClean="0"/>
               <a:t>‹#›</a:t>
             </a:fld>
@@ -367,13 +385,13 @@
     </p:spTree>
     <p:extLst>
       <p:ext uri="{BB962C8B-B14F-4D97-AF65-F5344CB8AC3E}">
-        <p14:creationId xmlns:p14="http://schemas.microsoft.com/office/powerpoint/2010/main" val="2623252185"/>
+        <p14:creationId xmlns:p14="http://schemas.microsoft.com/office/powerpoint/2010/main" val="3192206712"/>
       </p:ext>
     </p:extLst>
   </p:cSld>
   <p:clrMap bg1="lt1" tx1="dk1" bg2="lt2" tx2="dk2" accent1="accent1" accent2="accent2" accent3="accent3" accent4="accent4" accent5="accent5" accent6="accent6" hlink="hlink" folHlink="folHlink"/>
   <p:notesStyle>
-    <a:lvl1pPr marL="0" algn="l" defTabSz="457200" rtl="0" eaLnBrk="1" latinLnBrk="0" hangingPunct="1">
+    <a:lvl1pPr marL="0" algn="l" defTabSz="914400" rtl="0" eaLnBrk="1" latinLnBrk="0" hangingPunct="1">
       <a:defRPr sz="1200" kern="1200">
         <a:solidFill>
           <a:schemeClr val="tx1"/>
@@ -383,7 +401,7 @@
         <a:cs typeface="+mn-cs"/>
       </a:defRPr>
     </a:lvl1pPr>
-    <a:lvl2pPr marL="457200" algn="l" defTabSz="457200" rtl="0" eaLnBrk="1" latinLnBrk="0" hangingPunct="1">
+    <a:lvl2pPr marL="457200" algn="l" defTabSz="914400" rtl="0" eaLnBrk="1" latinLnBrk="0" hangingPunct="1">
       <a:defRPr sz="1200" kern="1200">
         <a:solidFill>
           <a:schemeClr val="tx1"/>
@@ -393,7 +411,7 @@
         <a:cs typeface="+mn-cs"/>
       </a:defRPr>
     </a:lvl2pPr>
-    <a:lvl3pPr marL="914400" algn="l" defTabSz="457200" rtl="0" eaLnBrk="1" latinLnBrk="0" hangingPunct="1">
+    <a:lvl3pPr marL="914400" algn="l" defTabSz="914400" rtl="0" eaLnBrk="1" latinLnBrk="0" hangingPunct="1">
       <a:defRPr sz="1200" kern="1200">
         <a:solidFill>
           <a:schemeClr val="tx1"/>
@@ -403,7 +421,7 @@
         <a:cs typeface="+mn-cs"/>
       </a:defRPr>
     </a:lvl3pPr>
-    <a:lvl4pPr marL="1371600" algn="l" defTabSz="457200" rtl="0" eaLnBrk="1" latinLnBrk="0" hangingPunct="1">
+    <a:lvl4pPr marL="1371600" algn="l" defTabSz="914400" rtl="0" eaLnBrk="1" latinLnBrk="0" hangingPunct="1">
       <a:defRPr sz="1200" kern="1200">
         <a:solidFill>
           <a:schemeClr val="tx1"/>
@@ -413,7 +431,7 @@
         <a:cs typeface="+mn-cs"/>
       </a:defRPr>
     </a:lvl4pPr>
-    <a:lvl5pPr marL="1828800" algn="l" defTabSz="457200" rtl="0" eaLnBrk="1" latinLnBrk="0" hangingPunct="1">
+    <a:lvl5pPr marL="1828800" algn="l" defTabSz="914400" rtl="0" eaLnBrk="1" latinLnBrk="0" hangingPunct="1">
       <a:defRPr sz="1200" kern="1200">
         <a:solidFill>
           <a:schemeClr val="tx1"/>
@@ -423,7 +441,7 @@
         <a:cs typeface="+mn-cs"/>
       </a:defRPr>
     </a:lvl5pPr>
-    <a:lvl6pPr marL="2286000" algn="l" defTabSz="457200" rtl="0" eaLnBrk="1" latinLnBrk="0" hangingPunct="1">
+    <a:lvl6pPr marL="2286000" algn="l" defTabSz="914400" rtl="0" eaLnBrk="1" latinLnBrk="0" hangingPunct="1">
       <a:defRPr sz="1200" kern="1200">
         <a:solidFill>
           <a:schemeClr val="tx1"/>
@@ -433,7 +451,7 @@
         <a:cs typeface="+mn-cs"/>
       </a:defRPr>
     </a:lvl6pPr>
-    <a:lvl7pPr marL="2743200" algn="l" defTabSz="457200" rtl="0" eaLnBrk="1" latinLnBrk="0" hangingPunct="1">
+    <a:lvl7pPr marL="2743200" algn="l" defTabSz="914400" rtl="0" eaLnBrk="1" latinLnBrk="0" hangingPunct="1">
       <a:defRPr sz="1200" kern="1200">
         <a:solidFill>
           <a:schemeClr val="tx1"/>
@@ -443,7 +461,7 @@
         <a:cs typeface="+mn-cs"/>
       </a:defRPr>
     </a:lvl7pPr>
-    <a:lvl8pPr marL="3200400" algn="l" defTabSz="457200" rtl="0" eaLnBrk="1" latinLnBrk="0" hangingPunct="1">
+    <a:lvl8pPr marL="3200400" algn="l" defTabSz="914400" rtl="0" eaLnBrk="1" latinLnBrk="0" hangingPunct="1">
       <a:defRPr sz="1200" kern="1200">
         <a:solidFill>
           <a:schemeClr val="tx1"/>
@@ -453,7 +471,7 @@
         <a:cs typeface="+mn-cs"/>
       </a:defRPr>
     </a:lvl8pPr>
-    <a:lvl9pPr marL="3657600" algn="l" defTabSz="457200" rtl="0" eaLnBrk="1" latinLnBrk="0" hangingPunct="1">
+    <a:lvl9pPr marL="3657600" algn="l" defTabSz="914400" rtl="0" eaLnBrk="1" latinLnBrk="0" hangingPunct="1">
       <a:defRPr sz="1200" kern="1200">
         <a:solidFill>
           <a:schemeClr val="tx1"/>
@@ -468,7 +486,7 @@
 </file>
 
 <file path=ppt/notesSlides/notesSlide1.xml><?xml version="1.0" encoding="utf-8"?>
-<p:notes xmlns:a="http://schemas.openxmlformats.org/drawingml/2006/main" xmlns:p="http://schemas.openxmlformats.org/presentationml/2006/main" xmlns:r="http://schemas.openxmlformats.org/officeDocument/2006/relationships">
+<p:notes xmlns:a="http://schemas.openxmlformats.org/drawingml/2006/main" xmlns:r="http://schemas.openxmlformats.org/officeDocument/2006/relationships" xmlns:p="http://schemas.openxmlformats.org/presentationml/2006/main">
   <p:cSld>
     <p:spTree>
       <p:nvGrpSpPr>
@@ -488,7 +506,7 @@
         <p:nvSpPr>
           <p:cNvPr id="2" name="Slide Image Placeholder 1"/>
           <p:cNvSpPr>
-            <a:spLocks noGrp="1"/>
+            <a:spLocks noGrp="1" noRot="1" noChangeAspect="1"/>
           </p:cNvSpPr>
           <p:nvPr>
             <p:ph type="sldImg" idx="2"/>
@@ -503,7 +521,7 @@
             <a:spLocks noGrp="1"/>
           </p:cNvSpPr>
           <p:nvPr>
-            <p:ph type="body" idx="3" sz="quarter"/>
+            <p:ph type="body" sz="quarter" idx="3"/>
           </p:nvPr>
         </p:nvSpPr>
         <p:spPr/>
@@ -544,7 +562,7 @@
             <a:spLocks noGrp="1"/>
           </p:cNvSpPr>
           <p:nvPr>
-            <p:ph type="sldNum" idx="5" sz="quarter"/>
+            <p:ph type="sldNum" sz="quarter" idx="5"/>
           </p:nvPr>
         </p:nvSpPr>
         <p:spPr/>
@@ -558,7 +576,7 @@
 </file>
 
 <file path=ppt/notesSlides/notesSlide2.xml><?xml version="1.0" encoding="utf-8"?>
-<p:notes xmlns:a="http://schemas.openxmlformats.org/drawingml/2006/main" xmlns:p="http://schemas.openxmlformats.org/presentationml/2006/main" xmlns:r="http://schemas.openxmlformats.org/officeDocument/2006/relationships">
+<p:notes xmlns:a="http://schemas.openxmlformats.org/drawingml/2006/main" xmlns:r="http://schemas.openxmlformats.org/officeDocument/2006/relationships" xmlns:p="http://schemas.openxmlformats.org/presentationml/2006/main">
   <p:cSld>
     <p:spTree>
       <p:nvGrpSpPr>
@@ -578,7 +596,7 @@
         <p:nvSpPr>
           <p:cNvPr id="2" name="Slide Image Placeholder 1"/>
           <p:cNvSpPr>
-            <a:spLocks noGrp="1"/>
+            <a:spLocks noGrp="1" noRot="1" noChangeAspect="1"/>
           </p:cNvSpPr>
           <p:nvPr>
             <p:ph type="sldImg" idx="2"/>
@@ -593,7 +611,7 @@
             <a:spLocks noGrp="1"/>
           </p:cNvSpPr>
           <p:nvPr>
-            <p:ph type="body" idx="3" sz="quarter"/>
+            <p:ph type="body" sz="quarter" idx="3"/>
           </p:nvPr>
         </p:nvSpPr>
         <p:spPr/>
@@ -639,7 +657,7 @@
             <a:spLocks noGrp="1"/>
           </p:cNvSpPr>
           <p:nvPr>
-            <p:ph type="sldNum" idx="5" sz="quarter"/>
+            <p:ph type="sldNum" sz="quarter" idx="5"/>
           </p:nvPr>
         </p:nvSpPr>
         <p:spPr/>
@@ -653,7 +671,7 @@
 </file>
 
 <file path=ppt/notesSlides/notesSlide3.xml><?xml version="1.0" encoding="utf-8"?>
-<p:notes xmlns:a="http://schemas.openxmlformats.org/drawingml/2006/main" xmlns:p="http://schemas.openxmlformats.org/presentationml/2006/main" xmlns:r="http://schemas.openxmlformats.org/officeDocument/2006/relationships">
+<p:notes xmlns:a="http://schemas.openxmlformats.org/drawingml/2006/main" xmlns:r="http://schemas.openxmlformats.org/officeDocument/2006/relationships" xmlns:p="http://schemas.openxmlformats.org/presentationml/2006/main">
   <p:cSld>
     <p:spTree>
       <p:nvGrpSpPr>
@@ -673,7 +691,7 @@
         <p:nvSpPr>
           <p:cNvPr id="2" name="Slide Image Placeholder 1"/>
           <p:cNvSpPr>
-            <a:spLocks noGrp="1"/>
+            <a:spLocks noGrp="1" noRot="1" noChangeAspect="1"/>
           </p:cNvSpPr>
           <p:nvPr>
             <p:ph type="sldImg" idx="2"/>
@@ -688,7 +706,7 @@
             <a:spLocks noGrp="1"/>
           </p:cNvSpPr>
           <p:nvPr>
-            <p:ph type="body" idx="3" sz="quarter"/>
+            <p:ph type="body" sz="quarter" idx="3"/>
           </p:nvPr>
         </p:nvSpPr>
         <p:spPr/>
@@ -749,7 +767,7 @@
             <a:spLocks noGrp="1"/>
           </p:cNvSpPr>
           <p:nvPr>
-            <p:ph type="sldNum" idx="5" sz="quarter"/>
+            <p:ph type="sldNum" sz="quarter" idx="5"/>
           </p:nvPr>
         </p:nvSpPr>
         <p:spPr/>
@@ -763,7 +781,7 @@
 </file>
 
 <file path=ppt/notesSlides/notesSlide4.xml><?xml version="1.0" encoding="utf-8"?>
-<p:notes xmlns:a="http://schemas.openxmlformats.org/drawingml/2006/main" xmlns:p="http://schemas.openxmlformats.org/presentationml/2006/main" xmlns:r="http://schemas.openxmlformats.org/officeDocument/2006/relationships">
+<p:notes xmlns:a="http://schemas.openxmlformats.org/drawingml/2006/main" xmlns:r="http://schemas.openxmlformats.org/officeDocument/2006/relationships" xmlns:p="http://schemas.openxmlformats.org/presentationml/2006/main">
   <p:cSld>
     <p:spTree>
       <p:nvGrpSpPr>
@@ -783,7 +801,7 @@
         <p:nvSpPr>
           <p:cNvPr id="2" name="Slide Image Placeholder 1"/>
           <p:cNvSpPr>
-            <a:spLocks noGrp="1"/>
+            <a:spLocks noGrp="1" noRot="1" noChangeAspect="1"/>
           </p:cNvSpPr>
           <p:nvPr>
             <p:ph type="sldImg" idx="2"/>
@@ -798,7 +816,7 @@
             <a:spLocks noGrp="1"/>
           </p:cNvSpPr>
           <p:nvPr>
-            <p:ph type="body" idx="3" sz="quarter"/>
+            <p:ph type="body" sz="quarter" idx="3"/>
           </p:nvPr>
         </p:nvSpPr>
         <p:spPr/>
@@ -815,19 +833,25 @@
               <a:t>ETL: scrapes 100 products via Playwright with anti-bot measures, normalises delivery copy ('arrives Mar 14' -&gt; 5 days). 72/100 delivery values were missing post-scrape and are flagged 'estimated'; descriptions for all 100 are flagged 'synthesised from title'. No silent fabrication.</a:t>
             </a:r>
           </a:p>
-          <a:p/>
+          <a:p>
+            <a:endParaRPr/>
+          </a:p>
           <a:p>
             <a:r>
               <a:t>Attribute extraction: regex-based, runs at load time. Echo Show models map to known screen sizes (5 -&gt; 5.5", 8 -&gt; 8", 15 -&gt; 15.6"); ecosystems infer from Echo/Nest/HomePod keywords; bottle capacity from 'oz' patterns.</a:t>
             </a:r>
           </a:p>
-          <a:p/>
+          <a:p>
+            <a:endParaRPr/>
+          </a:p>
           <a:p>
             <a:r>
               <a:t>Claude call sites in the runtime: parse free-text input, write personal copy, parse refine intent. All three have deterministic fallbacks so the demo runs without an API key. Ranking is never an LLM call.</a:t>
             </a:r>
           </a:p>
-          <a:p/>
+          <a:p>
+            <a:endParaRPr/>
+          </a:p>
           <a:p>
             <a:r>
               <a:t>AI tooling across the build (disclosed honestly):</a:t>
@@ -862,7 +886,7 @@
             <a:spLocks noGrp="1"/>
           </p:cNvSpPr>
           <p:nvPr>
-            <p:ph type="sldNum" idx="5" sz="quarter"/>
+            <p:ph type="sldNum" sz="quarter" idx="5"/>
           </p:nvPr>
         </p:nvSpPr>
         <p:spPr/>
@@ -876,7 +900,7 @@
 </file>
 
 <file path=ppt/notesSlides/notesSlide5.xml><?xml version="1.0" encoding="utf-8"?>
-<p:notes xmlns:a="http://schemas.openxmlformats.org/drawingml/2006/main" xmlns:p="http://schemas.openxmlformats.org/presentationml/2006/main" xmlns:r="http://schemas.openxmlformats.org/officeDocument/2006/relationships">
+<p:notes xmlns:a="http://schemas.openxmlformats.org/drawingml/2006/main" xmlns:r="http://schemas.openxmlformats.org/officeDocument/2006/relationships" xmlns:p="http://schemas.openxmlformats.org/presentationml/2006/main">
   <p:cSld>
     <p:spTree>
       <p:nvGrpSpPr>
@@ -896,7 +920,7 @@
         <p:nvSpPr>
           <p:cNvPr id="2" name="Slide Image Placeholder 1"/>
           <p:cNvSpPr>
-            <a:spLocks noGrp="1"/>
+            <a:spLocks noGrp="1" noRot="1" noChangeAspect="1"/>
           </p:cNvSpPr>
           <p:nvPr>
             <p:ph type="sldImg" idx="2"/>
@@ -911,7 +935,7 @@
             <a:spLocks noGrp="1"/>
           </p:cNvSpPr>
           <p:nvPr>
-            <p:ph type="body" idx="3" sz="quarter"/>
+            <p:ph type="body" sz="quarter" idx="3"/>
           </p:nvPr>
         </p:nvSpPr>
         <p:spPr/>
@@ -923,7 +947,9 @@
               <a:t>Capability Validation — talking points (45–60 sec):</a:t>
             </a:r>
           </a:p>
-          <a:p/>
+          <a:p>
+            <a:endParaRPr/>
+          </a:p>
           <a:p>
             <a:r>
               <a:t>DECISION TRANSPARENCY (left card, the headline finding):</a:t>
@@ -934,13 +960,17 @@
               <a:t>Every recommendation surfaces three things the user can audit — a Match / Miss / ? checklist mapping their chips to match status, an explicit trade-off card naming what the pick gives up, and reasons that map directly to rules the deterministic ranker fired.</a:t>
             </a:r>
           </a:p>
-          <a:p/>
+          <a:p>
+            <a:endParaRPr/>
+          </a:p>
           <a:p>
             <a:r>
               <a:t>CAPABILITY CHECK (right top): the structural gaps from the competitive comparison on slide 4 are addressed in code — main gaps closed, preference continuity (diff per refine), explicit decision modeling (multi-criteria scoring), comparison view, and lifecycle layer.</a:t>
             </a:r>
           </a:p>
-          <a:p/>
+          <a:p>
+            <a:endParaRPr/>
+          </a:p>
           <a:p>
             <a:r>
               <a:t>FEEDBACK &amp; REVIEW (right bottom): four sources fed back into the build —</a:t>
@@ -966,13 +996,17 @@
               <a:t> 4. Implementation review — Claude Code (Opus 4.7) build pair-programmer + Codex GPT-5.5 independent validator cross-reviewed the same codebase; each finding got fixed or dismissed in writing.</a:t>
             </a:r>
           </a:p>
-          <a:p/>
+          <a:p>
+            <a:endParaRPr/>
+          </a:p>
           <a:p>
             <a:r>
               <a:t>RESULT BAR: the system turns vague needs into structured preferences and then into explainable recommendations — that transformation is the deliverable.</a:t>
             </a:r>
           </a:p>
-          <a:p/>
+          <a:p>
+            <a:endParaRPr/>
+          </a:p>
           <a:p>
             <a:r>
               <a:t>Live demo runs immediately after this slide.</a:t>
@@ -987,7 +1021,7 @@
             <a:spLocks noGrp="1"/>
           </p:cNvSpPr>
           <p:nvPr>
-            <p:ph type="sldNum" idx="5" sz="quarter"/>
+            <p:ph type="sldNum" sz="quarter" idx="5"/>
           </p:nvPr>
         </p:nvSpPr>
         <p:spPr/>
@@ -1038,10 +1072,9 @@
           <a:lstStyle/>
           <a:p>
             <a:r>
-              <a:rPr lang="en-US" smtClean="0"/>
+              <a:rPr lang="en-US"/>
               <a:t>Click to edit Master title style</a:t>
             </a:r>
-            <a:endParaRPr lang="en-US"/>
           </a:p>
         </p:txBody>
       </p:sp>
@@ -1157,10 +1190,9 @@
           </a:lstStyle>
           <a:p>
             <a:r>
-              <a:rPr lang="en-US" smtClean="0"/>
+              <a:rPr lang="en-US"/>
               <a:t>Click to edit Master subtitle style</a:t>
             </a:r>
-            <a:endParaRPr lang="en-US"/>
           </a:p>
         </p:txBody>
       </p:sp>
@@ -1181,7 +1213,7 @@
           <a:p>
             <a:fld id="{5BCAD085-E8A6-8845-BD4E-CB4CCA059FC4}" type="datetimeFigureOut">
               <a:rPr lang="en-US" smtClean="0"/>
-              <a:t>1/27/13</a:t>
+              <a:t>5/6/26</a:t>
             </a:fld>
             <a:endParaRPr lang="en-US"/>
           </a:p>
@@ -1275,10 +1307,9 @@
           <a:lstStyle/>
           <a:p>
             <a:r>
-              <a:rPr lang="en-US" smtClean="0"/>
+              <a:rPr lang="en-US"/>
               <a:t>Click to edit Master title style</a:t>
             </a:r>
-            <a:endParaRPr lang="en-US"/>
           </a:p>
         </p:txBody>
       </p:sp>
@@ -1299,38 +1330,37 @@
           <a:p>
             <a:pPr lvl="0"/>
             <a:r>
-              <a:rPr lang="en-US" smtClean="0"/>
+              <a:rPr lang="en-US"/>
               <a:t>Click to edit Master text styles</a:t>
             </a:r>
           </a:p>
           <a:p>
             <a:pPr lvl="1"/>
             <a:r>
-              <a:rPr lang="en-US" smtClean="0"/>
+              <a:rPr lang="en-US"/>
               <a:t>Second level</a:t>
             </a:r>
           </a:p>
           <a:p>
             <a:pPr lvl="2"/>
             <a:r>
-              <a:rPr lang="en-US" smtClean="0"/>
+              <a:rPr lang="en-US"/>
               <a:t>Third level</a:t>
             </a:r>
           </a:p>
           <a:p>
             <a:pPr lvl="3"/>
             <a:r>
-              <a:rPr lang="en-US" smtClean="0"/>
+              <a:rPr lang="en-US"/>
               <a:t>Fourth level</a:t>
             </a:r>
           </a:p>
           <a:p>
             <a:pPr lvl="4"/>
             <a:r>
-              <a:rPr lang="en-US" smtClean="0"/>
+              <a:rPr lang="en-US"/>
               <a:t>Fifth level</a:t>
             </a:r>
-            <a:endParaRPr lang="en-US"/>
           </a:p>
         </p:txBody>
       </p:sp>
@@ -1351,7 +1381,7 @@
           <a:p>
             <a:fld id="{5BCAD085-E8A6-8845-BD4E-CB4CCA059FC4}" type="datetimeFigureOut">
               <a:rPr lang="en-US" smtClean="0"/>
-              <a:t>1/27/13</a:t>
+              <a:t>5/6/26</a:t>
             </a:fld>
             <a:endParaRPr lang="en-US"/>
           </a:p>
@@ -1450,10 +1480,9 @@
           <a:lstStyle/>
           <a:p>
             <a:r>
-              <a:rPr lang="en-US" smtClean="0"/>
+              <a:rPr lang="en-US"/>
               <a:t>Click to edit Master title style</a:t>
             </a:r>
-            <a:endParaRPr lang="en-US"/>
           </a:p>
         </p:txBody>
       </p:sp>
@@ -1479,38 +1508,37 @@
           <a:p>
             <a:pPr lvl="0"/>
             <a:r>
-              <a:rPr lang="en-US" smtClean="0"/>
+              <a:rPr lang="en-US"/>
               <a:t>Click to edit Master text styles</a:t>
             </a:r>
           </a:p>
           <a:p>
             <a:pPr lvl="1"/>
             <a:r>
-              <a:rPr lang="en-US" smtClean="0"/>
+              <a:rPr lang="en-US"/>
               <a:t>Second level</a:t>
             </a:r>
           </a:p>
           <a:p>
             <a:pPr lvl="2"/>
             <a:r>
-              <a:rPr lang="en-US" smtClean="0"/>
+              <a:rPr lang="en-US"/>
               <a:t>Third level</a:t>
             </a:r>
           </a:p>
           <a:p>
             <a:pPr lvl="3"/>
             <a:r>
-              <a:rPr lang="en-US" smtClean="0"/>
+              <a:rPr lang="en-US"/>
               <a:t>Fourth level</a:t>
             </a:r>
           </a:p>
           <a:p>
             <a:pPr lvl="4"/>
             <a:r>
-              <a:rPr lang="en-US" smtClean="0"/>
+              <a:rPr lang="en-US"/>
               <a:t>Fifth level</a:t>
             </a:r>
-            <a:endParaRPr lang="en-US"/>
           </a:p>
         </p:txBody>
       </p:sp>
@@ -1531,7 +1559,7 @@
           <a:p>
             <a:fld id="{5BCAD085-E8A6-8845-BD4E-CB4CCA059FC4}" type="datetimeFigureOut">
               <a:rPr lang="en-US" smtClean="0"/>
-              <a:t>1/27/13</a:t>
+              <a:t>5/6/26</a:t>
             </a:fld>
             <a:endParaRPr lang="en-US"/>
           </a:p>
@@ -1625,10 +1653,9 @@
           <a:lstStyle/>
           <a:p>
             <a:r>
-              <a:rPr lang="en-US" smtClean="0"/>
+              <a:rPr lang="en-US"/>
               <a:t>Click to edit Master title style</a:t>
             </a:r>
-            <a:endParaRPr lang="en-US"/>
           </a:p>
         </p:txBody>
       </p:sp>
@@ -1649,38 +1676,37 @@
           <a:p>
             <a:pPr lvl="0"/>
             <a:r>
-              <a:rPr lang="en-US" smtClean="0"/>
+              <a:rPr lang="en-US"/>
               <a:t>Click to edit Master text styles</a:t>
             </a:r>
           </a:p>
           <a:p>
             <a:pPr lvl="1"/>
             <a:r>
-              <a:rPr lang="en-US" smtClean="0"/>
+              <a:rPr lang="en-US"/>
               <a:t>Second level</a:t>
             </a:r>
           </a:p>
           <a:p>
             <a:pPr lvl="2"/>
             <a:r>
-              <a:rPr lang="en-US" smtClean="0"/>
+              <a:rPr lang="en-US"/>
               <a:t>Third level</a:t>
             </a:r>
           </a:p>
           <a:p>
             <a:pPr lvl="3"/>
             <a:r>
-              <a:rPr lang="en-US" smtClean="0"/>
+              <a:rPr lang="en-US"/>
               <a:t>Fourth level</a:t>
             </a:r>
           </a:p>
           <a:p>
             <a:pPr lvl="4"/>
             <a:r>
-              <a:rPr lang="en-US" smtClean="0"/>
+              <a:rPr lang="en-US"/>
               <a:t>Fifth level</a:t>
             </a:r>
-            <a:endParaRPr lang="en-US"/>
           </a:p>
         </p:txBody>
       </p:sp>
@@ -1701,7 +1727,7 @@
           <a:p>
             <a:fld id="{5BCAD085-E8A6-8845-BD4E-CB4CCA059FC4}" type="datetimeFigureOut">
               <a:rPr lang="en-US" smtClean="0"/>
-              <a:t>1/27/13</a:t>
+              <a:t>5/6/26</a:t>
             </a:fld>
             <a:endParaRPr lang="en-US"/>
           </a:p>
@@ -1804,10 +1830,9 @@
           </a:lstStyle>
           <a:p>
             <a:r>
-              <a:rPr lang="en-US" smtClean="0"/>
+              <a:rPr lang="en-US"/>
               <a:t>Click to edit Master title style</a:t>
             </a:r>
-            <a:endParaRPr lang="en-US"/>
           </a:p>
         </p:txBody>
       </p:sp>
@@ -1924,7 +1949,7 @@
           <a:p>
             <a:pPr lvl="0"/>
             <a:r>
-              <a:rPr lang="en-US" smtClean="0"/>
+              <a:rPr lang="en-US"/>
               <a:t>Click to edit Master text styles</a:t>
             </a:r>
           </a:p>
@@ -1947,7 +1972,7 @@
           <a:p>
             <a:fld id="{5BCAD085-E8A6-8845-BD4E-CB4CCA059FC4}" type="datetimeFigureOut">
               <a:rPr lang="en-US" smtClean="0"/>
-              <a:t>1/27/13</a:t>
+              <a:t>5/6/26</a:t>
             </a:fld>
             <a:endParaRPr lang="en-US"/>
           </a:p>
@@ -2041,10 +2066,9 @@
           <a:lstStyle/>
           <a:p>
             <a:r>
-              <a:rPr lang="en-US" smtClean="0"/>
+              <a:rPr lang="en-US"/>
               <a:t>Click to edit Master title style</a:t>
             </a:r>
-            <a:endParaRPr lang="en-US"/>
           </a:p>
         </p:txBody>
       </p:sp>
@@ -2098,38 +2122,37 @@
           <a:p>
             <a:pPr lvl="0"/>
             <a:r>
-              <a:rPr lang="en-US" smtClean="0"/>
+              <a:rPr lang="en-US"/>
               <a:t>Click to edit Master text styles</a:t>
             </a:r>
           </a:p>
           <a:p>
             <a:pPr lvl="1"/>
             <a:r>
-              <a:rPr lang="en-US" smtClean="0"/>
+              <a:rPr lang="en-US"/>
               <a:t>Second level</a:t>
             </a:r>
           </a:p>
           <a:p>
             <a:pPr lvl="2"/>
             <a:r>
-              <a:rPr lang="en-US" smtClean="0"/>
+              <a:rPr lang="en-US"/>
               <a:t>Third level</a:t>
             </a:r>
           </a:p>
           <a:p>
             <a:pPr lvl="3"/>
             <a:r>
-              <a:rPr lang="en-US" smtClean="0"/>
+              <a:rPr lang="en-US"/>
               <a:t>Fourth level</a:t>
             </a:r>
           </a:p>
           <a:p>
             <a:pPr lvl="4"/>
             <a:r>
-              <a:rPr lang="en-US" smtClean="0"/>
+              <a:rPr lang="en-US"/>
               <a:t>Fifth level</a:t>
             </a:r>
-            <a:endParaRPr lang="en-US"/>
           </a:p>
         </p:txBody>
       </p:sp>
@@ -2183,38 +2206,37 @@
           <a:p>
             <a:pPr lvl="0"/>
             <a:r>
-              <a:rPr lang="en-US" smtClean="0"/>
+              <a:rPr lang="en-US"/>
               <a:t>Click to edit Master text styles</a:t>
             </a:r>
           </a:p>
           <a:p>
             <a:pPr lvl="1"/>
             <a:r>
-              <a:rPr lang="en-US" smtClean="0"/>
+              <a:rPr lang="en-US"/>
               <a:t>Second level</a:t>
             </a:r>
           </a:p>
           <a:p>
             <a:pPr lvl="2"/>
             <a:r>
-              <a:rPr lang="en-US" smtClean="0"/>
+              <a:rPr lang="en-US"/>
               <a:t>Third level</a:t>
             </a:r>
           </a:p>
           <a:p>
             <a:pPr lvl="3"/>
             <a:r>
-              <a:rPr lang="en-US" smtClean="0"/>
+              <a:rPr lang="en-US"/>
               <a:t>Fourth level</a:t>
             </a:r>
           </a:p>
           <a:p>
             <a:pPr lvl="4"/>
             <a:r>
-              <a:rPr lang="en-US" smtClean="0"/>
+              <a:rPr lang="en-US"/>
               <a:t>Fifth level</a:t>
             </a:r>
-            <a:endParaRPr lang="en-US"/>
           </a:p>
         </p:txBody>
       </p:sp>
@@ -2235,7 +2257,7 @@
           <a:p>
             <a:fld id="{5BCAD085-E8A6-8845-BD4E-CB4CCA059FC4}" type="datetimeFigureOut">
               <a:rPr lang="en-US" smtClean="0"/>
-              <a:t>1/27/13</a:t>
+              <a:t>5/6/26</a:t>
             </a:fld>
             <a:endParaRPr lang="en-US"/>
           </a:p>
@@ -2333,10 +2355,9 @@
           </a:lstStyle>
           <a:p>
             <a:r>
-              <a:rPr lang="en-US" smtClean="0"/>
+              <a:rPr lang="en-US"/>
               <a:t>Click to edit Master title style</a:t>
             </a:r>
-            <a:endParaRPr lang="en-US"/>
           </a:p>
         </p:txBody>
       </p:sp>
@@ -2399,7 +2420,7 @@
           <a:p>
             <a:pPr lvl="0"/>
             <a:r>
-              <a:rPr lang="en-US" smtClean="0"/>
+              <a:rPr lang="en-US"/>
               <a:t>Click to edit Master text styles</a:t>
             </a:r>
           </a:p>
@@ -2455,38 +2476,37 @@
           <a:p>
             <a:pPr lvl="0"/>
             <a:r>
-              <a:rPr lang="en-US" smtClean="0"/>
+              <a:rPr lang="en-US"/>
               <a:t>Click to edit Master text styles</a:t>
             </a:r>
           </a:p>
           <a:p>
             <a:pPr lvl="1"/>
             <a:r>
-              <a:rPr lang="en-US" smtClean="0"/>
+              <a:rPr lang="en-US"/>
               <a:t>Second level</a:t>
             </a:r>
           </a:p>
           <a:p>
             <a:pPr lvl="2"/>
             <a:r>
-              <a:rPr lang="en-US" smtClean="0"/>
+              <a:rPr lang="en-US"/>
               <a:t>Third level</a:t>
             </a:r>
           </a:p>
           <a:p>
             <a:pPr lvl="3"/>
             <a:r>
-              <a:rPr lang="en-US" smtClean="0"/>
+              <a:rPr lang="en-US"/>
               <a:t>Fourth level</a:t>
             </a:r>
           </a:p>
           <a:p>
             <a:pPr lvl="4"/>
             <a:r>
-              <a:rPr lang="en-US" smtClean="0"/>
+              <a:rPr lang="en-US"/>
               <a:t>Fifth level</a:t>
             </a:r>
-            <a:endParaRPr lang="en-US"/>
           </a:p>
         </p:txBody>
       </p:sp>
@@ -2549,7 +2569,7 @@
           <a:p>
             <a:pPr lvl="0"/>
             <a:r>
-              <a:rPr lang="en-US" smtClean="0"/>
+              <a:rPr lang="en-US"/>
               <a:t>Click to edit Master text styles</a:t>
             </a:r>
           </a:p>
@@ -2605,38 +2625,37 @@
           <a:p>
             <a:pPr lvl="0"/>
             <a:r>
-              <a:rPr lang="en-US" smtClean="0"/>
+              <a:rPr lang="en-US"/>
               <a:t>Click to edit Master text styles</a:t>
             </a:r>
           </a:p>
           <a:p>
             <a:pPr lvl="1"/>
             <a:r>
-              <a:rPr lang="en-US" smtClean="0"/>
+              <a:rPr lang="en-US"/>
               <a:t>Second level</a:t>
             </a:r>
           </a:p>
           <a:p>
             <a:pPr lvl="2"/>
             <a:r>
-              <a:rPr lang="en-US" smtClean="0"/>
+              <a:rPr lang="en-US"/>
               <a:t>Third level</a:t>
             </a:r>
           </a:p>
           <a:p>
             <a:pPr lvl="3"/>
             <a:r>
-              <a:rPr lang="en-US" smtClean="0"/>
+              <a:rPr lang="en-US"/>
               <a:t>Fourth level</a:t>
             </a:r>
           </a:p>
           <a:p>
             <a:pPr lvl="4"/>
             <a:r>
-              <a:rPr lang="en-US" smtClean="0"/>
+              <a:rPr lang="en-US"/>
               <a:t>Fifth level</a:t>
             </a:r>
-            <a:endParaRPr lang="en-US"/>
           </a:p>
         </p:txBody>
       </p:sp>
@@ -2657,7 +2676,7 @@
           <a:p>
             <a:fld id="{5BCAD085-E8A6-8845-BD4E-CB4CCA059FC4}" type="datetimeFigureOut">
               <a:rPr lang="en-US" smtClean="0"/>
-              <a:t>1/27/13</a:t>
+              <a:t>5/6/26</a:t>
             </a:fld>
             <a:endParaRPr lang="en-US"/>
           </a:p>
@@ -2751,10 +2770,9 @@
           <a:lstStyle/>
           <a:p>
             <a:r>
-              <a:rPr lang="en-US" smtClean="0"/>
+              <a:rPr lang="en-US"/>
               <a:t>Click to edit Master title style</a:t>
             </a:r>
-            <a:endParaRPr lang="en-US"/>
           </a:p>
         </p:txBody>
       </p:sp>
@@ -2775,7 +2793,7 @@
           <a:p>
             <a:fld id="{5BCAD085-E8A6-8845-BD4E-CB4CCA059FC4}" type="datetimeFigureOut">
               <a:rPr lang="en-US" smtClean="0"/>
-              <a:t>1/27/13</a:t>
+              <a:t>5/6/26</a:t>
             </a:fld>
             <a:endParaRPr lang="en-US"/>
           </a:p>
@@ -2870,7 +2888,7 @@
           <a:p>
             <a:fld id="{5BCAD085-E8A6-8845-BD4E-CB4CCA059FC4}" type="datetimeFigureOut">
               <a:rPr lang="en-US" smtClean="0"/>
-              <a:t>1/27/13</a:t>
+              <a:t>5/6/26</a:t>
             </a:fld>
             <a:endParaRPr lang="en-US"/>
           </a:p>
@@ -2973,10 +2991,9 @@
           </a:lstStyle>
           <a:p>
             <a:r>
-              <a:rPr lang="en-US" smtClean="0"/>
+              <a:rPr lang="en-US"/>
               <a:t>Click to edit Master title style</a:t>
             </a:r>
-            <a:endParaRPr lang="en-US"/>
           </a:p>
         </p:txBody>
       </p:sp>
@@ -3030,38 +3047,37 @@
           <a:p>
             <a:pPr lvl="0"/>
             <a:r>
-              <a:rPr lang="en-US" smtClean="0"/>
+              <a:rPr lang="en-US"/>
               <a:t>Click to edit Master text styles</a:t>
             </a:r>
           </a:p>
           <a:p>
             <a:pPr lvl="1"/>
             <a:r>
-              <a:rPr lang="en-US" smtClean="0"/>
+              <a:rPr lang="en-US"/>
               <a:t>Second level</a:t>
             </a:r>
           </a:p>
           <a:p>
             <a:pPr lvl="2"/>
             <a:r>
-              <a:rPr lang="en-US" smtClean="0"/>
+              <a:rPr lang="en-US"/>
               <a:t>Third level</a:t>
             </a:r>
           </a:p>
           <a:p>
             <a:pPr lvl="3"/>
             <a:r>
-              <a:rPr lang="en-US" smtClean="0"/>
+              <a:rPr lang="en-US"/>
               <a:t>Fourth level</a:t>
             </a:r>
           </a:p>
           <a:p>
             <a:pPr lvl="4"/>
             <a:r>
-              <a:rPr lang="en-US" smtClean="0"/>
+              <a:rPr lang="en-US"/>
               <a:t>Fifth level</a:t>
             </a:r>
-            <a:endParaRPr lang="en-US"/>
           </a:p>
         </p:txBody>
       </p:sp>
@@ -3124,7 +3140,7 @@
           <a:p>
             <a:pPr lvl="0"/>
             <a:r>
-              <a:rPr lang="en-US" smtClean="0"/>
+              <a:rPr lang="en-US"/>
               <a:t>Click to edit Master text styles</a:t>
             </a:r>
           </a:p>
@@ -3147,7 +3163,7 @@
           <a:p>
             <a:fld id="{5BCAD085-E8A6-8845-BD4E-CB4CCA059FC4}" type="datetimeFigureOut">
               <a:rPr lang="en-US" smtClean="0"/>
-              <a:t>1/27/13</a:t>
+              <a:t>5/6/26</a:t>
             </a:fld>
             <a:endParaRPr lang="en-US"/>
           </a:p>
@@ -3250,10 +3266,9 @@
           </a:lstStyle>
           <a:p>
             <a:r>
-              <a:rPr lang="en-US" smtClean="0"/>
+              <a:rPr lang="en-US"/>
               <a:t>Click to edit Master title style</a:t>
             </a:r>
-            <a:endParaRPr lang="en-US"/>
           </a:p>
         </p:txBody>
       </p:sp>
@@ -3377,7 +3392,7 @@
           <a:p>
             <a:pPr lvl="0"/>
             <a:r>
-              <a:rPr lang="en-US" smtClean="0"/>
+              <a:rPr lang="en-US"/>
               <a:t>Click to edit Master text styles</a:t>
             </a:r>
           </a:p>
@@ -3400,7 +3415,7 @@
           <a:p>
             <a:fld id="{5BCAD085-E8A6-8845-BD4E-CB4CCA059FC4}" type="datetimeFigureOut">
               <a:rPr lang="en-US" smtClean="0"/>
-              <a:t>1/27/13</a:t>
+              <a:t>5/6/26</a:t>
             </a:fld>
             <a:endParaRPr lang="en-US"/>
           </a:p>
@@ -3509,10 +3524,9 @@
           <a:lstStyle/>
           <a:p>
             <a:r>
-              <a:rPr lang="en-US" smtClean="0"/>
+              <a:rPr lang="en-US"/>
               <a:t>Click to edit Master title style</a:t>
             </a:r>
-            <a:endParaRPr lang="en-US"/>
           </a:p>
         </p:txBody>
       </p:sp>
@@ -3543,38 +3557,37 @@
           <a:p>
             <a:pPr lvl="0"/>
             <a:r>
-              <a:rPr lang="en-US" smtClean="0"/>
+              <a:rPr lang="en-US"/>
               <a:t>Click to edit Master text styles</a:t>
             </a:r>
           </a:p>
           <a:p>
             <a:pPr lvl="1"/>
             <a:r>
-              <a:rPr lang="en-US" smtClean="0"/>
+              <a:rPr lang="en-US"/>
               <a:t>Second level</a:t>
             </a:r>
           </a:p>
           <a:p>
             <a:pPr lvl="2"/>
             <a:r>
-              <a:rPr lang="en-US" smtClean="0"/>
+              <a:rPr lang="en-US"/>
               <a:t>Third level</a:t>
             </a:r>
           </a:p>
           <a:p>
             <a:pPr lvl="3"/>
             <a:r>
-              <a:rPr lang="en-US" smtClean="0"/>
+              <a:rPr lang="en-US"/>
               <a:t>Fourth level</a:t>
             </a:r>
           </a:p>
           <a:p>
             <a:pPr lvl="4"/>
             <a:r>
-              <a:rPr lang="en-US" smtClean="0"/>
+              <a:rPr lang="en-US"/>
               <a:t>Fifth level</a:t>
             </a:r>
-            <a:endParaRPr lang="en-US"/>
           </a:p>
         </p:txBody>
       </p:sp>
@@ -3613,7 +3626,7 @@
           <a:p>
             <a:fld id="{5BCAD085-E8A6-8845-BD4E-CB4CCA059FC4}" type="datetimeFigureOut">
               <a:rPr lang="en-US" smtClean="0"/>
-              <a:t>1/27/13</a:t>
+              <a:t>5/6/26</a:t>
             </a:fld>
             <a:endParaRPr lang="en-US"/>
           </a:p>
@@ -3972,7 +3985,7 @@
 </file>
 
 <file path=ppt/slides/slide1.xml><?xml version="1.0" encoding="utf-8"?>
-<p:sld xmlns:a="http://schemas.openxmlformats.org/drawingml/2006/main" xmlns:p="http://schemas.openxmlformats.org/presentationml/2006/main" xmlns:r="http://schemas.openxmlformats.org/officeDocument/2006/relationships">
+<p:sld xmlns:a="http://schemas.openxmlformats.org/drawingml/2006/main" xmlns:r="http://schemas.openxmlformats.org/officeDocument/2006/relationships" xmlns:p="http://schemas.openxmlformats.org/presentationml/2006/main">
   <p:cSld>
     <p:spTree>
       <p:nvGrpSpPr>
@@ -3980,7 +3993,14 @@
         <p:cNvGrpSpPr/>
         <p:nvPr/>
       </p:nvGrpSpPr>
-      <p:grpSpPr/>
+      <p:grpSpPr>
+        <a:xfrm>
+          <a:off x="0" y="0"/>
+          <a:ext cx="0" cy="0"/>
+          <a:chOff x="0" y="0"/>
+          <a:chExt cx="0" cy="0"/>
+        </a:xfrm>
+      </p:grpSpPr>
       <p:sp>
         <p:nvSpPr>
           <p:cNvPr id="2" name="Rectangle 1"/>
@@ -4021,6 +4041,7 @@
           <a:lstStyle/>
           <a:p>
             <a:pPr algn="ctr"/>
+            <a:endParaRPr/>
           </a:p>
         </p:txBody>
       </p:sp>
@@ -4064,6 +4085,7 @@
           <a:lstStyle/>
           <a:p>
             <a:pPr algn="ctr"/>
+            <a:endParaRPr/>
           </a:p>
         </p:txBody>
       </p:sp>
@@ -4107,6 +4129,7 @@
           <a:lstStyle/>
           <a:p>
             <a:pPr algn="ctr"/>
+            <a:endParaRPr/>
           </a:p>
         </p:txBody>
       </p:sp>
@@ -4134,7 +4157,7 @@
           <a:p>
             <a:pPr algn="l"/>
             <a:r>
-              <a:rPr b="1" i="0" sz="900">
+              <a:rPr sz="900" b="1" i="0">
                 <a:solidFill>
                   <a:srgbClr val="CADCFC"/>
                 </a:solidFill>
@@ -4168,7 +4191,7 @@
           <a:p>
             <a:pPr algn="l"/>
             <a:r>
-              <a:rPr b="1" i="0" sz="4400">
+              <a:rPr sz="4400" b="1" i="0">
                 <a:solidFill>
                   <a:srgbClr val="FFFFFF"/>
                 </a:solidFill>
@@ -4203,7 +4226,7 @@
           <a:p>
             <a:pPr algn="l"/>
             <a:r>
-              <a:rPr b="0" i="0" sz="1600">
+              <a:rPr sz="1600" b="0" i="0">
                 <a:solidFill>
                   <a:srgbClr val="CADCFC"/>
                 </a:solidFill>
@@ -4253,6 +4276,7 @@
           <a:lstStyle/>
           <a:p>
             <a:pPr algn="ctr"/>
+            <a:endParaRPr/>
           </a:p>
         </p:txBody>
       </p:sp>
@@ -4280,7 +4304,7 @@
           <a:p>
             <a:pPr algn="l"/>
             <a:r>
-              <a:rPr b="1" i="0" sz="1500">
+              <a:rPr sz="1500" b="1" i="0">
                 <a:solidFill>
                   <a:srgbClr val="FFFFFF"/>
                 </a:solidFill>
@@ -4314,7 +4338,7 @@
           <a:p>
             <a:pPr algn="l"/>
             <a:r>
-              <a:rPr b="0" i="0" sz="1200">
+              <a:rPr sz="1200" b="0" i="0">
                 <a:solidFill>
                   <a:srgbClr val="6B7AB8"/>
                 </a:solidFill>
@@ -4348,12 +4372,12 @@
           <a:p>
             <a:pPr algn="r"/>
             <a:r>
-              <a:rPr b="0" i="0" sz="900">
+              <a:rPr sz="900" b="0" i="0">
                 <a:solidFill>
                   <a:srgbClr val="6B7AB8"/>
                 </a:solidFill>
               </a:rPr>
-              <a:t>1 / 11</a:t>
+              <a:t>1 / 12</a:t>
             </a:r>
           </a:p>
         </p:txBody>
@@ -4367,7 +4391,7 @@
 </file>
 
 <file path=ppt/slides/slide10.xml><?xml version="1.0" encoding="utf-8"?>
-<p:sld xmlns:a="http://schemas.openxmlformats.org/drawingml/2006/main" xmlns:p="http://schemas.openxmlformats.org/presentationml/2006/main" xmlns:r="http://schemas.openxmlformats.org/officeDocument/2006/relationships">
+<p:sld xmlns:a="http://schemas.openxmlformats.org/drawingml/2006/main" xmlns:r="http://schemas.openxmlformats.org/officeDocument/2006/relationships" xmlns:p="http://schemas.openxmlformats.org/presentationml/2006/main">
   <p:cSld>
     <p:spTree>
       <p:nvGrpSpPr>
@@ -4375,7 +4399,14 @@
         <p:cNvGrpSpPr/>
         <p:nvPr/>
       </p:nvGrpSpPr>
-      <p:grpSpPr/>
+      <p:grpSpPr>
+        <a:xfrm>
+          <a:off x="0" y="0"/>
+          <a:ext cx="0" cy="0"/>
+          <a:chOff x="0" y="0"/>
+          <a:chExt cx="0" cy="0"/>
+        </a:xfrm>
+      </p:grpSpPr>
       <p:sp>
         <p:nvSpPr>
           <p:cNvPr id="2" name="Rectangle 1"/>
@@ -4416,6 +4447,7 @@
           <a:lstStyle/>
           <a:p>
             <a:pPr algn="ctr"/>
+            <a:endParaRPr/>
           </a:p>
         </p:txBody>
       </p:sp>
@@ -4459,6 +4491,7 @@
           <a:lstStyle/>
           <a:p>
             <a:pPr algn="ctr"/>
+            <a:endParaRPr/>
           </a:p>
         </p:txBody>
       </p:sp>
@@ -4502,6 +4535,7 @@
           <a:lstStyle/>
           <a:p>
             <a:pPr algn="ctr"/>
+            <a:endParaRPr/>
           </a:p>
         </p:txBody>
       </p:sp>
@@ -4529,12 +4563,12 @@
           <a:p>
             <a:pPr algn="l"/>
             <a:r>
-              <a:rPr b="1" i="0" sz="900">
+              <a:rPr sz="900" b="1" i="0">
                 <a:solidFill>
                   <a:srgbClr val="1E2761"/>
                 </a:solidFill>
               </a:rPr>
-              <a:t>08  ·  LIMITATIONS, CONCLUSIONS &amp; FUTURE WORK</a:t>
+              <a:t>09  ·  LIMITATIONS, CONCLUSIONS &amp; FUTURE WORK</a:t>
             </a:r>
           </a:p>
         </p:txBody>
@@ -4563,7 +4597,7 @@
           <a:p>
             <a:pPr algn="l"/>
             <a:r>
-              <a:rPr b="1" i="0" sz="2800">
+              <a:rPr sz="2800" b="1" i="0">
                 <a:solidFill>
                   <a:srgbClr val="1E2761"/>
                 </a:solidFill>
@@ -4613,6 +4647,7 @@
           <a:lstStyle/>
           <a:p>
             <a:pPr algn="ctr"/>
+            <a:endParaRPr/>
           </a:p>
         </p:txBody>
       </p:sp>
@@ -4656,6 +4691,7 @@
           <a:lstStyle/>
           <a:p>
             <a:pPr algn="ctr"/>
+            <a:endParaRPr/>
           </a:p>
         </p:txBody>
       </p:sp>
@@ -4683,7 +4719,7 @@
           <a:p>
             <a:pPr algn="l"/>
             <a:r>
-              <a:rPr b="1" i="0" sz="1200">
+              <a:rPr sz="1200" b="1" i="0">
                 <a:solidFill>
                   <a:srgbClr val="FFFFFF"/>
                 </a:solidFill>
@@ -4733,6 +4769,7 @@
           <a:lstStyle/>
           <a:p>
             <a:pPr algn="ctr"/>
+            <a:endParaRPr/>
           </a:p>
         </p:txBody>
       </p:sp>
@@ -4760,7 +4797,7 @@
           <a:p>
             <a:pPr algn="l"/>
             <a:r>
-              <a:rPr b="1" i="0" sz="1200">
+              <a:rPr sz="1200" b="1" i="0">
                 <a:solidFill>
                   <a:srgbClr val="FFFFFF"/>
                 </a:solidFill>
@@ -4810,6 +4847,7 @@
           <a:lstStyle/>
           <a:p>
             <a:pPr algn="ctr"/>
+            <a:endParaRPr/>
           </a:p>
         </p:txBody>
       </p:sp>
@@ -4837,7 +4875,7 @@
           <a:p>
             <a:pPr algn="l"/>
             <a:r>
-              <a:rPr b="1" i="0" sz="1200">
+              <a:rPr sz="1200" b="1" i="0">
                 <a:solidFill>
                   <a:srgbClr val="FFFFFF"/>
                 </a:solidFill>
@@ -4871,7 +4909,7 @@
           <a:p>
             <a:pPr algn="l"/>
             <a:r>
-              <a:rPr b="0" i="0" sz="1000">
+              <a:rPr sz="1000" b="0" i="0">
                 <a:solidFill>
                   <a:srgbClr val="FFFFFF"/>
                 </a:solidFill>
@@ -4906,7 +4944,7 @@
           <a:p>
             <a:pPr algn="l"/>
             <a:r>
-              <a:rPr b="0" i="0" sz="1000">
+              <a:rPr sz="1000" b="0" i="0">
                 <a:solidFill>
                   <a:srgbClr val="FFFFFF"/>
                 </a:solidFill>
@@ -4941,7 +4979,7 @@
           <a:p>
             <a:pPr algn="l"/>
             <a:r>
-              <a:rPr b="0" i="0" sz="1000">
+              <a:rPr sz="1000" b="0" i="0">
                 <a:solidFill>
                   <a:srgbClr val="FFFFFF"/>
                 </a:solidFill>
@@ -4976,7 +5014,7 @@
           <a:p>
             <a:pPr algn="l"/>
             <a:r>
-              <a:rPr b="0" i="0" sz="1000">
+              <a:rPr sz="1000" b="0" i="0">
                 <a:solidFill>
                   <a:srgbClr val="FFFFFF"/>
                 </a:solidFill>
@@ -5011,7 +5049,7 @@
           <a:p>
             <a:pPr algn="l"/>
             <a:r>
-              <a:rPr b="0" i="0" sz="1000">
+              <a:rPr sz="1000" b="0" i="0">
                 <a:solidFill>
                   <a:srgbClr val="FFFFFF"/>
                 </a:solidFill>
@@ -5046,7 +5084,7 @@
           <a:p>
             <a:pPr algn="l"/>
             <a:r>
-              <a:rPr b="0" i="0" sz="1000">
+              <a:rPr sz="1000" b="0" i="0">
                 <a:solidFill>
                   <a:srgbClr val="FFFFFF"/>
                 </a:solidFill>
@@ -5081,7 +5119,7 @@
           <a:p>
             <a:pPr algn="l"/>
             <a:r>
-              <a:rPr b="0" i="0" sz="1000">
+              <a:rPr sz="1000" b="0" i="0">
                 <a:solidFill>
                   <a:srgbClr val="FFFFFF"/>
                 </a:solidFill>
@@ -5116,7 +5154,7 @@
           <a:p>
             <a:pPr algn="l"/>
             <a:r>
-              <a:rPr b="0" i="0" sz="1000">
+              <a:rPr sz="1000" b="0" i="0">
                 <a:solidFill>
                   <a:srgbClr val="FFFFFF"/>
                 </a:solidFill>
@@ -5151,7 +5189,7 @@
           <a:p>
             <a:pPr algn="l"/>
             <a:r>
-              <a:rPr b="0" i="0" sz="1000">
+              <a:rPr sz="1000" b="0" i="0">
                 <a:solidFill>
                   <a:srgbClr val="FFFFFF"/>
                 </a:solidFill>
@@ -5186,7 +5224,7 @@
           <a:p>
             <a:pPr algn="l"/>
             <a:r>
-              <a:rPr b="0" i="0" sz="1000">
+              <a:rPr sz="1000" b="0" i="0">
                 <a:solidFill>
                   <a:srgbClr val="FFFFFF"/>
                 </a:solidFill>
@@ -5221,7 +5259,7 @@
           <a:p>
             <a:pPr algn="l"/>
             <a:r>
-              <a:rPr b="0" i="0" sz="1000">
+              <a:rPr sz="1000" b="0" i="0">
                 <a:solidFill>
                   <a:srgbClr val="FFFFFF"/>
                 </a:solidFill>
@@ -5256,7 +5294,7 @@
           <a:p>
             <a:pPr algn="l"/>
             <a:r>
-              <a:rPr b="0" i="0" sz="1000">
+              <a:rPr sz="1000" b="0" i="0">
                 <a:solidFill>
                   <a:srgbClr val="FFFFFF"/>
                 </a:solidFill>
@@ -5291,7 +5329,7 @@
           <a:p>
             <a:pPr algn="l"/>
             <a:r>
-              <a:rPr b="0" i="0" sz="1000">
+              <a:rPr sz="1000" b="0" i="0">
                 <a:solidFill>
                   <a:srgbClr val="FFFFFF"/>
                 </a:solidFill>
@@ -5326,7 +5364,7 @@
           <a:p>
             <a:pPr algn="l"/>
             <a:r>
-              <a:rPr b="0" i="0" sz="1000">
+              <a:rPr sz="1000" b="0" i="0">
                 <a:solidFill>
                   <a:srgbClr val="FFFFFF"/>
                 </a:solidFill>
@@ -5361,12 +5399,12 @@
           <a:p>
             <a:pPr algn="r"/>
             <a:r>
-              <a:rPr b="0" i="0" sz="900">
+              <a:rPr sz="900" b="0" i="0">
                 <a:solidFill>
                   <a:srgbClr val="9AA8CC"/>
                 </a:solidFill>
               </a:rPr>
-              <a:t>10 / 11</a:t>
+              <a:t>11 / 12</a:t>
             </a:r>
           </a:p>
         </p:txBody>
@@ -5380,7 +5418,7 @@
 </file>
 
 <file path=ppt/slides/slide11.xml><?xml version="1.0" encoding="utf-8"?>
-<p:sld xmlns:a="http://schemas.openxmlformats.org/drawingml/2006/main" xmlns:p="http://schemas.openxmlformats.org/presentationml/2006/main" xmlns:r="http://schemas.openxmlformats.org/officeDocument/2006/relationships">
+<p:sld xmlns:a="http://schemas.openxmlformats.org/drawingml/2006/main" xmlns:r="http://schemas.openxmlformats.org/officeDocument/2006/relationships" xmlns:p="http://schemas.openxmlformats.org/presentationml/2006/main">
   <p:cSld>
     <p:spTree>
       <p:nvGrpSpPr>
@@ -5388,7 +5426,14 @@
         <p:cNvGrpSpPr/>
         <p:nvPr/>
       </p:nvGrpSpPr>
-      <p:grpSpPr/>
+      <p:grpSpPr>
+        <a:xfrm>
+          <a:off x="0" y="0"/>
+          <a:ext cx="0" cy="0"/>
+          <a:chOff x="0" y="0"/>
+          <a:chExt cx="0" cy="0"/>
+        </a:xfrm>
+      </p:grpSpPr>
       <p:sp>
         <p:nvSpPr>
           <p:cNvPr id="2" name="Rectangle 1"/>
@@ -5429,6 +5474,7 @@
           <a:lstStyle/>
           <a:p>
             <a:pPr algn="ctr"/>
+            <a:endParaRPr/>
           </a:p>
         </p:txBody>
       </p:sp>
@@ -5472,6 +5518,7 @@
           <a:lstStyle/>
           <a:p>
             <a:pPr algn="ctr"/>
+            <a:endParaRPr/>
           </a:p>
         </p:txBody>
       </p:sp>
@@ -5515,6 +5562,7 @@
           <a:lstStyle/>
           <a:p>
             <a:pPr algn="ctr"/>
+            <a:endParaRPr/>
           </a:p>
         </p:txBody>
       </p:sp>
@@ -5542,7 +5590,7 @@
           <a:p>
             <a:pPr algn="ctr"/>
             <a:r>
-              <a:rPr b="1" i="0" sz="6000">
+              <a:rPr sz="6000" b="1" i="0">
                 <a:solidFill>
                   <a:srgbClr val="FFFFFF"/>
                 </a:solidFill>
@@ -5576,7 +5624,7 @@
           <a:p>
             <a:pPr algn="ctr"/>
             <a:r>
-              <a:rPr b="0" i="0" sz="2200">
+              <a:rPr sz="2200" b="0" i="0">
                 <a:solidFill>
                   <a:srgbClr val="CADCFC"/>
                 </a:solidFill>
@@ -5626,6 +5674,7 @@
           <a:lstStyle/>
           <a:p>
             <a:pPr algn="ctr"/>
+            <a:endParaRPr/>
           </a:p>
         </p:txBody>
       </p:sp>
@@ -5653,7 +5702,7 @@
           <a:p>
             <a:pPr algn="l"/>
             <a:r>
-              <a:rPr b="1" i="0" sz="1300">
+              <a:rPr sz="1300" b="1" i="0">
                 <a:solidFill>
                   <a:srgbClr val="CADCFC"/>
                 </a:solidFill>
@@ -5687,7 +5736,7 @@
           <a:p>
             <a:pPr algn="l"/>
             <a:r>
-              <a:rPr b="0" i="0" sz="1300">
+              <a:rPr sz="1300" b="0" i="0">
                 <a:solidFill>
                   <a:srgbClr val="FFFFFF"/>
                 </a:solidFill>
@@ -5721,7 +5770,7 @@
           <a:p>
             <a:pPr algn="l"/>
             <a:r>
-              <a:rPr b="1" i="0" sz="1300">
+              <a:rPr sz="1300" b="1" i="0">
                 <a:solidFill>
                   <a:srgbClr val="CADCFC"/>
                 </a:solidFill>
@@ -5755,7 +5804,7 @@
           <a:p>
             <a:pPr algn="l"/>
             <a:r>
-              <a:rPr b="0" i="0" sz="1300">
+              <a:rPr sz="1300" b="0" i="0">
                 <a:solidFill>
                   <a:srgbClr val="FFFFFF"/>
                 </a:solidFill>
@@ -5789,7 +5838,7 @@
           <a:p>
             <a:pPr algn="l"/>
             <a:r>
-              <a:rPr b="1" i="0" sz="1300">
+              <a:rPr sz="1300" b="1" i="0">
                 <a:solidFill>
                   <a:srgbClr val="CADCFC"/>
                 </a:solidFill>
@@ -5823,7 +5872,7 @@
           <a:p>
             <a:pPr algn="l"/>
             <a:r>
-              <a:rPr b="0" i="0" sz="1300">
+              <a:rPr sz="1300" b="0" i="0">
                 <a:solidFill>
                   <a:srgbClr val="FFFFFF"/>
                 </a:solidFill>
@@ -5857,7 +5906,7 @@
           <a:p>
             <a:pPr algn="l"/>
             <a:r>
-              <a:rPr b="1" i="0" sz="1300">
+              <a:rPr sz="1300" b="1" i="0">
                 <a:solidFill>
                   <a:srgbClr val="CADCFC"/>
                 </a:solidFill>
@@ -5891,7 +5940,7 @@
           <a:p>
             <a:pPr algn="l"/>
             <a:r>
-              <a:rPr b="0" i="0" sz="1300">
+              <a:rPr sz="1300" b="0" i="0">
                 <a:solidFill>
                   <a:srgbClr val="FFFFFF"/>
                 </a:solidFill>
@@ -5925,7 +5974,7 @@
           <a:p>
             <a:pPr algn="l"/>
             <a:r>
-              <a:rPr b="1" i="0" sz="1300">
+              <a:rPr sz="1300" b="1" i="0">
                 <a:solidFill>
                   <a:srgbClr val="CADCFC"/>
                 </a:solidFill>
@@ -5959,7 +6008,7 @@
           <a:p>
             <a:pPr algn="l"/>
             <a:r>
-              <a:rPr b="0" i="0" sz="1300">
+              <a:rPr sz="1300" b="0" i="0">
                 <a:solidFill>
                   <a:srgbClr val="FFFFFF"/>
                 </a:solidFill>
@@ -5993,12 +6042,12 @@
           <a:p>
             <a:pPr algn="r"/>
             <a:r>
-              <a:rPr b="0" i="0" sz="900">
+              <a:rPr sz="900" b="0" i="0">
                 <a:solidFill>
                   <a:srgbClr val="6B7AB8"/>
                 </a:solidFill>
               </a:rPr>
-              <a:t>11 / 11</a:t>
+              <a:t>12 / 12</a:t>
             </a:r>
           </a:p>
         </p:txBody>
@@ -6012,7 +6061,7 @@
 </file>
 
 <file path=ppt/slides/slide2.xml><?xml version="1.0" encoding="utf-8"?>
-<p:sld xmlns:a="http://schemas.openxmlformats.org/drawingml/2006/main" xmlns:p="http://schemas.openxmlformats.org/presentationml/2006/main" xmlns:r="http://schemas.openxmlformats.org/officeDocument/2006/relationships">
+<p:sld xmlns:a="http://schemas.openxmlformats.org/drawingml/2006/main" xmlns:r="http://schemas.openxmlformats.org/officeDocument/2006/relationships" xmlns:p="http://schemas.openxmlformats.org/presentationml/2006/main">
   <p:cSld>
     <p:spTree>
       <p:nvGrpSpPr>
@@ -6020,7 +6069,14 @@
         <p:cNvGrpSpPr/>
         <p:nvPr/>
       </p:nvGrpSpPr>
-      <p:grpSpPr/>
+      <p:grpSpPr>
+        <a:xfrm>
+          <a:off x="0" y="0"/>
+          <a:ext cx="0" cy="0"/>
+          <a:chOff x="0" y="0"/>
+          <a:chExt cx="0" cy="0"/>
+        </a:xfrm>
+      </p:grpSpPr>
       <p:sp>
         <p:nvSpPr>
           <p:cNvPr id="2" name="Rectangle 1"/>
@@ -6061,6 +6117,7 @@
           <a:lstStyle/>
           <a:p>
             <a:pPr algn="ctr"/>
+            <a:endParaRPr/>
           </a:p>
         </p:txBody>
       </p:sp>
@@ -6104,6 +6161,7 @@
           <a:lstStyle/>
           <a:p>
             <a:pPr algn="ctr"/>
+            <a:endParaRPr/>
           </a:p>
         </p:txBody>
       </p:sp>
@@ -6147,6 +6205,7 @@
           <a:lstStyle/>
           <a:p>
             <a:pPr algn="ctr"/>
+            <a:endParaRPr/>
           </a:p>
         </p:txBody>
       </p:sp>
@@ -6174,7 +6233,7 @@
           <a:p>
             <a:pPr algn="l"/>
             <a:r>
-              <a:rPr b="1" i="0" sz="900">
+              <a:rPr sz="900" b="1" i="0">
                 <a:solidFill>
                   <a:srgbClr val="1E2761"/>
                 </a:solidFill>
@@ -6208,7 +6267,7 @@
           <a:p>
             <a:pPr algn="l"/>
             <a:r>
-              <a:rPr b="1" i="0" sz="3200">
+              <a:rPr sz="3200" b="1" i="0">
                 <a:solidFill>
                   <a:srgbClr val="1E2761"/>
                 </a:solidFill>
@@ -6258,6 +6317,7 @@
           <a:lstStyle/>
           <a:p>
             <a:pPr algn="ctr"/>
+            <a:endParaRPr/>
           </a:p>
         </p:txBody>
       </p:sp>
@@ -6301,6 +6361,7 @@
           <a:lstStyle/>
           <a:p>
             <a:pPr algn="ctr"/>
+            <a:endParaRPr/>
           </a:p>
         </p:txBody>
       </p:sp>
@@ -6328,7 +6389,7 @@
           <a:p>
             <a:pPr algn="l"/>
             <a:r>
-              <a:rPr b="0" i="0" sz="2000">
+              <a:rPr sz="2000" b="0" i="0">
                 <a:solidFill>
                   <a:srgbClr val="FFFFFF"/>
                 </a:solidFill>
@@ -6362,7 +6423,7 @@
           <a:p>
             <a:pPr algn="l"/>
             <a:r>
-              <a:rPr b="1" i="0" sz="1300">
+              <a:rPr sz="1300" b="1" i="0">
                 <a:solidFill>
                   <a:srgbClr val="CADCFC"/>
                 </a:solidFill>
@@ -6396,7 +6457,7 @@
           <a:p>
             <a:pPr algn="l"/>
             <a:r>
-              <a:rPr b="0" i="0" sz="1100">
+              <a:rPr sz="1100" b="0" i="0">
                 <a:solidFill>
                   <a:srgbClr val="FFFFFF"/>
                 </a:solidFill>
@@ -6446,6 +6507,7 @@
           <a:lstStyle/>
           <a:p>
             <a:pPr algn="ctr"/>
+            <a:endParaRPr/>
           </a:p>
         </p:txBody>
       </p:sp>
@@ -6473,7 +6535,7 @@
           <a:p>
             <a:pPr algn="l"/>
             <a:r>
-              <a:rPr b="0" i="0" sz="2000">
+              <a:rPr sz="2000" b="0" i="0">
                 <a:solidFill>
                   <a:srgbClr val="FFFFFF"/>
                 </a:solidFill>
@@ -6507,7 +6569,7 @@
           <a:p>
             <a:pPr algn="l"/>
             <a:r>
-              <a:rPr b="1" i="0" sz="1300">
+              <a:rPr sz="1300" b="1" i="0">
                 <a:solidFill>
                   <a:srgbClr val="CADCFC"/>
                 </a:solidFill>
@@ -6541,7 +6603,7 @@
           <a:p>
             <a:pPr algn="l"/>
             <a:r>
-              <a:rPr b="0" i="0" sz="1100">
+              <a:rPr sz="1100" b="0" i="0">
                 <a:solidFill>
                   <a:srgbClr val="FFFFFF"/>
                 </a:solidFill>
@@ -6591,6 +6653,7 @@
           <a:lstStyle/>
           <a:p>
             <a:pPr algn="ctr"/>
+            <a:endParaRPr/>
           </a:p>
         </p:txBody>
       </p:sp>
@@ -6618,7 +6681,7 @@
           <a:p>
             <a:pPr algn="l"/>
             <a:r>
-              <a:rPr b="0" i="0" sz="2000">
+              <a:rPr sz="2000" b="0" i="0">
                 <a:solidFill>
                   <a:srgbClr val="FFFFFF"/>
                 </a:solidFill>
@@ -6652,7 +6715,7 @@
           <a:p>
             <a:pPr algn="l"/>
             <a:r>
-              <a:rPr b="1" i="0" sz="1300">
+              <a:rPr sz="1300" b="1" i="0">
                 <a:solidFill>
                   <a:srgbClr val="CADCFC"/>
                 </a:solidFill>
@@ -6686,7 +6749,7 @@
           <a:p>
             <a:pPr algn="l"/>
             <a:r>
-              <a:rPr b="0" i="0" sz="1100">
+              <a:rPr sz="1100" b="0" i="0">
                 <a:solidFill>
                   <a:srgbClr val="FFFFFF"/>
                 </a:solidFill>
@@ -6736,6 +6799,7 @@
           <a:lstStyle/>
           <a:p>
             <a:pPr algn="ctr"/>
+            <a:endParaRPr/>
           </a:p>
         </p:txBody>
       </p:sp>
@@ -6763,7 +6827,7 @@
           <a:p>
             <a:pPr algn="l"/>
             <a:r>
-              <a:rPr b="0" i="0" sz="2000">
+              <a:rPr sz="2000" b="0" i="0">
                 <a:solidFill>
                   <a:srgbClr val="FFFFFF"/>
                 </a:solidFill>
@@ -6797,7 +6861,7 @@
           <a:p>
             <a:pPr algn="l"/>
             <a:r>
-              <a:rPr b="1" i="0" sz="1300">
+              <a:rPr sz="1300" b="1" i="0">
                 <a:solidFill>
                   <a:srgbClr val="CADCFC"/>
                 </a:solidFill>
@@ -6831,7 +6895,7 @@
           <a:p>
             <a:pPr algn="l"/>
             <a:r>
-              <a:rPr b="0" i="0" sz="1100">
+              <a:rPr sz="1100" b="0" i="0">
                 <a:solidFill>
                   <a:srgbClr val="FFFFFF"/>
                 </a:solidFill>
@@ -6881,6 +6945,7 @@
           <a:lstStyle/>
           <a:p>
             <a:pPr algn="ctr"/>
+            <a:endParaRPr/>
           </a:p>
         </p:txBody>
       </p:sp>
@@ -6908,7 +6973,7 @@
           <a:p>
             <a:pPr algn="l"/>
             <a:r>
-              <a:rPr b="1" i="0" sz="1400">
+              <a:rPr sz="1400" b="1" i="0">
                 <a:solidFill>
                   <a:srgbClr val="CADCFC"/>
                 </a:solidFill>
@@ -6942,7 +7007,7 @@
           <a:p>
             <a:pPr algn="l"/>
             <a:r>
-              <a:rPr b="0" i="1" sz="1200">
+              <a:rPr sz="1200" b="0" i="1">
                 <a:solidFill>
                   <a:srgbClr val="FFFFFF"/>
                 </a:solidFill>
@@ -6994,6 +7059,7 @@
           <a:lstStyle/>
           <a:p>
             <a:pPr algn="ctr"/>
+            <a:endParaRPr/>
           </a:p>
         </p:txBody>
       </p:sp>
@@ -7021,7 +7087,7 @@
           <a:p>
             <a:pPr algn="l"/>
             <a:r>
-              <a:rPr b="0" i="0" sz="1100">
+              <a:rPr sz="1100" b="0" i="0">
                 <a:solidFill>
                   <a:srgbClr val="FFFFFF"/>
                 </a:solidFill>
@@ -7055,7 +7121,7 @@
           <a:p>
             <a:pPr algn="l"/>
             <a:r>
-              <a:rPr b="0" i="0" sz="1100">
+              <a:rPr sz="1100" b="0" i="0">
                 <a:solidFill>
                   <a:srgbClr val="FFFFFF"/>
                 </a:solidFill>
@@ -7089,7 +7155,7 @@
           <a:p>
             <a:pPr algn="l"/>
             <a:r>
-              <a:rPr b="0" i="0" sz="1100">
+              <a:rPr sz="1100" b="0" i="0">
                 <a:solidFill>
                   <a:srgbClr val="FFFFFF"/>
                 </a:solidFill>
@@ -7123,7 +7189,7 @@
           <a:p>
             <a:pPr algn="l"/>
             <a:r>
-              <a:rPr b="0" i="0" sz="1100">
+              <a:rPr sz="1100" b="0" i="0">
                 <a:solidFill>
                   <a:srgbClr val="FFFFFF"/>
                 </a:solidFill>
@@ -7173,6 +7239,7 @@
           <a:lstStyle/>
           <a:p>
             <a:pPr algn="ctr"/>
+            <a:endParaRPr/>
           </a:p>
         </p:txBody>
       </p:sp>
@@ -7200,7 +7267,7 @@
           <a:p>
             <a:pPr algn="l"/>
             <a:r>
-              <a:rPr b="1" i="0" sz="1100">
+              <a:rPr sz="1100" b="1" i="0">
                 <a:solidFill>
                   <a:srgbClr val="CADCFC"/>
                 </a:solidFill>
@@ -7234,12 +7301,12 @@
           <a:p>
             <a:pPr algn="r"/>
             <a:r>
-              <a:rPr b="0" i="0" sz="900">
+              <a:rPr sz="900" b="0" i="0">
                 <a:solidFill>
                   <a:srgbClr val="9AA8CC"/>
                 </a:solidFill>
               </a:rPr>
-              <a:t>2 / 11</a:t>
+              <a:t>2 / 12</a:t>
             </a:r>
           </a:p>
         </p:txBody>
@@ -7253,7 +7320,7 @@
 </file>
 
 <file path=ppt/slides/slide3.xml><?xml version="1.0" encoding="utf-8"?>
-<p:sld xmlns:a="http://schemas.openxmlformats.org/drawingml/2006/main" xmlns:p="http://schemas.openxmlformats.org/presentationml/2006/main" xmlns:r="http://schemas.openxmlformats.org/officeDocument/2006/relationships">
+<p:sld xmlns:a="http://schemas.openxmlformats.org/drawingml/2006/main" xmlns:r="http://schemas.openxmlformats.org/officeDocument/2006/relationships" xmlns:p="http://schemas.openxmlformats.org/presentationml/2006/main">
   <p:cSld>
     <p:spTree>
       <p:nvGrpSpPr>
@@ -7261,7 +7328,14 @@
         <p:cNvGrpSpPr/>
         <p:nvPr/>
       </p:nvGrpSpPr>
-      <p:grpSpPr/>
+      <p:grpSpPr>
+        <a:xfrm>
+          <a:off x="0" y="0"/>
+          <a:ext cx="0" cy="0"/>
+          <a:chOff x="0" y="0"/>
+          <a:chExt cx="0" cy="0"/>
+        </a:xfrm>
+      </p:grpSpPr>
       <p:sp>
         <p:nvSpPr>
           <p:cNvPr id="2" name="Rectangle 1"/>
@@ -7302,6 +7376,7 @@
           <a:lstStyle/>
           <a:p>
             <a:pPr algn="ctr"/>
+            <a:endParaRPr/>
           </a:p>
         </p:txBody>
       </p:sp>
@@ -7345,6 +7420,7 @@
           <a:lstStyle/>
           <a:p>
             <a:pPr algn="ctr"/>
+            <a:endParaRPr/>
           </a:p>
         </p:txBody>
       </p:sp>
@@ -7388,6 +7464,7 @@
           <a:lstStyle/>
           <a:p>
             <a:pPr algn="ctr"/>
+            <a:endParaRPr/>
           </a:p>
         </p:txBody>
       </p:sp>
@@ -7415,7 +7492,7 @@
           <a:p>
             <a:pPr algn="l"/>
             <a:r>
-              <a:rPr b="1" i="0" sz="900">
+              <a:rPr sz="900" b="1" i="0">
                 <a:solidFill>
                   <a:srgbClr val="CADCFC"/>
                 </a:solidFill>
@@ -7449,7 +7526,7 @@
           <a:p>
             <a:pPr algn="l"/>
             <a:r>
-              <a:rPr b="1" i="0" sz="3400">
+              <a:rPr sz="3400" b="1" i="0">
                 <a:solidFill>
                   <a:srgbClr val="FFFFFF"/>
                 </a:solidFill>
@@ -7499,6 +7576,7 @@
           <a:lstStyle/>
           <a:p>
             <a:pPr algn="ctr"/>
+            <a:endParaRPr/>
           </a:p>
         </p:txBody>
       </p:sp>
@@ -7542,6 +7620,7 @@
           <a:lstStyle/>
           <a:p>
             <a:pPr algn="ctr"/>
+            <a:endParaRPr/>
           </a:p>
         </p:txBody>
       </p:sp>
@@ -7569,7 +7648,7 @@
           <a:p>
             <a:pPr algn="ctr"/>
             <a:r>
-              <a:rPr b="1" i="0" sz="1600">
+              <a:rPr sz="1600" b="1" i="0">
                 <a:solidFill>
                   <a:srgbClr val="FFFFFF"/>
                 </a:solidFill>
@@ -7604,7 +7683,7 @@
           <a:p>
             <a:pPr algn="ctr"/>
             <a:r>
-              <a:rPr b="0" i="0" sz="1000">
+              <a:rPr sz="1000" b="0" i="0">
                 <a:solidFill>
                   <a:srgbClr val="CADCFC"/>
                 </a:solidFill>
@@ -7654,6 +7733,7 @@
           <a:lstStyle/>
           <a:p>
             <a:pPr algn="ctr"/>
+            <a:endParaRPr/>
           </a:p>
         </p:txBody>
       </p:sp>
@@ -7681,7 +7761,7 @@
           <a:p>
             <a:pPr algn="ctr"/>
             <a:r>
-              <a:rPr b="1" i="0" sz="1600">
+              <a:rPr sz="1600" b="1" i="0">
                 <a:solidFill>
                   <a:srgbClr val="FFFFFF"/>
                 </a:solidFill>
@@ -7716,7 +7796,7 @@
           <a:p>
             <a:pPr algn="ctr"/>
             <a:r>
-              <a:rPr b="0" i="0" sz="1000">
+              <a:rPr sz="1000" b="0" i="0">
                 <a:solidFill>
                   <a:srgbClr val="CADCFC"/>
                 </a:solidFill>
@@ -7766,6 +7846,7 @@
           <a:lstStyle/>
           <a:p>
             <a:pPr algn="ctr"/>
+            <a:endParaRPr/>
           </a:p>
         </p:txBody>
       </p:sp>
@@ -7793,7 +7874,7 @@
           <a:p>
             <a:pPr algn="ctr"/>
             <a:r>
-              <a:rPr b="1" i="0" sz="1600">
+              <a:rPr sz="1600" b="1" i="0">
                 <a:solidFill>
                   <a:srgbClr val="FFFFFF"/>
                 </a:solidFill>
@@ -7828,7 +7909,7 @@
           <a:p>
             <a:pPr algn="ctr"/>
             <a:r>
-              <a:rPr b="0" i="0" sz="1000">
+              <a:rPr sz="1000" b="0" i="0">
                 <a:solidFill>
                   <a:srgbClr val="CADCFC"/>
                 </a:solidFill>
@@ -7878,6 +7959,7 @@
           <a:lstStyle/>
           <a:p>
             <a:pPr algn="ctr"/>
+            <a:endParaRPr/>
           </a:p>
         </p:txBody>
       </p:sp>
@@ -7905,7 +7987,7 @@
           <a:p>
             <a:pPr algn="ctr"/>
             <a:r>
-              <a:rPr b="1" i="0" sz="1600">
+              <a:rPr sz="1600" b="1" i="0">
                 <a:solidFill>
                   <a:srgbClr val="FFFFFF"/>
                 </a:solidFill>
@@ -7939,7 +8021,7 @@
           <a:p>
             <a:pPr algn="ctr"/>
             <a:r>
-              <a:rPr b="0" i="0" sz="1000">
+              <a:rPr sz="1000" b="0" i="0">
                 <a:solidFill>
                   <a:srgbClr val="CADCFC"/>
                 </a:solidFill>
@@ -7973,7 +8055,7 @@
           <a:p>
             <a:pPr algn="l"/>
             <a:r>
-              <a:rPr b="1" i="0" sz="1000">
+              <a:rPr sz="1000" b="1" i="0">
                 <a:solidFill>
                   <a:srgbClr val="CADCFC"/>
                 </a:solidFill>
@@ -8023,6 +8105,7 @@
           <a:lstStyle/>
           <a:p>
             <a:pPr algn="ctr"/>
+            <a:endParaRPr/>
           </a:p>
         </p:txBody>
       </p:sp>
@@ -8050,7 +8133,7 @@
           <a:p>
             <a:pPr algn="l"/>
             <a:r>
-              <a:rPr b="0" i="0" sz="1100">
+              <a:rPr sz="1100" b="0" i="0">
                 <a:solidFill>
                   <a:srgbClr val="FFFFFF"/>
                 </a:solidFill>
@@ -8100,6 +8183,7 @@
           <a:lstStyle/>
           <a:p>
             <a:pPr algn="ctr"/>
+            <a:endParaRPr/>
           </a:p>
         </p:txBody>
       </p:sp>
@@ -8127,7 +8211,7 @@
           <a:p>
             <a:pPr algn="l"/>
             <a:r>
-              <a:rPr b="0" i="0" sz="1100">
+              <a:rPr sz="1100" b="0" i="0">
                 <a:solidFill>
                   <a:srgbClr val="FFFFFF"/>
                 </a:solidFill>
@@ -8177,6 +8261,7 @@
           <a:lstStyle/>
           <a:p>
             <a:pPr algn="ctr"/>
+            <a:endParaRPr/>
           </a:p>
         </p:txBody>
       </p:sp>
@@ -8204,7 +8289,7 @@
           <a:p>
             <a:pPr algn="l"/>
             <a:r>
-              <a:rPr b="0" i="0" sz="1100">
+              <a:rPr sz="1100" b="0" i="0">
                 <a:solidFill>
                   <a:srgbClr val="FFFFFF"/>
                 </a:solidFill>
@@ -8254,6 +8339,7 @@
           <a:lstStyle/>
           <a:p>
             <a:pPr algn="ctr"/>
+            <a:endParaRPr/>
           </a:p>
         </p:txBody>
       </p:sp>
@@ -8281,7 +8367,7 @@
           <a:p>
             <a:pPr algn="l"/>
             <a:r>
-              <a:rPr b="0" i="0" sz="1100">
+              <a:rPr sz="1100" b="0" i="0">
                 <a:solidFill>
                   <a:srgbClr val="FFFFFF"/>
                 </a:solidFill>
@@ -8331,6 +8417,7 @@
           <a:lstStyle/>
           <a:p>
             <a:pPr algn="ctr"/>
+            <a:endParaRPr/>
           </a:p>
         </p:txBody>
       </p:sp>
@@ -8358,7 +8445,7 @@
           <a:p>
             <a:pPr algn="l"/>
             <a:r>
-              <a:rPr b="0" i="0" sz="1100">
+              <a:rPr sz="1100" b="0" i="0">
                 <a:solidFill>
                   <a:srgbClr val="FFFFFF"/>
                 </a:solidFill>
@@ -8408,6 +8495,7 @@
           <a:lstStyle/>
           <a:p>
             <a:pPr algn="ctr"/>
+            <a:endParaRPr/>
           </a:p>
         </p:txBody>
       </p:sp>
@@ -8435,7 +8523,7 @@
           <a:p>
             <a:pPr algn="l"/>
             <a:r>
-              <a:rPr b="0" i="0" sz="1100">
+              <a:rPr sz="1100" b="0" i="0">
                 <a:solidFill>
                   <a:srgbClr val="FFFFFF"/>
                 </a:solidFill>
@@ -8485,6 +8573,7 @@
           <a:lstStyle/>
           <a:p>
             <a:pPr algn="ctr"/>
+            <a:endParaRPr/>
           </a:p>
         </p:txBody>
       </p:sp>
@@ -8512,7 +8601,7 @@
           <a:p>
             <a:pPr algn="l"/>
             <a:r>
-              <a:rPr b="0" i="0" sz="1100">
+              <a:rPr sz="1100" b="0" i="0">
                 <a:solidFill>
                   <a:srgbClr val="FFFFFF"/>
                 </a:solidFill>
@@ -8562,6 +8651,7 @@
           <a:lstStyle/>
           <a:p>
             <a:pPr algn="ctr"/>
+            <a:endParaRPr/>
           </a:p>
         </p:txBody>
       </p:sp>
@@ -8589,7 +8679,7 @@
           <a:p>
             <a:pPr algn="l"/>
             <a:r>
-              <a:rPr b="0" i="0" sz="1100">
+              <a:rPr sz="1100" b="0" i="0">
                 <a:solidFill>
                   <a:srgbClr val="FFFFFF"/>
                 </a:solidFill>
@@ -8639,6 +8729,7 @@
           <a:lstStyle/>
           <a:p>
             <a:pPr algn="ctr"/>
+            <a:endParaRPr/>
           </a:p>
         </p:txBody>
       </p:sp>
@@ -8666,7 +8757,7 @@
           <a:p>
             <a:pPr algn="l"/>
             <a:r>
-              <a:rPr b="0" i="0" sz="1100">
+              <a:rPr sz="1100" b="0" i="0">
                 <a:solidFill>
                   <a:srgbClr val="FFFFFF"/>
                 </a:solidFill>
@@ -8716,6 +8807,7 @@
           <a:lstStyle/>
           <a:p>
             <a:pPr algn="ctr"/>
+            <a:endParaRPr/>
           </a:p>
         </p:txBody>
       </p:sp>
@@ -8743,7 +8835,7 @@
           <a:p>
             <a:pPr algn="ctr"/>
             <a:r>
-              <a:rPr b="1" i="0" sz="1300">
+              <a:rPr sz="1300" b="1" i="0">
                 <a:solidFill>
                   <a:srgbClr val="CADCFC"/>
                 </a:solidFill>
@@ -8793,6 +8885,7 @@
           <a:lstStyle/>
           <a:p>
             <a:pPr algn="ctr"/>
+            <a:endParaRPr/>
           </a:p>
         </p:txBody>
       </p:sp>
@@ -8820,7 +8913,7 @@
           <a:p>
             <a:pPr algn="l"/>
             <a:r>
-              <a:rPr b="1" i="0" sz="900">
+              <a:rPr sz="900" b="1" i="0">
                 <a:solidFill>
                   <a:srgbClr val="CADCFC"/>
                 </a:solidFill>
@@ -8854,7 +8947,7 @@
           <a:p>
             <a:pPr algn="l"/>
             <a:r>
-              <a:rPr b="0" i="0" sz="900">
+              <a:rPr sz="900" b="0" i="0">
                 <a:solidFill>
                   <a:srgbClr val="FFFFFF"/>
                 </a:solidFill>
@@ -8904,6 +8997,7 @@
           <a:lstStyle/>
           <a:p>
             <a:pPr algn="ctr"/>
+            <a:endParaRPr/>
           </a:p>
         </p:txBody>
       </p:sp>
@@ -8931,7 +9025,7 @@
           <a:p>
             <a:pPr algn="l"/>
             <a:r>
-              <a:rPr b="1" i="0" sz="900">
+              <a:rPr sz="900" b="1" i="0">
                 <a:solidFill>
                   <a:srgbClr val="CADCFC"/>
                 </a:solidFill>
@@ -8965,7 +9059,7 @@
           <a:p>
             <a:pPr algn="l"/>
             <a:r>
-              <a:rPr b="0" i="0" sz="900">
+              <a:rPr sz="900" b="0" i="0">
                 <a:solidFill>
                   <a:srgbClr val="FFFFFF"/>
                 </a:solidFill>
@@ -9015,6 +9109,7 @@
           <a:lstStyle/>
           <a:p>
             <a:pPr algn="ctr"/>
+            <a:endParaRPr/>
           </a:p>
         </p:txBody>
       </p:sp>
@@ -9042,7 +9137,7 @@
           <a:p>
             <a:pPr algn="l"/>
             <a:r>
-              <a:rPr b="1" i="0" sz="900">
+              <a:rPr sz="900" b="1" i="0">
                 <a:solidFill>
                   <a:srgbClr val="CADCFC"/>
                 </a:solidFill>
@@ -9076,7 +9171,7 @@
           <a:p>
             <a:pPr algn="l"/>
             <a:r>
-              <a:rPr b="0" i="0" sz="900">
+              <a:rPr sz="900" b="0" i="0">
                 <a:solidFill>
                   <a:srgbClr val="FFFFFF"/>
                 </a:solidFill>
@@ -9110,12 +9205,12 @@
           <a:p>
             <a:pPr algn="r"/>
             <a:r>
-              <a:rPr b="0" i="0" sz="900">
+              <a:rPr sz="900" b="0" i="0">
                 <a:solidFill>
                   <a:srgbClr val="6B7AB8"/>
                 </a:solidFill>
               </a:rPr>
-              <a:t>3 / 11</a:t>
+              <a:t>3 / 12</a:t>
             </a:r>
           </a:p>
         </p:txBody>
@@ -9129,7 +9224,7 @@
 </file>
 
 <file path=ppt/slides/slide4.xml><?xml version="1.0" encoding="utf-8"?>
-<p:sld xmlns:a="http://schemas.openxmlformats.org/drawingml/2006/main" xmlns:p="http://schemas.openxmlformats.org/presentationml/2006/main" xmlns:r="http://schemas.openxmlformats.org/officeDocument/2006/relationships">
+<p:sld xmlns:a="http://schemas.openxmlformats.org/drawingml/2006/main" xmlns:r="http://schemas.openxmlformats.org/officeDocument/2006/relationships" xmlns:p="http://schemas.openxmlformats.org/presentationml/2006/main">
   <p:cSld>
     <p:spTree>
       <p:nvGrpSpPr>
@@ -9137,7 +9232,14 @@
         <p:cNvGrpSpPr/>
         <p:nvPr/>
       </p:nvGrpSpPr>
-      <p:grpSpPr/>
+      <p:grpSpPr>
+        <a:xfrm>
+          <a:off x="0" y="0"/>
+          <a:ext cx="0" cy="0"/>
+          <a:chOff x="0" y="0"/>
+          <a:chExt cx="0" cy="0"/>
+        </a:xfrm>
+      </p:grpSpPr>
       <p:sp>
         <p:nvSpPr>
           <p:cNvPr id="2" name="Rectangle 1"/>
@@ -9178,6 +9280,7 @@
           <a:lstStyle/>
           <a:p>
             <a:pPr algn="ctr"/>
+            <a:endParaRPr/>
           </a:p>
         </p:txBody>
       </p:sp>
@@ -9221,6 +9324,7 @@
           <a:lstStyle/>
           <a:p>
             <a:pPr algn="ctr"/>
+            <a:endParaRPr/>
           </a:p>
         </p:txBody>
       </p:sp>
@@ -9264,6 +9368,7 @@
           <a:lstStyle/>
           <a:p>
             <a:pPr algn="ctr"/>
+            <a:endParaRPr/>
           </a:p>
         </p:txBody>
       </p:sp>
@@ -9291,12 +9396,12 @@
           <a:p>
             <a:pPr algn="l"/>
             <a:r>
-              <a:rPr b="1" i="0" sz="900">
+              <a:rPr sz="900" b="1" i="0">
                 <a:solidFill>
                   <a:srgbClr val="CADCFC"/>
                 </a:solidFill>
               </a:rPr>
-              <a:t>03  ·  OUR PRODUCT</a:t>
+              <a:t>04  ·  OUR PRODUCT</a:t>
             </a:r>
           </a:p>
         </p:txBody>
@@ -9325,7 +9430,7 @@
           <a:p>
             <a:pPr algn="l"/>
             <a:r>
-              <a:rPr b="1" i="0" sz="3400">
+              <a:rPr sz="3400" b="1" i="0">
                 <a:solidFill>
                   <a:srgbClr val="FFFFFF"/>
                 </a:solidFill>
@@ -9375,6 +9480,7 @@
           <a:lstStyle/>
           <a:p>
             <a:pPr algn="ctr"/>
+            <a:endParaRPr/>
           </a:p>
         </p:txBody>
       </p:sp>
@@ -9418,6 +9524,7 @@
           <a:lstStyle/>
           <a:p>
             <a:pPr algn="ctr"/>
+            <a:endParaRPr/>
           </a:p>
         </p:txBody>
       </p:sp>
@@ -9461,6 +9568,7 @@
           <a:lstStyle/>
           <a:p>
             <a:pPr algn="ctr"/>
+            <a:endParaRPr/>
           </a:p>
         </p:txBody>
       </p:sp>
@@ -9488,7 +9596,7 @@
           <a:p>
             <a:pPr algn="ctr"/>
             <a:r>
-              <a:rPr b="0" i="0" sz="2400">
+              <a:rPr sz="2400" b="0" i="0">
                 <a:solidFill>
                   <a:srgbClr val="FFFFFF"/>
                 </a:solidFill>
@@ -9522,7 +9630,7 @@
           <a:p>
             <a:pPr algn="ctr"/>
             <a:r>
-              <a:rPr b="1" i="0" sz="1600">
+              <a:rPr sz="1600" b="1" i="0">
                 <a:solidFill>
                   <a:srgbClr val="FFFFFF"/>
                 </a:solidFill>
@@ -9572,6 +9680,7 @@
           <a:lstStyle/>
           <a:p>
             <a:pPr algn="ctr"/>
+            <a:endParaRPr/>
           </a:p>
         </p:txBody>
       </p:sp>
@@ -9599,7 +9708,7 @@
           <a:p>
             <a:pPr algn="ctr"/>
             <a:r>
-              <a:rPr b="1" i="0" sz="1200">
+              <a:rPr sz="1200" b="1" i="0">
                 <a:solidFill>
                   <a:srgbClr val="CADCFC"/>
                 </a:solidFill>
@@ -9649,6 +9758,7 @@
           <a:lstStyle/>
           <a:p>
             <a:pPr algn="ctr"/>
+            <a:endParaRPr/>
           </a:p>
         </p:txBody>
       </p:sp>
@@ -9676,7 +9786,7 @@
           <a:p>
             <a:pPr algn="ctr"/>
             <a:r>
-              <a:rPr b="1" i="0" sz="1200">
+              <a:rPr sz="1200" b="1" i="0">
                 <a:solidFill>
                   <a:srgbClr val="CADCFC"/>
                 </a:solidFill>
@@ -9710,7 +9820,7 @@
           <a:p>
             <a:pPr algn="ctr"/>
             <a:r>
-              <a:rPr b="0" i="1" sz="1000">
+              <a:rPr sz="1000" b="0" i="1">
                 <a:solidFill>
                   <a:srgbClr val="CADCFC"/>
                 </a:solidFill>
@@ -9760,6 +9870,7 @@
           <a:lstStyle/>
           <a:p>
             <a:pPr algn="ctr"/>
+            <a:endParaRPr/>
           </a:p>
         </p:txBody>
       </p:sp>
@@ -9803,6 +9914,7 @@
           <a:lstStyle/>
           <a:p>
             <a:pPr algn="ctr"/>
+            <a:endParaRPr/>
           </a:p>
         </p:txBody>
       </p:sp>
@@ -9830,7 +9942,7 @@
           <a:p>
             <a:pPr algn="ctr"/>
             <a:r>
-              <a:rPr b="0" i="0" sz="2400">
+              <a:rPr sz="2400" b="0" i="0">
                 <a:solidFill>
                   <a:srgbClr val="FFFFFF"/>
                 </a:solidFill>
@@ -9864,7 +9976,7 @@
           <a:p>
             <a:pPr algn="ctr"/>
             <a:r>
-              <a:rPr b="1" i="0" sz="1600">
+              <a:rPr sz="1600" b="1" i="0">
                 <a:solidFill>
                   <a:srgbClr val="FFFFFF"/>
                 </a:solidFill>
@@ -9914,6 +10026,7 @@
           <a:lstStyle/>
           <a:p>
             <a:pPr algn="ctr"/>
+            <a:endParaRPr/>
           </a:p>
         </p:txBody>
       </p:sp>
@@ -9941,7 +10054,7 @@
           <a:p>
             <a:pPr algn="ctr"/>
             <a:r>
-              <a:rPr b="1" i="0" sz="1200">
+              <a:rPr sz="1200" b="1" i="0">
                 <a:solidFill>
                   <a:srgbClr val="CADCFC"/>
                 </a:solidFill>
@@ -9991,6 +10104,7 @@
           <a:lstStyle/>
           <a:p>
             <a:pPr algn="ctr"/>
+            <a:endParaRPr/>
           </a:p>
         </p:txBody>
       </p:sp>
@@ -10018,7 +10132,7 @@
           <a:p>
             <a:pPr algn="ctr"/>
             <a:r>
-              <a:rPr b="1" i="0" sz="1200">
+              <a:rPr sz="1200" b="1" i="0">
                 <a:solidFill>
                   <a:srgbClr val="CADCFC"/>
                 </a:solidFill>
@@ -10052,7 +10166,7 @@
           <a:p>
             <a:pPr algn="ctr"/>
             <a:r>
-              <a:rPr b="0" i="1" sz="1000">
+              <a:rPr sz="1000" b="0" i="1">
                 <a:solidFill>
                   <a:srgbClr val="CADCFC"/>
                 </a:solidFill>
@@ -10102,6 +10216,7 @@
           <a:lstStyle/>
           <a:p>
             <a:pPr algn="ctr"/>
+            <a:endParaRPr/>
           </a:p>
         </p:txBody>
       </p:sp>
@@ -10145,6 +10260,7 @@
           <a:lstStyle/>
           <a:p>
             <a:pPr algn="ctr"/>
+            <a:endParaRPr/>
           </a:p>
         </p:txBody>
       </p:sp>
@@ -10172,7 +10288,7 @@
           <a:p>
             <a:pPr algn="ctr"/>
             <a:r>
-              <a:rPr b="0" i="0" sz="2400">
+              <a:rPr sz="2400" b="0" i="0">
                 <a:solidFill>
                   <a:srgbClr val="FFFFFF"/>
                 </a:solidFill>
@@ -10206,7 +10322,7 @@
           <a:p>
             <a:pPr algn="ctr"/>
             <a:r>
-              <a:rPr b="1" i="0" sz="1600">
+              <a:rPr sz="1600" b="1" i="0">
                 <a:solidFill>
                   <a:srgbClr val="FFFFFF"/>
                 </a:solidFill>
@@ -10256,6 +10372,7 @@
           <a:lstStyle/>
           <a:p>
             <a:pPr algn="ctr"/>
+            <a:endParaRPr/>
           </a:p>
         </p:txBody>
       </p:sp>
@@ -10283,7 +10400,7 @@
           <a:p>
             <a:pPr algn="ctr"/>
             <a:r>
-              <a:rPr b="1" i="0" sz="1200">
+              <a:rPr sz="1200" b="1" i="0">
                 <a:solidFill>
                   <a:srgbClr val="CADCFC"/>
                 </a:solidFill>
@@ -10333,6 +10450,7 @@
           <a:lstStyle/>
           <a:p>
             <a:pPr algn="ctr"/>
+            <a:endParaRPr/>
           </a:p>
         </p:txBody>
       </p:sp>
@@ -10360,7 +10478,7 @@
           <a:p>
             <a:pPr algn="ctr"/>
             <a:r>
-              <a:rPr b="1" i="0" sz="1200">
+              <a:rPr sz="1200" b="1" i="0">
                 <a:solidFill>
                   <a:srgbClr val="CADCFC"/>
                 </a:solidFill>
@@ -10394,7 +10512,7 @@
           <a:p>
             <a:pPr algn="ctr"/>
             <a:r>
-              <a:rPr b="0" i="1" sz="1000">
+              <a:rPr sz="1000" b="0" i="1">
                 <a:solidFill>
                   <a:srgbClr val="CADCFC"/>
                 </a:solidFill>
@@ -10444,6 +10562,7 @@
           <a:lstStyle/>
           <a:p>
             <a:pPr algn="ctr"/>
+            <a:endParaRPr/>
           </a:p>
         </p:txBody>
       </p:sp>
@@ -10471,7 +10590,7 @@
           <a:p>
             <a:pPr algn="ctr"/>
             <a:r>
-              <a:rPr b="1" i="0" sz="1300">
+              <a:rPr sz="1300" b="1" i="0">
                 <a:solidFill>
                   <a:srgbClr val="FFFFFF"/>
                 </a:solidFill>
@@ -10505,12 +10624,12 @@
           <a:p>
             <a:pPr algn="r"/>
             <a:r>
-              <a:rPr b="0" i="0" sz="900">
+              <a:rPr sz="900" b="0" i="0">
                 <a:solidFill>
                   <a:srgbClr val="6B7AB8"/>
                 </a:solidFill>
               </a:rPr>
-              <a:t>5 / 11</a:t>
+              <a:t>5 / 12</a:t>
             </a:r>
           </a:p>
         </p:txBody>
@@ -10524,7 +10643,7 @@
 </file>
 
 <file path=ppt/slides/slide5.xml><?xml version="1.0" encoding="utf-8"?>
-<p:sld xmlns:a="http://schemas.openxmlformats.org/drawingml/2006/main" xmlns:p="http://schemas.openxmlformats.org/presentationml/2006/main" xmlns:r="http://schemas.openxmlformats.org/officeDocument/2006/relationships">
+<p:sld xmlns:a="http://schemas.openxmlformats.org/drawingml/2006/main" xmlns:r="http://schemas.openxmlformats.org/officeDocument/2006/relationships" xmlns:p="http://schemas.openxmlformats.org/presentationml/2006/main">
   <p:cSld>
     <p:spTree>
       <p:nvGrpSpPr>
@@ -10532,7 +10651,14 @@
         <p:cNvGrpSpPr/>
         <p:nvPr/>
       </p:nvGrpSpPr>
-      <p:grpSpPr/>
+      <p:grpSpPr>
+        <a:xfrm>
+          <a:off x="0" y="0"/>
+          <a:ext cx="0" cy="0"/>
+          <a:chOff x="0" y="0"/>
+          <a:chExt cx="0" cy="0"/>
+        </a:xfrm>
+      </p:grpSpPr>
       <p:sp>
         <p:nvSpPr>
           <p:cNvPr id="2" name="Rectangle 1"/>
@@ -10573,6 +10699,7 @@
           <a:lstStyle/>
           <a:p>
             <a:pPr algn="ctr"/>
+            <a:endParaRPr/>
           </a:p>
         </p:txBody>
       </p:sp>
@@ -10616,6 +10743,7 @@
           <a:lstStyle/>
           <a:p>
             <a:pPr algn="ctr"/>
+            <a:endParaRPr/>
           </a:p>
         </p:txBody>
       </p:sp>
@@ -10659,6 +10787,7 @@
           <a:lstStyle/>
           <a:p>
             <a:pPr algn="ctr"/>
+            <a:endParaRPr/>
           </a:p>
         </p:txBody>
       </p:sp>
@@ -10686,12 +10815,12 @@
           <a:p>
             <a:pPr algn="l"/>
             <a:r>
-              <a:rPr b="1" i="0" sz="900">
+              <a:rPr sz="900" b="1" i="0">
                 <a:solidFill>
                   <a:srgbClr val="1E2761"/>
                 </a:solidFill>
               </a:rPr>
-              <a:t>04A  ·  CONCEPTUAL ARCHITECTURE</a:t>
+              <a:t>05A  ·  CONCEPTUAL ARCHITECTURE</a:t>
             </a:r>
           </a:p>
         </p:txBody>
@@ -10720,7 +10849,7 @@
           <a:p>
             <a:pPr algn="l"/>
             <a:r>
-              <a:rPr b="1" i="0" sz="3200">
+              <a:rPr sz="3200" b="1" i="0">
                 <a:solidFill>
                   <a:srgbClr val="1E2761"/>
                 </a:solidFill>
@@ -10770,6 +10899,7 @@
           <a:lstStyle/>
           <a:p>
             <a:pPr algn="ctr"/>
+            <a:endParaRPr/>
           </a:p>
         </p:txBody>
       </p:sp>
@@ -10813,6 +10943,7 @@
           <a:lstStyle/>
           <a:p>
             <a:pPr algn="ctr"/>
+            <a:endParaRPr/>
           </a:p>
         </p:txBody>
       </p:sp>
@@ -10856,6 +10987,7 @@
           <a:lstStyle/>
           <a:p>
             <a:pPr algn="ctr"/>
+            <a:endParaRPr/>
           </a:p>
         </p:txBody>
       </p:sp>
@@ -10883,7 +11015,7 @@
           <a:p>
             <a:pPr algn="ctr"/>
             <a:r>
-              <a:rPr b="1" i="0" sz="1600">
+              <a:rPr sz="1600" b="1" i="0">
                 <a:solidFill>
                   <a:srgbClr val="CADCFC"/>
                 </a:solidFill>
@@ -10917,7 +11049,7 @@
           <a:p>
             <a:pPr algn="ctr"/>
             <a:r>
-              <a:rPr b="1" i="0" sz="1300">
+              <a:rPr sz="1300" b="1" i="0">
                 <a:solidFill>
                   <a:srgbClr val="CADCFC"/>
                 </a:solidFill>
@@ -10952,7 +11084,7 @@
           <a:p>
             <a:pPr algn="l"/>
             <a:r>
-              <a:rPr b="0" i="0" sz="1100">
+              <a:rPr sz="1100" b="0" i="0">
                 <a:solidFill>
                   <a:srgbClr val="1A1A2E"/>
                 </a:solidFill>
@@ -10988,7 +11120,7 @@
           <a:p>
             <a:pPr algn="ctr"/>
             <a:r>
-              <a:rPr b="1" i="0" sz="1800">
+              <a:rPr sz="1800" b="1" i="0">
                 <a:solidFill>
                   <a:srgbClr val="1E2761"/>
                 </a:solidFill>
@@ -11038,6 +11170,7 @@
           <a:lstStyle/>
           <a:p>
             <a:pPr algn="ctr"/>
+            <a:endParaRPr/>
           </a:p>
         </p:txBody>
       </p:sp>
@@ -11081,6 +11214,7 @@
           <a:lstStyle/>
           <a:p>
             <a:pPr algn="ctr"/>
+            <a:endParaRPr/>
           </a:p>
         </p:txBody>
       </p:sp>
@@ -11108,7 +11242,7 @@
           <a:p>
             <a:pPr algn="ctr"/>
             <a:r>
-              <a:rPr b="1" i="0" sz="1600">
+              <a:rPr sz="1600" b="1" i="0">
                 <a:solidFill>
                   <a:srgbClr val="CADCFC"/>
                 </a:solidFill>
@@ -11142,7 +11276,7 @@
           <a:p>
             <a:pPr algn="ctr"/>
             <a:r>
-              <a:rPr b="1" i="0" sz="1300">
+              <a:rPr sz="1300" b="1" i="0">
                 <a:solidFill>
                   <a:srgbClr val="CADCFC"/>
                 </a:solidFill>
@@ -11177,7 +11311,7 @@
           <a:p>
             <a:pPr algn="l"/>
             <a:r>
-              <a:rPr b="0" i="0" sz="1100">
+              <a:rPr sz="1100" b="0" i="0">
                 <a:solidFill>
                   <a:srgbClr val="1A1A2E"/>
                 </a:solidFill>
@@ -11213,7 +11347,7 @@
           <a:p>
             <a:pPr algn="ctr"/>
             <a:r>
-              <a:rPr b="1" i="0" sz="1800">
+              <a:rPr sz="1800" b="1" i="0">
                 <a:solidFill>
                   <a:srgbClr val="1E2761"/>
                 </a:solidFill>
@@ -11263,6 +11397,7 @@
           <a:lstStyle/>
           <a:p>
             <a:pPr algn="ctr"/>
+            <a:endParaRPr/>
           </a:p>
         </p:txBody>
       </p:sp>
@@ -11306,6 +11441,7 @@
           <a:lstStyle/>
           <a:p>
             <a:pPr algn="ctr"/>
+            <a:endParaRPr/>
           </a:p>
         </p:txBody>
       </p:sp>
@@ -11333,7 +11469,7 @@
           <a:p>
             <a:pPr algn="ctr"/>
             <a:r>
-              <a:rPr b="1" i="0" sz="1600">
+              <a:rPr sz="1600" b="1" i="0">
                 <a:solidFill>
                   <a:srgbClr val="CADCFC"/>
                 </a:solidFill>
@@ -11367,7 +11503,7 @@
           <a:p>
             <a:pPr algn="ctr"/>
             <a:r>
-              <a:rPr b="1" i="0" sz="1300">
+              <a:rPr sz="1300" b="1" i="0">
                 <a:solidFill>
                   <a:srgbClr val="CADCFC"/>
                 </a:solidFill>
@@ -11402,7 +11538,7 @@
           <a:p>
             <a:pPr algn="l"/>
             <a:r>
-              <a:rPr b="0" i="0" sz="1100">
+              <a:rPr sz="1100" b="0" i="0">
                 <a:solidFill>
                   <a:srgbClr val="1A1A2E"/>
                 </a:solidFill>
@@ -11438,7 +11574,7 @@
           <a:p>
             <a:pPr algn="ctr"/>
             <a:r>
-              <a:rPr b="1" i="0" sz="1800">
+              <a:rPr sz="1800" b="1" i="0">
                 <a:solidFill>
                   <a:srgbClr val="1E2761"/>
                 </a:solidFill>
@@ -11488,6 +11624,7 @@
           <a:lstStyle/>
           <a:p>
             <a:pPr algn="ctr"/>
+            <a:endParaRPr/>
           </a:p>
         </p:txBody>
       </p:sp>
@@ -11531,6 +11668,7 @@
           <a:lstStyle/>
           <a:p>
             <a:pPr algn="ctr"/>
+            <a:endParaRPr/>
           </a:p>
         </p:txBody>
       </p:sp>
@@ -11558,7 +11696,7 @@
           <a:p>
             <a:pPr algn="ctr"/>
             <a:r>
-              <a:rPr b="1" i="0" sz="1600">
+              <a:rPr sz="1600" b="1" i="0">
                 <a:solidFill>
                   <a:srgbClr val="CADCFC"/>
                 </a:solidFill>
@@ -11592,7 +11730,7 @@
           <a:p>
             <a:pPr algn="ctr"/>
             <a:r>
-              <a:rPr b="1" i="0" sz="1300">
+              <a:rPr sz="1300" b="1" i="0">
                 <a:solidFill>
                   <a:srgbClr val="CADCFC"/>
                 </a:solidFill>
@@ -11627,7 +11765,7 @@
           <a:p>
             <a:pPr algn="l"/>
             <a:r>
-              <a:rPr b="0" i="0" sz="1100">
+              <a:rPr sz="1100" b="0" i="0">
                 <a:solidFill>
                   <a:srgbClr val="1A1A2E"/>
                 </a:solidFill>
@@ -11663,7 +11801,7 @@
           <a:p>
             <a:pPr algn="ctr"/>
             <a:r>
-              <a:rPr b="1" i="0" sz="1800">
+              <a:rPr sz="1800" b="1" i="0">
                 <a:solidFill>
                   <a:srgbClr val="1E2761"/>
                 </a:solidFill>
@@ -11713,6 +11851,7 @@
           <a:lstStyle/>
           <a:p>
             <a:pPr algn="ctr"/>
+            <a:endParaRPr/>
           </a:p>
         </p:txBody>
       </p:sp>
@@ -11756,6 +11895,7 @@
           <a:lstStyle/>
           <a:p>
             <a:pPr algn="ctr"/>
+            <a:endParaRPr/>
           </a:p>
         </p:txBody>
       </p:sp>
@@ -11783,7 +11923,7 @@
           <a:p>
             <a:pPr algn="ctr"/>
             <a:r>
-              <a:rPr b="1" i="0" sz="1600">
+              <a:rPr sz="1600" b="1" i="0">
                 <a:solidFill>
                   <a:srgbClr val="CADCFC"/>
                 </a:solidFill>
@@ -11817,7 +11957,7 @@
           <a:p>
             <a:pPr algn="ctr"/>
             <a:r>
-              <a:rPr b="1" i="0" sz="1300">
+              <a:rPr sz="1300" b="1" i="0">
                 <a:solidFill>
                   <a:srgbClr val="CADCFC"/>
                 </a:solidFill>
@@ -11852,7 +11992,7 @@
           <a:p>
             <a:pPr algn="l"/>
             <a:r>
-              <a:rPr b="0" i="0" sz="1100">
+              <a:rPr sz="1100" b="0" i="0">
                 <a:solidFill>
                   <a:srgbClr val="1A1A2E"/>
                 </a:solidFill>
@@ -11888,7 +12028,7 @@
           <a:p>
             <a:pPr algn="ctr"/>
             <a:r>
-              <a:rPr b="0" i="1" sz="1100">
+              <a:rPr sz="1100" b="0" i="1">
                 <a:solidFill>
                   <a:srgbClr val="6B7AB8"/>
                 </a:solidFill>
@@ -11922,12 +12062,12 @@
           <a:p>
             <a:pPr algn="r"/>
             <a:r>
-              <a:rPr b="0" i="0" sz="900">
+              <a:rPr sz="900" b="0" i="0">
                 <a:solidFill>
                   <a:srgbClr val="9AA8CC"/>
                 </a:solidFill>
               </a:rPr>
-              <a:t>5 / 11</a:t>
+              <a:t>6 / 12</a:t>
             </a:r>
           </a:p>
         </p:txBody>
@@ -11941,7 +12081,7 @@
 </file>
 
 <file path=ppt/slides/slide6.xml><?xml version="1.0" encoding="utf-8"?>
-<p:sld xmlns:a="http://schemas.openxmlformats.org/drawingml/2006/main" xmlns:p="http://schemas.openxmlformats.org/presentationml/2006/main" xmlns:r="http://schemas.openxmlformats.org/officeDocument/2006/relationships">
+<p:sld xmlns:a="http://schemas.openxmlformats.org/drawingml/2006/main" xmlns:r="http://schemas.openxmlformats.org/officeDocument/2006/relationships" xmlns:p="http://schemas.openxmlformats.org/presentationml/2006/main">
   <p:cSld>
     <p:spTree>
       <p:nvGrpSpPr>
@@ -11949,7 +12089,14 @@
         <p:cNvGrpSpPr/>
         <p:nvPr/>
       </p:nvGrpSpPr>
-      <p:grpSpPr/>
+      <p:grpSpPr>
+        <a:xfrm>
+          <a:off x="0" y="0"/>
+          <a:ext cx="0" cy="0"/>
+          <a:chOff x="0" y="0"/>
+          <a:chExt cx="0" cy="0"/>
+        </a:xfrm>
+      </p:grpSpPr>
       <p:sp>
         <p:nvSpPr>
           <p:cNvPr id="2" name="Rectangle 1"/>
@@ -11990,6 +12137,7 @@
           <a:lstStyle/>
           <a:p>
             <a:pPr algn="ctr"/>
+            <a:endParaRPr/>
           </a:p>
         </p:txBody>
       </p:sp>
@@ -12033,6 +12181,7 @@
           <a:lstStyle/>
           <a:p>
             <a:pPr algn="ctr"/>
+            <a:endParaRPr/>
           </a:p>
         </p:txBody>
       </p:sp>
@@ -12076,6 +12225,7 @@
           <a:lstStyle/>
           <a:p>
             <a:pPr algn="ctr"/>
+            <a:endParaRPr/>
           </a:p>
         </p:txBody>
       </p:sp>
@@ -12103,12 +12253,12 @@
           <a:p>
             <a:pPr algn="l"/>
             <a:r>
-              <a:rPr b="1" i="0" sz="900">
+              <a:rPr sz="900" b="1" i="0">
                 <a:solidFill>
                   <a:srgbClr val="CADCFC"/>
                 </a:solidFill>
               </a:rPr>
-              <a:t>04B  ·  RUNTIME ARCHITECTURE — TECH &amp; INTERACTIONS</a:t>
+              <a:t>05B  ·  RUNTIME ARCHITECTURE — TECH &amp; INTERACTIONS</a:t>
             </a:r>
           </a:p>
         </p:txBody>
@@ -12137,7 +12287,7 @@
           <a:p>
             <a:pPr algn="l"/>
             <a:r>
-              <a:rPr b="1" i="0" sz="3400">
+              <a:rPr sz="3400" b="1" i="0">
                 <a:solidFill>
                   <a:srgbClr val="FFFFFF"/>
                 </a:solidFill>
@@ -12187,6 +12337,7 @@
           <a:lstStyle/>
           <a:p>
             <a:pPr algn="ctr"/>
+            <a:endParaRPr/>
           </a:p>
         </p:txBody>
       </p:sp>
@@ -12230,6 +12381,7 @@
           <a:lstStyle/>
           <a:p>
             <a:pPr algn="ctr"/>
+            <a:endParaRPr/>
           </a:p>
         </p:txBody>
       </p:sp>
@@ -12257,7 +12409,7 @@
           <a:p>
             <a:pPr algn="ctr"/>
             <a:r>
-              <a:rPr b="1" i="0" sz="1200">
+              <a:rPr sz="1200" b="1" i="0">
                 <a:solidFill>
                   <a:srgbClr val="FFFFFF"/>
                 </a:solidFill>
@@ -12291,7 +12443,7 @@
           <a:p>
             <a:pPr algn="l"/>
             <a:r>
-              <a:rPr b="0" i="0" sz="1000">
+              <a:rPr sz="1000" b="0" i="0">
                 <a:solidFill>
                   <a:srgbClr val="FFFFFF"/>
                 </a:solidFill>
@@ -12345,6 +12497,7 @@
           <a:lstStyle/>
           <a:p>
             <a:pPr algn="ctr"/>
+            <a:endParaRPr/>
           </a:p>
         </p:txBody>
       </p:sp>
@@ -12372,7 +12525,7 @@
           <a:p>
             <a:pPr algn="ctr"/>
             <a:r>
-              <a:rPr b="1" i="0" sz="1200">
+              <a:rPr sz="1200" b="1" i="0">
                 <a:solidFill>
                   <a:srgbClr val="FFFFFF"/>
                 </a:solidFill>
@@ -12406,7 +12559,7 @@
           <a:p>
             <a:pPr algn="ctr"/>
             <a:r>
-              <a:rPr b="0" i="0" sz="1100">
+              <a:rPr sz="1100" b="0" i="0">
                 <a:solidFill>
                   <a:srgbClr val="CADCFC"/>
                 </a:solidFill>
@@ -12441,7 +12594,7 @@
           <a:p>
             <a:pPr algn="ctr"/>
             <a:r>
-              <a:rPr b="0" i="0" sz="1000">
+              <a:rPr sz="1000" b="0" i="0">
                 <a:solidFill>
                   <a:srgbClr val="FFFFFF"/>
                 </a:solidFill>
@@ -12492,6 +12645,7 @@
           <a:lstStyle/>
           <a:p>
             <a:pPr algn="ctr"/>
+            <a:endParaRPr/>
           </a:p>
         </p:txBody>
       </p:sp>
@@ -12519,7 +12673,7 @@
           <a:p>
             <a:pPr algn="ctr"/>
             <a:r>
-              <a:rPr b="1" i="0" sz="1200">
+              <a:rPr sz="1200" b="1" i="0">
                 <a:solidFill>
                   <a:srgbClr val="FFFFFF"/>
                 </a:solidFill>
@@ -12553,7 +12707,7 @@
           <a:p>
             <a:pPr algn="l"/>
             <a:r>
-              <a:rPr b="0" i="0" sz="1000">
+              <a:rPr sz="1000" b="0" i="0">
                 <a:solidFill>
                   <a:srgbClr val="FFFFFF"/>
                 </a:solidFill>
@@ -12606,6 +12760,7 @@
           <a:lstStyle/>
           <a:p>
             <a:pPr algn="ctr"/>
+            <a:endParaRPr/>
           </a:p>
         </p:txBody>
       </p:sp>
@@ -12633,7 +12788,7 @@
           <a:p>
             <a:pPr algn="ctr"/>
             <a:r>
-              <a:rPr b="1" i="0" sz="1000">
+              <a:rPr sz="1000" b="1" i="0">
                 <a:solidFill>
                   <a:srgbClr val="FFFFFF"/>
                 </a:solidFill>
@@ -12667,7 +12822,7 @@
           <a:p>
             <a:pPr algn="l"/>
             <a:r>
-              <a:rPr b="0" i="0" sz="950">
+              <a:rPr sz="950" b="0" i="0">
                 <a:solidFill>
                   <a:srgbClr val="FFFFFF"/>
                 </a:solidFill>
@@ -12720,6 +12875,7 @@
           <a:lstStyle/>
           <a:p>
             <a:pPr algn="ctr"/>
+            <a:endParaRPr/>
           </a:p>
         </p:txBody>
       </p:sp>
@@ -12747,7 +12903,7 @@
           <a:p>
             <a:pPr algn="ctr"/>
             <a:r>
-              <a:rPr b="1" i="0" sz="1100">
+              <a:rPr sz="1100" b="1" i="0">
                 <a:solidFill>
                   <a:srgbClr val="FFFFFF"/>
                 </a:solidFill>
@@ -12781,7 +12937,7 @@
           <a:p>
             <a:pPr algn="l"/>
             <a:r>
-              <a:rPr b="0" i="0" sz="950">
+              <a:rPr sz="950" b="0" i="0">
                 <a:solidFill>
                   <a:srgbClr val="FFFFFF"/>
                 </a:solidFill>
@@ -12834,6 +12990,7 @@
           <a:lstStyle/>
           <a:p>
             <a:pPr algn="ctr"/>
+            <a:endParaRPr/>
           </a:p>
         </p:txBody>
       </p:sp>
@@ -12861,7 +13018,7 @@
           <a:p>
             <a:pPr algn="ctr"/>
             <a:r>
-              <a:rPr b="1" i="0" sz="1100">
+              <a:rPr sz="1100" b="1" i="0">
                 <a:solidFill>
                   <a:srgbClr val="CADCFC"/>
                 </a:solidFill>
@@ -12895,7 +13052,7 @@
           <a:p>
             <a:pPr algn="l"/>
             <a:r>
-              <a:rPr b="0" i="0" sz="950">
+              <a:rPr sz="950" b="0" i="0">
                 <a:solidFill>
                   <a:srgbClr val="FFFFFF"/>
                 </a:solidFill>
@@ -12948,6 +13105,7 @@
           <a:lstStyle/>
           <a:p>
             <a:pPr algn="ctr"/>
+            <a:endParaRPr/>
           </a:p>
         </p:txBody>
       </p:sp>
@@ -12975,7 +13133,7 @@
           <a:p>
             <a:pPr algn="l"/>
             <a:r>
-              <a:rPr b="1" i="0" sz="1200">
+              <a:rPr sz="1200" b="1" i="0">
                 <a:solidFill>
                   <a:srgbClr val="CADCFC"/>
                 </a:solidFill>
@@ -13009,7 +13167,7 @@
           <a:p>
             <a:pPr algn="ctr"/>
             <a:r>
-              <a:rPr b="0" i="1" sz="1000">
+              <a:rPr sz="1000" b="0" i="1">
                 <a:solidFill>
                   <a:srgbClr val="6B7AB8"/>
                 </a:solidFill>
@@ -13059,6 +13217,7 @@
           <a:lstStyle/>
           <a:p>
             <a:pPr algn="ctr"/>
+            <a:endParaRPr/>
           </a:p>
         </p:txBody>
       </p:sp>
@@ -13086,7 +13245,7 @@
           <a:p>
             <a:pPr algn="l"/>
             <a:r>
-              <a:rPr b="1" i="0" sz="1200">
+              <a:rPr sz="1200" b="1" i="0">
                 <a:solidFill>
                   <a:srgbClr val="CADCFC"/>
                 </a:solidFill>
@@ -13120,7 +13279,7 @@
           <a:p>
             <a:pPr algn="ctr"/>
             <a:r>
-              <a:rPr b="0" i="1" sz="1000">
+              <a:rPr sz="1000" b="0" i="1">
                 <a:solidFill>
                   <a:srgbClr val="6B7AB8"/>
                 </a:solidFill>
@@ -13170,6 +13329,7 @@
           <a:lstStyle/>
           <a:p>
             <a:pPr algn="ctr"/>
+            <a:endParaRPr/>
           </a:p>
         </p:txBody>
       </p:sp>
@@ -13197,7 +13357,7 @@
           <a:p>
             <a:pPr algn="l"/>
             <a:r>
-              <a:rPr b="1" i="0" sz="1200">
+              <a:rPr sz="1200" b="1" i="0">
                 <a:solidFill>
                   <a:srgbClr val="CADCFC"/>
                 </a:solidFill>
@@ -13231,7 +13391,7 @@
           <a:p>
             <a:pPr algn="ctr"/>
             <a:r>
-              <a:rPr b="0" i="1" sz="1000">
+              <a:rPr sz="1000" b="0" i="1">
                 <a:solidFill>
                   <a:srgbClr val="6B7AB8"/>
                 </a:solidFill>
@@ -13281,6 +13441,7 @@
           <a:lstStyle/>
           <a:p>
             <a:pPr algn="ctr"/>
+            <a:endParaRPr/>
           </a:p>
         </p:txBody>
       </p:sp>
@@ -13308,7 +13469,7 @@
           <a:p>
             <a:pPr algn="l"/>
             <a:r>
-              <a:rPr b="1" i="0" sz="1200">
+              <a:rPr sz="1200" b="1" i="0">
                 <a:solidFill>
                   <a:srgbClr val="CADCFC"/>
                 </a:solidFill>
@@ -13342,7 +13503,7 @@
           <a:p>
             <a:pPr algn="ctr"/>
             <a:r>
-              <a:rPr b="0" i="1" sz="1000">
+              <a:rPr sz="1000" b="0" i="1">
                 <a:solidFill>
                   <a:srgbClr val="6B7AB8"/>
                 </a:solidFill>
@@ -13392,6 +13553,7 @@
           <a:lstStyle/>
           <a:p>
             <a:pPr algn="ctr"/>
+            <a:endParaRPr/>
           </a:p>
         </p:txBody>
       </p:sp>
@@ -13435,6 +13597,7 @@
           <a:lstStyle/>
           <a:p>
             <a:pPr algn="ctr"/>
+            <a:endParaRPr/>
           </a:p>
         </p:txBody>
       </p:sp>
@@ -13478,6 +13641,7 @@
           <a:lstStyle/>
           <a:p>
             <a:pPr algn="ctr"/>
+            <a:endParaRPr/>
           </a:p>
         </p:txBody>
       </p:sp>
@@ -13505,7 +13669,7 @@
           <a:p>
             <a:pPr algn="ctr"/>
             <a:r>
-              <a:rPr b="1" i="0" sz="1100">
+              <a:rPr sz="1100" b="1" i="0">
                 <a:solidFill>
                   <a:srgbClr val="CADCFC"/>
                 </a:solidFill>
@@ -13555,6 +13719,7 @@
           <a:lstStyle/>
           <a:p>
             <a:pPr algn="ctr"/>
+            <a:endParaRPr/>
           </a:p>
         </p:txBody>
       </p:sp>
@@ -13582,7 +13747,7 @@
           <a:p>
             <a:pPr algn="ctr"/>
             <a:r>
-              <a:rPr b="1" i="0" sz="1100">
+              <a:rPr sz="1100" b="1" i="0">
                 <a:solidFill>
                   <a:srgbClr val="CADCFC"/>
                 </a:solidFill>
@@ -13616,7 +13781,7 @@
           <a:p>
             <a:pPr algn="l"/>
             <a:r>
-              <a:rPr b="0" i="1" sz="1000">
+              <a:rPr sz="1000" b="0" i="1">
                 <a:solidFill>
                   <a:srgbClr val="6B7AB8"/>
                 </a:solidFill>
@@ -13650,7 +13815,7 @@
           <a:p>
             <a:pPr algn="l"/>
             <a:r>
-              <a:rPr b="0" i="1" sz="1000">
+              <a:rPr sz="1000" b="0" i="1">
                 <a:solidFill>
                   <a:srgbClr val="6B7AB8"/>
                 </a:solidFill>
@@ -13684,7 +13849,7 @@
           <a:p>
             <a:pPr algn="l"/>
             <a:r>
-              <a:rPr b="0" i="1" sz="1000">
+              <a:rPr sz="1000" b="0" i="1">
                 <a:solidFill>
                   <a:srgbClr val="6B7AB8"/>
                 </a:solidFill>
@@ -13734,6 +13899,7 @@
           <a:lstStyle/>
           <a:p>
             <a:pPr algn="ctr"/>
+            <a:endParaRPr/>
           </a:p>
         </p:txBody>
       </p:sp>
@@ -13761,7 +13927,7 @@
           <a:p>
             <a:pPr algn="l"/>
             <a:r>
-              <a:rPr b="1" i="0" sz="1100">
+              <a:rPr sz="1100" b="1" i="0">
                 <a:solidFill>
                   <a:srgbClr val="CADCFC"/>
                 </a:solidFill>
@@ -13795,7 +13961,7 @@
           <a:p>
             <a:pPr algn="ctr"/>
             <a:r>
-              <a:rPr b="0" i="1" sz="1000">
+              <a:rPr sz="1000" b="0" i="1">
                 <a:solidFill>
                   <a:srgbClr val="6B7AB8"/>
                 </a:solidFill>
@@ -13829,12 +13995,12 @@
           <a:p>
             <a:pPr algn="r"/>
             <a:r>
-              <a:rPr b="0" i="0" sz="900">
+              <a:rPr sz="900" b="0" i="0">
                 <a:solidFill>
                   <a:srgbClr val="6B7AB8"/>
                 </a:solidFill>
               </a:rPr>
-              <a:t>6 / 11</a:t>
+              <a:t>7 / 12</a:t>
             </a:r>
           </a:p>
         </p:txBody>
@@ -13848,7 +14014,7 @@
 </file>
 
 <file path=ppt/slides/slide7.xml><?xml version="1.0" encoding="utf-8"?>
-<p:sld xmlns:a="http://schemas.openxmlformats.org/drawingml/2006/main" xmlns:p="http://schemas.openxmlformats.org/presentationml/2006/main" xmlns:r="http://schemas.openxmlformats.org/officeDocument/2006/relationships">
+<p:sld xmlns:a="http://schemas.openxmlformats.org/drawingml/2006/main" xmlns:r="http://schemas.openxmlformats.org/officeDocument/2006/relationships" xmlns:p="http://schemas.openxmlformats.org/presentationml/2006/main">
   <p:cSld>
     <p:spTree>
       <p:nvGrpSpPr>
@@ -13856,7 +14022,14 @@
         <p:cNvGrpSpPr/>
         <p:nvPr/>
       </p:nvGrpSpPr>
-      <p:grpSpPr/>
+      <p:grpSpPr>
+        <a:xfrm>
+          <a:off x="0" y="0"/>
+          <a:ext cx="0" cy="0"/>
+          <a:chOff x="0" y="0"/>
+          <a:chExt cx="0" cy="0"/>
+        </a:xfrm>
+      </p:grpSpPr>
       <p:sp>
         <p:nvSpPr>
           <p:cNvPr id="2" name="Rectangle 1"/>
@@ -13897,6 +14070,7 @@
           <a:lstStyle/>
           <a:p>
             <a:pPr algn="ctr"/>
+            <a:endParaRPr/>
           </a:p>
         </p:txBody>
       </p:sp>
@@ -13940,6 +14114,7 @@
           <a:lstStyle/>
           <a:p>
             <a:pPr algn="ctr"/>
+            <a:endParaRPr/>
           </a:p>
         </p:txBody>
       </p:sp>
@@ -13983,6 +14158,7 @@
           <a:lstStyle/>
           <a:p>
             <a:pPr algn="ctr"/>
+            <a:endParaRPr/>
           </a:p>
         </p:txBody>
       </p:sp>
@@ -14010,12 +14186,12 @@
           <a:p>
             <a:pPr algn="l"/>
             <a:r>
-              <a:rPr b="1" i="0" sz="900">
+              <a:rPr sz="900" b="1" i="0">
                 <a:solidFill>
                   <a:srgbClr val="1E2761"/>
                 </a:solidFill>
               </a:rPr>
-              <a:t>05  ·  RECOMMENDATION ALGORITHM</a:t>
+              <a:t>06  ·  RECOMMENDATION ALGORITHM</a:t>
             </a:r>
           </a:p>
         </p:txBody>
@@ -14044,7 +14220,7 @@
           <a:p>
             <a:pPr algn="l"/>
             <a:r>
-              <a:rPr b="1" i="0" sz="3000">
+              <a:rPr sz="3000" b="1" i="0">
                 <a:solidFill>
                   <a:srgbClr val="1E2761"/>
                 </a:solidFill>
@@ -14094,6 +14270,7 @@
           <a:lstStyle/>
           <a:p>
             <a:pPr algn="ctr"/>
+            <a:endParaRPr/>
           </a:p>
         </p:txBody>
       </p:sp>
@@ -14137,6 +14314,7 @@
           <a:lstStyle/>
           <a:p>
             <a:pPr algn="ctr"/>
+            <a:endParaRPr/>
           </a:p>
         </p:txBody>
       </p:sp>
@@ -14164,7 +14342,7 @@
           <a:p>
             <a:pPr algn="ctr"/>
             <a:r>
-              <a:rPr b="1" i="0" sz="1100">
+              <a:rPr sz="1100" b="1" i="0">
                 <a:solidFill>
                   <a:srgbClr val="FFFFFF"/>
                 </a:solidFill>
@@ -14214,6 +14392,7 @@
           <a:lstStyle/>
           <a:p>
             <a:pPr algn="ctr"/>
+            <a:endParaRPr/>
           </a:p>
         </p:txBody>
       </p:sp>
@@ -14241,7 +14420,7 @@
           <a:p>
             <a:pPr algn="ctr"/>
             <a:r>
-              <a:rPr b="1" i="0" sz="1100">
+              <a:rPr sz="1100" b="1" i="0">
                 <a:solidFill>
                   <a:srgbClr val="FFFFFF"/>
                 </a:solidFill>
@@ -14291,6 +14470,7 @@
           <a:lstStyle/>
           <a:p>
             <a:pPr algn="ctr"/>
+            <a:endParaRPr/>
           </a:p>
         </p:txBody>
       </p:sp>
@@ -14318,7 +14498,7 @@
           <a:p>
             <a:pPr algn="ctr"/>
             <a:r>
-              <a:rPr b="1" i="0" sz="1100">
+              <a:rPr sz="1100" b="1" i="0">
                 <a:solidFill>
                   <a:srgbClr val="FFFFFF"/>
                 </a:solidFill>
@@ -14368,6 +14548,7 @@
           <a:lstStyle/>
           <a:p>
             <a:pPr algn="ctr"/>
+            <a:endParaRPr/>
           </a:p>
         </p:txBody>
       </p:sp>
@@ -14395,7 +14576,7 @@
           <a:p>
             <a:pPr algn="l"/>
             <a:r>
-              <a:rPr b="1" i="0" sz="1200">
+              <a:rPr sz="1200" b="1" i="0">
                 <a:solidFill>
                   <a:srgbClr val="CADCFC"/>
                 </a:solidFill>
@@ -14429,7 +14610,7 @@
           <a:p>
             <a:pPr algn="l"/>
             <a:r>
-              <a:rPr b="0" i="0" sz="1000">
+              <a:rPr sz="1000" b="0" i="0">
                 <a:solidFill>
                   <a:srgbClr val="CADCFC"/>
                 </a:solidFill>
@@ -14464,7 +14645,7 @@
           <a:p>
             <a:pPr algn="l"/>
             <a:r>
-              <a:rPr b="1" i="0" sz="1300">
+              <a:rPr sz="1300" b="1" i="0">
                 <a:solidFill>
                   <a:srgbClr val="1E2761"/>
                 </a:solidFill>
@@ -14514,6 +14695,7 @@
           <a:lstStyle/>
           <a:p>
             <a:pPr algn="ctr"/>
+            <a:endParaRPr/>
           </a:p>
         </p:txBody>
       </p:sp>
@@ -14541,7 +14723,7 @@
           <a:p>
             <a:pPr algn="l"/>
             <a:r>
-              <a:rPr b="1" i="0" sz="1200">
+              <a:rPr sz="1200" b="1" i="0">
                 <a:solidFill>
                   <a:srgbClr val="FFFFFF"/>
                 </a:solidFill>
@@ -14575,7 +14757,7 @@
           <a:p>
             <a:pPr algn="l"/>
             <a:r>
-              <a:rPr b="0" i="0" sz="1000">
+              <a:rPr sz="1000" b="0" i="0">
                 <a:solidFill>
                   <a:srgbClr val="FFFFFF"/>
                 </a:solidFill>
@@ -14610,7 +14792,7 @@
           <a:p>
             <a:pPr algn="l"/>
             <a:r>
-              <a:rPr b="1" i="0" sz="1300">
+              <a:rPr sz="1300" b="1" i="0">
                 <a:solidFill>
                   <a:srgbClr val="1E2761"/>
                 </a:solidFill>
@@ -14660,6 +14842,7 @@
           <a:lstStyle/>
           <a:p>
             <a:pPr algn="ctr"/>
+            <a:endParaRPr/>
           </a:p>
         </p:txBody>
       </p:sp>
@@ -14687,7 +14870,7 @@
           <a:p>
             <a:pPr algn="l"/>
             <a:r>
-              <a:rPr b="1" i="0" sz="1200">
+              <a:rPr sz="1200" b="1" i="0">
                 <a:solidFill>
                   <a:srgbClr val="FFFFFF"/>
                 </a:solidFill>
@@ -14721,7 +14904,7 @@
           <a:p>
             <a:pPr algn="l"/>
             <a:r>
-              <a:rPr b="0" i="0" sz="1000">
+              <a:rPr sz="1000" b="0" i="0">
                 <a:solidFill>
                   <a:srgbClr val="FFFFFF"/>
                 </a:solidFill>
@@ -14756,7 +14939,7 @@
           <a:p>
             <a:pPr algn="l"/>
             <a:r>
-              <a:rPr b="1" i="0" sz="1300">
+              <a:rPr sz="1300" b="1" i="0">
                 <a:solidFill>
                   <a:srgbClr val="1E2761"/>
                 </a:solidFill>
@@ -14806,6 +14989,7 @@
           <a:lstStyle/>
           <a:p>
             <a:pPr algn="ctr"/>
+            <a:endParaRPr/>
           </a:p>
         </p:txBody>
       </p:sp>
@@ -14833,7 +15017,7 @@
           <a:p>
             <a:pPr algn="l"/>
             <a:r>
-              <a:rPr b="1" i="0" sz="1200">
+              <a:rPr sz="1200" b="1" i="0">
                 <a:solidFill>
                   <a:srgbClr val="FFFFFF"/>
                 </a:solidFill>
@@ -14867,7 +15051,7 @@
           <a:p>
             <a:pPr algn="l"/>
             <a:r>
-              <a:rPr b="0" i="0" sz="1000">
+              <a:rPr sz="1000" b="0" i="0">
                 <a:solidFill>
                   <a:srgbClr val="FFFFFF"/>
                 </a:solidFill>
@@ -14918,6 +15102,7 @@
           <a:lstStyle/>
           <a:p>
             <a:pPr algn="ctr"/>
+            <a:endParaRPr/>
           </a:p>
         </p:txBody>
       </p:sp>
@@ -14945,7 +15130,7 @@
           <a:p>
             <a:pPr algn="l"/>
             <a:r>
-              <a:rPr b="1" i="0" sz="1050">
+              <a:rPr sz="1050" b="1" i="0">
                 <a:solidFill>
                   <a:srgbClr val="FFFFFF"/>
                 </a:solidFill>
@@ -14979,7 +15164,7 @@
           <a:p>
             <a:pPr algn="l"/>
             <a:r>
-              <a:rPr b="1" i="0" sz="900">
+              <a:rPr sz="900" b="1" i="0">
                 <a:solidFill>
                   <a:srgbClr val="1E2761"/>
                 </a:solidFill>
@@ -15029,6 +15214,7 @@
           <a:lstStyle/>
           <a:p>
             <a:pPr algn="ctr"/>
+            <a:endParaRPr/>
           </a:p>
         </p:txBody>
       </p:sp>
@@ -15056,7 +15242,7 @@
           <a:p>
             <a:pPr algn="ctr"/>
             <a:r>
-              <a:rPr b="1" i="0" sz="1000">
+              <a:rPr sz="1000" b="1" i="0">
                 <a:solidFill>
                   <a:srgbClr val="FFFFFF"/>
                 </a:solidFill>
@@ -15106,6 +15292,7 @@
           <a:lstStyle/>
           <a:p>
             <a:pPr algn="ctr"/>
+            <a:endParaRPr/>
           </a:p>
         </p:txBody>
       </p:sp>
@@ -15133,7 +15320,7 @@
           <a:p>
             <a:pPr algn="ctr"/>
             <a:r>
-              <a:rPr b="1" i="0" sz="1000">
+              <a:rPr sz="1000" b="1" i="0">
                 <a:solidFill>
                   <a:srgbClr val="FFFFFF"/>
                 </a:solidFill>
@@ -15183,6 +15370,7 @@
           <a:lstStyle/>
           <a:p>
             <a:pPr algn="ctr"/>
+            <a:endParaRPr/>
           </a:p>
         </p:txBody>
       </p:sp>
@@ -15210,7 +15398,7 @@
           <a:p>
             <a:pPr algn="ctr"/>
             <a:r>
-              <a:rPr b="1" i="0" sz="1000">
+              <a:rPr sz="1000" b="1" i="0">
                 <a:solidFill>
                   <a:srgbClr val="FFFFFF"/>
                 </a:solidFill>
@@ -15244,7 +15432,7 @@
           <a:p>
             <a:pPr algn="l"/>
             <a:r>
-              <a:rPr b="1" i="0" sz="900">
+              <a:rPr sz="900" b="1" i="0">
                 <a:solidFill>
                   <a:srgbClr val="1E2761"/>
                 </a:solidFill>
@@ -15294,6 +15482,7 @@
           <a:lstStyle/>
           <a:p>
             <a:pPr algn="ctr"/>
+            <a:endParaRPr/>
           </a:p>
         </p:txBody>
       </p:sp>
@@ -15321,7 +15510,7 @@
           <a:p>
             <a:pPr algn="ctr"/>
             <a:r>
-              <a:rPr b="1" i="0" sz="950">
+              <a:rPr sz="950" b="1" i="0">
                 <a:solidFill>
                   <a:srgbClr val="CADCFC"/>
                 </a:solidFill>
@@ -15371,6 +15560,7 @@
           <a:lstStyle/>
           <a:p>
             <a:pPr algn="ctr"/>
+            <a:endParaRPr/>
           </a:p>
         </p:txBody>
       </p:sp>
@@ -15398,7 +15588,7 @@
           <a:p>
             <a:pPr algn="ctr"/>
             <a:r>
-              <a:rPr b="1" i="0" sz="950">
+              <a:rPr sz="950" b="1" i="0">
                 <a:solidFill>
                   <a:srgbClr val="CADCFC"/>
                 </a:solidFill>
@@ -15448,6 +15638,7 @@
           <a:lstStyle/>
           <a:p>
             <a:pPr algn="ctr"/>
+            <a:endParaRPr/>
           </a:p>
         </p:txBody>
       </p:sp>
@@ -15475,7 +15666,7 @@
           <a:p>
             <a:pPr algn="ctr"/>
             <a:r>
-              <a:rPr b="1" i="0" sz="950">
+              <a:rPr sz="950" b="1" i="0">
                 <a:solidFill>
                   <a:srgbClr val="CADCFC"/>
                 </a:solidFill>
@@ -15525,6 +15716,7 @@
           <a:lstStyle/>
           <a:p>
             <a:pPr algn="ctr"/>
+            <a:endParaRPr/>
           </a:p>
         </p:txBody>
       </p:sp>
@@ -15552,7 +15744,7 @@
           <a:p>
             <a:pPr algn="ctr"/>
             <a:r>
-              <a:rPr b="1" i="0" sz="950">
+              <a:rPr sz="950" b="1" i="0">
                 <a:solidFill>
                   <a:srgbClr val="CADCFC"/>
                 </a:solidFill>
@@ -15602,6 +15794,7 @@
           <a:lstStyle/>
           <a:p>
             <a:pPr algn="ctr"/>
+            <a:endParaRPr/>
           </a:p>
         </p:txBody>
       </p:sp>
@@ -15645,6 +15838,7 @@
           <a:lstStyle/>
           <a:p>
             <a:pPr algn="ctr"/>
+            <a:endParaRPr/>
           </a:p>
         </p:txBody>
       </p:sp>
@@ -15672,7 +15866,7 @@
           <a:p>
             <a:pPr algn="ctr"/>
             <a:r>
-              <a:rPr b="1" i="0" sz="900">
+              <a:rPr sz="900" b="1" i="0">
                 <a:solidFill>
                   <a:srgbClr val="FFFFFF"/>
                 </a:solidFill>
@@ -15706,7 +15900,7 @@
           <a:p>
             <a:pPr algn="l"/>
             <a:r>
-              <a:rPr b="1" i="0" sz="1050">
+              <a:rPr sz="1050" b="1" i="0">
                 <a:solidFill>
                   <a:srgbClr val="1A1A2E"/>
                 </a:solidFill>
@@ -15740,7 +15934,7 @@
           <a:p>
             <a:pPr algn="l"/>
             <a:r>
-              <a:rPr b="0" i="0" sz="900">
+              <a:rPr sz="900" b="0" i="0">
                 <a:solidFill>
                   <a:srgbClr val="6B7AB8"/>
                 </a:solidFill>
@@ -15774,7 +15968,7 @@
           <a:p>
             <a:pPr algn="r"/>
             <a:r>
-              <a:rPr b="0" i="0" sz="950">
+              <a:rPr sz="950" b="0" i="0">
                 <a:solidFill>
                   <a:srgbClr val="1A1A2E"/>
                 </a:solidFill>
@@ -15808,7 +16002,7 @@
           <a:p>
             <a:pPr algn="r"/>
             <a:r>
-              <a:rPr b="1" i="0" sz="1000">
+              <a:rPr sz="1000" b="1" i="0">
                 <a:solidFill>
                   <a:srgbClr val="1E2761"/>
                 </a:solidFill>
@@ -15858,6 +16052,7 @@
           <a:lstStyle/>
           <a:p>
             <a:pPr algn="ctr"/>
+            <a:endParaRPr/>
           </a:p>
         </p:txBody>
       </p:sp>
@@ -15901,6 +16096,7 @@
           <a:lstStyle/>
           <a:p>
             <a:pPr algn="ctr"/>
+            <a:endParaRPr/>
           </a:p>
         </p:txBody>
       </p:sp>
@@ -15928,7 +16124,7 @@
           <a:p>
             <a:pPr algn="ctr"/>
             <a:r>
-              <a:rPr b="1" i="0" sz="900">
+              <a:rPr sz="900" b="1" i="0">
                 <a:solidFill>
                   <a:srgbClr val="FFFFFF"/>
                 </a:solidFill>
@@ -15962,7 +16158,7 @@
           <a:p>
             <a:pPr algn="l"/>
             <a:r>
-              <a:rPr b="1" i="0" sz="1050">
+              <a:rPr sz="1050" b="1" i="0">
                 <a:solidFill>
                   <a:srgbClr val="1A1A2E"/>
                 </a:solidFill>
@@ -15996,7 +16192,7 @@
           <a:p>
             <a:pPr algn="l"/>
             <a:r>
-              <a:rPr b="0" i="0" sz="900">
+              <a:rPr sz="900" b="0" i="0">
                 <a:solidFill>
                   <a:srgbClr val="6B7AB8"/>
                 </a:solidFill>
@@ -16030,7 +16226,7 @@
           <a:p>
             <a:pPr algn="r"/>
             <a:r>
-              <a:rPr b="0" i="0" sz="950">
+              <a:rPr sz="950" b="0" i="0">
                 <a:solidFill>
                   <a:srgbClr val="1A1A2E"/>
                 </a:solidFill>
@@ -16064,7 +16260,7 @@
           <a:p>
             <a:pPr algn="r"/>
             <a:r>
-              <a:rPr b="1" i="0" sz="1000">
+              <a:rPr sz="1000" b="1" i="0">
                 <a:solidFill>
                   <a:srgbClr val="1E2761"/>
                 </a:solidFill>
@@ -16114,6 +16310,7 @@
           <a:lstStyle/>
           <a:p>
             <a:pPr algn="ctr"/>
+            <a:endParaRPr/>
           </a:p>
         </p:txBody>
       </p:sp>
@@ -16157,6 +16354,7 @@
           <a:lstStyle/>
           <a:p>
             <a:pPr algn="ctr"/>
+            <a:endParaRPr/>
           </a:p>
         </p:txBody>
       </p:sp>
@@ -16184,7 +16382,7 @@
           <a:p>
             <a:pPr algn="ctr"/>
             <a:r>
-              <a:rPr b="1" i="0" sz="900">
+              <a:rPr sz="900" b="1" i="0">
                 <a:solidFill>
                   <a:srgbClr val="FFFFFF"/>
                 </a:solidFill>
@@ -16218,7 +16416,7 @@
           <a:p>
             <a:pPr algn="l"/>
             <a:r>
-              <a:rPr b="1" i="0" sz="1050">
+              <a:rPr sz="1050" b="1" i="0">
                 <a:solidFill>
                   <a:srgbClr val="1A1A2E"/>
                 </a:solidFill>
@@ -16252,7 +16450,7 @@
           <a:p>
             <a:pPr algn="l"/>
             <a:r>
-              <a:rPr b="0" i="0" sz="900">
+              <a:rPr sz="900" b="0" i="0">
                 <a:solidFill>
                   <a:srgbClr val="6B7AB8"/>
                 </a:solidFill>
@@ -16286,7 +16484,7 @@
           <a:p>
             <a:pPr algn="r"/>
             <a:r>
-              <a:rPr b="0" i="0" sz="950">
+              <a:rPr sz="950" b="0" i="0">
                 <a:solidFill>
                   <a:srgbClr val="1A1A2E"/>
                 </a:solidFill>
@@ -16320,7 +16518,7 @@
           <a:p>
             <a:pPr algn="r"/>
             <a:r>
-              <a:rPr b="1" i="0" sz="1000">
+              <a:rPr sz="1000" b="1" i="0">
                 <a:solidFill>
                   <a:srgbClr val="E74C3C"/>
                 </a:solidFill>
@@ -16370,6 +16568,7 @@
           <a:lstStyle/>
           <a:p>
             <a:pPr algn="ctr"/>
+            <a:endParaRPr/>
           </a:p>
         </p:txBody>
       </p:sp>
@@ -16397,7 +16596,7 @@
           <a:p>
             <a:pPr algn="ctr"/>
             <a:r>
-              <a:rPr b="1" i="0" sz="1100">
+              <a:rPr sz="1100" b="1" i="0">
                 <a:solidFill>
                   <a:srgbClr val="CADCFC"/>
                 </a:solidFill>
@@ -16431,12 +16630,12 @@
           <a:p>
             <a:pPr algn="r"/>
             <a:r>
-              <a:rPr b="0" i="0" sz="900">
+              <a:rPr sz="900" b="0" i="0">
                 <a:solidFill>
                   <a:srgbClr val="9AA8CC"/>
                 </a:solidFill>
               </a:rPr>
-              <a:t>7 / 11</a:t>
+              <a:t>8 / 12</a:t>
             </a:r>
           </a:p>
         </p:txBody>
@@ -16450,7 +16649,7 @@
 </file>
 
 <file path=ppt/slides/slide8.xml><?xml version="1.0" encoding="utf-8"?>
-<p:sld xmlns:a="http://schemas.openxmlformats.org/drawingml/2006/main" xmlns:p="http://schemas.openxmlformats.org/presentationml/2006/main" xmlns:r="http://schemas.openxmlformats.org/officeDocument/2006/relationships">
+<p:sld xmlns:a="http://schemas.openxmlformats.org/drawingml/2006/main" xmlns:r="http://schemas.openxmlformats.org/officeDocument/2006/relationships" xmlns:p="http://schemas.openxmlformats.org/presentationml/2006/main">
   <p:cSld>
     <p:spTree>
       <p:nvGrpSpPr>
@@ -16458,7 +16657,14 @@
         <p:cNvGrpSpPr/>
         <p:nvPr/>
       </p:nvGrpSpPr>
-      <p:grpSpPr/>
+      <p:grpSpPr>
+        <a:xfrm>
+          <a:off x="0" y="0"/>
+          <a:ext cx="0" cy="0"/>
+          <a:chOff x="0" y="0"/>
+          <a:chExt cx="0" cy="0"/>
+        </a:xfrm>
+      </p:grpSpPr>
       <p:sp>
         <p:nvSpPr>
           <p:cNvPr id="2" name="Rectangle 1"/>
@@ -16499,6 +16705,7 @@
           <a:lstStyle/>
           <a:p>
             <a:pPr algn="ctr"/>
+            <a:endParaRPr/>
           </a:p>
         </p:txBody>
       </p:sp>
@@ -16542,6 +16749,7 @@
           <a:lstStyle/>
           <a:p>
             <a:pPr algn="ctr"/>
+            <a:endParaRPr/>
           </a:p>
         </p:txBody>
       </p:sp>
@@ -16585,6 +16793,7 @@
           <a:lstStyle/>
           <a:p>
             <a:pPr algn="ctr"/>
+            <a:endParaRPr/>
           </a:p>
         </p:txBody>
       </p:sp>
@@ -16612,12 +16821,12 @@
           <a:p>
             <a:pPr algn="l"/>
             <a:r>
-              <a:rPr b="1" i="0" sz="900">
+              <a:rPr sz="900" b="1" i="0">
                 <a:solidFill>
                   <a:srgbClr val="1E2761"/>
                 </a:solidFill>
               </a:rPr>
-              <a:t>06  ·  DATA, AI &amp; FRONTEND</a:t>
+              <a:t>07  ·  DATA, AI &amp; FRONTEND</a:t>
             </a:r>
           </a:p>
         </p:txBody>
@@ -16646,7 +16855,7 @@
           <a:p>
             <a:pPr algn="l"/>
             <a:r>
-              <a:rPr b="1" i="0" sz="2800">
+              <a:rPr sz="2800" b="1" i="0">
                 <a:solidFill>
                   <a:srgbClr val="1E2761"/>
                 </a:solidFill>
@@ -16696,6 +16905,7 @@
           <a:lstStyle/>
           <a:p>
             <a:pPr algn="ctr"/>
+            <a:endParaRPr/>
           </a:p>
         </p:txBody>
       </p:sp>
@@ -16739,6 +16949,7 @@
           <a:lstStyle/>
           <a:p>
             <a:pPr algn="ctr"/>
+            <a:endParaRPr/>
           </a:p>
         </p:txBody>
       </p:sp>
@@ -16766,7 +16977,7 @@
           <a:p>
             <a:pPr algn="l"/>
             <a:r>
-              <a:rPr b="1" i="0" sz="1300">
+              <a:rPr sz="1300" b="1" i="0">
                 <a:solidFill>
                   <a:srgbClr val="CADCFC"/>
                 </a:solidFill>
@@ -16800,7 +17011,7 @@
           <a:p>
             <a:pPr algn="l"/>
             <a:r>
-              <a:rPr b="0" i="0" sz="1050">
+              <a:rPr sz="1050" b="0" i="0">
                 <a:solidFill>
                   <a:srgbClr val="FFFFFF"/>
                 </a:solidFill>
@@ -16853,6 +17064,7 @@
           <a:lstStyle/>
           <a:p>
             <a:pPr algn="ctr"/>
+            <a:endParaRPr/>
           </a:p>
         </p:txBody>
       </p:sp>
@@ -16880,7 +17092,7 @@
           <a:p>
             <a:pPr algn="l"/>
             <a:r>
-              <a:rPr b="1" i="0" sz="900">
+              <a:rPr sz="900" b="1" i="0">
                 <a:solidFill>
                   <a:srgbClr val="CADCFC"/>
                 </a:solidFill>
@@ -16930,6 +17142,7 @@
           <a:lstStyle/>
           <a:p>
             <a:pPr algn="ctr"/>
+            <a:endParaRPr/>
           </a:p>
         </p:txBody>
       </p:sp>
@@ -16957,7 +17170,7 @@
           <a:p>
             <a:pPr algn="l"/>
             <a:r>
-              <a:rPr b="1" i="0" sz="1300">
+              <a:rPr sz="1300" b="1" i="0">
                 <a:solidFill>
                   <a:srgbClr val="CADCFC"/>
                 </a:solidFill>
@@ -16991,7 +17204,7 @@
           <a:p>
             <a:pPr algn="l"/>
             <a:r>
-              <a:rPr b="0" i="0" sz="1050">
+              <a:rPr sz="1050" b="0" i="0">
                 <a:solidFill>
                   <a:srgbClr val="FFFFFF"/>
                 </a:solidFill>
@@ -17044,6 +17257,7 @@
           <a:lstStyle/>
           <a:p>
             <a:pPr algn="ctr"/>
+            <a:endParaRPr/>
           </a:p>
         </p:txBody>
       </p:sp>
@@ -17071,7 +17285,7 @@
           <a:p>
             <a:pPr algn="l"/>
             <a:r>
-              <a:rPr b="1" i="0" sz="900">
+              <a:rPr sz="900" b="1" i="0">
                 <a:solidFill>
                   <a:srgbClr val="CADCFC"/>
                 </a:solidFill>
@@ -17121,6 +17335,7 @@
           <a:lstStyle/>
           <a:p>
             <a:pPr algn="ctr"/>
+            <a:endParaRPr/>
           </a:p>
         </p:txBody>
       </p:sp>
@@ -17148,7 +17363,7 @@
           <a:p>
             <a:pPr algn="l"/>
             <a:r>
-              <a:rPr b="1" i="0" sz="1300">
+              <a:rPr sz="1300" b="1" i="0">
                 <a:solidFill>
                   <a:srgbClr val="CADCFC"/>
                 </a:solidFill>
@@ -17182,7 +17397,7 @@
           <a:p>
             <a:pPr algn="l"/>
             <a:r>
-              <a:rPr b="0" i="0" sz="1050">
+              <a:rPr sz="1050" b="0" i="0">
                 <a:solidFill>
                   <a:srgbClr val="FFFFFF"/>
                 </a:solidFill>
@@ -17235,6 +17450,7 @@
           <a:lstStyle/>
           <a:p>
             <a:pPr algn="ctr"/>
+            <a:endParaRPr/>
           </a:p>
         </p:txBody>
       </p:sp>
@@ -17262,7 +17478,7 @@
           <a:p>
             <a:pPr algn="l"/>
             <a:r>
-              <a:rPr b="1" i="0" sz="900">
+              <a:rPr sz="900" b="1" i="0">
                 <a:solidFill>
                   <a:srgbClr val="CADCFC"/>
                 </a:solidFill>
@@ -17312,6 +17528,7 @@
           <a:lstStyle/>
           <a:p>
             <a:pPr algn="ctr"/>
+            <a:endParaRPr/>
           </a:p>
         </p:txBody>
       </p:sp>
@@ -17339,7 +17556,7 @@
           <a:p>
             <a:pPr algn="l"/>
             <a:r>
-              <a:rPr b="1" i="0" sz="1300">
+              <a:rPr sz="1300" b="1" i="0">
                 <a:solidFill>
                   <a:srgbClr val="CADCFC"/>
                 </a:solidFill>
@@ -17373,7 +17590,7 @@
           <a:p>
             <a:pPr algn="l"/>
             <a:r>
-              <a:rPr b="0" i="0" sz="1050">
+              <a:rPr sz="1050" b="0" i="0">
                 <a:solidFill>
                   <a:srgbClr val="FFFFFF"/>
                 </a:solidFill>
@@ -17427,6 +17644,7 @@
           <a:lstStyle/>
           <a:p>
             <a:pPr algn="ctr"/>
+            <a:endParaRPr/>
           </a:p>
         </p:txBody>
       </p:sp>
@@ -17454,7 +17672,7 @@
           <a:p>
             <a:pPr algn="l"/>
             <a:r>
-              <a:rPr b="1" i="0" sz="900">
+              <a:rPr sz="900" b="1" i="0">
                 <a:solidFill>
                   <a:srgbClr val="CADCFC"/>
                 </a:solidFill>
@@ -17504,6 +17722,7 @@
           <a:lstStyle/>
           <a:p>
             <a:pPr algn="ctr"/>
+            <a:endParaRPr/>
           </a:p>
         </p:txBody>
       </p:sp>
@@ -17531,7 +17750,7 @@
           <a:p>
             <a:pPr algn="ctr"/>
             <a:r>
-              <a:rPr b="1" i="0" sz="1000">
+              <a:rPr sz="1000" b="1" i="0">
                 <a:solidFill>
                   <a:srgbClr val="CADCFC"/>
                 </a:solidFill>
@@ -17565,12 +17784,12 @@
           <a:p>
             <a:pPr algn="r"/>
             <a:r>
-              <a:rPr b="0" i="0" sz="900">
+              <a:rPr sz="900" b="0" i="0">
                 <a:solidFill>
                   <a:srgbClr val="9AA8CC"/>
                 </a:solidFill>
               </a:rPr>
-              <a:t>8 / 11</a:t>
+              <a:t>9 / 12</a:t>
             </a:r>
           </a:p>
         </p:txBody>
@@ -17584,7 +17803,7 @@
 </file>
 
 <file path=ppt/slides/slide9.xml><?xml version="1.0" encoding="utf-8"?>
-<p:sld xmlns:a="http://schemas.openxmlformats.org/drawingml/2006/main" xmlns:p="http://schemas.openxmlformats.org/presentationml/2006/main" xmlns:r="http://schemas.openxmlformats.org/officeDocument/2006/relationships">
+<p:sld xmlns:a="http://schemas.openxmlformats.org/drawingml/2006/main" xmlns:r="http://schemas.openxmlformats.org/officeDocument/2006/relationships" xmlns:p="http://schemas.openxmlformats.org/presentationml/2006/main">
   <p:cSld>
     <p:spTree>
       <p:nvGrpSpPr>
@@ -17592,7 +17811,14 @@
         <p:cNvGrpSpPr/>
         <p:nvPr/>
       </p:nvGrpSpPr>
-      <p:grpSpPr/>
+      <p:grpSpPr>
+        <a:xfrm>
+          <a:off x="0" y="0"/>
+          <a:ext cx="0" cy="0"/>
+          <a:chOff x="0" y="0"/>
+          <a:chExt cx="0" cy="0"/>
+        </a:xfrm>
+      </p:grpSpPr>
       <p:sp>
         <p:nvSpPr>
           <p:cNvPr id="2" name="Rectangle 1"/>
@@ -17633,6 +17859,7 @@
           <a:lstStyle/>
           <a:p>
             <a:pPr algn="ctr"/>
+            <a:endParaRPr/>
           </a:p>
         </p:txBody>
       </p:sp>
@@ -17676,6 +17903,7 @@
           <a:lstStyle/>
           <a:p>
             <a:pPr algn="ctr"/>
+            <a:endParaRPr/>
           </a:p>
         </p:txBody>
       </p:sp>
@@ -17719,6 +17947,7 @@
           <a:lstStyle/>
           <a:p>
             <a:pPr algn="ctr"/>
+            <a:endParaRPr/>
           </a:p>
         </p:txBody>
       </p:sp>
@@ -17746,12 +17975,12 @@
           <a:p>
             <a:pPr algn="l"/>
             <a:r>
-              <a:rPr b="1" i="0" sz="900">
+              <a:rPr sz="900" b="1" i="0">
                 <a:solidFill>
                   <a:srgbClr val="CADCFC"/>
                 </a:solidFill>
               </a:rPr>
-              <a:t>07  ·  CAPABILITY VALIDATION</a:t>
+              <a:t>08  ·  CAPABILITY VALIDATION</a:t>
             </a:r>
           </a:p>
         </p:txBody>
@@ -17780,7 +18009,7 @@
           <a:p>
             <a:pPr algn="l"/>
             <a:r>
-              <a:rPr b="1" i="0" sz="3400">
+              <a:rPr sz="3400" b="1" i="0">
                 <a:solidFill>
                   <a:srgbClr val="FFFFFF"/>
                 </a:solidFill>
@@ -17830,6 +18059,7 @@
           <a:lstStyle/>
           <a:p>
             <a:pPr algn="ctr"/>
+            <a:endParaRPr/>
           </a:p>
         </p:txBody>
       </p:sp>
@@ -17873,6 +18103,7 @@
           <a:lstStyle/>
           <a:p>
             <a:pPr algn="ctr"/>
+            <a:endParaRPr/>
           </a:p>
         </p:txBody>
       </p:sp>
@@ -17900,7 +18131,7 @@
           <a:p>
             <a:pPr algn="l"/>
             <a:r>
-              <a:rPr b="1" i="0" sz="2200">
+              <a:rPr sz="2200" b="1" i="0">
                 <a:solidFill>
                   <a:srgbClr val="FFFFFF"/>
                 </a:solidFill>
@@ -17934,7 +18165,7 @@
           <a:p>
             <a:pPr algn="l"/>
             <a:r>
-              <a:rPr b="0" i="1" sz="1200">
+              <a:rPr sz="1200" b="0" i="1">
                 <a:solidFill>
                   <a:srgbClr val="CADCFC"/>
                 </a:solidFill>
@@ -17984,6 +18215,7 @@
           <a:lstStyle/>
           <a:p>
             <a:pPr algn="ctr"/>
+            <a:endParaRPr/>
           </a:p>
         </p:txBody>
       </p:sp>
@@ -18011,7 +18243,7 @@
           <a:p>
             <a:pPr algn="ctr"/>
             <a:r>
-              <a:rPr b="1" i="0" sz="1400">
+              <a:rPr sz="1400" b="1" i="0">
                 <a:solidFill>
                   <a:srgbClr val="2ECC71"/>
                 </a:solidFill>
@@ -18045,7 +18277,7 @@
           <a:p>
             <a:pPr algn="l"/>
             <a:r>
-              <a:rPr b="1" i="0" sz="1500">
+              <a:rPr sz="1500" b="1" i="0">
                 <a:solidFill>
                   <a:srgbClr val="FFFFFF"/>
                 </a:solidFill>
@@ -18079,7 +18311,7 @@
           <a:p>
             <a:pPr algn="l"/>
             <a:r>
-              <a:rPr b="0" i="0" sz="1100">
+              <a:rPr sz="1100" b="0" i="0">
                 <a:solidFill>
                   <a:srgbClr val="CADCFC"/>
                 </a:solidFill>
@@ -18129,6 +18361,7 @@
           <a:lstStyle/>
           <a:p>
             <a:pPr algn="ctr"/>
+            <a:endParaRPr/>
           </a:p>
         </p:txBody>
       </p:sp>
@@ -18156,7 +18389,7 @@
           <a:p>
             <a:pPr algn="ctr"/>
             <a:r>
-              <a:rPr b="1" i="0" sz="1400">
+              <a:rPr sz="1400" b="1" i="0">
                 <a:solidFill>
                   <a:srgbClr val="2ECC71"/>
                 </a:solidFill>
@@ -18190,7 +18423,7 @@
           <a:p>
             <a:pPr algn="l"/>
             <a:r>
-              <a:rPr b="1" i="0" sz="1500">
+              <a:rPr sz="1500" b="1" i="0">
                 <a:solidFill>
                   <a:srgbClr val="FFFFFF"/>
                 </a:solidFill>
@@ -18224,7 +18457,7 @@
           <a:p>
             <a:pPr algn="l"/>
             <a:r>
-              <a:rPr b="0" i="0" sz="1100">
+              <a:rPr sz="1100" b="0" i="0">
                 <a:solidFill>
                   <a:srgbClr val="CADCFC"/>
                 </a:solidFill>
@@ -18274,6 +18507,7 @@
           <a:lstStyle/>
           <a:p>
             <a:pPr algn="ctr"/>
+            <a:endParaRPr/>
           </a:p>
         </p:txBody>
       </p:sp>
@@ -18301,7 +18535,7 @@
           <a:p>
             <a:pPr algn="ctr"/>
             <a:r>
-              <a:rPr b="1" i="0" sz="1400">
+              <a:rPr sz="1400" b="1" i="0">
                 <a:solidFill>
                   <a:srgbClr val="2ECC71"/>
                 </a:solidFill>
@@ -18335,7 +18569,7 @@
           <a:p>
             <a:pPr algn="l"/>
             <a:r>
-              <a:rPr b="1" i="0" sz="1500">
+              <a:rPr sz="1500" b="1" i="0">
                 <a:solidFill>
                   <a:srgbClr val="FFFFFF"/>
                 </a:solidFill>
@@ -18369,7 +18603,7 @@
           <a:p>
             <a:pPr algn="l"/>
             <a:r>
-              <a:rPr b="0" i="0" sz="1100">
+              <a:rPr sz="1100" b="0" i="0">
                 <a:solidFill>
                   <a:srgbClr val="CADCFC"/>
                 </a:solidFill>
@@ -18419,6 +18653,7 @@
           <a:lstStyle/>
           <a:p>
             <a:pPr algn="ctr"/>
+            <a:endParaRPr/>
           </a:p>
         </p:txBody>
       </p:sp>
@@ -18446,7 +18681,7 @@
           <a:p>
             <a:pPr algn="l"/>
             <a:r>
-              <a:rPr b="1" i="0" sz="1600">
+              <a:rPr sz="1600" b="1" i="0">
                 <a:solidFill>
                   <a:srgbClr val="FFFFFF"/>
                 </a:solidFill>
@@ -18480,7 +18715,7 @@
           <a:p>
             <a:pPr algn="l"/>
             <a:r>
-              <a:rPr b="1" i="0" sz="1400">
+              <a:rPr sz="1400" b="1" i="0">
                 <a:solidFill>
                   <a:srgbClr val="CADCFC"/>
                 </a:solidFill>
@@ -18514,7 +18749,7 @@
           <a:p>
             <a:pPr algn="l"/>
             <a:r>
-              <a:rPr b="0" i="0" sz="1300">
+              <a:rPr sz="1300" b="0" i="0">
                 <a:solidFill>
                   <a:srgbClr val="FFFFFF"/>
                 </a:solidFill>
@@ -18548,7 +18783,7 @@
           <a:p>
             <a:pPr algn="l"/>
             <a:r>
-              <a:rPr b="1" i="0" sz="1400">
+              <a:rPr sz="1400" b="1" i="0">
                 <a:solidFill>
                   <a:srgbClr val="CADCFC"/>
                 </a:solidFill>
@@ -18582,7 +18817,7 @@
           <a:p>
             <a:pPr algn="l"/>
             <a:r>
-              <a:rPr b="0" i="0" sz="1300">
+              <a:rPr sz="1300" b="0" i="0">
                 <a:solidFill>
                   <a:srgbClr val="FFFFFF"/>
                 </a:solidFill>
@@ -18616,7 +18851,7 @@
           <a:p>
             <a:pPr algn="l"/>
             <a:r>
-              <a:rPr b="1" i="0" sz="1400">
+              <a:rPr sz="1400" b="1" i="0">
                 <a:solidFill>
                   <a:srgbClr val="CADCFC"/>
                 </a:solidFill>
@@ -18650,7 +18885,7 @@
           <a:p>
             <a:pPr algn="l"/>
             <a:r>
-              <a:rPr b="0" i="0" sz="1300">
+              <a:rPr sz="1300" b="0" i="0">
                 <a:solidFill>
                   <a:srgbClr val="FFFFFF"/>
                 </a:solidFill>
@@ -18684,7 +18919,7 @@
           <a:p>
             <a:pPr algn="l"/>
             <a:r>
-              <a:rPr b="1" i="0" sz="1400">
+              <a:rPr sz="1400" b="1" i="0">
                 <a:solidFill>
                   <a:srgbClr val="CADCFC"/>
                 </a:solidFill>
@@ -18718,7 +18953,7 @@
           <a:p>
             <a:pPr algn="l"/>
             <a:r>
-              <a:rPr b="0" i="0" sz="1300">
+              <a:rPr sz="1300" b="0" i="0">
                 <a:solidFill>
                   <a:srgbClr val="FFFFFF"/>
                 </a:solidFill>
@@ -18768,6 +19003,7 @@
           <a:lstStyle/>
           <a:p>
             <a:pPr algn="ctr"/>
+            <a:endParaRPr/>
           </a:p>
         </p:txBody>
       </p:sp>
@@ -18795,7 +19031,7 @@
           <a:p>
             <a:pPr algn="l"/>
             <a:r>
-              <a:rPr b="1" i="0" sz="1600">
+              <a:rPr sz="1600" b="1" i="0">
                 <a:solidFill>
                   <a:srgbClr val="FFFFFF"/>
                 </a:solidFill>
@@ -18829,7 +19065,7 @@
           <a:p>
             <a:pPr algn="l"/>
             <a:r>
-              <a:rPr b="1" i="0" sz="1400">
+              <a:rPr sz="1400" b="1" i="0">
                 <a:solidFill>
                   <a:srgbClr val="CADCFC"/>
                 </a:solidFill>
@@ -18863,7 +19099,7 @@
           <a:p>
             <a:pPr algn="l"/>
             <a:r>
-              <a:rPr b="0" i="0" sz="1300">
+              <a:rPr sz="1300" b="0" i="0">
                 <a:solidFill>
                   <a:srgbClr val="FFFFFF"/>
                 </a:solidFill>
@@ -18897,7 +19133,7 @@
           <a:p>
             <a:pPr algn="l"/>
             <a:r>
-              <a:rPr b="1" i="0" sz="1400">
+              <a:rPr sz="1400" b="1" i="0">
                 <a:solidFill>
                   <a:srgbClr val="CADCFC"/>
                 </a:solidFill>
@@ -18931,7 +19167,7 @@
           <a:p>
             <a:pPr algn="l"/>
             <a:r>
-              <a:rPr b="0" i="0" sz="1300">
+              <a:rPr sz="1300" b="0" i="0">
                 <a:solidFill>
                   <a:srgbClr val="FFFFFF"/>
                 </a:solidFill>
@@ -18965,7 +19201,7 @@
           <a:p>
             <a:pPr algn="l"/>
             <a:r>
-              <a:rPr b="1" i="0" sz="1400">
+              <a:rPr sz="1400" b="1" i="0">
                 <a:solidFill>
                   <a:srgbClr val="CADCFC"/>
                 </a:solidFill>
@@ -18984,28 +19220,51 @@
         <p:spPr>
           <a:xfrm>
             <a:off x="6766560" y="5193792"/>
-            <a:ext cx="4846320" cy="292608"/>
-          </a:xfrm>
-          <a:prstGeom prst="rect">
-            <a:avLst/>
-          </a:prstGeom>
-          <a:noFill/>
-        </p:spPr>
-        <p:txBody>
-          <a:bodyPr wrap="square">
-            <a:spAutoFit/>
-          </a:bodyPr>
-          <a:lstStyle/>
+            <a:ext cx="4846320" cy="492443"/>
+          </a:xfrm>
+          <a:prstGeom prst="rect">
+            <a:avLst/>
+          </a:prstGeom>
+          <a:noFill/>
+        </p:spPr>
+        <p:txBody>
+          <a:bodyPr wrap="square">
+            <a:spAutoFit/>
+          </a:bodyPr>
+          <a:lstStyle/>
+          <a:p>
+            <a:r>
+              <a:rPr lang="en-US" sz="1300" dirty="0">
+                <a:solidFill>
+                  <a:srgbClr val="FFFFFF"/>
+                </a:solidFill>
+              </a:rPr>
+              <a:t>Industry context from Amazon </a:t>
+            </a:r>
+            <a:r>
+              <a:rPr lang="zh-CN" altLang="en-US" sz="1300" dirty="0">
+                <a:solidFill>
+                  <a:srgbClr val="FFFFFF"/>
+                </a:solidFill>
+              </a:rPr>
+              <a:t> </a:t>
+            </a:r>
+            <a:r>
+              <a:rPr lang="en-US" sz="1300" dirty="0">
+                <a:solidFill>
+                  <a:srgbClr val="FFFFFF"/>
+                </a:solidFill>
+              </a:rPr>
+              <a:t>experience</a:t>
+            </a:r>
+          </a:p>
           <a:p>
             <a:pPr algn="l"/>
-            <a:r>
-              <a:rPr b="0" i="0" sz="1300">
-                <a:solidFill>
-                  <a:srgbClr val="FFFFFF"/>
-                </a:solidFill>
-              </a:rPr>
-              <a:t>Industry mentor input</a:t>
-            </a:r>
+            <a:endParaRPr sz="1300" b="0" i="0" dirty="0">
+              <a:solidFill>
+                <a:srgbClr val="FFFFFF"/>
+              </a:solidFill>
+            </a:endParaRPr>
           </a:p>
         </p:txBody>
       </p:sp>
@@ -19033,7 +19292,7 @@
           <a:p>
             <a:pPr algn="l"/>
             <a:r>
-              <a:rPr b="1" i="0" sz="1400">
+              <a:rPr sz="1400" b="1" i="0">
                 <a:solidFill>
                   <a:srgbClr val="CADCFC"/>
                 </a:solidFill>
@@ -19067,7 +19326,7 @@
           <a:p>
             <a:pPr algn="l"/>
             <a:r>
-              <a:rPr b="0" i="0" sz="1300">
+              <a:rPr sz="1300" b="0" i="0">
                 <a:solidFill>
                   <a:srgbClr val="FFFFFF"/>
                 </a:solidFill>
@@ -19117,6 +19376,7 @@
           <a:lstStyle/>
           <a:p>
             <a:pPr algn="ctr"/>
+            <a:endParaRPr/>
           </a:p>
         </p:txBody>
       </p:sp>
@@ -19144,7 +19404,7 @@
           <a:p>
             <a:pPr algn="ctr"/>
             <a:r>
-              <a:rPr b="1" i="0" sz="1400">
+              <a:rPr sz="1400" b="1" i="0">
                 <a:solidFill>
                   <a:srgbClr val="FFFFFF"/>
                 </a:solidFill>
@@ -19178,12 +19438,12 @@
           <a:p>
             <a:pPr algn="r"/>
             <a:r>
-              <a:rPr b="0" i="0" sz="900">
+              <a:rPr sz="900" b="0" i="0">
                 <a:solidFill>
                   <a:srgbClr val="6B7AB8"/>
                 </a:solidFill>
               </a:rPr>
-              <a:t>9 / 11</a:t>
+              <a:t>10 / 12</a:t>
             </a:r>
           </a:p>
         </p:txBody>
@@ -19527,44 +19787,44 @@
         <a:sysClr val="window" lastClr="FFFFFF"/>
       </a:lt1>
       <a:dk2>
-        <a:srgbClr val="1F497D"/>
+        <a:srgbClr val="0E2841"/>
       </a:dk2>
       <a:lt2>
-        <a:srgbClr val="EEECE1"/>
+        <a:srgbClr val="E8E8E8"/>
       </a:lt2>
       <a:accent1>
-        <a:srgbClr val="4F81BD"/>
+        <a:srgbClr val="156082"/>
       </a:accent1>
       <a:accent2>
-        <a:srgbClr val="C0504D"/>
+        <a:srgbClr val="E97132"/>
       </a:accent2>
       <a:accent3>
-        <a:srgbClr val="9BBB59"/>
+        <a:srgbClr val="196B24"/>
       </a:accent3>
       <a:accent4>
-        <a:srgbClr val="8064A2"/>
+        <a:srgbClr val="0F9ED5"/>
       </a:accent4>
       <a:accent5>
-        <a:srgbClr val="4BACC6"/>
+        <a:srgbClr val="A02B93"/>
       </a:accent5>
       <a:accent6>
-        <a:srgbClr val="F79646"/>
+        <a:srgbClr val="4EA72E"/>
       </a:accent6>
       <a:hlink>
-        <a:srgbClr val="0000FF"/>
+        <a:srgbClr val="467886"/>
       </a:hlink>
       <a:folHlink>
-        <a:srgbClr val="800080"/>
+        <a:srgbClr val="96607D"/>
       </a:folHlink>
     </a:clrScheme>
     <a:fontScheme name="Office">
       <a:majorFont>
-        <a:latin typeface="Calibri"/>
+        <a:latin typeface="Aptos Display" panose="02110004020202020204"/>
         <a:ea typeface=""/>
         <a:cs typeface=""/>
-        <a:font script="Jpan" typeface="ＭＳ Ｐゴシック"/>
+        <a:font script="Jpan" typeface="游ゴシック Light"/>
         <a:font script="Hang" typeface="맑은 고딕"/>
-        <a:font script="Hans" typeface="宋体"/>
+        <a:font script="Hans" typeface="等线 Light"/>
         <a:font script="Hant" typeface="新細明體"/>
         <a:font script="Arab" typeface="Times New Roman"/>
         <a:font script="Hebr" typeface="Times New Roman"/>
@@ -19592,14 +19852,31 @@
         <a:font script="Viet" typeface="Times New Roman"/>
         <a:font script="Uigh" typeface="Microsoft Uighur"/>
         <a:font script="Geor" typeface="Sylfaen"/>
+        <a:font script="Armn" typeface="Arial"/>
+        <a:font script="Bugi" typeface="Leelawadee UI"/>
+        <a:font script="Bopo" typeface="Microsoft JhengHei"/>
+        <a:font script="Java" typeface="Javanese Text"/>
+        <a:font script="Lisu" typeface="Segoe UI"/>
+        <a:font script="Mymr" typeface="Myanmar Text"/>
+        <a:font script="Nkoo" typeface="Ebrima"/>
+        <a:font script="Olck" typeface="Nirmala UI"/>
+        <a:font script="Osma" typeface="Ebrima"/>
+        <a:font script="Phag" typeface="Phagspa"/>
+        <a:font script="Syrn" typeface="Estrangelo Edessa"/>
+        <a:font script="Syrj" typeface="Estrangelo Edessa"/>
+        <a:font script="Syre" typeface="Estrangelo Edessa"/>
+        <a:font script="Sora" typeface="Nirmala UI"/>
+        <a:font script="Tale" typeface="Microsoft Tai Le"/>
+        <a:font script="Talu" typeface="Microsoft New Tai Lue"/>
+        <a:font script="Tfng" typeface="Ebrima"/>
       </a:majorFont>
       <a:minorFont>
-        <a:latin typeface="Calibri"/>
+        <a:latin typeface="Aptos" panose="02110004020202020204"/>
         <a:ea typeface=""/>
         <a:cs typeface=""/>
-        <a:font script="Jpan" typeface="ＭＳ Ｐゴシック"/>
+        <a:font script="Jpan" typeface="游ゴシック"/>
         <a:font script="Hang" typeface="맑은 고딕"/>
-        <a:font script="Hans" typeface="宋体"/>
+        <a:font script="Hans" typeface="等线"/>
         <a:font script="Hant" typeface="新細明體"/>
         <a:font script="Arab" typeface="Arial"/>
         <a:font script="Hebr" typeface="Arial"/>
@@ -19627,6 +19904,23 @@
         <a:font script="Viet" typeface="Arial"/>
         <a:font script="Uigh" typeface="Microsoft Uighur"/>
         <a:font script="Geor" typeface="Sylfaen"/>
+        <a:font script="Armn" typeface="Arial"/>
+        <a:font script="Bugi" typeface="Leelawadee UI"/>
+        <a:font script="Bopo" typeface="Microsoft JhengHei"/>
+        <a:font script="Java" typeface="Javanese Text"/>
+        <a:font script="Lisu" typeface="Segoe UI"/>
+        <a:font script="Mymr" typeface="Myanmar Text"/>
+        <a:font script="Nkoo" typeface="Ebrima"/>
+        <a:font script="Olck" typeface="Nirmala UI"/>
+        <a:font script="Osma" typeface="Ebrima"/>
+        <a:font script="Phag" typeface="Phagspa"/>
+        <a:font script="Syrn" typeface="Estrangelo Edessa"/>
+        <a:font script="Syrj" typeface="Estrangelo Edessa"/>
+        <a:font script="Syre" typeface="Estrangelo Edessa"/>
+        <a:font script="Sora" typeface="Nirmala UI"/>
+        <a:font script="Tale" typeface="Microsoft Tai Le"/>
+        <a:font script="Talu" typeface="Microsoft New Tai Lue"/>
+        <a:font script="Tfng" typeface="Ebrima"/>
       </a:minorFont>
     </a:fontScheme>
     <a:fmtScheme name="Office">
@@ -19638,180 +19932,136 @@
           <a:gsLst>
             <a:gs pos="0">
               <a:schemeClr val="phClr">
-                <a:tint val="50000"/>
-                <a:satMod val="300000"/>
+                <a:lumMod val="110000"/>
+                <a:satMod val="105000"/>
+                <a:tint val="67000"/>
               </a:schemeClr>
             </a:gs>
-            <a:gs pos="35000">
+            <a:gs pos="50000">
               <a:schemeClr val="phClr">
-                <a:tint val="37000"/>
-                <a:satMod val="300000"/>
+                <a:lumMod val="105000"/>
+                <a:satMod val="103000"/>
+                <a:tint val="73000"/>
               </a:schemeClr>
             </a:gs>
             <a:gs pos="100000">
               <a:schemeClr val="phClr">
-                <a:tint val="15000"/>
-                <a:satMod val="350000"/>
+                <a:lumMod val="105000"/>
+                <a:satMod val="109000"/>
+                <a:tint val="81000"/>
               </a:schemeClr>
             </a:gs>
           </a:gsLst>
-          <a:lin ang="16200000" scaled="1"/>
+          <a:lin ang="5400000" scaled="0"/>
         </a:gradFill>
         <a:gradFill rotWithShape="1">
           <a:gsLst>
             <a:gs pos="0">
               <a:schemeClr val="phClr">
-                <a:tint val="100000"/>
+                <a:satMod val="103000"/>
+                <a:lumMod val="102000"/>
+                <a:tint val="94000"/>
+              </a:schemeClr>
+            </a:gs>
+            <a:gs pos="50000">
+              <a:schemeClr val="phClr">
+                <a:satMod val="110000"/>
+                <a:lumMod val="100000"/>
                 <a:shade val="100000"/>
-                <a:satMod val="130000"/>
               </a:schemeClr>
             </a:gs>
             <a:gs pos="100000">
               <a:schemeClr val="phClr">
-                <a:tint val="50000"/>
-                <a:shade val="100000"/>
-                <a:satMod val="350000"/>
+                <a:lumMod val="99000"/>
+                <a:satMod val="120000"/>
+                <a:shade val="78000"/>
               </a:schemeClr>
             </a:gs>
           </a:gsLst>
-          <a:lin ang="16200000" scaled="0"/>
+          <a:lin ang="5400000" scaled="0"/>
         </a:gradFill>
       </a:fillStyleLst>
       <a:lnStyleLst>
-        <a:ln w="9525" cap="flat" cmpd="sng" algn="ctr">
+        <a:ln w="12700" cap="flat" cmpd="sng" algn="ctr">
           <a:solidFill>
-            <a:schemeClr val="phClr">
-              <a:shade val="95000"/>
-              <a:satMod val="105000"/>
-            </a:schemeClr>
+            <a:schemeClr val="phClr"/>
           </a:solidFill>
           <a:prstDash val="solid"/>
+          <a:miter lim="800000"/>
+        </a:ln>
+        <a:ln w="19050" cap="flat" cmpd="sng" algn="ctr">
+          <a:solidFill>
+            <a:schemeClr val="phClr"/>
+          </a:solidFill>
+          <a:prstDash val="solid"/>
+          <a:miter lim="800000"/>
         </a:ln>
         <a:ln w="25400" cap="flat" cmpd="sng" algn="ctr">
           <a:solidFill>
             <a:schemeClr val="phClr"/>
           </a:solidFill>
           <a:prstDash val="solid"/>
-        </a:ln>
-        <a:ln w="38100" cap="flat" cmpd="sng" algn="ctr">
-          <a:solidFill>
-            <a:schemeClr val="phClr"/>
-          </a:solidFill>
-          <a:prstDash val="solid"/>
+          <a:miter lim="800000"/>
         </a:ln>
       </a:lnStyleLst>
       <a:effectStyleLst>
         <a:effectStyle>
+          <a:effectLst/>
+        </a:effectStyle>
+        <a:effectStyle>
+          <a:effectLst/>
+        </a:effectStyle>
+        <a:effectStyle>
           <a:effectLst>
-            <a:outerShdw blurRad="40000" dist="20000" dir="5400000" rotWithShape="0">
+            <a:outerShdw blurRad="57150" dist="19050" dir="5400000" algn="ctr" rotWithShape="0">
               <a:srgbClr val="000000">
-                <a:alpha val="38000"/>
+                <a:alpha val="63000"/>
               </a:srgbClr>
             </a:outerShdw>
           </a:effectLst>
-        </a:effectStyle>
-        <a:effectStyle>
-          <a:effectLst>
-            <a:outerShdw blurRad="40000" dist="23000" dir="5400000" rotWithShape="0">
-              <a:srgbClr val="000000">
-                <a:alpha val="35000"/>
-              </a:srgbClr>
-            </a:outerShdw>
-          </a:effectLst>
-        </a:effectStyle>
-        <a:effectStyle>
-          <a:effectLst>
-            <a:outerShdw blurRad="40000" dist="23000" dir="5400000" rotWithShape="0">
-              <a:srgbClr val="000000">
-                <a:alpha val="35000"/>
-              </a:srgbClr>
-            </a:outerShdw>
-          </a:effectLst>
-          <a:scene3d>
-            <a:camera prst="orthographicFront">
-              <a:rot lat="0" lon="0" rev="0"/>
-            </a:camera>
-            <a:lightRig rig="threePt" dir="t">
-              <a:rot lat="0" lon="0" rev="1200000"/>
-            </a:lightRig>
-          </a:scene3d>
-          <a:sp3d>
-            <a:bevelT w="63500" h="25400"/>
-          </a:sp3d>
         </a:effectStyle>
       </a:effectStyleLst>
       <a:bgFillStyleLst>
         <a:solidFill>
           <a:schemeClr val="phClr"/>
         </a:solidFill>
+        <a:solidFill>
+          <a:schemeClr val="phClr">
+            <a:tint val="95000"/>
+            <a:satMod val="170000"/>
+          </a:schemeClr>
+        </a:solidFill>
         <a:gradFill rotWithShape="1">
           <a:gsLst>
             <a:gs pos="0">
               <a:schemeClr val="phClr">
-                <a:tint val="40000"/>
-                <a:satMod val="350000"/>
+                <a:tint val="93000"/>
+                <a:satMod val="150000"/>
+                <a:shade val="98000"/>
+                <a:lumMod val="102000"/>
               </a:schemeClr>
             </a:gs>
-            <a:gs pos="40000">
+            <a:gs pos="50000">
               <a:schemeClr val="phClr">
-                <a:tint val="45000"/>
-                <a:shade val="99000"/>
-                <a:satMod val="350000"/>
+                <a:tint val="98000"/>
+                <a:satMod val="130000"/>
+                <a:shade val="90000"/>
+                <a:lumMod val="103000"/>
               </a:schemeClr>
             </a:gs>
             <a:gs pos="100000">
               <a:schemeClr val="phClr">
-                <a:shade val="20000"/>
-                <a:satMod val="255000"/>
+                <a:shade val="63000"/>
+                <a:satMod val="120000"/>
               </a:schemeClr>
             </a:gs>
           </a:gsLst>
-          <a:path path="circle">
-            <a:fillToRect l="50000" t="-80000" r="50000" b="180000"/>
-          </a:path>
-        </a:gradFill>
-        <a:gradFill rotWithShape="1">
-          <a:gsLst>
-            <a:gs pos="0">
-              <a:schemeClr val="phClr">
-                <a:tint val="80000"/>
-                <a:satMod val="300000"/>
-              </a:schemeClr>
-            </a:gs>
-            <a:gs pos="100000">
-              <a:schemeClr val="phClr">
-                <a:shade val="30000"/>
-                <a:satMod val="200000"/>
-              </a:schemeClr>
-            </a:gs>
-          </a:gsLst>
-          <a:path path="circle">
-            <a:fillToRect l="50000" t="50000" r="50000" b="50000"/>
-          </a:path>
+          <a:lin ang="5400000" scaled="0"/>
         </a:gradFill>
       </a:bgFillStyleLst>
     </a:fmtScheme>
   </a:themeElements>
   <a:objectDefaults>
-    <a:spDef>
-      <a:spPr/>
-      <a:bodyPr/>
-      <a:lstStyle/>
-      <a:style>
-        <a:lnRef idx="1">
-          <a:schemeClr val="accent1"/>
-        </a:lnRef>
-        <a:fillRef idx="3">
-          <a:schemeClr val="accent1"/>
-        </a:fillRef>
-        <a:effectRef idx="2">
-          <a:schemeClr val="accent1"/>
-        </a:effectRef>
-        <a:fontRef idx="minor">
-          <a:schemeClr val="lt1"/>
-        </a:fontRef>
-      </a:style>
-    </a:spDef>
     <a:lnDef>
       <a:spPr/>
       <a:bodyPr/>
@@ -19833,5 +20083,10 @@
     </a:lnDef>
   </a:objectDefaults>
   <a:extraClrSchemeLst/>
+  <a:extLst>
+    <a:ext uri="{05A4C25C-085E-4340-85A3-A5531E510DB2}">
+      <thm15:themeFamily xmlns:thm15="http://schemas.microsoft.com/office/thememl/2012/main" name="Office Theme" id="{2E142A2C-CD16-42D6-873A-C26D2A0506FA}" vid="{1BDDFF52-6CD6-40A5-AB3C-68EB2F1E4D0A}"/>
+    </a:ext>
+  </a:extLst>
 </a:theme>
 </file>